--- a/docs/training-standards.pptx
+++ b/docs/training-standards.pptx
@@ -17,9 +17,11 @@
     <p:sldId id="265" r:id="rId11"/>
     <p:sldId id="266" r:id="rId12"/>
     <p:sldId id="267" r:id="rId13"/>
+    <p:sldId id="268" r:id="rId14"/>
+    <p:sldId id="269" r:id="rId15"/>
   </p:sldIdLst>
   <p:notesMasterIdLst>
-    <p:notesMasterId r:id="rId14"/>
+    <p:notesMasterId r:id="rId16"/>
   </p:notesMasterIdLst>
   <p:sldSz cx="12192000" cy="6858000"/>
   <p:notesSz cx="6858000" cy="12192000"/>
@@ -118,36 +120,38 @@
   <p:extLst>
     <p:ext uri="{521415D9-36F7-43E2-AB2F-B90AF26B5E84}">
       <p14:sectionLst xmlns:p14="http://schemas.microsoft.com/office/powerpoint/2010/main">
-        <p14:section name="Intro" id="{0d413a68-2ef3-270d-0328-e0fb7ec1ee72}">
+        <p14:section name="Intro" id="{50668ef0-ec5a-3f68-c9b6-132ce37234d9}">
           <p14:sldIdLst>
             <p14:sldId id="256"/>
             <p14:sldId id="257"/>
           </p14:sldIdLst>
         </p14:section>
-        <p14:section name="Backend" id="{4f8df25d-f148-ceb7-3ec6-b9d97c7e6eb0}">
+        <p14:section name="Backend" id="{4920caf5-215d-e756-d001-a65d2b6a627e}">
           <p14:sldIdLst>
             <p14:sldId id="258"/>
             <p14:sldId id="259"/>
           </p14:sldIdLst>
         </p14:section>
-        <p14:section name="Frontend" id="{1ca3eecb-b55d-7516-f977-22f96fe3cdeb}">
+        <p14:section name="Frontend" id="{d27a7d6e-6c7f-f2d8-9458-c0912230db4a}">
           <p14:sldIdLst>
             <p14:sldId id="260"/>
             <p14:sldId id="261"/>
             <p14:sldId id="262"/>
             <p14:sldId id="263"/>
-          </p14:sldIdLst>
-        </p14:section>
-        <p14:section name="Pages" id="{9e4e26b5-6b92-437c-ad61-f1ae11eca433}">
-          <p14:sldIdLst>
             <p14:sldId id="264"/>
             <p14:sldId id="265"/>
           </p14:sldIdLst>
         </p14:section>
-        <p14:section name="Checklist" id="{69ce2796-1319-959d-b244-95f2581cfab3}">
+        <p14:section name="Pages" id="{984731e0-2748-dae2-f7a6-41310938e948}">
           <p14:sldIdLst>
             <p14:sldId id="266"/>
             <p14:sldId id="267"/>
+          </p14:sldIdLst>
+        </p14:section>
+        <p14:section name="Checklist" id="{c7229ff4-e53d-4b81-4e43-d90a3c864bb6}">
+          <p14:sldIdLst>
+            <p14:sldId id="268"/>
+            <p14:sldId id="269"/>
           </p14:sldIdLst>
         </p14:section>
       </p14:sectionLst>
@@ -642,7 +646,7 @@
           <a:p>
             <a:r>
               <a:rPr lang="en-US" dirty="0"/>
-              <a:t>Two columns of label and value per row. Do not stretch every value across three columns.</a:t>
+              <a:t>Never branch on locale() === "ar" for UI copy. LocaleService is only for direction and for picking _en/_ar data fields.</a:t>
             </a:r>
             <a:endParaRPr lang="en-US" dirty="0"/>
           </a:p>
@@ -730,7 +734,7 @@
           <a:p>
             <a:r>
               <a:rPr lang="en-US" dirty="0"/>
-              <a:t>Use this as the PR checklist. If any line is missing, the page is not done.</a:t>
+              <a:t>Copy an existing list (users, custom notifications, notification transactions) rather than inventing a pager. core/ui has table-pager and paged-list ready to use.</a:t>
             </a:r>
             <a:endParaRPr lang="en-US" dirty="0"/>
           </a:p>
@@ -818,7 +822,7 @@
           <a:p>
             <a:r>
               <a:rPr lang="en-US" dirty="0"/>
-              <a:t>Questions. Point the team at the README for setup: connection string, JWT keys to change, and the no-migrations rule.</a:t>
+              <a:t>Two columns of label and value per row. Do not stretch every value across three columns.</a:t>
             </a:r>
             <a:endParaRPr lang="en-US" dirty="0"/>
           </a:p>
@@ -842,6 +846,182 @@
             <a:fld id="{F7021451-1387-4CA6-816F-3879F97B5CBC}" type="slidenum">
               <a:rPr lang="en-US"/>
               <a:t>12</a:t>
+            </a:fld>
+            <a:endParaRPr lang="en-US"/>
+          </a:p>
+        </p:txBody>
+      </p:sp>
+    </p:spTree>
+    <p:extLst>
+      <p:ext uri="{BB962C8B-B14F-4D97-AF65-F5344CB8AC3E}">
+        <p14:creationId xmlns:p14="http://schemas.microsoft.com/office/powerpoint/2010/main" val="1024086991"/>
+      </p:ext>
+    </p:extLst>
+  </p:cSld>
+  <p:clrMapOvr>
+    <a:masterClrMapping/>
+  </p:clrMapOvr>
+</p:notes>
+</file>
+
+<file path=ppt/notesSlides/notesSlide13.xml><?xml version="1.0" encoding="utf-8"?>
+<p:notes xmlns:a="http://schemas.openxmlformats.org/drawingml/2006/main" xmlns:r="http://schemas.openxmlformats.org/officeDocument/2006/relationships" xmlns:p="http://schemas.openxmlformats.org/presentationml/2006/main">
+  <p:cSld>
+    <p:spTree>
+      <p:nvGrpSpPr>
+        <p:cNvPr id="1" name=""/>
+        <p:cNvGrpSpPr/>
+        <p:nvPr/>
+      </p:nvGrpSpPr>
+      <p:grpSpPr>
+        <a:xfrm>
+          <a:off x="0" y="0"/>
+          <a:ext cx="0" cy="0"/>
+          <a:chOff x="0" y="0"/>
+          <a:chExt cx="0" cy="0"/>
+        </a:xfrm>
+      </p:grpSpPr>
+      <p:sp>
+        <p:nvSpPr>
+          <p:cNvPr id="2" name="Slide Image Placeholder 1"/>
+          <p:cNvSpPr>
+            <a:spLocks noGrp="1" noRot="1" noChangeAspect="1"/>
+          </p:cNvSpPr>
+          <p:nvPr>
+            <p:ph type="sldImg"/>
+          </p:nvPr>
+        </p:nvSpPr>
+        <p:spPr/>
+      </p:sp>
+      <p:sp>
+        <p:nvSpPr>
+          <p:cNvPr id="3" name="Notes Placeholder 2"/>
+          <p:cNvSpPr>
+            <a:spLocks noGrp="1"/>
+          </p:cNvSpPr>
+          <p:nvPr>
+            <p:ph type="body" idx="1"/>
+          </p:nvPr>
+        </p:nvSpPr>
+        <p:spPr/>
+        <p:txBody>
+          <a:bodyPr/>
+          <a:lstStyle/>
+          <a:p>
+            <a:r>
+              <a:rPr lang="en-US" dirty="0"/>
+              <a:t>Use this as the PR checklist. If any line is missing, the page is not done.</a:t>
+            </a:r>
+            <a:endParaRPr lang="en-US" dirty="0"/>
+          </a:p>
+        </p:txBody>
+      </p:sp>
+      <p:sp>
+        <p:nvSpPr>
+          <p:cNvPr id="4" name="Slide Number Placeholder 3"/>
+          <p:cNvSpPr>
+            <a:spLocks noGrp="1"/>
+          </p:cNvSpPr>
+          <p:nvPr>
+            <p:ph type="sldNum" sz="quarter" idx="10"/>
+          </p:nvPr>
+        </p:nvSpPr>
+        <p:spPr/>
+        <p:txBody>
+          <a:bodyPr/>
+          <a:lstStyle/>
+          <a:p>
+            <a:fld id="{F7021451-1387-4CA6-816F-3879F97B5CBC}" type="slidenum">
+              <a:rPr lang="en-US"/>
+              <a:t>13</a:t>
+            </a:fld>
+            <a:endParaRPr lang="en-US"/>
+          </a:p>
+        </p:txBody>
+      </p:sp>
+    </p:spTree>
+    <p:extLst>
+      <p:ext uri="{BB962C8B-B14F-4D97-AF65-F5344CB8AC3E}">
+        <p14:creationId xmlns:p14="http://schemas.microsoft.com/office/powerpoint/2010/main" val="1024086991"/>
+      </p:ext>
+    </p:extLst>
+  </p:cSld>
+  <p:clrMapOvr>
+    <a:masterClrMapping/>
+  </p:clrMapOvr>
+</p:notes>
+</file>
+
+<file path=ppt/notesSlides/notesSlide14.xml><?xml version="1.0" encoding="utf-8"?>
+<p:notes xmlns:a="http://schemas.openxmlformats.org/drawingml/2006/main" xmlns:r="http://schemas.openxmlformats.org/officeDocument/2006/relationships" xmlns:p="http://schemas.openxmlformats.org/presentationml/2006/main">
+  <p:cSld>
+    <p:spTree>
+      <p:nvGrpSpPr>
+        <p:cNvPr id="1" name=""/>
+        <p:cNvGrpSpPr/>
+        <p:nvPr/>
+      </p:nvGrpSpPr>
+      <p:grpSpPr>
+        <a:xfrm>
+          <a:off x="0" y="0"/>
+          <a:ext cx="0" cy="0"/>
+          <a:chOff x="0" y="0"/>
+          <a:chExt cx="0" cy="0"/>
+        </a:xfrm>
+      </p:grpSpPr>
+      <p:sp>
+        <p:nvSpPr>
+          <p:cNvPr id="2" name="Slide Image Placeholder 1"/>
+          <p:cNvSpPr>
+            <a:spLocks noGrp="1" noRot="1" noChangeAspect="1"/>
+          </p:cNvSpPr>
+          <p:nvPr>
+            <p:ph type="sldImg"/>
+          </p:nvPr>
+        </p:nvSpPr>
+        <p:spPr/>
+      </p:sp>
+      <p:sp>
+        <p:nvSpPr>
+          <p:cNvPr id="3" name="Notes Placeholder 2"/>
+          <p:cNvSpPr>
+            <a:spLocks noGrp="1"/>
+          </p:cNvSpPr>
+          <p:nvPr>
+            <p:ph type="body" idx="1"/>
+          </p:nvPr>
+        </p:nvSpPr>
+        <p:spPr/>
+        <p:txBody>
+          <a:bodyPr/>
+          <a:lstStyle/>
+          <a:p>
+            <a:r>
+              <a:rPr lang="en-US" dirty="0"/>
+              <a:t>Questions. Point the team at the README for setup: connection string, JWT keys to change, and the no-migrations rule.</a:t>
+            </a:r>
+            <a:endParaRPr lang="en-US" dirty="0"/>
+          </a:p>
+        </p:txBody>
+      </p:sp>
+      <p:sp>
+        <p:nvSpPr>
+          <p:cNvPr id="4" name="Slide Number Placeholder 3"/>
+          <p:cNvSpPr>
+            <a:spLocks noGrp="1"/>
+          </p:cNvSpPr>
+          <p:nvPr>
+            <p:ph type="sldNum" sz="quarter" idx="10"/>
+          </p:nvPr>
+        </p:nvSpPr>
+        <p:spPr/>
+        <p:txBody>
+          <a:bodyPr/>
+          <a:lstStyle/>
+          <a:p>
+            <a:fld id="{F7021451-1387-4CA6-816F-3879F97B5CBC}" type="slidenum">
+              <a:rPr lang="en-US"/>
+              <a:t>14</a:t>
             </a:fld>
             <a:endParaRPr lang="en-US"/>
           </a:p>
@@ -1346,7 +1526,7 @@
           <a:p>
             <a:r>
               <a:rPr lang="en-US" dirty="0"/>
-              <a:t>If a page needs a spinner, it needs AsyncExecutorService, not a new flag.</a:t>
+              <a:t>The pipeline lives in core/ui/form-pipeline.service.ts. The page never calls markAllAsTouched, never sets a loading flag and never shows a toast itself. Each stop returns a reason so the page can react if it needs to, but most pages just return.</a:t>
             </a:r>
             <a:endParaRPr lang="en-US" dirty="0"/>
           </a:p>
@@ -1434,7 +1614,7 @@
           <a:p>
             <a:r>
               <a:rPr lang="en-US" dirty="0"/>
-              <a:t>Never branch on locale() === "ar" for UI copy. LocaleService is only for direction and for picking _en/_ar data fields.</a:t>
+              <a:t>Walk through the numbers. The point: a page only describes the form, the HTTP call and the messages. Validation order, loading, errors and toasts are handled once, in core/ui.</a:t>
             </a:r>
             <a:endParaRPr lang="en-US" dirty="0"/>
           </a:p>
@@ -1522,7 +1702,7 @@
           <a:p>
             <a:r>
               <a:rPr lang="en-US" dirty="0"/>
-              <a:t>Copy an existing list (users, custom notifications, notification transactions) rather than inventing a pager. core/ui has table-pager and paged-list ready to use.</a:t>
+              <a:t>If a page needs a spinner, it needs AsyncExecutorService, not a new flag.</a:t>
             </a:r>
             <a:endParaRPr lang="en-US" dirty="0"/>
           </a:p>
@@ -2382,7 +2562,7 @@
                   <a:schemeClr val="tx2"/>
                 </a:solidFill>
               </a:rPr>
-              <a:t>Detail pages and on-screen copy</a:t>
+              <a:t>State, language and direction</a:t>
             </a:r>
             <a:endParaRPr lang="en-US" sz="3600" dirty="0"/>
           </a:p>
@@ -2390,778 +2570,18 @@
       </p:sp>
       <p:sp>
         <p:nvSpPr>
-          <p:cNvPr id="3" name="grid-title"/>
-          <p:cNvSpPr txBox="1"/>
+          <p:cNvPr id="3" name="ngrx-card"/>
+          <p:cNvSpPr/>
           <p:nvPr/>
         </p:nvSpPr>
         <p:spPr>
           <a:xfrm>
             <a:off x="548640" y="1463040"/>
-            <a:ext cx="6675120" cy="411480"/>
-          </a:xfrm>
-          <a:prstGeom prst="rect">
-            <a:avLst/>
-          </a:prstGeom>
-          <a:noFill/>
-          <a:ln/>
-        </p:spPr>
-        <p:txBody>
-          <a:bodyPr wrap="square" lIns="0" tIns="0" rIns="0" bIns="0" rtlCol="0" anchor="ctr"/>
-          <a:lstStyle/>
-          <a:p>
-            <a:pPr indent="0" marL="0">
-              <a:buNone/>
-            </a:pPr>
-            <a:r>
-              <a:rPr lang="en-US" sz="1800" b="1" dirty="0">
-                <a:solidFill>
-                  <a:schemeClr val="tx2"/>
-                </a:solidFill>
-              </a:rPr>
-              <a:t>Read-only grid: 4 columns on desktop</a:t>
-            </a:r>
-            <a:endParaRPr lang="en-US" sz="1800" dirty="0"/>
-          </a:p>
-        </p:txBody>
-      </p:sp>
-      <p:sp>
-        <p:nvSpPr>
-          <p:cNvPr id="4" name="grid-0-0"/>
-          <p:cNvSpPr/>
-          <p:nvPr/>
-        </p:nvSpPr>
-        <p:spPr>
-          <a:xfrm>
-            <a:off x="548640" y="2057400"/>
-            <a:ext cx="1600200" cy="502920"/>
+            <a:ext cx="3566160" cy="3566160"/>
           </a:xfrm>
           <a:prstGeom prst="roundRect">
             <a:avLst>
-              <a:gd name="adj" fmla="val 10909"/>
-            </a:avLst>
-          </a:prstGeom>
-          <a:solidFill>
-            <a:schemeClr val="bg2"/>
-          </a:solidFill>
-          <a:ln w="9525">
-            <a:solidFill>
-              <a:schemeClr val="accent3"/>
-            </a:solidFill>
-            <a:prstDash val="solid"/>
-          </a:ln>
-        </p:spPr>
-      </p:sp>
-      <p:sp>
-        <p:nvSpPr>
-          <p:cNvPr id="5" name="grid-0-0-t"/>
-          <p:cNvSpPr txBox="1"/>
-          <p:nvPr/>
-        </p:nvSpPr>
-        <p:spPr>
-          <a:xfrm>
-            <a:off x="658368" y="2057400"/>
-            <a:ext cx="1417320" cy="502920"/>
-          </a:xfrm>
-          <a:prstGeom prst="rect">
-            <a:avLst/>
-          </a:prstGeom>
-          <a:noFill/>
-          <a:ln/>
-        </p:spPr>
-        <p:txBody>
-          <a:bodyPr wrap="square" lIns="0" tIns="0" rIns="0" bIns="0" rtlCol="0" anchor="ctr"/>
-          <a:lstStyle/>
-          <a:p>
-            <a:pPr indent="0" marL="0">
-              <a:buNone/>
-            </a:pPr>
-            <a:r>
-              <a:rPr lang="en-US" sz="1300" b="1" dirty="0">
-                <a:solidFill>
-                  <a:schemeClr val="tx1"/>
-                </a:solidFill>
-              </a:rPr>
-              <a:t>Label</a:t>
-            </a:r>
-            <a:endParaRPr lang="en-US" sz="1300" dirty="0"/>
-          </a:p>
-        </p:txBody>
-      </p:sp>
-      <p:sp>
-        <p:nvSpPr>
-          <p:cNvPr id="6" name="grid-0-1"/>
-          <p:cNvSpPr/>
-          <p:nvPr/>
-        </p:nvSpPr>
-        <p:spPr>
-          <a:xfrm>
-            <a:off x="2194560" y="2057400"/>
-            <a:ext cx="1600200" cy="502920"/>
-          </a:xfrm>
-          <a:prstGeom prst="roundRect">
-            <a:avLst>
-              <a:gd name="adj" fmla="val 10909"/>
-            </a:avLst>
-          </a:prstGeom>
-          <a:solidFill>
-            <a:schemeClr val="bg1"/>
-          </a:solidFill>
-          <a:ln w="9525">
-            <a:solidFill>
-              <a:schemeClr val="accent3"/>
-            </a:solidFill>
-            <a:prstDash val="solid"/>
-          </a:ln>
-        </p:spPr>
-      </p:sp>
-      <p:sp>
-        <p:nvSpPr>
-          <p:cNvPr id="7" name="grid-0-1-t"/>
-          <p:cNvSpPr txBox="1"/>
-          <p:nvPr/>
-        </p:nvSpPr>
-        <p:spPr>
-          <a:xfrm>
-            <a:off x="2304288" y="2057400"/>
-            <a:ext cx="1417320" cy="502920"/>
-          </a:xfrm>
-          <a:prstGeom prst="rect">
-            <a:avLst/>
-          </a:prstGeom>
-          <a:noFill/>
-          <a:ln/>
-        </p:spPr>
-        <p:txBody>
-          <a:bodyPr wrap="square" lIns="0" tIns="0" rIns="0" bIns="0" rtlCol="0" anchor="ctr"/>
-          <a:lstStyle/>
-          <a:p>
-            <a:pPr indent="0" marL="0">
-              <a:buNone/>
-            </a:pPr>
-            <a:r>
-              <a:rPr lang="en-US" sz="1300" dirty="0">
-                <a:solidFill>
-                  <a:schemeClr val="tx1"/>
-                </a:solidFill>
-              </a:rPr>
-              <a:t>Value</a:t>
-            </a:r>
-            <a:endParaRPr lang="en-US" sz="1300" dirty="0"/>
-          </a:p>
-        </p:txBody>
-      </p:sp>
-      <p:sp>
-        <p:nvSpPr>
-          <p:cNvPr id="8" name="grid-0-2"/>
-          <p:cNvSpPr/>
-          <p:nvPr/>
-        </p:nvSpPr>
-        <p:spPr>
-          <a:xfrm>
-            <a:off x="3840480" y="2057400"/>
-            <a:ext cx="1600200" cy="502920"/>
-          </a:xfrm>
-          <a:prstGeom prst="roundRect">
-            <a:avLst>
-              <a:gd name="adj" fmla="val 10909"/>
-            </a:avLst>
-          </a:prstGeom>
-          <a:solidFill>
-            <a:schemeClr val="bg2"/>
-          </a:solidFill>
-          <a:ln w="9525">
-            <a:solidFill>
-              <a:schemeClr val="accent3"/>
-            </a:solidFill>
-            <a:prstDash val="solid"/>
-          </a:ln>
-        </p:spPr>
-      </p:sp>
-      <p:sp>
-        <p:nvSpPr>
-          <p:cNvPr id="9" name="grid-0-2-t"/>
-          <p:cNvSpPr txBox="1"/>
-          <p:nvPr/>
-        </p:nvSpPr>
-        <p:spPr>
-          <a:xfrm>
-            <a:off x="3950208" y="2057400"/>
-            <a:ext cx="1417320" cy="502920"/>
-          </a:xfrm>
-          <a:prstGeom prst="rect">
-            <a:avLst/>
-          </a:prstGeom>
-          <a:noFill/>
-          <a:ln/>
-        </p:spPr>
-        <p:txBody>
-          <a:bodyPr wrap="square" lIns="0" tIns="0" rIns="0" bIns="0" rtlCol="0" anchor="ctr"/>
-          <a:lstStyle/>
-          <a:p>
-            <a:pPr indent="0" marL="0">
-              <a:buNone/>
-            </a:pPr>
-            <a:r>
-              <a:rPr lang="en-US" sz="1300" b="1" dirty="0">
-                <a:solidFill>
-                  <a:schemeClr val="tx1"/>
-                </a:solidFill>
-              </a:rPr>
-              <a:t>Label</a:t>
-            </a:r>
-            <a:endParaRPr lang="en-US" sz="1300" dirty="0"/>
-          </a:p>
-        </p:txBody>
-      </p:sp>
-      <p:sp>
-        <p:nvSpPr>
-          <p:cNvPr id="10" name="grid-0-3"/>
-          <p:cNvSpPr/>
-          <p:nvPr/>
-        </p:nvSpPr>
-        <p:spPr>
-          <a:xfrm>
-            <a:off x="5486400" y="2057400"/>
-            <a:ext cx="1600200" cy="502920"/>
-          </a:xfrm>
-          <a:prstGeom prst="roundRect">
-            <a:avLst>
-              <a:gd name="adj" fmla="val 10909"/>
-            </a:avLst>
-          </a:prstGeom>
-          <a:solidFill>
-            <a:schemeClr val="bg1"/>
-          </a:solidFill>
-          <a:ln w="9525">
-            <a:solidFill>
-              <a:schemeClr val="accent3"/>
-            </a:solidFill>
-            <a:prstDash val="solid"/>
-          </a:ln>
-        </p:spPr>
-      </p:sp>
-      <p:sp>
-        <p:nvSpPr>
-          <p:cNvPr id="11" name="grid-0-3-t"/>
-          <p:cNvSpPr txBox="1"/>
-          <p:nvPr/>
-        </p:nvSpPr>
-        <p:spPr>
-          <a:xfrm>
-            <a:off x="5596128" y="2057400"/>
-            <a:ext cx="1417320" cy="502920"/>
-          </a:xfrm>
-          <a:prstGeom prst="rect">
-            <a:avLst/>
-          </a:prstGeom>
-          <a:noFill/>
-          <a:ln/>
-        </p:spPr>
-        <p:txBody>
-          <a:bodyPr wrap="square" lIns="0" tIns="0" rIns="0" bIns="0" rtlCol="0" anchor="ctr"/>
-          <a:lstStyle/>
-          <a:p>
-            <a:pPr indent="0" marL="0">
-              <a:buNone/>
-            </a:pPr>
-            <a:r>
-              <a:rPr lang="en-US" sz="1300" dirty="0">
-                <a:solidFill>
-                  <a:schemeClr val="tx1"/>
-                </a:solidFill>
-              </a:rPr>
-              <a:t>Value</a:t>
-            </a:r>
-            <a:endParaRPr lang="en-US" sz="1300" dirty="0"/>
-          </a:p>
-        </p:txBody>
-      </p:sp>
-      <p:sp>
-        <p:nvSpPr>
-          <p:cNvPr id="12" name="grid-1-0"/>
-          <p:cNvSpPr/>
-          <p:nvPr/>
-        </p:nvSpPr>
-        <p:spPr>
-          <a:xfrm>
-            <a:off x="548640" y="2670048"/>
-            <a:ext cx="1600200" cy="502920"/>
-          </a:xfrm>
-          <a:prstGeom prst="roundRect">
-            <a:avLst>
-              <a:gd name="adj" fmla="val 10909"/>
-            </a:avLst>
-          </a:prstGeom>
-          <a:solidFill>
-            <a:schemeClr val="bg2"/>
-          </a:solidFill>
-          <a:ln w="9525">
-            <a:solidFill>
-              <a:schemeClr val="accent3"/>
-            </a:solidFill>
-            <a:prstDash val="solid"/>
-          </a:ln>
-        </p:spPr>
-      </p:sp>
-      <p:sp>
-        <p:nvSpPr>
-          <p:cNvPr id="13" name="grid-1-0-t"/>
-          <p:cNvSpPr txBox="1"/>
-          <p:nvPr/>
-        </p:nvSpPr>
-        <p:spPr>
-          <a:xfrm>
-            <a:off x="658368" y="2670048"/>
-            <a:ext cx="1417320" cy="502920"/>
-          </a:xfrm>
-          <a:prstGeom prst="rect">
-            <a:avLst/>
-          </a:prstGeom>
-          <a:noFill/>
-          <a:ln/>
-        </p:spPr>
-        <p:txBody>
-          <a:bodyPr wrap="square" lIns="0" tIns="0" rIns="0" bIns="0" rtlCol="0" anchor="ctr"/>
-          <a:lstStyle/>
-          <a:p>
-            <a:pPr indent="0" marL="0">
-              <a:buNone/>
-            </a:pPr>
-            <a:r>
-              <a:rPr lang="en-US" sz="1300" b="1" dirty="0">
-                <a:solidFill>
-                  <a:schemeClr val="tx1"/>
-                </a:solidFill>
-              </a:rPr>
-              <a:t>Label</a:t>
-            </a:r>
-            <a:endParaRPr lang="en-US" sz="1300" dirty="0"/>
-          </a:p>
-        </p:txBody>
-      </p:sp>
-      <p:sp>
-        <p:nvSpPr>
-          <p:cNvPr id="14" name="grid-1-1"/>
-          <p:cNvSpPr/>
-          <p:nvPr/>
-        </p:nvSpPr>
-        <p:spPr>
-          <a:xfrm>
-            <a:off x="2194560" y="2670048"/>
-            <a:ext cx="1600200" cy="502920"/>
-          </a:xfrm>
-          <a:prstGeom prst="roundRect">
-            <a:avLst>
-              <a:gd name="adj" fmla="val 10909"/>
-            </a:avLst>
-          </a:prstGeom>
-          <a:solidFill>
-            <a:schemeClr val="bg1"/>
-          </a:solidFill>
-          <a:ln w="9525">
-            <a:solidFill>
-              <a:schemeClr val="accent3"/>
-            </a:solidFill>
-            <a:prstDash val="solid"/>
-          </a:ln>
-        </p:spPr>
-      </p:sp>
-      <p:sp>
-        <p:nvSpPr>
-          <p:cNvPr id="15" name="grid-1-1-t"/>
-          <p:cNvSpPr txBox="1"/>
-          <p:nvPr/>
-        </p:nvSpPr>
-        <p:spPr>
-          <a:xfrm>
-            <a:off x="2304288" y="2670048"/>
-            <a:ext cx="1417320" cy="502920"/>
-          </a:xfrm>
-          <a:prstGeom prst="rect">
-            <a:avLst/>
-          </a:prstGeom>
-          <a:noFill/>
-          <a:ln/>
-        </p:spPr>
-        <p:txBody>
-          <a:bodyPr wrap="square" lIns="0" tIns="0" rIns="0" bIns="0" rtlCol="0" anchor="ctr"/>
-          <a:lstStyle/>
-          <a:p>
-            <a:pPr indent="0" marL="0">
-              <a:buNone/>
-            </a:pPr>
-            <a:r>
-              <a:rPr lang="en-US" sz="1300" dirty="0">
-                <a:solidFill>
-                  <a:schemeClr val="tx1"/>
-                </a:solidFill>
-              </a:rPr>
-              <a:t>Value</a:t>
-            </a:r>
-            <a:endParaRPr lang="en-US" sz="1300" dirty="0"/>
-          </a:p>
-        </p:txBody>
-      </p:sp>
-      <p:sp>
-        <p:nvSpPr>
-          <p:cNvPr id="16" name="grid-1-2"/>
-          <p:cNvSpPr/>
-          <p:nvPr/>
-        </p:nvSpPr>
-        <p:spPr>
-          <a:xfrm>
-            <a:off x="3840480" y="2670048"/>
-            <a:ext cx="1600200" cy="502920"/>
-          </a:xfrm>
-          <a:prstGeom prst="roundRect">
-            <a:avLst>
-              <a:gd name="adj" fmla="val 10909"/>
-            </a:avLst>
-          </a:prstGeom>
-          <a:solidFill>
-            <a:schemeClr val="bg2"/>
-          </a:solidFill>
-          <a:ln w="9525">
-            <a:solidFill>
-              <a:schemeClr val="accent3"/>
-            </a:solidFill>
-            <a:prstDash val="solid"/>
-          </a:ln>
-        </p:spPr>
-      </p:sp>
-      <p:sp>
-        <p:nvSpPr>
-          <p:cNvPr id="17" name="grid-1-2-t"/>
-          <p:cNvSpPr txBox="1"/>
-          <p:nvPr/>
-        </p:nvSpPr>
-        <p:spPr>
-          <a:xfrm>
-            <a:off x="3950208" y="2670048"/>
-            <a:ext cx="1417320" cy="502920"/>
-          </a:xfrm>
-          <a:prstGeom prst="rect">
-            <a:avLst/>
-          </a:prstGeom>
-          <a:noFill/>
-          <a:ln/>
-        </p:spPr>
-        <p:txBody>
-          <a:bodyPr wrap="square" lIns="0" tIns="0" rIns="0" bIns="0" rtlCol="0" anchor="ctr"/>
-          <a:lstStyle/>
-          <a:p>
-            <a:pPr indent="0" marL="0">
-              <a:buNone/>
-            </a:pPr>
-            <a:r>
-              <a:rPr lang="en-US" sz="1300" b="1" dirty="0">
-                <a:solidFill>
-                  <a:schemeClr val="tx1"/>
-                </a:solidFill>
-              </a:rPr>
-              <a:t>Label</a:t>
-            </a:r>
-            <a:endParaRPr lang="en-US" sz="1300" dirty="0"/>
-          </a:p>
-        </p:txBody>
-      </p:sp>
-      <p:sp>
-        <p:nvSpPr>
-          <p:cNvPr id="18" name="grid-1-3"/>
-          <p:cNvSpPr/>
-          <p:nvPr/>
-        </p:nvSpPr>
-        <p:spPr>
-          <a:xfrm>
-            <a:off x="5486400" y="2670048"/>
-            <a:ext cx="1600200" cy="502920"/>
-          </a:xfrm>
-          <a:prstGeom prst="roundRect">
-            <a:avLst>
-              <a:gd name="adj" fmla="val 10909"/>
-            </a:avLst>
-          </a:prstGeom>
-          <a:solidFill>
-            <a:schemeClr val="bg1"/>
-          </a:solidFill>
-          <a:ln w="9525">
-            <a:solidFill>
-              <a:schemeClr val="accent3"/>
-            </a:solidFill>
-            <a:prstDash val="solid"/>
-          </a:ln>
-        </p:spPr>
-      </p:sp>
-      <p:sp>
-        <p:nvSpPr>
-          <p:cNvPr id="19" name="grid-1-3-t"/>
-          <p:cNvSpPr txBox="1"/>
-          <p:nvPr/>
-        </p:nvSpPr>
-        <p:spPr>
-          <a:xfrm>
-            <a:off x="5596128" y="2670048"/>
-            <a:ext cx="1417320" cy="502920"/>
-          </a:xfrm>
-          <a:prstGeom prst="rect">
-            <a:avLst/>
-          </a:prstGeom>
-          <a:noFill/>
-          <a:ln/>
-        </p:spPr>
-        <p:txBody>
-          <a:bodyPr wrap="square" lIns="0" tIns="0" rIns="0" bIns="0" rtlCol="0" anchor="ctr"/>
-          <a:lstStyle/>
-          <a:p>
-            <a:pPr indent="0" marL="0">
-              <a:buNone/>
-            </a:pPr>
-            <a:r>
-              <a:rPr lang="en-US" sz="1300" dirty="0">
-                <a:solidFill>
-                  <a:schemeClr val="tx1"/>
-                </a:solidFill>
-              </a:rPr>
-              <a:t>Value</a:t>
-            </a:r>
-            <a:endParaRPr lang="en-US" sz="1300" dirty="0"/>
-          </a:p>
-        </p:txBody>
-      </p:sp>
-      <p:sp>
-        <p:nvSpPr>
-          <p:cNvPr id="20" name="grid-2-0"/>
-          <p:cNvSpPr/>
-          <p:nvPr/>
-        </p:nvSpPr>
-        <p:spPr>
-          <a:xfrm>
-            <a:off x="548640" y="3282696"/>
-            <a:ext cx="1600200" cy="502920"/>
-          </a:xfrm>
-          <a:prstGeom prst="roundRect">
-            <a:avLst>
-              <a:gd name="adj" fmla="val 10909"/>
-            </a:avLst>
-          </a:prstGeom>
-          <a:solidFill>
-            <a:schemeClr val="bg2"/>
-          </a:solidFill>
-          <a:ln w="9525">
-            <a:solidFill>
-              <a:schemeClr val="accent3"/>
-            </a:solidFill>
-            <a:prstDash val="solid"/>
-          </a:ln>
-        </p:spPr>
-      </p:sp>
-      <p:sp>
-        <p:nvSpPr>
-          <p:cNvPr id="21" name="grid-2-0-t"/>
-          <p:cNvSpPr txBox="1"/>
-          <p:nvPr/>
-        </p:nvSpPr>
-        <p:spPr>
-          <a:xfrm>
-            <a:off x="658368" y="3282696"/>
-            <a:ext cx="1417320" cy="502920"/>
-          </a:xfrm>
-          <a:prstGeom prst="rect">
-            <a:avLst/>
-          </a:prstGeom>
-          <a:noFill/>
-          <a:ln/>
-        </p:spPr>
-        <p:txBody>
-          <a:bodyPr wrap="square" lIns="0" tIns="0" rIns="0" bIns="0" rtlCol="0" anchor="ctr"/>
-          <a:lstStyle/>
-          <a:p>
-            <a:pPr indent="0" marL="0">
-              <a:buNone/>
-            </a:pPr>
-            <a:r>
-              <a:rPr lang="en-US" sz="1300" b="1" dirty="0">
-                <a:solidFill>
-                  <a:schemeClr val="tx1"/>
-                </a:solidFill>
-              </a:rPr>
-              <a:t>Notes</a:t>
-            </a:r>
-            <a:endParaRPr lang="en-US" sz="1300" dirty="0"/>
-          </a:p>
-        </p:txBody>
-      </p:sp>
-      <p:sp>
-        <p:nvSpPr>
-          <p:cNvPr id="22" name="grid-2-1"/>
-          <p:cNvSpPr/>
-          <p:nvPr/>
-        </p:nvSpPr>
-        <p:spPr>
-          <a:xfrm>
-            <a:off x="2194560" y="3282696"/>
-            <a:ext cx="4937760" cy="502920"/>
-          </a:xfrm>
-          <a:prstGeom prst="roundRect">
-            <a:avLst>
-              <a:gd name="adj" fmla="val 10909"/>
-            </a:avLst>
-          </a:prstGeom>
-          <a:solidFill>
-            <a:schemeClr val="bg1"/>
-          </a:solidFill>
-          <a:ln w="9525">
-            <a:solidFill>
-              <a:schemeClr val="accent3"/>
-            </a:solidFill>
-            <a:prstDash val="solid"/>
-          </a:ln>
-        </p:spPr>
-      </p:sp>
-      <p:sp>
-        <p:nvSpPr>
-          <p:cNvPr id="23" name="grid-2-1-t"/>
-          <p:cNvSpPr txBox="1"/>
-          <p:nvPr/>
-        </p:nvSpPr>
-        <p:spPr>
-          <a:xfrm>
-            <a:off x="2304288" y="3282696"/>
-            <a:ext cx="4754880" cy="502920"/>
-          </a:xfrm>
-          <a:prstGeom prst="rect">
-            <a:avLst/>
-          </a:prstGeom>
-          <a:noFill/>
-          <a:ln/>
-        </p:spPr>
-        <p:txBody>
-          <a:bodyPr wrap="square" lIns="0" tIns="0" rIns="0" bIns="0" rtlCol="0" anchor="ctr"/>
-          <a:lstStyle/>
-          <a:p>
-            <a:pPr indent="0" marL="0">
-              <a:buNone/>
-            </a:pPr>
-            <a:r>
-              <a:rPr lang="en-US" sz="1300" dirty="0">
-                <a:solidFill>
-                  <a:schemeClr val="tx1"/>
-                </a:solidFill>
-              </a:rPr>
-              <a:t>Long text may span three columns</a:t>
-            </a:r>
-            <a:endParaRPr lang="en-US" sz="1300" dirty="0"/>
-          </a:p>
-        </p:txBody>
-      </p:sp>
-      <p:sp>
-        <p:nvSpPr>
-          <p:cNvPr id="24" name="detail-rules"/>
-          <p:cNvSpPr txBox="1"/>
-          <p:nvPr/>
-        </p:nvSpPr>
-        <p:spPr>
-          <a:xfrm>
-            <a:off x="548640" y="4114800"/>
-            <a:ext cx="6675120" cy="2011680"/>
-          </a:xfrm>
-          <a:prstGeom prst="rect">
-            <a:avLst/>
-          </a:prstGeom>
-          <a:noFill/>
-          <a:ln/>
-        </p:spPr>
-        <p:txBody>
-          <a:bodyPr wrap="square" lIns="0" tIns="0" rIns="0" bIns="0" rtlCol="0" anchor="t"/>
-          <a:lstStyle/>
-          <a:p>
-            <a:pPr marL="342900" indent="-342900">
-              <a:spcAft>
-                <a:spcPts val="800"/>
-              </a:spcAft>
-              <a:buSzPct val="100000"/>
-              <a:buChar char="•"/>
-            </a:pPr>
-            <a:r>
-              <a:rPr lang="en-US" sz="1600" dirty="0">
-                <a:solidFill>
-                  <a:schemeClr val="tx1"/>
-                </a:solidFill>
-              </a:rPr>
-              <a:t>Section title, then a thin separator line between sections</a:t>
-            </a:r>
-            <a:endParaRPr lang="en-US" sz="1600" dirty="0"/>
-          </a:p>
-          <a:p>
-            <a:pPr marL="342900" indent="-342900">
-              <a:spcAft>
-                <a:spcPts val="800"/>
-              </a:spcAft>
-              <a:buSzPct val="100000"/>
-              <a:buChar char="•"/>
-            </a:pPr>
-            <a:r>
-              <a:rPr lang="en-US" sz="1600" dirty="0">
-                <a:solidFill>
-                  <a:schemeClr val="tx1"/>
-                </a:solidFill>
-              </a:rPr>
-              <a:t>Actions at the top of the section, aligned to the reading start</a:t>
-            </a:r>
-            <a:endParaRPr lang="en-US" sz="1600" dirty="0"/>
-          </a:p>
-          <a:p>
-            <a:pPr marL="342900" indent="-342900">
-              <a:spcAft>
-                <a:spcPts val="800"/>
-              </a:spcAft>
-              <a:buSzPct val="100000"/>
-              <a:buChar char="•"/>
-            </a:pPr>
-            <a:r>
-              <a:rPr lang="en-US" sz="1600" dirty="0">
-                <a:solidFill>
-                  <a:schemeClr val="tx1"/>
-                </a:solidFill>
-              </a:rPr>
-              <a:t>Downloads always use the attachment chips component</a:t>
-            </a:r>
-            <a:endParaRPr lang="en-US" sz="1600" dirty="0"/>
-          </a:p>
-          <a:p>
-            <a:pPr marL="342900" indent="-342900">
-              <a:spcAft>
-                <a:spcPts val="800"/>
-              </a:spcAft>
-              <a:buSzPct val="100000"/>
-              <a:buChar char="•"/>
-            </a:pPr>
-            <a:r>
-              <a:rPr lang="en-US" sz="1600" dirty="0">
-                <a:solidFill>
-                  <a:schemeClr val="tx1"/>
-                </a:solidFill>
-              </a:rPr>
-              <a:t>Every page must work at 320 px wide</a:t>
-            </a:r>
-            <a:endParaRPr lang="en-US" sz="1600" dirty="0"/>
-          </a:p>
-        </p:txBody>
-      </p:sp>
-      <p:sp>
-        <p:nvSpPr>
-          <p:cNvPr id="25" name="copy-card"/>
-          <p:cNvSpPr/>
-          <p:nvPr/>
-        </p:nvSpPr>
-        <p:spPr>
-          <a:xfrm>
-            <a:off x="7680960" y="1463040"/>
-            <a:ext cx="3931920" cy="3108960"/>
-          </a:xfrm>
-          <a:prstGeom prst="roundRect">
-            <a:avLst>
-              <a:gd name="adj" fmla="val 3529"/>
+              <a:gd name="adj" fmla="val 3077"/>
             </a:avLst>
           </a:prstGeom>
           <a:solidFill>
@@ -3177,13 +2597,213 @@
       </p:sp>
       <p:sp>
         <p:nvSpPr>
-          <p:cNvPr id="26" name="copy-badge"/>
+          <p:cNvPr id="4" name="ngrx-badge"/>
           <p:cNvSpPr/>
           <p:nvPr/>
         </p:nvSpPr>
         <p:spPr>
           <a:xfrm>
-            <a:off x="7955280" y="1737360"/>
+            <a:off x="822960" y="1737360"/>
+            <a:ext cx="502920" cy="502920"/>
+          </a:xfrm>
+          <a:prstGeom prst="ellipse">
+            <a:avLst/>
+          </a:prstGeom>
+          <a:solidFill>
+            <a:schemeClr val="tx2"/>
+          </a:solidFill>
+          <a:ln w="12700">
+            <a:solidFill>
+              <a:schemeClr val="tx2"/>
+            </a:solidFill>
+            <a:prstDash val="solid"/>
+          </a:ln>
+        </p:spPr>
+      </p:sp>
+      <p:sp>
+        <p:nvSpPr>
+          <p:cNvPr id="5" name="ngrx-badge-text"/>
+          <p:cNvSpPr txBox="1"/>
+          <p:nvPr/>
+        </p:nvSpPr>
+        <p:spPr>
+          <a:xfrm>
+            <a:off x="822960" y="1737360"/>
+            <a:ext cx="502920" cy="502920"/>
+          </a:xfrm>
+          <a:prstGeom prst="rect">
+            <a:avLst/>
+          </a:prstGeom>
+          <a:noFill/>
+          <a:ln/>
+        </p:spPr>
+        <p:txBody>
+          <a:bodyPr wrap="square" lIns="0" tIns="0" rIns="0" bIns="0" rtlCol="0" anchor="ctr"/>
+          <a:lstStyle/>
+          <a:p>
+            <a:pPr algn="ctr" indent="0" marL="0">
+              <a:buNone/>
+            </a:pPr>
+            <a:r>
+              <a:rPr lang="en-US" sz="1600" b="1" dirty="0">
+                <a:solidFill>
+                  <a:schemeClr val="bg1"/>
+                </a:solidFill>
+              </a:rPr>
+              <a:t>S</a:t>
+            </a:r>
+            <a:endParaRPr lang="en-US" sz="1600" dirty="0"/>
+          </a:p>
+        </p:txBody>
+      </p:sp>
+      <p:sp>
+        <p:nvSpPr>
+          <p:cNvPr id="6" name="ngrx-title"/>
+          <p:cNvSpPr txBox="1"/>
+          <p:nvPr/>
+        </p:nvSpPr>
+        <p:spPr>
+          <a:xfrm>
+            <a:off x="1508760" y="1737360"/>
+            <a:ext cx="2377440" cy="502920"/>
+          </a:xfrm>
+          <a:prstGeom prst="rect">
+            <a:avLst/>
+          </a:prstGeom>
+          <a:noFill/>
+          <a:ln/>
+        </p:spPr>
+        <p:txBody>
+          <a:bodyPr wrap="square" lIns="0" tIns="0" rIns="0" bIns="0" rtlCol="0" anchor="ctr"/>
+          <a:lstStyle/>
+          <a:p>
+            <a:pPr indent="0" marL="0">
+              <a:buNone/>
+            </a:pPr>
+            <a:r>
+              <a:rPr lang="en-US" sz="1800" b="1" dirty="0">
+                <a:solidFill>
+                  <a:schemeClr val="tx1"/>
+                </a:solidFill>
+              </a:rPr>
+              <a:t>NgRx</a:t>
+            </a:r>
+            <a:endParaRPr lang="en-US" sz="1800" dirty="0"/>
+          </a:p>
+        </p:txBody>
+      </p:sp>
+      <p:sp>
+        <p:nvSpPr>
+          <p:cNvPr id="7" name="ngrx-body"/>
+          <p:cNvSpPr txBox="1"/>
+          <p:nvPr/>
+        </p:nvSpPr>
+        <p:spPr>
+          <a:xfrm>
+            <a:off x="822960" y="2377440"/>
+            <a:ext cx="3063240" cy="2468880"/>
+          </a:xfrm>
+          <a:prstGeom prst="rect">
+            <a:avLst/>
+          </a:prstGeom>
+          <a:noFill/>
+          <a:ln/>
+        </p:spPr>
+        <p:txBody>
+          <a:bodyPr wrap="square" lIns="0" tIns="0" rIns="0" bIns="0" rtlCol="0" anchor="t"/>
+          <a:lstStyle/>
+          <a:p>
+            <a:pPr marL="342900" indent="-342900">
+              <a:spcAft>
+                <a:spcPts val="400"/>
+              </a:spcAft>
+              <a:buSzPct val="100000"/>
+              <a:buChar char="•"/>
+            </a:pPr>
+            <a:r>
+              <a:rPr lang="en-US" sz="1500" dirty="0">
+                <a:solidFill>
+                  <a:schemeClr val="tx1"/>
+                </a:solidFill>
+              </a:rPr>
+              <a:t>core/store/&lt;feature&gt;/ flat files: actions, reducer, selectors, state</a:t>
+            </a:r>
+            <a:endParaRPr lang="en-US" sz="1500" dirty="0"/>
+          </a:p>
+          <a:p>
+            <a:pPr marL="342900" indent="-342900">
+              <a:spcAft>
+                <a:spcPts val="400"/>
+              </a:spcAft>
+              <a:buSzPct val="100000"/>
+              <a:buChar char="•"/>
+            </a:pPr>
+            <a:r>
+              <a:rPr lang="en-US" sz="1500" dirty="0">
+                <a:solidFill>
+                  <a:schemeClr val="tx1"/>
+                </a:solidFill>
+              </a:rPr>
+              <a:t>Write to the store after a successful HTTP call</a:t>
+            </a:r>
+            <a:endParaRPr lang="en-US" sz="1500" dirty="0"/>
+          </a:p>
+          <a:p>
+            <a:pPr marL="342900" indent="-342900">
+              <a:spcAft>
+                <a:spcPts val="400"/>
+              </a:spcAft>
+              <a:buSzPct val="100000"/>
+              <a:buChar char="•"/>
+            </a:pPr>
+            <a:r>
+              <a:rPr lang="en-US" sz="1500" dirty="0">
+                <a:solidFill>
+                  <a:schemeClr val="tx1"/>
+                </a:solidFill>
+              </a:rPr>
+              <a:t>Clear caches on logout</a:t>
+            </a:r>
+            <a:endParaRPr lang="en-US" sz="1500" dirty="0"/>
+          </a:p>
+        </p:txBody>
+      </p:sp>
+      <p:sp>
+        <p:nvSpPr>
+          <p:cNvPr id="8" name="i18n-card"/>
+          <p:cNvSpPr/>
+          <p:nvPr/>
+        </p:nvSpPr>
+        <p:spPr>
+          <a:xfrm>
+            <a:off x="4297680" y="1463040"/>
+            <a:ext cx="3566160" cy="3566160"/>
+          </a:xfrm>
+          <a:prstGeom prst="roundRect">
+            <a:avLst>
+              <a:gd name="adj" fmla="val 3077"/>
+            </a:avLst>
+          </a:prstGeom>
+          <a:solidFill>
+            <a:schemeClr val="bg2"/>
+          </a:solidFill>
+          <a:ln w="12700">
+            <a:solidFill>
+              <a:schemeClr val="bg2"/>
+            </a:solidFill>
+            <a:prstDash val="solid"/>
+          </a:ln>
+        </p:spPr>
+      </p:sp>
+      <p:sp>
+        <p:nvSpPr>
+          <p:cNvPr id="9" name="i18n-badge"/>
+          <p:cNvSpPr/>
+          <p:nvPr/>
+        </p:nvSpPr>
+        <p:spPr>
+          <a:xfrm>
+            <a:off x="4572000" y="1737360"/>
             <a:ext cx="502920" cy="502920"/>
           </a:xfrm>
           <a:prstGeom prst="ellipse">
@@ -3202,13 +2822,13 @@
       </p:sp>
       <p:sp>
         <p:nvSpPr>
-          <p:cNvPr id="27" name="copy-badge-text"/>
-          <p:cNvSpPr txBox="1"/>
-          <p:nvPr/>
-        </p:nvSpPr>
-        <p:spPr>
-          <a:xfrm>
-            <a:off x="7955280" y="1737360"/>
+          <p:cNvPr id="10" name="i18n-badge-text"/>
+          <p:cNvSpPr txBox="1"/>
+          <p:nvPr/>
+        </p:nvSpPr>
+        <p:spPr>
+          <a:xfrm>
+            <a:off x="4572000" y="1737360"/>
             <a:ext cx="502920" cy="502920"/>
           </a:xfrm>
           <a:prstGeom prst="rect">
@@ -3230,7 +2850,7 @@
                   <a:schemeClr val="bg1"/>
                 </a:solidFill>
               </a:rPr>
-              <a:t>!</a:t>
+              <a:t>T</a:t>
             </a:r>
             <a:endParaRPr lang="en-US" sz="1600" dirty="0"/>
           </a:p>
@@ -3238,14 +2858,14 @@
       </p:sp>
       <p:sp>
         <p:nvSpPr>
-          <p:cNvPr id="28" name="copy-title"/>
-          <p:cNvSpPr txBox="1"/>
-          <p:nvPr/>
-        </p:nvSpPr>
-        <p:spPr>
-          <a:xfrm>
-            <a:off x="8641080" y="1737360"/>
-            <a:ext cx="2743200" cy="502920"/>
+          <p:cNvPr id="11" name="i18n-title"/>
+          <p:cNvSpPr txBox="1"/>
+          <p:nvPr/>
+        </p:nvSpPr>
+        <p:spPr>
+          <a:xfrm>
+            <a:off x="5257800" y="1737360"/>
+            <a:ext cx="2377440" cy="502920"/>
           </a:xfrm>
           <a:prstGeom prst="rect">
             <a:avLst/>
@@ -3266,7 +2886,7 @@
                   <a:schemeClr val="tx1"/>
                 </a:solidFill>
               </a:rPr>
-              <a:t>Copy rules</a:t>
+              <a:t>Translations</a:t>
             </a:r>
             <a:endParaRPr lang="en-US" sz="1800" dirty="0"/>
           </a:p>
@@ -3274,14 +2894,14 @@
       </p:sp>
       <p:sp>
         <p:nvSpPr>
-          <p:cNvPr id="29" name="copy-body"/>
-          <p:cNvSpPr txBox="1"/>
-          <p:nvPr/>
-        </p:nvSpPr>
-        <p:spPr>
-          <a:xfrm>
-            <a:off x="7955280" y="2377440"/>
-            <a:ext cx="3429000" cy="2011680"/>
+          <p:cNvPr id="12" name="i18n-body"/>
+          <p:cNvSpPr txBox="1"/>
+          <p:nvPr/>
+        </p:nvSpPr>
+        <p:spPr>
+          <a:xfrm>
+            <a:off x="4572000" y="2377440"/>
+            <a:ext cx="3063240" cy="2468880"/>
           </a:xfrm>
           <a:prstGeom prst="rect">
             <a:avLst/>
@@ -3306,7 +2926,7 @@
                   <a:schemeClr val="tx1"/>
                 </a:solidFill>
               </a:rPr>
-              <a:t>No intro or helper paragraphs under titles</a:t>
+              <a:t>i18n attribute or $localize with a stable @@jobseeker.* ID</a:t>
             </a:r>
             <a:endParaRPr lang="en-US" sz="1500" dirty="0"/>
           </a:p>
@@ -3324,7 +2944,7 @@
                   <a:schemeClr val="tx1"/>
                 </a:solidFill>
               </a:rPr>
-              <a:t>Only add the fields, columns and badges that were asked for</a:t>
+              <a:t>Arabic in core/translations/&lt;area&gt;/messages.ar.json</a:t>
             </a:r>
             <a:endParaRPr lang="en-US" sz="1500" dirty="0"/>
           </a:p>
@@ -3342,10 +2962,156 @@
                   <a:schemeClr val="tx1"/>
                 </a:solidFill>
               </a:rPr>
-              <a:t>Phone fields are labelled "Phone number"</a:t>
+              <a:t>Register new folders in merge-ar-translations.ts</a:t>
             </a:r>
             <a:endParaRPr lang="en-US" sz="1500" dirty="0"/>
           </a:p>
+        </p:txBody>
+      </p:sp>
+      <p:sp>
+        <p:nvSpPr>
+          <p:cNvPr id="13" name="bilingual-card"/>
+          <p:cNvSpPr/>
+          <p:nvPr/>
+        </p:nvSpPr>
+        <p:spPr>
+          <a:xfrm>
+            <a:off x="8046720" y="1463040"/>
+            <a:ext cx="3566160" cy="3566160"/>
+          </a:xfrm>
+          <a:prstGeom prst="roundRect">
+            <a:avLst>
+              <a:gd name="adj" fmla="val 3077"/>
+            </a:avLst>
+          </a:prstGeom>
+          <a:solidFill>
+            <a:schemeClr val="bg2"/>
+          </a:solidFill>
+          <a:ln w="12700">
+            <a:solidFill>
+              <a:schemeClr val="bg2"/>
+            </a:solidFill>
+            <a:prstDash val="solid"/>
+          </a:ln>
+        </p:spPr>
+      </p:sp>
+      <p:sp>
+        <p:nvSpPr>
+          <p:cNvPr id="14" name="bilingual-badge"/>
+          <p:cNvSpPr/>
+          <p:nvPr/>
+        </p:nvSpPr>
+        <p:spPr>
+          <a:xfrm>
+            <a:off x="8321040" y="1737360"/>
+            <a:ext cx="502920" cy="502920"/>
+          </a:xfrm>
+          <a:prstGeom prst="ellipse">
+            <a:avLst/>
+          </a:prstGeom>
+          <a:solidFill>
+            <a:schemeClr val="tx2"/>
+          </a:solidFill>
+          <a:ln w="12700">
+            <a:solidFill>
+              <a:schemeClr val="tx2"/>
+            </a:solidFill>
+            <a:prstDash val="solid"/>
+          </a:ln>
+        </p:spPr>
+      </p:sp>
+      <p:sp>
+        <p:nvSpPr>
+          <p:cNvPr id="15" name="bilingual-badge-text"/>
+          <p:cNvSpPr txBox="1"/>
+          <p:nvPr/>
+        </p:nvSpPr>
+        <p:spPr>
+          <a:xfrm>
+            <a:off x="8321040" y="1737360"/>
+            <a:ext cx="502920" cy="502920"/>
+          </a:xfrm>
+          <a:prstGeom prst="rect">
+            <a:avLst/>
+          </a:prstGeom>
+          <a:noFill/>
+          <a:ln/>
+        </p:spPr>
+        <p:txBody>
+          <a:bodyPr wrap="square" lIns="0" tIns="0" rIns="0" bIns="0" rtlCol="0" anchor="ctr"/>
+          <a:lstStyle/>
+          <a:p>
+            <a:pPr algn="ctr" indent="0" marL="0">
+              <a:buNone/>
+            </a:pPr>
+            <a:r>
+              <a:rPr lang="en-US" sz="1600" b="1" dirty="0">
+                <a:solidFill>
+                  <a:schemeClr val="bg1"/>
+                </a:solidFill>
+              </a:rPr>
+              <a:t>B</a:t>
+            </a:r>
+            <a:endParaRPr lang="en-US" sz="1600" dirty="0"/>
+          </a:p>
+        </p:txBody>
+      </p:sp>
+      <p:sp>
+        <p:nvSpPr>
+          <p:cNvPr id="16" name="bilingual-title"/>
+          <p:cNvSpPr txBox="1"/>
+          <p:nvPr/>
+        </p:nvSpPr>
+        <p:spPr>
+          <a:xfrm>
+            <a:off x="9006840" y="1737360"/>
+            <a:ext cx="2377440" cy="502920"/>
+          </a:xfrm>
+          <a:prstGeom prst="rect">
+            <a:avLst/>
+          </a:prstGeom>
+          <a:noFill/>
+          <a:ln/>
+        </p:spPr>
+        <p:txBody>
+          <a:bodyPr wrap="square" lIns="0" tIns="0" rIns="0" bIns="0" rtlCol="0" anchor="ctr"/>
+          <a:lstStyle/>
+          <a:p>
+            <a:pPr indent="0" marL="0">
+              <a:buNone/>
+            </a:pPr>
+            <a:r>
+              <a:rPr lang="en-US" sz="1800" b="1" dirty="0">
+                <a:solidFill>
+                  <a:schemeClr val="tx1"/>
+                </a:solidFill>
+              </a:rPr>
+              <a:t>Bilingual data</a:t>
+            </a:r>
+            <a:endParaRPr lang="en-US" sz="1800" dirty="0"/>
+          </a:p>
+        </p:txBody>
+      </p:sp>
+      <p:sp>
+        <p:nvSpPr>
+          <p:cNvPr id="17" name="bilingual-body"/>
+          <p:cNvSpPr txBox="1"/>
+          <p:nvPr/>
+        </p:nvSpPr>
+        <p:spPr>
+          <a:xfrm>
+            <a:off x="8321040" y="2377440"/>
+            <a:ext cx="3063240" cy="2468880"/>
+          </a:xfrm>
+          <a:prstGeom prst="rect">
+            <a:avLst/>
+          </a:prstGeom>
+          <a:noFill/>
+          <a:ln/>
+        </p:spPr>
+        <p:txBody>
+          <a:bodyPr wrap="square" lIns="0" tIns="0" rIns="0" bIns="0" rtlCol="0" anchor="t"/>
+          <a:lstStyle/>
           <a:p>
             <a:pPr marL="342900" indent="-342900">
               <a:spcAft>
@@ -3360,7 +3126,61 @@
                   <a:schemeClr val="tx1"/>
                 </a:solidFill>
               </a:rPr>
-              <a:t>Empty states and errors are fine</a:t>
+              <a:t>Fields come in pairs: title_en / title_ar</a:t>
+            </a:r>
+            <a:endParaRPr lang="en-US" sz="1500" dirty="0"/>
+          </a:p>
+          <a:p>
+            <a:pPr marL="342900" indent="-342900">
+              <a:spcAft>
+                <a:spcPts val="400"/>
+              </a:spcAft>
+              <a:buSzPct val="100000"/>
+              <a:buChar char="•"/>
+            </a:pPr>
+            <a:r>
+              <a:rPr lang="en-US" sz="1500" dirty="0">
+                <a:solidFill>
+                  <a:schemeClr val="tx1"/>
+                </a:solidFill>
+              </a:rPr>
+              <a:t>Forms show both inputs</a:t>
+            </a:r>
+            <a:endParaRPr lang="en-US" sz="1500" dirty="0"/>
+          </a:p>
+          <a:p>
+            <a:pPr marL="342900" indent="-342900">
+              <a:spcAft>
+                <a:spcPts val="400"/>
+              </a:spcAft>
+              <a:buSzPct val="100000"/>
+              <a:buChar char="•"/>
+            </a:pPr>
+            <a:r>
+              <a:rPr lang="en-US" sz="1500" dirty="0">
+                <a:solidFill>
+                  <a:schemeClr val="tx1"/>
+                </a:solidFill>
+              </a:rPr>
+              <a:t>Read-only views show only the active locale</a:t>
+            </a:r>
+            <a:endParaRPr lang="en-US" sz="1500" dirty="0"/>
+          </a:p>
+          <a:p>
+            <a:pPr marL="342900" indent="-342900">
+              <a:spcAft>
+                <a:spcPts val="400"/>
+              </a:spcAft>
+              <a:buSzPct val="100000"/>
+              <a:buChar char="•"/>
+            </a:pPr>
+            <a:r>
+              <a:rPr lang="en-US" sz="1500" dirty="0">
+                <a:solidFill>
+                  <a:schemeClr val="tx1"/>
+                </a:solidFill>
+              </a:rPr>
+              <a:t>RTL / LTR set by LocaleService</a:t>
             </a:r>
             <a:endParaRPr lang="en-US" sz="1500" dirty="0"/>
           </a:p>
@@ -3468,7 +3288,7 @@
                   <a:schemeClr val="tx2"/>
                 </a:solidFill>
               </a:rPr>
-              <a:t>Adding a new page: the checklist</a:t>
+              <a:t>List pages look and behave the same</a:t>
             </a:r>
             <a:endParaRPr lang="en-US" sz="3600" dirty="0"/>
           </a:p>
@@ -3476,16 +3296,223 @@
       </p:sp>
       <p:sp>
         <p:nvSpPr>
-          <p:cNvPr id="3" name="chk-0-badge"/>
+          <p:cNvPr id="3" name="wf-shell"/>
           <p:cNvSpPr/>
           <p:nvPr/>
         </p:nvSpPr>
         <p:spPr>
           <a:xfrm>
-            <a:off x="548640" y="1572768"/>
-            <a:ext cx="502920" cy="502920"/>
-          </a:xfrm>
-          <a:prstGeom prst="ellipse">
+            <a:off x="548640" y="1463040"/>
+            <a:ext cx="6583680" cy="4480560"/>
+          </a:xfrm>
+          <a:prstGeom prst="roundRect">
+            <a:avLst>
+              <a:gd name="adj" fmla="val 2449"/>
+            </a:avLst>
+          </a:prstGeom>
+          <a:solidFill>
+            <a:schemeClr val="bg2"/>
+          </a:solidFill>
+          <a:ln w="12700">
+            <a:solidFill>
+              <a:schemeClr val="accent3"/>
+            </a:solidFill>
+            <a:prstDash val="solid"/>
+          </a:ln>
+        </p:spPr>
+      </p:sp>
+      <p:sp>
+        <p:nvSpPr>
+          <p:cNvPr id="4" name="wf-title"/>
+          <p:cNvSpPr txBox="1"/>
+          <p:nvPr/>
+        </p:nvSpPr>
+        <p:spPr>
+          <a:xfrm>
+            <a:off x="822960" y="1691640"/>
+            <a:ext cx="2743200" cy="411480"/>
+          </a:xfrm>
+          <a:prstGeom prst="rect">
+            <a:avLst/>
+          </a:prstGeom>
+          <a:noFill/>
+          <a:ln/>
+        </p:spPr>
+        <p:txBody>
+          <a:bodyPr wrap="square" lIns="0" tIns="0" rIns="0" bIns="0" rtlCol="0" anchor="ctr"/>
+          <a:lstStyle/>
+          <a:p>
+            <a:pPr indent="0" marL="0">
+              <a:buNone/>
+            </a:pPr>
+            <a:r>
+              <a:rPr lang="en-US" sz="1600" b="1" dirty="0">
+                <a:solidFill>
+                  <a:schemeClr val="tx1"/>
+                </a:solidFill>
+              </a:rPr>
+              <a:t>Page title</a:t>
+            </a:r>
+            <a:endParaRPr lang="en-US" sz="1600" dirty="0"/>
+          </a:p>
+        </p:txBody>
+      </p:sp>
+      <p:sp>
+        <p:nvSpPr>
+          <p:cNvPr id="5" name="wf-btn-0"/>
+          <p:cNvSpPr/>
+          <p:nvPr/>
+        </p:nvSpPr>
+        <p:spPr>
+          <a:xfrm>
+            <a:off x="5212080" y="1664208"/>
+            <a:ext cx="457200" cy="457200"/>
+          </a:xfrm>
+          <a:prstGeom prst="roundRect">
+            <a:avLst>
+              <a:gd name="adj" fmla="val 16000"/>
+            </a:avLst>
+          </a:prstGeom>
+          <a:solidFill>
+            <a:schemeClr val="bg1"/>
+          </a:solidFill>
+          <a:ln w="12700">
+            <a:solidFill>
+              <a:schemeClr val="accent3"/>
+            </a:solidFill>
+            <a:prstDash val="solid"/>
+          </a:ln>
+        </p:spPr>
+      </p:sp>
+      <p:sp>
+        <p:nvSpPr>
+          <p:cNvPr id="6" name="wf-btn-1"/>
+          <p:cNvSpPr/>
+          <p:nvPr/>
+        </p:nvSpPr>
+        <p:spPr>
+          <a:xfrm>
+            <a:off x="5760720" y="1664208"/>
+            <a:ext cx="457200" cy="457200"/>
+          </a:xfrm>
+          <a:prstGeom prst="roundRect">
+            <a:avLst>
+              <a:gd name="adj" fmla="val 16000"/>
+            </a:avLst>
+          </a:prstGeom>
+          <a:solidFill>
+            <a:schemeClr val="bg1"/>
+          </a:solidFill>
+          <a:ln w="12700">
+            <a:solidFill>
+              <a:schemeClr val="accent3"/>
+            </a:solidFill>
+            <a:prstDash val="solid"/>
+          </a:ln>
+        </p:spPr>
+      </p:sp>
+      <p:sp>
+        <p:nvSpPr>
+          <p:cNvPr id="7" name="wf-btn-2"/>
+          <p:cNvSpPr/>
+          <p:nvPr/>
+        </p:nvSpPr>
+        <p:spPr>
+          <a:xfrm>
+            <a:off x="6309360" y="1664208"/>
+            <a:ext cx="457200" cy="457200"/>
+          </a:xfrm>
+          <a:prstGeom prst="roundRect">
+            <a:avLst>
+              <a:gd name="adj" fmla="val 16000"/>
+            </a:avLst>
+          </a:prstGeom>
+          <a:solidFill>
+            <a:schemeClr val="accent3"/>
+          </a:solidFill>
+          <a:ln w="12700">
+            <a:solidFill>
+              <a:schemeClr val="accent3"/>
+            </a:solidFill>
+            <a:prstDash val="solid"/>
+          </a:ln>
+        </p:spPr>
+      </p:sp>
+      <p:sp>
+        <p:nvSpPr>
+          <p:cNvPr id="8" name="wf-search"/>
+          <p:cNvSpPr/>
+          <p:nvPr/>
+        </p:nvSpPr>
+        <p:spPr>
+          <a:xfrm>
+            <a:off x="822960" y="2331720"/>
+            <a:ext cx="6035040" cy="457200"/>
+          </a:xfrm>
+          <a:prstGeom prst="roundRect">
+            <a:avLst>
+              <a:gd name="adj" fmla="val 16000"/>
+            </a:avLst>
+          </a:prstGeom>
+          <a:solidFill>
+            <a:schemeClr val="bg1"/>
+          </a:solidFill>
+          <a:ln w="12700">
+            <a:solidFill>
+              <a:schemeClr val="accent3"/>
+            </a:solidFill>
+            <a:prstDash val="solid"/>
+          </a:ln>
+        </p:spPr>
+      </p:sp>
+      <p:sp>
+        <p:nvSpPr>
+          <p:cNvPr id="9" name="wf-search-text"/>
+          <p:cNvSpPr txBox="1"/>
+          <p:nvPr/>
+        </p:nvSpPr>
+        <p:spPr>
+          <a:xfrm>
+            <a:off x="960120" y="2331720"/>
+            <a:ext cx="3657600" cy="457200"/>
+          </a:xfrm>
+          <a:prstGeom prst="rect">
+            <a:avLst/>
+          </a:prstGeom>
+          <a:noFill/>
+          <a:ln/>
+        </p:spPr>
+        <p:txBody>
+          <a:bodyPr wrap="square" lIns="0" tIns="0" rIns="0" bIns="0" rtlCol="0" anchor="ctr"/>
+          <a:lstStyle/>
+          <a:p>
+            <a:pPr indent="0" marL="0">
+              <a:buNone/>
+            </a:pPr>
+            <a:r>
+              <a:rPr lang="en-US" sz="1200" dirty="0">
+                <a:solidFill>
+                  <a:schemeClr val="accent6"/>
+                </a:solidFill>
+              </a:rPr>
+              <a:t>Search… (runs as you type)</a:t>
+            </a:r>
+            <a:endParaRPr lang="en-US" sz="1200" dirty="0"/>
+          </a:p>
+        </p:txBody>
+      </p:sp>
+      <p:sp>
+        <p:nvSpPr>
+          <p:cNvPr id="10" name="wf-row-0"/>
+          <p:cNvSpPr/>
+          <p:nvPr/>
+        </p:nvSpPr>
+        <p:spPr>
+          <a:xfrm>
+            <a:off x="822960" y="3017520"/>
+            <a:ext cx="6035040" cy="365760"/>
+          </a:xfrm>
+          <a:prstGeom prst="rect">
             <a:avLst/>
           </a:prstGeom>
           <a:solidFill>
@@ -3493,7 +3520,7 @@
           </a:solidFill>
           <a:ln w="12700">
             <a:solidFill>
-              <a:schemeClr val="tx2"/>
+              <a:schemeClr val="bg2"/>
             </a:solidFill>
             <a:prstDash val="solid"/>
           </a:ln>
@@ -3501,14 +3528,14 @@
       </p:sp>
       <p:sp>
         <p:nvSpPr>
-          <p:cNvPr id="4" name="chk-0-badge-text"/>
-          <p:cNvSpPr txBox="1"/>
-          <p:nvPr/>
-        </p:nvSpPr>
-        <p:spPr>
-          <a:xfrm>
-            <a:off x="548640" y="1572768"/>
-            <a:ext cx="502920" cy="502920"/>
+          <p:cNvPr id="11" name="wf-row-0-n"/>
+          <p:cNvSpPr txBox="1"/>
+          <p:nvPr/>
+        </p:nvSpPr>
+        <p:spPr>
+          <a:xfrm>
+            <a:off x="914400" y="3017520"/>
+            <a:ext cx="365760" cy="365760"/>
           </a:xfrm>
           <a:prstGeom prst="rect">
             <a:avLst/>
@@ -3520,77 +3547,41 @@
           <a:bodyPr wrap="square" lIns="0" tIns="0" rIns="0" bIns="0" rtlCol="0" anchor="ctr"/>
           <a:lstStyle/>
           <a:p>
-            <a:pPr algn="ctr" indent="0" marL="0">
-              <a:buNone/>
-            </a:pPr>
-            <a:r>
-              <a:rPr lang="en-US" sz="1600" b="1" dirty="0">
+            <a:pPr indent="0" marL="0">
+              <a:buNone/>
+            </a:pPr>
+            <a:r>
+              <a:rPr lang="en-US" sz="1200" b="1" dirty="0">
                 <a:solidFill>
                   <a:schemeClr val="bg1"/>
                 </a:solidFill>
               </a:rPr>
-              <a:t>1</a:t>
-            </a:r>
-            <a:endParaRPr lang="en-US" sz="1600" dirty="0"/>
-          </a:p>
-        </p:txBody>
-      </p:sp>
-      <p:sp>
-        <p:nvSpPr>
-          <p:cNvPr id="5" name="chk-0-t"/>
-          <p:cNvSpPr txBox="1"/>
-          <p:nvPr/>
-        </p:nvSpPr>
-        <p:spPr>
-          <a:xfrm>
-            <a:off x="1280160" y="1463040"/>
-            <a:ext cx="4663440" cy="731520"/>
-          </a:xfrm>
-          <a:prstGeom prst="rect">
-            <a:avLst/>
-          </a:prstGeom>
-          <a:noFill/>
-          <a:ln/>
-        </p:spPr>
-        <p:txBody>
-          <a:bodyPr wrap="square" lIns="0" tIns="0" rIns="0" bIns="0" rtlCol="0" anchor="ctr"/>
-          <a:lstStyle/>
-          <a:p>
-            <a:pPr indent="0" marL="0">
-              <a:buNone/>
-            </a:pPr>
-            <a:r>
-              <a:rPr lang="en-US" sz="1800" dirty="0">
-                <a:solidFill>
-                  <a:schemeClr val="tx1"/>
-                </a:solidFill>
-              </a:rPr>
-              <a:t>Route in app.routes.ts and sidebar link</a:t>
-            </a:r>
-            <a:endParaRPr lang="en-US" sz="1800" dirty="0"/>
-          </a:p>
-        </p:txBody>
-      </p:sp>
-      <p:sp>
-        <p:nvSpPr>
-          <p:cNvPr id="6" name="chk-1-badge"/>
+              <a:t>#</a:t>
+            </a:r>
+            <a:endParaRPr lang="en-US" sz="1200" dirty="0"/>
+          </a:p>
+        </p:txBody>
+      </p:sp>
+      <p:sp>
+        <p:nvSpPr>
+          <p:cNvPr id="12" name="wf-row-1"/>
           <p:cNvSpPr/>
           <p:nvPr/>
         </p:nvSpPr>
         <p:spPr>
           <a:xfrm>
-            <a:off x="548640" y="2670048"/>
-            <a:ext cx="502920" cy="502920"/>
-          </a:xfrm>
-          <a:prstGeom prst="ellipse">
+            <a:off x="822960" y="3429000"/>
+            <a:ext cx="6035040" cy="365760"/>
+          </a:xfrm>
+          <a:prstGeom prst="rect">
             <a:avLst/>
           </a:prstGeom>
           <a:solidFill>
-            <a:schemeClr val="tx2"/>
+            <a:schemeClr val="bg1"/>
           </a:solidFill>
           <a:ln w="12700">
             <a:solidFill>
-              <a:schemeClr val="tx2"/>
+              <a:schemeClr val="bg2"/>
             </a:solidFill>
             <a:prstDash val="solid"/>
           </a:ln>
@@ -3598,14 +3589,14 @@
       </p:sp>
       <p:sp>
         <p:nvSpPr>
-          <p:cNvPr id="7" name="chk-1-badge-text"/>
-          <p:cNvSpPr txBox="1"/>
-          <p:nvPr/>
-        </p:nvSpPr>
-        <p:spPr>
-          <a:xfrm>
-            <a:off x="548640" y="2670048"/>
-            <a:ext cx="502920" cy="502920"/>
+          <p:cNvPr id="13" name="wf-row-1-n"/>
+          <p:cNvSpPr txBox="1"/>
+          <p:nvPr/>
+        </p:nvSpPr>
+        <p:spPr>
+          <a:xfrm>
+            <a:off x="914400" y="3429000"/>
+            <a:ext cx="365760" cy="365760"/>
           </a:xfrm>
           <a:prstGeom prst="rect">
             <a:avLst/>
@@ -3617,77 +3608,41 @@
           <a:bodyPr wrap="square" lIns="0" tIns="0" rIns="0" bIns="0" rtlCol="0" anchor="ctr"/>
           <a:lstStyle/>
           <a:p>
-            <a:pPr algn="ctr" indent="0" marL="0">
-              <a:buNone/>
-            </a:pPr>
-            <a:r>
-              <a:rPr lang="en-US" sz="1600" b="1" dirty="0">
-                <a:solidFill>
-                  <a:schemeClr val="bg1"/>
-                </a:solidFill>
-              </a:rPr>
-              <a:t>2</a:t>
-            </a:r>
-            <a:endParaRPr lang="en-US" sz="1600" dirty="0"/>
-          </a:p>
-        </p:txBody>
-      </p:sp>
-      <p:sp>
-        <p:nvSpPr>
-          <p:cNvPr id="8" name="chk-1-t"/>
-          <p:cNvSpPr txBox="1"/>
-          <p:nvPr/>
-        </p:nvSpPr>
-        <p:spPr>
-          <a:xfrm>
-            <a:off x="1280160" y="2560320"/>
-            <a:ext cx="4663440" cy="731520"/>
-          </a:xfrm>
-          <a:prstGeom prst="rect">
-            <a:avLst/>
-          </a:prstGeom>
-          <a:noFill/>
-          <a:ln/>
-        </p:spPr>
-        <p:txBody>
-          <a:bodyPr wrap="square" lIns="0" tIns="0" rIns="0" bIns="0" rtlCol="0" anchor="ctr"/>
-          <a:lstStyle/>
-          <a:p>
             <a:pPr indent="0" marL="0">
               <a:buNone/>
             </a:pPr>
             <a:r>
-              <a:rPr lang="en-US" sz="1800" dirty="0">
+              <a:rPr lang="en-US" sz="1200" dirty="0">
                 <a:solidFill>
                   <a:schemeClr val="tx1"/>
                 </a:solidFill>
               </a:rPr>
-              <a:t>AppPage seed entry with the same URL</a:t>
-            </a:r>
-            <a:endParaRPr lang="en-US" sz="1800" dirty="0"/>
-          </a:p>
-        </p:txBody>
-      </p:sp>
-      <p:sp>
-        <p:nvSpPr>
-          <p:cNvPr id="9" name="chk-2-badge"/>
+              <a:t>1</a:t>
+            </a:r>
+            <a:endParaRPr lang="en-US" sz="1200" dirty="0"/>
+          </a:p>
+        </p:txBody>
+      </p:sp>
+      <p:sp>
+        <p:nvSpPr>
+          <p:cNvPr id="14" name="wf-row-2"/>
           <p:cNvSpPr/>
           <p:nvPr/>
         </p:nvSpPr>
         <p:spPr>
           <a:xfrm>
-            <a:off x="548640" y="3767328"/>
-            <a:ext cx="502920" cy="502920"/>
-          </a:xfrm>
-          <a:prstGeom prst="ellipse">
+            <a:off x="822960" y="3840480"/>
+            <a:ext cx="6035040" cy="365760"/>
+          </a:xfrm>
+          <a:prstGeom prst="rect">
             <a:avLst/>
           </a:prstGeom>
           <a:solidFill>
-            <a:schemeClr val="tx2"/>
+            <a:schemeClr val="bg1"/>
           </a:solidFill>
           <a:ln w="12700">
             <a:solidFill>
-              <a:schemeClr val="tx2"/>
+              <a:schemeClr val="bg2"/>
             </a:solidFill>
             <a:prstDash val="solid"/>
           </a:ln>
@@ -3695,14 +3650,14 @@
       </p:sp>
       <p:sp>
         <p:nvSpPr>
-          <p:cNvPr id="10" name="chk-2-badge-text"/>
-          <p:cNvSpPr txBox="1"/>
-          <p:nvPr/>
-        </p:nvSpPr>
-        <p:spPr>
-          <a:xfrm>
-            <a:off x="548640" y="3767328"/>
-            <a:ext cx="502920" cy="502920"/>
+          <p:cNvPr id="15" name="wf-row-2-n"/>
+          <p:cNvSpPr txBox="1"/>
+          <p:nvPr/>
+        </p:nvSpPr>
+        <p:spPr>
+          <a:xfrm>
+            <a:off x="914400" y="3840480"/>
+            <a:ext cx="365760" cy="365760"/>
           </a:xfrm>
           <a:prstGeom prst="rect">
             <a:avLst/>
@@ -3714,77 +3669,41 @@
           <a:bodyPr wrap="square" lIns="0" tIns="0" rIns="0" bIns="0" rtlCol="0" anchor="ctr"/>
           <a:lstStyle/>
           <a:p>
-            <a:pPr algn="ctr" indent="0" marL="0">
-              <a:buNone/>
-            </a:pPr>
-            <a:r>
-              <a:rPr lang="en-US" sz="1600" b="1" dirty="0">
-                <a:solidFill>
-                  <a:schemeClr val="bg1"/>
-                </a:solidFill>
-              </a:rPr>
-              <a:t>3</a:t>
-            </a:r>
-            <a:endParaRPr lang="en-US" sz="1600" dirty="0"/>
-          </a:p>
-        </p:txBody>
-      </p:sp>
-      <p:sp>
-        <p:nvSpPr>
-          <p:cNvPr id="11" name="chk-2-t"/>
-          <p:cNvSpPr txBox="1"/>
-          <p:nvPr/>
-        </p:nvSpPr>
-        <p:spPr>
-          <a:xfrm>
-            <a:off x="1280160" y="3657600"/>
-            <a:ext cx="4663440" cy="731520"/>
-          </a:xfrm>
-          <a:prstGeom prst="rect">
-            <a:avLst/>
-          </a:prstGeom>
-          <a:noFill/>
-          <a:ln/>
-        </p:spPr>
-        <p:txBody>
-          <a:bodyPr wrap="square" lIns="0" tIns="0" rIns="0" bIns="0" rtlCol="0" anchor="ctr"/>
-          <a:lstStyle/>
-          <a:p>
             <a:pPr indent="0" marL="0">
               <a:buNone/>
             </a:pPr>
             <a:r>
-              <a:rPr lang="en-US" sz="1800" dirty="0">
+              <a:rPr lang="en-US" sz="1200" dirty="0">
                 <a:solidFill>
                   <a:schemeClr val="tx1"/>
                 </a:solidFill>
               </a:rPr>
-              <a:t>API endpoint + service rule + DTOs</a:t>
-            </a:r>
-            <a:endParaRPr lang="en-US" sz="1800" dirty="0"/>
-          </a:p>
-        </p:txBody>
-      </p:sp>
-      <p:sp>
-        <p:nvSpPr>
-          <p:cNvPr id="12" name="chk-3-badge"/>
+              <a:t>2</a:t>
+            </a:r>
+            <a:endParaRPr lang="en-US" sz="1200" dirty="0"/>
+          </a:p>
+        </p:txBody>
+      </p:sp>
+      <p:sp>
+        <p:nvSpPr>
+          <p:cNvPr id="16" name="wf-row-3"/>
           <p:cNvSpPr/>
           <p:nvPr/>
         </p:nvSpPr>
         <p:spPr>
           <a:xfrm>
-            <a:off x="548640" y="4864608"/>
-            <a:ext cx="502920" cy="502920"/>
-          </a:xfrm>
-          <a:prstGeom prst="ellipse">
+            <a:off x="822960" y="4251960"/>
+            <a:ext cx="6035040" cy="365760"/>
+          </a:xfrm>
+          <a:prstGeom prst="rect">
             <a:avLst/>
           </a:prstGeom>
           <a:solidFill>
-            <a:schemeClr val="tx2"/>
+            <a:schemeClr val="bg1"/>
           </a:solidFill>
           <a:ln w="12700">
             <a:solidFill>
-              <a:schemeClr val="tx2"/>
+              <a:schemeClr val="bg2"/>
             </a:solidFill>
             <a:prstDash val="solid"/>
           </a:ln>
@@ -3792,14 +3711,14 @@
       </p:sp>
       <p:sp>
         <p:nvSpPr>
-          <p:cNvPr id="13" name="chk-3-badge-text"/>
-          <p:cNvSpPr txBox="1"/>
-          <p:nvPr/>
-        </p:nvSpPr>
-        <p:spPr>
-          <a:xfrm>
-            <a:off x="548640" y="4864608"/>
-            <a:ext cx="502920" cy="502920"/>
+          <p:cNvPr id="17" name="wf-row-3-n"/>
+          <p:cNvSpPr txBox="1"/>
+          <p:nvPr/>
+        </p:nvSpPr>
+        <p:spPr>
+          <a:xfrm>
+            <a:off x="914400" y="4251960"/>
+            <a:ext cx="365760" cy="365760"/>
           </a:xfrm>
           <a:prstGeom prst="rect">
             <a:avLst/>
@@ -3811,77 +3730,41 @@
           <a:bodyPr wrap="square" lIns="0" tIns="0" rIns="0" bIns="0" rtlCol="0" anchor="ctr"/>
           <a:lstStyle/>
           <a:p>
-            <a:pPr algn="ctr" indent="0" marL="0">
-              <a:buNone/>
-            </a:pPr>
-            <a:r>
-              <a:rPr lang="en-US" sz="1600" b="1" dirty="0">
-                <a:solidFill>
-                  <a:schemeClr val="bg1"/>
-                </a:solidFill>
-              </a:rPr>
-              <a:t>4</a:t>
-            </a:r>
-            <a:endParaRPr lang="en-US" sz="1600" dirty="0"/>
-          </a:p>
-        </p:txBody>
-      </p:sp>
-      <p:sp>
-        <p:nvSpPr>
-          <p:cNvPr id="14" name="chk-3-t"/>
-          <p:cNvSpPr txBox="1"/>
-          <p:nvPr/>
-        </p:nvSpPr>
-        <p:spPr>
-          <a:xfrm>
-            <a:off x="1280160" y="4754880"/>
-            <a:ext cx="4663440" cy="731520"/>
-          </a:xfrm>
-          <a:prstGeom prst="rect">
-            <a:avLst/>
-          </a:prstGeom>
-          <a:noFill/>
-          <a:ln/>
-        </p:spPr>
-        <p:txBody>
-          <a:bodyPr wrap="square" lIns="0" tIns="0" rIns="0" bIns="0" rtlCol="0" anchor="ctr"/>
-          <a:lstStyle/>
-          <a:p>
             <a:pPr indent="0" marL="0">
               <a:buNone/>
             </a:pPr>
             <a:r>
-              <a:rPr lang="en-US" sz="1800" dirty="0">
+              <a:rPr lang="en-US" sz="1200" dirty="0">
                 <a:solidFill>
                   <a:schemeClr val="tx1"/>
                 </a:solidFill>
               </a:rPr>
-              <a:t>Data service, then NgRx slice if shared</a:t>
-            </a:r>
-            <a:endParaRPr lang="en-US" sz="1800" dirty="0"/>
-          </a:p>
-        </p:txBody>
-      </p:sp>
-      <p:sp>
-        <p:nvSpPr>
-          <p:cNvPr id="15" name="chk-4-badge"/>
+              <a:t>3</a:t>
+            </a:r>
+            <a:endParaRPr lang="en-US" sz="1200" dirty="0"/>
+          </a:p>
+        </p:txBody>
+      </p:sp>
+      <p:sp>
+        <p:nvSpPr>
+          <p:cNvPr id="18" name="wf-row-4"/>
           <p:cNvSpPr/>
           <p:nvPr/>
         </p:nvSpPr>
         <p:spPr>
           <a:xfrm>
-            <a:off x="6172200" y="1572768"/>
-            <a:ext cx="502920" cy="502920"/>
-          </a:xfrm>
-          <a:prstGeom prst="ellipse">
+            <a:off x="822960" y="4663440"/>
+            <a:ext cx="6035040" cy="365760"/>
+          </a:xfrm>
+          <a:prstGeom prst="rect">
             <a:avLst/>
           </a:prstGeom>
           <a:solidFill>
-            <a:schemeClr val="tx2"/>
+            <a:schemeClr val="bg1"/>
           </a:solidFill>
           <a:ln w="12700">
             <a:solidFill>
-              <a:schemeClr val="tx2"/>
+              <a:schemeClr val="bg2"/>
             </a:solidFill>
             <a:prstDash val="solid"/>
           </a:ln>
@@ -3889,14 +3772,14 @@
       </p:sp>
       <p:sp>
         <p:nvSpPr>
-          <p:cNvPr id="16" name="chk-4-badge-text"/>
-          <p:cNvSpPr txBox="1"/>
-          <p:nvPr/>
-        </p:nvSpPr>
-        <p:spPr>
-          <a:xfrm>
-            <a:off x="6172200" y="1572768"/>
-            <a:ext cx="502920" cy="502920"/>
+          <p:cNvPr id="19" name="wf-row-4-n"/>
+          <p:cNvSpPr txBox="1"/>
+          <p:nvPr/>
+        </p:nvSpPr>
+        <p:spPr>
+          <a:xfrm>
+            <a:off x="914400" y="4663440"/>
+            <a:ext cx="365760" cy="365760"/>
           </a:xfrm>
           <a:prstGeom prst="rect">
             <a:avLst/>
@@ -3908,345 +3791,220 @@
           <a:bodyPr wrap="square" lIns="0" tIns="0" rIns="0" bIns="0" rtlCol="0" anchor="ctr"/>
           <a:lstStyle/>
           <a:p>
-            <a:pPr algn="ctr" indent="0" marL="0">
-              <a:buNone/>
-            </a:pPr>
-            <a:r>
-              <a:rPr lang="en-US" sz="1600" b="1" dirty="0">
-                <a:solidFill>
-                  <a:schemeClr val="bg1"/>
-                </a:solidFill>
-              </a:rPr>
-              <a:t>5</a:t>
+            <a:pPr indent="0" marL="0">
+              <a:buNone/>
+            </a:pPr>
+            <a:r>
+              <a:rPr lang="en-US" sz="1200" dirty="0">
+                <a:solidFill>
+                  <a:schemeClr val="tx1"/>
+                </a:solidFill>
+              </a:rPr>
+              <a:t>4</a:t>
+            </a:r>
+            <a:endParaRPr lang="en-US" sz="1200" dirty="0"/>
+          </a:p>
+        </p:txBody>
+      </p:sp>
+      <p:sp>
+        <p:nvSpPr>
+          <p:cNvPr id="20" name="wf-summary"/>
+          <p:cNvSpPr txBox="1"/>
+          <p:nvPr/>
+        </p:nvSpPr>
+        <p:spPr>
+          <a:xfrm>
+            <a:off x="822960" y="5257800"/>
+            <a:ext cx="2377440" cy="411480"/>
+          </a:xfrm>
+          <a:prstGeom prst="rect">
+            <a:avLst/>
+          </a:prstGeom>
+          <a:noFill/>
+          <a:ln/>
+        </p:spPr>
+        <p:txBody>
+          <a:bodyPr wrap="square" lIns="0" tIns="0" rIns="0" bIns="0" rtlCol="0" anchor="ctr"/>
+          <a:lstStyle/>
+          <a:p>
+            <a:pPr indent="0" marL="0">
+              <a:buNone/>
+            </a:pPr>
+            <a:r>
+              <a:rPr lang="en-US" sz="1200" dirty="0">
+                <a:solidFill>
+                  <a:schemeClr val="tx1"/>
+                </a:solidFill>
+              </a:rPr>
+              <a:t>Showing 1–5 of 42</a:t>
+            </a:r>
+            <a:endParaRPr lang="en-US" sz="1200" dirty="0"/>
+          </a:p>
+        </p:txBody>
+      </p:sp>
+      <p:sp>
+        <p:nvSpPr>
+          <p:cNvPr id="21" name="wf-pager"/>
+          <p:cNvSpPr txBox="1"/>
+          <p:nvPr/>
+        </p:nvSpPr>
+        <p:spPr>
+          <a:xfrm>
+            <a:off x="4114800" y="5257800"/>
+            <a:ext cx="2743200" cy="411480"/>
+          </a:xfrm>
+          <a:prstGeom prst="rect">
+            <a:avLst/>
+          </a:prstGeom>
+          <a:noFill/>
+          <a:ln/>
+        </p:spPr>
+        <p:txBody>
+          <a:bodyPr wrap="square" lIns="0" tIns="0" rIns="0" bIns="0" rtlCol="0" anchor="ctr"/>
+          <a:lstStyle/>
+          <a:p>
+            <a:pPr algn="r" indent="0" marL="0">
+              <a:buNone/>
+            </a:pPr>
+            <a:r>
+              <a:rPr lang="en-US" sz="1200" b="1" dirty="0">
+                <a:solidFill>
+                  <a:schemeClr val="tx2"/>
+                </a:solidFill>
+              </a:rPr>
+              <a:t>Per page 5 ▾   ‹   1   ›</a:t>
+            </a:r>
+            <a:endParaRPr lang="en-US" sz="1200" dirty="0"/>
+          </a:p>
+        </p:txBody>
+      </p:sp>
+      <p:sp>
+        <p:nvSpPr>
+          <p:cNvPr id="22" name="list-rules"/>
+          <p:cNvSpPr txBox="1"/>
+          <p:nvPr/>
+        </p:nvSpPr>
+        <p:spPr>
+          <a:xfrm>
+            <a:off x="7498080" y="1463040"/>
+            <a:ext cx="4114800" cy="4480560"/>
+          </a:xfrm>
+          <a:prstGeom prst="rect">
+            <a:avLst/>
+          </a:prstGeom>
+          <a:noFill/>
+          <a:ln/>
+        </p:spPr>
+        <p:txBody>
+          <a:bodyPr wrap="square" lIns="0" tIns="0" rIns="0" bIns="0" rtlCol="0" anchor="t"/>
+          <a:lstStyle/>
+          <a:p>
+            <a:pPr marL="342900" indent="-342900">
+              <a:spcAft>
+                <a:spcPts val="1000"/>
+              </a:spcAft>
+              <a:buSzPct val="100000"/>
+              <a:buChar char="•"/>
+            </a:pPr>
+            <a:r>
+              <a:rPr lang="en-US" sz="1600" dirty="0">
+                <a:solidFill>
+                  <a:schemeClr val="tx1"/>
+                </a:solidFill>
+              </a:rPr>
+              <a:t>Server-side paging: pageIndex, pageSize and query go to the API</a:t>
             </a:r>
             <a:endParaRPr lang="en-US" sz="1600" dirty="0"/>
           </a:p>
-        </p:txBody>
-      </p:sp>
-      <p:sp>
-        <p:nvSpPr>
-          <p:cNvPr id="17" name="chk-4-t"/>
-          <p:cNvSpPr txBox="1"/>
-          <p:nvPr/>
-        </p:nvSpPr>
-        <p:spPr>
-          <a:xfrm>
-            <a:off x="6903720" y="1463040"/>
-            <a:ext cx="4663440" cy="731520"/>
-          </a:xfrm>
-          <a:prstGeom prst="rect">
-            <a:avLst/>
-          </a:prstGeom>
-          <a:noFill/>
-          <a:ln/>
-        </p:spPr>
-        <p:txBody>
-          <a:bodyPr wrap="square" lIns="0" tIns="0" rIns="0" bIns="0" rtlCol="0" anchor="ctr"/>
-          <a:lstStyle/>
-          <a:p>
-            <a:pPr indent="0" marL="0">
-              <a:buNone/>
-            </a:pPr>
-            <a:r>
-              <a:rPr lang="en-US" sz="1800" dirty="0">
+          <a:p>
+            <a:pPr marL="342900" indent="-342900">
+              <a:spcAft>
+                <a:spcPts val="1000"/>
+              </a:spcAft>
+              <a:buSzPct val="100000"/>
+              <a:buChar char="•"/>
+            </a:pPr>
+            <a:r>
+              <a:rPr lang="en-US" sz="1600" dirty="0">
                 <a:solidFill>
                   <a:schemeClr val="tx1"/>
                 </a:solidFill>
               </a:rPr>
-              <a:t>Form pipeline, executor, validators</a:t>
-            </a:r>
-            <a:endParaRPr lang="en-US" sz="1800" dirty="0"/>
-          </a:p>
-        </p:txBody>
-      </p:sp>
-      <p:sp>
-        <p:nvSpPr>
-          <p:cNvPr id="18" name="chk-5-badge"/>
-          <p:cNvSpPr/>
-          <p:nvPr/>
-        </p:nvSpPr>
-        <p:spPr>
-          <a:xfrm>
-            <a:off x="6172200" y="2670048"/>
-            <a:ext cx="502920" cy="502920"/>
-          </a:xfrm>
-          <a:prstGeom prst="ellipse">
-            <a:avLst/>
-          </a:prstGeom>
-          <a:solidFill>
-            <a:schemeClr val="tx2"/>
-          </a:solidFill>
-          <a:ln w="12700">
-            <a:solidFill>
-              <a:schemeClr val="tx2"/>
-            </a:solidFill>
-            <a:prstDash val="solid"/>
-          </a:ln>
-        </p:spPr>
-      </p:sp>
-      <p:sp>
-        <p:nvSpPr>
-          <p:cNvPr id="19" name="chk-5-badge-text"/>
-          <p:cNvSpPr txBox="1"/>
-          <p:nvPr/>
-        </p:nvSpPr>
-        <p:spPr>
-          <a:xfrm>
-            <a:off x="6172200" y="2670048"/>
-            <a:ext cx="502920" cy="502920"/>
-          </a:xfrm>
-          <a:prstGeom prst="rect">
-            <a:avLst/>
-          </a:prstGeom>
-          <a:noFill/>
-          <a:ln/>
-        </p:spPr>
-        <p:txBody>
-          <a:bodyPr wrap="square" lIns="0" tIns="0" rIns="0" bIns="0" rtlCol="0" anchor="ctr"/>
-          <a:lstStyle/>
-          <a:p>
-            <a:pPr algn="ctr" indent="0" marL="0">
-              <a:buNone/>
-            </a:pPr>
-            <a:r>
-              <a:rPr lang="en-US" sz="1600" b="1" dirty="0">
-                <a:solidFill>
-                  <a:schemeClr val="bg1"/>
-                </a:solidFill>
-              </a:rPr>
-              <a:t>6</a:t>
+              <a:t>Page sizes 5 / 10 / 15, default 5</a:t>
             </a:r>
             <a:endParaRPr lang="en-US" sz="1600" dirty="0"/>
           </a:p>
-        </p:txBody>
-      </p:sp>
-      <p:sp>
-        <p:nvSpPr>
-          <p:cNvPr id="20" name="chk-5-t"/>
-          <p:cNvSpPr txBox="1"/>
-          <p:nvPr/>
-        </p:nvSpPr>
-        <p:spPr>
-          <a:xfrm>
-            <a:off x="6903720" y="2560320"/>
-            <a:ext cx="4663440" cy="731520"/>
-          </a:xfrm>
-          <a:prstGeom prst="rect">
-            <a:avLst/>
-          </a:prstGeom>
-          <a:noFill/>
-          <a:ln/>
-        </p:spPr>
-        <p:txBody>
-          <a:bodyPr wrap="square" lIns="0" tIns="0" rIns="0" bIns="0" rtlCol="0" anchor="ctr"/>
-          <a:lstStyle/>
-          <a:p>
-            <a:pPr indent="0" marL="0">
-              <a:buNone/>
-            </a:pPr>
-            <a:r>
-              <a:rPr lang="en-US" sz="1800" dirty="0">
+          <a:p>
+            <a:pPr marL="342900" indent="-342900">
+              <a:spcAft>
+                <a:spcPts val="1000"/>
+              </a:spcAft>
+              <a:buSzPct val="100000"/>
+              <a:buChar char="•"/>
+            </a:pPr>
+            <a:r>
+              <a:rPr lang="en-US" sz="1600" dirty="0">
                 <a:solidFill>
                   <a:schemeClr val="tx1"/>
                 </a:solidFill>
               </a:rPr>
-              <a:t>English in templates, Arabic in messages.ar.json</a:t>
-            </a:r>
-            <a:endParaRPr lang="en-US" sz="1800" dirty="0"/>
-          </a:p>
-        </p:txBody>
-      </p:sp>
-      <p:sp>
-        <p:nvSpPr>
-          <p:cNvPr id="21" name="chk-6-badge"/>
-          <p:cNvSpPr/>
-          <p:nvPr/>
-        </p:nvSpPr>
-        <p:spPr>
-          <a:xfrm>
-            <a:off x="6172200" y="3767328"/>
-            <a:ext cx="502920" cy="502920"/>
-          </a:xfrm>
-          <a:prstGeom prst="ellipse">
-            <a:avLst/>
-          </a:prstGeom>
-          <a:solidFill>
-            <a:schemeClr val="tx2"/>
-          </a:solidFill>
-          <a:ln w="12700">
-            <a:solidFill>
-              <a:schemeClr val="tx2"/>
-            </a:solidFill>
-            <a:prstDash val="solid"/>
-          </a:ln>
-        </p:spPr>
-      </p:sp>
-      <p:sp>
-        <p:nvSpPr>
-          <p:cNvPr id="22" name="chk-6-badge-text"/>
-          <p:cNvSpPr txBox="1"/>
-          <p:nvPr/>
-        </p:nvSpPr>
-        <p:spPr>
-          <a:xfrm>
-            <a:off x="6172200" y="3767328"/>
-            <a:ext cx="502920" cy="502920"/>
-          </a:xfrm>
-          <a:prstGeom prst="rect">
-            <a:avLst/>
-          </a:prstGeom>
-          <a:noFill/>
-          <a:ln/>
-        </p:spPr>
-        <p:txBody>
-          <a:bodyPr wrap="square" lIns="0" tIns="0" rIns="0" bIns="0" rtlCol="0" anchor="ctr"/>
-          <a:lstStyle/>
-          <a:p>
-            <a:pPr algn="ctr" indent="0" marL="0">
-              <a:buNone/>
-            </a:pPr>
-            <a:r>
-              <a:rPr lang="en-US" sz="1600" b="1" dirty="0">
-                <a:solidFill>
-                  <a:schemeClr val="bg1"/>
-                </a:solidFill>
-              </a:rPr>
-              <a:t>7</a:t>
+              <a:t>First column # is page-aware</a:t>
             </a:r>
             <a:endParaRPr lang="en-US" sz="1600" dirty="0"/>
           </a:p>
-        </p:txBody>
-      </p:sp>
-      <p:sp>
-        <p:nvSpPr>
-          <p:cNvPr id="23" name="chk-6-t"/>
-          <p:cNvSpPr txBox="1"/>
-          <p:nvPr/>
-        </p:nvSpPr>
-        <p:spPr>
-          <a:xfrm>
-            <a:off x="6903720" y="3657600"/>
-            <a:ext cx="4663440" cy="731520"/>
-          </a:xfrm>
-          <a:prstGeom prst="rect">
-            <a:avLst/>
-          </a:prstGeom>
-          <a:noFill/>
-          <a:ln/>
-        </p:spPr>
-        <p:txBody>
-          <a:bodyPr wrap="square" lIns="0" tIns="0" rIns="0" bIns="0" rtlCol="0" anchor="ctr"/>
-          <a:lstStyle/>
-          <a:p>
-            <a:pPr indent="0" marL="0">
-              <a:buNone/>
-            </a:pPr>
-            <a:r>
-              <a:rPr lang="en-US" sz="1800" dirty="0">
+          <a:p>
+            <a:pPr marL="342900" indent="-342900">
+              <a:spcAft>
+                <a:spcPts val="1000"/>
+              </a:spcAft>
+              <a:buSzPct val="100000"/>
+              <a:buChar char="•"/>
+            </a:pPr>
+            <a:r>
+              <a:rPr lang="en-US" sz="1600" dirty="0">
                 <a:solidFill>
                   <a:schemeClr val="tx1"/>
                 </a:solidFill>
               </a:rPr>
-              <a:t>Mobile layout and RTL checked</a:t>
-            </a:r>
-            <a:endParaRPr lang="en-US" sz="1800" dirty="0"/>
-          </a:p>
-        </p:txBody>
-      </p:sp>
-      <p:sp>
-        <p:nvSpPr>
-          <p:cNvPr id="24" name="chk-7-badge"/>
-          <p:cNvSpPr/>
-          <p:nvPr/>
-        </p:nvSpPr>
-        <p:spPr>
-          <a:xfrm>
-            <a:off x="6172200" y="4864608"/>
-            <a:ext cx="502920" cy="502920"/>
-          </a:xfrm>
-          <a:prstGeom prst="ellipse">
-            <a:avLst/>
-          </a:prstGeom>
-          <a:solidFill>
-            <a:schemeClr val="accent2"/>
-          </a:solidFill>
-          <a:ln w="12700">
-            <a:solidFill>
-              <a:schemeClr val="accent2"/>
-            </a:solidFill>
-            <a:prstDash val="solid"/>
-          </a:ln>
-        </p:spPr>
-      </p:sp>
-      <p:sp>
-        <p:nvSpPr>
-          <p:cNvPr id="25" name="chk-7-badge-text"/>
-          <p:cNvSpPr txBox="1"/>
-          <p:nvPr/>
-        </p:nvSpPr>
-        <p:spPr>
-          <a:xfrm>
-            <a:off x="6172200" y="4864608"/>
-            <a:ext cx="502920" cy="502920"/>
-          </a:xfrm>
-          <a:prstGeom prst="rect">
-            <a:avLst/>
-          </a:prstGeom>
-          <a:noFill/>
-          <a:ln/>
-        </p:spPr>
-        <p:txBody>
-          <a:bodyPr wrap="square" lIns="0" tIns="0" rIns="0" bIns="0" rtlCol="0" anchor="ctr"/>
-          <a:lstStyle/>
-          <a:p>
-            <a:pPr algn="ctr" indent="0" marL="0">
-              <a:buNone/>
-            </a:pPr>
-            <a:r>
-              <a:rPr lang="en-US" sz="1600" b="1" dirty="0">
-                <a:solidFill>
-                  <a:schemeClr val="bg1"/>
-                </a:solidFill>
-              </a:rPr>
-              <a:t>8</a:t>
+              <a:t>Search on change (≈300 ms), no Search button</a:t>
             </a:r>
             <a:endParaRPr lang="en-US" sz="1600" dirty="0"/>
           </a:p>
-        </p:txBody>
-      </p:sp>
-      <p:sp>
-        <p:nvSpPr>
-          <p:cNvPr id="26" name="chk-7-t"/>
-          <p:cNvSpPr txBox="1"/>
-          <p:nvPr/>
-        </p:nvSpPr>
-        <p:spPr>
-          <a:xfrm>
-            <a:off x="6903720" y="4754880"/>
-            <a:ext cx="4663440" cy="731520"/>
-          </a:xfrm>
-          <a:prstGeom prst="rect">
-            <a:avLst/>
-          </a:prstGeom>
-          <a:noFill/>
-          <a:ln/>
-        </p:spPr>
-        <p:txBody>
-          <a:bodyPr wrap="square" lIns="0" tIns="0" rIns="0" bIns="0" rtlCol="0" anchor="ctr"/>
-          <a:lstStyle/>
-          <a:p>
-            <a:pPr indent="0" marL="0">
-              <a:buNone/>
-            </a:pPr>
-            <a:r>
-              <a:rPr lang="en-US" sz="1800" dirty="0">
+          <a:p>
+            <a:pPr marL="342900" indent="-342900">
+              <a:spcAft>
+                <a:spcPts val="1000"/>
+              </a:spcAft>
+              <a:buSzPct val="100000"/>
+              <a:buChar char="•"/>
+            </a:pPr>
+            <a:r>
+              <a:rPr lang="en-US" sz="1600" dirty="0">
                 <a:solidFill>
                   <a:schemeClr val="tx1"/>
                 </a:solidFill>
               </a:rPr>
-              <a:t>2–3 tests for the new rule</a:t>
-            </a:r>
-            <a:endParaRPr lang="en-US" sz="1800" dirty="0"/>
+              <a:t>Filter drawer on mobile, table becomes cards below lg</a:t>
+            </a:r>
+            <a:endParaRPr lang="en-US" sz="1600" dirty="0"/>
+          </a:p>
+          <a:p>
+            <a:pPr marL="342900" indent="-342900">
+              <a:spcAft>
+                <a:spcPts val="1000"/>
+              </a:spcAft>
+              <a:buSzPct val="100000"/>
+              <a:buChar char="•"/>
+            </a:pPr>
+            <a:r>
+              <a:rPr lang="en-US" sz="1600" dirty="0">
+                <a:solidFill>
+                  <a:schemeClr val="tx1"/>
+                </a:solidFill>
+              </a:rPr>
+              <a:t>Reset to page 1 when filters change</a:t>
+            </a:r>
+            <a:endParaRPr lang="en-US" sz="1600" dirty="0"/>
           </a:p>
         </p:txBody>
       </p:sp>
@@ -4330,6 +4088,1976 @@
         </p:nvSpPr>
         <p:spPr>
           <a:xfrm>
+            <a:off x="548640" y="365760"/>
+            <a:ext cx="11064240" cy="822960"/>
+          </a:xfrm>
+          <a:prstGeom prst="rect">
+            <a:avLst/>
+          </a:prstGeom>
+          <a:noFill/>
+          <a:ln/>
+        </p:spPr>
+        <p:txBody>
+          <a:bodyPr wrap="square" lIns="0" tIns="0" rIns="0" bIns="0" rtlCol="0" anchor="ctr"/>
+          <a:lstStyle/>
+          <a:p>
+            <a:pPr algn="l" indent="0" marL="0">
+              <a:buNone/>
+            </a:pPr>
+            <a:r>
+              <a:rPr lang="en-US" sz="3600" b="1" dirty="0">
+                <a:solidFill>
+                  <a:schemeClr val="tx2"/>
+                </a:solidFill>
+              </a:rPr>
+              <a:t>Detail pages and on-screen copy</a:t>
+            </a:r>
+            <a:endParaRPr lang="en-US" sz="3600" dirty="0"/>
+          </a:p>
+        </p:txBody>
+      </p:sp>
+      <p:sp>
+        <p:nvSpPr>
+          <p:cNvPr id="3" name="grid-title"/>
+          <p:cNvSpPr txBox="1"/>
+          <p:nvPr/>
+        </p:nvSpPr>
+        <p:spPr>
+          <a:xfrm>
+            <a:off x="548640" y="1463040"/>
+            <a:ext cx="6675120" cy="411480"/>
+          </a:xfrm>
+          <a:prstGeom prst="rect">
+            <a:avLst/>
+          </a:prstGeom>
+          <a:noFill/>
+          <a:ln/>
+        </p:spPr>
+        <p:txBody>
+          <a:bodyPr wrap="square" lIns="0" tIns="0" rIns="0" bIns="0" rtlCol="0" anchor="ctr"/>
+          <a:lstStyle/>
+          <a:p>
+            <a:pPr indent="0" marL="0">
+              <a:buNone/>
+            </a:pPr>
+            <a:r>
+              <a:rPr lang="en-US" sz="1800" b="1" dirty="0">
+                <a:solidFill>
+                  <a:schemeClr val="tx2"/>
+                </a:solidFill>
+              </a:rPr>
+              <a:t>Read-only grid: 4 columns on desktop</a:t>
+            </a:r>
+            <a:endParaRPr lang="en-US" sz="1800" dirty="0"/>
+          </a:p>
+        </p:txBody>
+      </p:sp>
+      <p:sp>
+        <p:nvSpPr>
+          <p:cNvPr id="4" name="grid-0-0"/>
+          <p:cNvSpPr/>
+          <p:nvPr/>
+        </p:nvSpPr>
+        <p:spPr>
+          <a:xfrm>
+            <a:off x="548640" y="2057400"/>
+            <a:ext cx="1600200" cy="502920"/>
+          </a:xfrm>
+          <a:prstGeom prst="roundRect">
+            <a:avLst>
+              <a:gd name="adj" fmla="val 10909"/>
+            </a:avLst>
+          </a:prstGeom>
+          <a:solidFill>
+            <a:schemeClr val="bg2"/>
+          </a:solidFill>
+          <a:ln w="9525">
+            <a:solidFill>
+              <a:schemeClr val="accent3"/>
+            </a:solidFill>
+            <a:prstDash val="solid"/>
+          </a:ln>
+        </p:spPr>
+      </p:sp>
+      <p:sp>
+        <p:nvSpPr>
+          <p:cNvPr id="5" name="grid-0-0-t"/>
+          <p:cNvSpPr txBox="1"/>
+          <p:nvPr/>
+        </p:nvSpPr>
+        <p:spPr>
+          <a:xfrm>
+            <a:off x="658368" y="2057400"/>
+            <a:ext cx="1417320" cy="502920"/>
+          </a:xfrm>
+          <a:prstGeom prst="rect">
+            <a:avLst/>
+          </a:prstGeom>
+          <a:noFill/>
+          <a:ln/>
+        </p:spPr>
+        <p:txBody>
+          <a:bodyPr wrap="square" lIns="0" tIns="0" rIns="0" bIns="0" rtlCol="0" anchor="ctr"/>
+          <a:lstStyle/>
+          <a:p>
+            <a:pPr indent="0" marL="0">
+              <a:buNone/>
+            </a:pPr>
+            <a:r>
+              <a:rPr lang="en-US" sz="1300" b="1" dirty="0">
+                <a:solidFill>
+                  <a:schemeClr val="tx1"/>
+                </a:solidFill>
+              </a:rPr>
+              <a:t>Label</a:t>
+            </a:r>
+            <a:endParaRPr lang="en-US" sz="1300" dirty="0"/>
+          </a:p>
+        </p:txBody>
+      </p:sp>
+      <p:sp>
+        <p:nvSpPr>
+          <p:cNvPr id="6" name="grid-0-1"/>
+          <p:cNvSpPr/>
+          <p:nvPr/>
+        </p:nvSpPr>
+        <p:spPr>
+          <a:xfrm>
+            <a:off x="2194560" y="2057400"/>
+            <a:ext cx="1600200" cy="502920"/>
+          </a:xfrm>
+          <a:prstGeom prst="roundRect">
+            <a:avLst>
+              <a:gd name="adj" fmla="val 10909"/>
+            </a:avLst>
+          </a:prstGeom>
+          <a:solidFill>
+            <a:schemeClr val="bg1"/>
+          </a:solidFill>
+          <a:ln w="9525">
+            <a:solidFill>
+              <a:schemeClr val="accent3"/>
+            </a:solidFill>
+            <a:prstDash val="solid"/>
+          </a:ln>
+        </p:spPr>
+      </p:sp>
+      <p:sp>
+        <p:nvSpPr>
+          <p:cNvPr id="7" name="grid-0-1-t"/>
+          <p:cNvSpPr txBox="1"/>
+          <p:nvPr/>
+        </p:nvSpPr>
+        <p:spPr>
+          <a:xfrm>
+            <a:off x="2304288" y="2057400"/>
+            <a:ext cx="1417320" cy="502920"/>
+          </a:xfrm>
+          <a:prstGeom prst="rect">
+            <a:avLst/>
+          </a:prstGeom>
+          <a:noFill/>
+          <a:ln/>
+        </p:spPr>
+        <p:txBody>
+          <a:bodyPr wrap="square" lIns="0" tIns="0" rIns="0" bIns="0" rtlCol="0" anchor="ctr"/>
+          <a:lstStyle/>
+          <a:p>
+            <a:pPr indent="0" marL="0">
+              <a:buNone/>
+            </a:pPr>
+            <a:r>
+              <a:rPr lang="en-US" sz="1300" dirty="0">
+                <a:solidFill>
+                  <a:schemeClr val="tx1"/>
+                </a:solidFill>
+              </a:rPr>
+              <a:t>Value</a:t>
+            </a:r>
+            <a:endParaRPr lang="en-US" sz="1300" dirty="0"/>
+          </a:p>
+        </p:txBody>
+      </p:sp>
+      <p:sp>
+        <p:nvSpPr>
+          <p:cNvPr id="8" name="grid-0-2"/>
+          <p:cNvSpPr/>
+          <p:nvPr/>
+        </p:nvSpPr>
+        <p:spPr>
+          <a:xfrm>
+            <a:off x="3840480" y="2057400"/>
+            <a:ext cx="1600200" cy="502920"/>
+          </a:xfrm>
+          <a:prstGeom prst="roundRect">
+            <a:avLst>
+              <a:gd name="adj" fmla="val 10909"/>
+            </a:avLst>
+          </a:prstGeom>
+          <a:solidFill>
+            <a:schemeClr val="bg2"/>
+          </a:solidFill>
+          <a:ln w="9525">
+            <a:solidFill>
+              <a:schemeClr val="accent3"/>
+            </a:solidFill>
+            <a:prstDash val="solid"/>
+          </a:ln>
+        </p:spPr>
+      </p:sp>
+      <p:sp>
+        <p:nvSpPr>
+          <p:cNvPr id="9" name="grid-0-2-t"/>
+          <p:cNvSpPr txBox="1"/>
+          <p:nvPr/>
+        </p:nvSpPr>
+        <p:spPr>
+          <a:xfrm>
+            <a:off x="3950208" y="2057400"/>
+            <a:ext cx="1417320" cy="502920"/>
+          </a:xfrm>
+          <a:prstGeom prst="rect">
+            <a:avLst/>
+          </a:prstGeom>
+          <a:noFill/>
+          <a:ln/>
+        </p:spPr>
+        <p:txBody>
+          <a:bodyPr wrap="square" lIns="0" tIns="0" rIns="0" bIns="0" rtlCol="0" anchor="ctr"/>
+          <a:lstStyle/>
+          <a:p>
+            <a:pPr indent="0" marL="0">
+              <a:buNone/>
+            </a:pPr>
+            <a:r>
+              <a:rPr lang="en-US" sz="1300" b="1" dirty="0">
+                <a:solidFill>
+                  <a:schemeClr val="tx1"/>
+                </a:solidFill>
+              </a:rPr>
+              <a:t>Label</a:t>
+            </a:r>
+            <a:endParaRPr lang="en-US" sz="1300" dirty="0"/>
+          </a:p>
+        </p:txBody>
+      </p:sp>
+      <p:sp>
+        <p:nvSpPr>
+          <p:cNvPr id="10" name="grid-0-3"/>
+          <p:cNvSpPr/>
+          <p:nvPr/>
+        </p:nvSpPr>
+        <p:spPr>
+          <a:xfrm>
+            <a:off x="5486400" y="2057400"/>
+            <a:ext cx="1600200" cy="502920"/>
+          </a:xfrm>
+          <a:prstGeom prst="roundRect">
+            <a:avLst>
+              <a:gd name="adj" fmla="val 10909"/>
+            </a:avLst>
+          </a:prstGeom>
+          <a:solidFill>
+            <a:schemeClr val="bg1"/>
+          </a:solidFill>
+          <a:ln w="9525">
+            <a:solidFill>
+              <a:schemeClr val="accent3"/>
+            </a:solidFill>
+            <a:prstDash val="solid"/>
+          </a:ln>
+        </p:spPr>
+      </p:sp>
+      <p:sp>
+        <p:nvSpPr>
+          <p:cNvPr id="11" name="grid-0-3-t"/>
+          <p:cNvSpPr txBox="1"/>
+          <p:nvPr/>
+        </p:nvSpPr>
+        <p:spPr>
+          <a:xfrm>
+            <a:off x="5596128" y="2057400"/>
+            <a:ext cx="1417320" cy="502920"/>
+          </a:xfrm>
+          <a:prstGeom prst="rect">
+            <a:avLst/>
+          </a:prstGeom>
+          <a:noFill/>
+          <a:ln/>
+        </p:spPr>
+        <p:txBody>
+          <a:bodyPr wrap="square" lIns="0" tIns="0" rIns="0" bIns="0" rtlCol="0" anchor="ctr"/>
+          <a:lstStyle/>
+          <a:p>
+            <a:pPr indent="0" marL="0">
+              <a:buNone/>
+            </a:pPr>
+            <a:r>
+              <a:rPr lang="en-US" sz="1300" dirty="0">
+                <a:solidFill>
+                  <a:schemeClr val="tx1"/>
+                </a:solidFill>
+              </a:rPr>
+              <a:t>Value</a:t>
+            </a:r>
+            <a:endParaRPr lang="en-US" sz="1300" dirty="0"/>
+          </a:p>
+        </p:txBody>
+      </p:sp>
+      <p:sp>
+        <p:nvSpPr>
+          <p:cNvPr id="12" name="grid-1-0"/>
+          <p:cNvSpPr/>
+          <p:nvPr/>
+        </p:nvSpPr>
+        <p:spPr>
+          <a:xfrm>
+            <a:off x="548640" y="2670048"/>
+            <a:ext cx="1600200" cy="502920"/>
+          </a:xfrm>
+          <a:prstGeom prst="roundRect">
+            <a:avLst>
+              <a:gd name="adj" fmla="val 10909"/>
+            </a:avLst>
+          </a:prstGeom>
+          <a:solidFill>
+            <a:schemeClr val="bg2"/>
+          </a:solidFill>
+          <a:ln w="9525">
+            <a:solidFill>
+              <a:schemeClr val="accent3"/>
+            </a:solidFill>
+            <a:prstDash val="solid"/>
+          </a:ln>
+        </p:spPr>
+      </p:sp>
+      <p:sp>
+        <p:nvSpPr>
+          <p:cNvPr id="13" name="grid-1-0-t"/>
+          <p:cNvSpPr txBox="1"/>
+          <p:nvPr/>
+        </p:nvSpPr>
+        <p:spPr>
+          <a:xfrm>
+            <a:off x="658368" y="2670048"/>
+            <a:ext cx="1417320" cy="502920"/>
+          </a:xfrm>
+          <a:prstGeom prst="rect">
+            <a:avLst/>
+          </a:prstGeom>
+          <a:noFill/>
+          <a:ln/>
+        </p:spPr>
+        <p:txBody>
+          <a:bodyPr wrap="square" lIns="0" tIns="0" rIns="0" bIns="0" rtlCol="0" anchor="ctr"/>
+          <a:lstStyle/>
+          <a:p>
+            <a:pPr indent="0" marL="0">
+              <a:buNone/>
+            </a:pPr>
+            <a:r>
+              <a:rPr lang="en-US" sz="1300" b="1" dirty="0">
+                <a:solidFill>
+                  <a:schemeClr val="tx1"/>
+                </a:solidFill>
+              </a:rPr>
+              <a:t>Label</a:t>
+            </a:r>
+            <a:endParaRPr lang="en-US" sz="1300" dirty="0"/>
+          </a:p>
+        </p:txBody>
+      </p:sp>
+      <p:sp>
+        <p:nvSpPr>
+          <p:cNvPr id="14" name="grid-1-1"/>
+          <p:cNvSpPr/>
+          <p:nvPr/>
+        </p:nvSpPr>
+        <p:spPr>
+          <a:xfrm>
+            <a:off x="2194560" y="2670048"/>
+            <a:ext cx="1600200" cy="502920"/>
+          </a:xfrm>
+          <a:prstGeom prst="roundRect">
+            <a:avLst>
+              <a:gd name="adj" fmla="val 10909"/>
+            </a:avLst>
+          </a:prstGeom>
+          <a:solidFill>
+            <a:schemeClr val="bg1"/>
+          </a:solidFill>
+          <a:ln w="9525">
+            <a:solidFill>
+              <a:schemeClr val="accent3"/>
+            </a:solidFill>
+            <a:prstDash val="solid"/>
+          </a:ln>
+        </p:spPr>
+      </p:sp>
+      <p:sp>
+        <p:nvSpPr>
+          <p:cNvPr id="15" name="grid-1-1-t"/>
+          <p:cNvSpPr txBox="1"/>
+          <p:nvPr/>
+        </p:nvSpPr>
+        <p:spPr>
+          <a:xfrm>
+            <a:off x="2304288" y="2670048"/>
+            <a:ext cx="1417320" cy="502920"/>
+          </a:xfrm>
+          <a:prstGeom prst="rect">
+            <a:avLst/>
+          </a:prstGeom>
+          <a:noFill/>
+          <a:ln/>
+        </p:spPr>
+        <p:txBody>
+          <a:bodyPr wrap="square" lIns="0" tIns="0" rIns="0" bIns="0" rtlCol="0" anchor="ctr"/>
+          <a:lstStyle/>
+          <a:p>
+            <a:pPr indent="0" marL="0">
+              <a:buNone/>
+            </a:pPr>
+            <a:r>
+              <a:rPr lang="en-US" sz="1300" dirty="0">
+                <a:solidFill>
+                  <a:schemeClr val="tx1"/>
+                </a:solidFill>
+              </a:rPr>
+              <a:t>Value</a:t>
+            </a:r>
+            <a:endParaRPr lang="en-US" sz="1300" dirty="0"/>
+          </a:p>
+        </p:txBody>
+      </p:sp>
+      <p:sp>
+        <p:nvSpPr>
+          <p:cNvPr id="16" name="grid-1-2"/>
+          <p:cNvSpPr/>
+          <p:nvPr/>
+        </p:nvSpPr>
+        <p:spPr>
+          <a:xfrm>
+            <a:off x="3840480" y="2670048"/>
+            <a:ext cx="1600200" cy="502920"/>
+          </a:xfrm>
+          <a:prstGeom prst="roundRect">
+            <a:avLst>
+              <a:gd name="adj" fmla="val 10909"/>
+            </a:avLst>
+          </a:prstGeom>
+          <a:solidFill>
+            <a:schemeClr val="bg2"/>
+          </a:solidFill>
+          <a:ln w="9525">
+            <a:solidFill>
+              <a:schemeClr val="accent3"/>
+            </a:solidFill>
+            <a:prstDash val="solid"/>
+          </a:ln>
+        </p:spPr>
+      </p:sp>
+      <p:sp>
+        <p:nvSpPr>
+          <p:cNvPr id="17" name="grid-1-2-t"/>
+          <p:cNvSpPr txBox="1"/>
+          <p:nvPr/>
+        </p:nvSpPr>
+        <p:spPr>
+          <a:xfrm>
+            <a:off x="3950208" y="2670048"/>
+            <a:ext cx="1417320" cy="502920"/>
+          </a:xfrm>
+          <a:prstGeom prst="rect">
+            <a:avLst/>
+          </a:prstGeom>
+          <a:noFill/>
+          <a:ln/>
+        </p:spPr>
+        <p:txBody>
+          <a:bodyPr wrap="square" lIns="0" tIns="0" rIns="0" bIns="0" rtlCol="0" anchor="ctr"/>
+          <a:lstStyle/>
+          <a:p>
+            <a:pPr indent="0" marL="0">
+              <a:buNone/>
+            </a:pPr>
+            <a:r>
+              <a:rPr lang="en-US" sz="1300" b="1" dirty="0">
+                <a:solidFill>
+                  <a:schemeClr val="tx1"/>
+                </a:solidFill>
+              </a:rPr>
+              <a:t>Label</a:t>
+            </a:r>
+            <a:endParaRPr lang="en-US" sz="1300" dirty="0"/>
+          </a:p>
+        </p:txBody>
+      </p:sp>
+      <p:sp>
+        <p:nvSpPr>
+          <p:cNvPr id="18" name="grid-1-3"/>
+          <p:cNvSpPr/>
+          <p:nvPr/>
+        </p:nvSpPr>
+        <p:spPr>
+          <a:xfrm>
+            <a:off x="5486400" y="2670048"/>
+            <a:ext cx="1600200" cy="502920"/>
+          </a:xfrm>
+          <a:prstGeom prst="roundRect">
+            <a:avLst>
+              <a:gd name="adj" fmla="val 10909"/>
+            </a:avLst>
+          </a:prstGeom>
+          <a:solidFill>
+            <a:schemeClr val="bg1"/>
+          </a:solidFill>
+          <a:ln w="9525">
+            <a:solidFill>
+              <a:schemeClr val="accent3"/>
+            </a:solidFill>
+            <a:prstDash val="solid"/>
+          </a:ln>
+        </p:spPr>
+      </p:sp>
+      <p:sp>
+        <p:nvSpPr>
+          <p:cNvPr id="19" name="grid-1-3-t"/>
+          <p:cNvSpPr txBox="1"/>
+          <p:nvPr/>
+        </p:nvSpPr>
+        <p:spPr>
+          <a:xfrm>
+            <a:off x="5596128" y="2670048"/>
+            <a:ext cx="1417320" cy="502920"/>
+          </a:xfrm>
+          <a:prstGeom prst="rect">
+            <a:avLst/>
+          </a:prstGeom>
+          <a:noFill/>
+          <a:ln/>
+        </p:spPr>
+        <p:txBody>
+          <a:bodyPr wrap="square" lIns="0" tIns="0" rIns="0" bIns="0" rtlCol="0" anchor="ctr"/>
+          <a:lstStyle/>
+          <a:p>
+            <a:pPr indent="0" marL="0">
+              <a:buNone/>
+            </a:pPr>
+            <a:r>
+              <a:rPr lang="en-US" sz="1300" dirty="0">
+                <a:solidFill>
+                  <a:schemeClr val="tx1"/>
+                </a:solidFill>
+              </a:rPr>
+              <a:t>Value</a:t>
+            </a:r>
+            <a:endParaRPr lang="en-US" sz="1300" dirty="0"/>
+          </a:p>
+        </p:txBody>
+      </p:sp>
+      <p:sp>
+        <p:nvSpPr>
+          <p:cNvPr id="20" name="grid-2-0"/>
+          <p:cNvSpPr/>
+          <p:nvPr/>
+        </p:nvSpPr>
+        <p:spPr>
+          <a:xfrm>
+            <a:off x="548640" y="3282696"/>
+            <a:ext cx="1600200" cy="502920"/>
+          </a:xfrm>
+          <a:prstGeom prst="roundRect">
+            <a:avLst>
+              <a:gd name="adj" fmla="val 10909"/>
+            </a:avLst>
+          </a:prstGeom>
+          <a:solidFill>
+            <a:schemeClr val="bg2"/>
+          </a:solidFill>
+          <a:ln w="9525">
+            <a:solidFill>
+              <a:schemeClr val="accent3"/>
+            </a:solidFill>
+            <a:prstDash val="solid"/>
+          </a:ln>
+        </p:spPr>
+      </p:sp>
+      <p:sp>
+        <p:nvSpPr>
+          <p:cNvPr id="21" name="grid-2-0-t"/>
+          <p:cNvSpPr txBox="1"/>
+          <p:nvPr/>
+        </p:nvSpPr>
+        <p:spPr>
+          <a:xfrm>
+            <a:off x="658368" y="3282696"/>
+            <a:ext cx="1417320" cy="502920"/>
+          </a:xfrm>
+          <a:prstGeom prst="rect">
+            <a:avLst/>
+          </a:prstGeom>
+          <a:noFill/>
+          <a:ln/>
+        </p:spPr>
+        <p:txBody>
+          <a:bodyPr wrap="square" lIns="0" tIns="0" rIns="0" bIns="0" rtlCol="0" anchor="ctr"/>
+          <a:lstStyle/>
+          <a:p>
+            <a:pPr indent="0" marL="0">
+              <a:buNone/>
+            </a:pPr>
+            <a:r>
+              <a:rPr lang="en-US" sz="1300" b="1" dirty="0">
+                <a:solidFill>
+                  <a:schemeClr val="tx1"/>
+                </a:solidFill>
+              </a:rPr>
+              <a:t>Notes</a:t>
+            </a:r>
+            <a:endParaRPr lang="en-US" sz="1300" dirty="0"/>
+          </a:p>
+        </p:txBody>
+      </p:sp>
+      <p:sp>
+        <p:nvSpPr>
+          <p:cNvPr id="22" name="grid-2-1"/>
+          <p:cNvSpPr/>
+          <p:nvPr/>
+        </p:nvSpPr>
+        <p:spPr>
+          <a:xfrm>
+            <a:off x="2194560" y="3282696"/>
+            <a:ext cx="4937760" cy="502920"/>
+          </a:xfrm>
+          <a:prstGeom prst="roundRect">
+            <a:avLst>
+              <a:gd name="adj" fmla="val 10909"/>
+            </a:avLst>
+          </a:prstGeom>
+          <a:solidFill>
+            <a:schemeClr val="bg1"/>
+          </a:solidFill>
+          <a:ln w="9525">
+            <a:solidFill>
+              <a:schemeClr val="accent3"/>
+            </a:solidFill>
+            <a:prstDash val="solid"/>
+          </a:ln>
+        </p:spPr>
+      </p:sp>
+      <p:sp>
+        <p:nvSpPr>
+          <p:cNvPr id="23" name="grid-2-1-t"/>
+          <p:cNvSpPr txBox="1"/>
+          <p:nvPr/>
+        </p:nvSpPr>
+        <p:spPr>
+          <a:xfrm>
+            <a:off x="2304288" y="3282696"/>
+            <a:ext cx="4754880" cy="502920"/>
+          </a:xfrm>
+          <a:prstGeom prst="rect">
+            <a:avLst/>
+          </a:prstGeom>
+          <a:noFill/>
+          <a:ln/>
+        </p:spPr>
+        <p:txBody>
+          <a:bodyPr wrap="square" lIns="0" tIns="0" rIns="0" bIns="0" rtlCol="0" anchor="ctr"/>
+          <a:lstStyle/>
+          <a:p>
+            <a:pPr indent="0" marL="0">
+              <a:buNone/>
+            </a:pPr>
+            <a:r>
+              <a:rPr lang="en-US" sz="1300" dirty="0">
+                <a:solidFill>
+                  <a:schemeClr val="tx1"/>
+                </a:solidFill>
+              </a:rPr>
+              <a:t>Long text may span three columns</a:t>
+            </a:r>
+            <a:endParaRPr lang="en-US" sz="1300" dirty="0"/>
+          </a:p>
+        </p:txBody>
+      </p:sp>
+      <p:sp>
+        <p:nvSpPr>
+          <p:cNvPr id="24" name="detail-rules"/>
+          <p:cNvSpPr txBox="1"/>
+          <p:nvPr/>
+        </p:nvSpPr>
+        <p:spPr>
+          <a:xfrm>
+            <a:off x="548640" y="4114800"/>
+            <a:ext cx="6675120" cy="2011680"/>
+          </a:xfrm>
+          <a:prstGeom prst="rect">
+            <a:avLst/>
+          </a:prstGeom>
+          <a:noFill/>
+          <a:ln/>
+        </p:spPr>
+        <p:txBody>
+          <a:bodyPr wrap="square" lIns="0" tIns="0" rIns="0" bIns="0" rtlCol="0" anchor="t"/>
+          <a:lstStyle/>
+          <a:p>
+            <a:pPr marL="342900" indent="-342900">
+              <a:spcAft>
+                <a:spcPts val="800"/>
+              </a:spcAft>
+              <a:buSzPct val="100000"/>
+              <a:buChar char="•"/>
+            </a:pPr>
+            <a:r>
+              <a:rPr lang="en-US" sz="1600" dirty="0">
+                <a:solidFill>
+                  <a:schemeClr val="tx1"/>
+                </a:solidFill>
+              </a:rPr>
+              <a:t>Section title, then a thin separator line between sections</a:t>
+            </a:r>
+            <a:endParaRPr lang="en-US" sz="1600" dirty="0"/>
+          </a:p>
+          <a:p>
+            <a:pPr marL="342900" indent="-342900">
+              <a:spcAft>
+                <a:spcPts val="800"/>
+              </a:spcAft>
+              <a:buSzPct val="100000"/>
+              <a:buChar char="•"/>
+            </a:pPr>
+            <a:r>
+              <a:rPr lang="en-US" sz="1600" dirty="0">
+                <a:solidFill>
+                  <a:schemeClr val="tx1"/>
+                </a:solidFill>
+              </a:rPr>
+              <a:t>Actions at the top of the section, aligned to the reading start</a:t>
+            </a:r>
+            <a:endParaRPr lang="en-US" sz="1600" dirty="0"/>
+          </a:p>
+          <a:p>
+            <a:pPr marL="342900" indent="-342900">
+              <a:spcAft>
+                <a:spcPts val="800"/>
+              </a:spcAft>
+              <a:buSzPct val="100000"/>
+              <a:buChar char="•"/>
+            </a:pPr>
+            <a:r>
+              <a:rPr lang="en-US" sz="1600" dirty="0">
+                <a:solidFill>
+                  <a:schemeClr val="tx1"/>
+                </a:solidFill>
+              </a:rPr>
+              <a:t>Downloads always use the attachment chips component</a:t>
+            </a:r>
+            <a:endParaRPr lang="en-US" sz="1600" dirty="0"/>
+          </a:p>
+          <a:p>
+            <a:pPr marL="342900" indent="-342900">
+              <a:spcAft>
+                <a:spcPts val="800"/>
+              </a:spcAft>
+              <a:buSzPct val="100000"/>
+              <a:buChar char="•"/>
+            </a:pPr>
+            <a:r>
+              <a:rPr lang="en-US" sz="1600" dirty="0">
+                <a:solidFill>
+                  <a:schemeClr val="tx1"/>
+                </a:solidFill>
+              </a:rPr>
+              <a:t>Every page must work at 320 px wide</a:t>
+            </a:r>
+            <a:endParaRPr lang="en-US" sz="1600" dirty="0"/>
+          </a:p>
+        </p:txBody>
+      </p:sp>
+      <p:sp>
+        <p:nvSpPr>
+          <p:cNvPr id="25" name="copy-card"/>
+          <p:cNvSpPr/>
+          <p:nvPr/>
+        </p:nvSpPr>
+        <p:spPr>
+          <a:xfrm>
+            <a:off x="7680960" y="1463040"/>
+            <a:ext cx="3931920" cy="3108960"/>
+          </a:xfrm>
+          <a:prstGeom prst="roundRect">
+            <a:avLst>
+              <a:gd name="adj" fmla="val 3529"/>
+            </a:avLst>
+          </a:prstGeom>
+          <a:solidFill>
+            <a:schemeClr val="bg2"/>
+          </a:solidFill>
+          <a:ln w="12700">
+            <a:solidFill>
+              <a:schemeClr val="bg2"/>
+            </a:solidFill>
+            <a:prstDash val="solid"/>
+          </a:ln>
+        </p:spPr>
+      </p:sp>
+      <p:sp>
+        <p:nvSpPr>
+          <p:cNvPr id="26" name="copy-badge"/>
+          <p:cNvSpPr/>
+          <p:nvPr/>
+        </p:nvSpPr>
+        <p:spPr>
+          <a:xfrm>
+            <a:off x="7955280" y="1737360"/>
+            <a:ext cx="502920" cy="502920"/>
+          </a:xfrm>
+          <a:prstGeom prst="ellipse">
+            <a:avLst/>
+          </a:prstGeom>
+          <a:solidFill>
+            <a:schemeClr val="accent2"/>
+          </a:solidFill>
+          <a:ln w="12700">
+            <a:solidFill>
+              <a:schemeClr val="accent2"/>
+            </a:solidFill>
+            <a:prstDash val="solid"/>
+          </a:ln>
+        </p:spPr>
+      </p:sp>
+      <p:sp>
+        <p:nvSpPr>
+          <p:cNvPr id="27" name="copy-badge-text"/>
+          <p:cNvSpPr txBox="1"/>
+          <p:nvPr/>
+        </p:nvSpPr>
+        <p:spPr>
+          <a:xfrm>
+            <a:off x="7955280" y="1737360"/>
+            <a:ext cx="502920" cy="502920"/>
+          </a:xfrm>
+          <a:prstGeom prst="rect">
+            <a:avLst/>
+          </a:prstGeom>
+          <a:noFill/>
+          <a:ln/>
+        </p:spPr>
+        <p:txBody>
+          <a:bodyPr wrap="square" lIns="0" tIns="0" rIns="0" bIns="0" rtlCol="0" anchor="ctr"/>
+          <a:lstStyle/>
+          <a:p>
+            <a:pPr algn="ctr" indent="0" marL="0">
+              <a:buNone/>
+            </a:pPr>
+            <a:r>
+              <a:rPr lang="en-US" sz="1600" b="1" dirty="0">
+                <a:solidFill>
+                  <a:schemeClr val="bg1"/>
+                </a:solidFill>
+              </a:rPr>
+              <a:t>!</a:t>
+            </a:r>
+            <a:endParaRPr lang="en-US" sz="1600" dirty="0"/>
+          </a:p>
+        </p:txBody>
+      </p:sp>
+      <p:sp>
+        <p:nvSpPr>
+          <p:cNvPr id="28" name="copy-title"/>
+          <p:cNvSpPr txBox="1"/>
+          <p:nvPr/>
+        </p:nvSpPr>
+        <p:spPr>
+          <a:xfrm>
+            <a:off x="8641080" y="1737360"/>
+            <a:ext cx="2743200" cy="502920"/>
+          </a:xfrm>
+          <a:prstGeom prst="rect">
+            <a:avLst/>
+          </a:prstGeom>
+          <a:noFill/>
+          <a:ln/>
+        </p:spPr>
+        <p:txBody>
+          <a:bodyPr wrap="square" lIns="0" tIns="0" rIns="0" bIns="0" rtlCol="0" anchor="ctr"/>
+          <a:lstStyle/>
+          <a:p>
+            <a:pPr indent="0" marL="0">
+              <a:buNone/>
+            </a:pPr>
+            <a:r>
+              <a:rPr lang="en-US" sz="1800" b="1" dirty="0">
+                <a:solidFill>
+                  <a:schemeClr val="tx1"/>
+                </a:solidFill>
+              </a:rPr>
+              <a:t>Copy rules</a:t>
+            </a:r>
+            <a:endParaRPr lang="en-US" sz="1800" dirty="0"/>
+          </a:p>
+        </p:txBody>
+      </p:sp>
+      <p:sp>
+        <p:nvSpPr>
+          <p:cNvPr id="29" name="copy-body"/>
+          <p:cNvSpPr txBox="1"/>
+          <p:nvPr/>
+        </p:nvSpPr>
+        <p:spPr>
+          <a:xfrm>
+            <a:off x="7955280" y="2377440"/>
+            <a:ext cx="3429000" cy="2011680"/>
+          </a:xfrm>
+          <a:prstGeom prst="rect">
+            <a:avLst/>
+          </a:prstGeom>
+          <a:noFill/>
+          <a:ln/>
+        </p:spPr>
+        <p:txBody>
+          <a:bodyPr wrap="square" lIns="0" tIns="0" rIns="0" bIns="0" rtlCol="0" anchor="t"/>
+          <a:lstStyle/>
+          <a:p>
+            <a:pPr marL="342900" indent="-342900">
+              <a:spcAft>
+                <a:spcPts val="400"/>
+              </a:spcAft>
+              <a:buSzPct val="100000"/>
+              <a:buChar char="•"/>
+            </a:pPr>
+            <a:r>
+              <a:rPr lang="en-US" sz="1500" dirty="0">
+                <a:solidFill>
+                  <a:schemeClr val="tx1"/>
+                </a:solidFill>
+              </a:rPr>
+              <a:t>No intro or helper paragraphs under titles</a:t>
+            </a:r>
+            <a:endParaRPr lang="en-US" sz="1500" dirty="0"/>
+          </a:p>
+          <a:p>
+            <a:pPr marL="342900" indent="-342900">
+              <a:spcAft>
+                <a:spcPts val="400"/>
+              </a:spcAft>
+              <a:buSzPct val="100000"/>
+              <a:buChar char="•"/>
+            </a:pPr>
+            <a:r>
+              <a:rPr lang="en-US" sz="1500" dirty="0">
+                <a:solidFill>
+                  <a:schemeClr val="tx1"/>
+                </a:solidFill>
+              </a:rPr>
+              <a:t>Only add the fields, columns and badges that were asked for</a:t>
+            </a:r>
+            <a:endParaRPr lang="en-US" sz="1500" dirty="0"/>
+          </a:p>
+          <a:p>
+            <a:pPr marL="342900" indent="-342900">
+              <a:spcAft>
+                <a:spcPts val="400"/>
+              </a:spcAft>
+              <a:buSzPct val="100000"/>
+              <a:buChar char="•"/>
+            </a:pPr>
+            <a:r>
+              <a:rPr lang="en-US" sz="1500" dirty="0">
+                <a:solidFill>
+                  <a:schemeClr val="tx1"/>
+                </a:solidFill>
+              </a:rPr>
+              <a:t>Phone fields are labelled "Phone number"</a:t>
+            </a:r>
+            <a:endParaRPr lang="en-US" sz="1500" dirty="0"/>
+          </a:p>
+          <a:p>
+            <a:pPr marL="342900" indent="-342900">
+              <a:spcAft>
+                <a:spcPts val="400"/>
+              </a:spcAft>
+              <a:buSzPct val="100000"/>
+              <a:buChar char="•"/>
+            </a:pPr>
+            <a:r>
+              <a:rPr lang="en-US" sz="1500" dirty="0">
+                <a:solidFill>
+                  <a:schemeClr val="tx1"/>
+                </a:solidFill>
+              </a:rPr>
+              <a:t>Empty states and errors are fine</a:t>
+            </a:r>
+            <a:endParaRPr lang="en-US" sz="1500" dirty="0"/>
+          </a:p>
+        </p:txBody>
+      </p:sp>
+      <p:sp>
+        <p:nvSpPr>
+          <p:cNvPr id="25" name="Slide Number Placeholder 0"/>
+          <p:cNvSpPr>
+            <a:spLocks noGrp="1"/>
+          </p:cNvSpPr>
+          <p:nvPr>
+            <p:ph type="sldNum" sz="quarter" idx="4294967295"/>
+          </p:nvPr>
+        </p:nvSpPr>
+        <p:spPr>
+          <a:xfrm>
+            <a:off x="11155680" y="6400800"/>
+            <a:ext cx="457200" cy="274320"/>
+          </a:xfrm>
+          <a:prstGeom prst="rect">
+            <a:avLst/>
+          </a:prstGeom>
+          <a:extLst>
+            <a:ext uri="{C572A759-6A51-4108-AA02-DFA0A04FC94B}">
+              <ma14:wrappingTextBoxFlag xmlns:ma14="http://schemas.microsoft.com/office/mac/drawingml/2011/main" val="0"/>
+            </a:ext>
+          </a:extLst>
+        </p:spPr>
+        <p:txBody>
+          <a:bodyPr/>
+          <a:lstStyle>
+            <a:lvl1pPr>
+              <a:defRPr sz="1000">
+                <a:solidFill>
+                  <a:schemeClr val="accent6"/>
+                </a:solidFill>
+              </a:defRPr>
+            </a:lvl1pPr>
+          </a:lstStyle>
+          <a:p>
+            <a:pPr algn="r"/>
+            <a:fld id="{F7021451-1387-4CA6-816F-3879F97B5CBC}" type="slidenum">
+              <a:rPr b="0" lang="en-US"/>
+              <a:t>12</a:t>
+            </a:fld>
+            <a:endParaRPr lang="en-US"/>
+          </a:p>
+        </p:txBody>
+      </p:sp>
+    </p:spTree>
+  </p:cSld>
+  <p:clrMapOvr>
+    <a:masterClrMapping/>
+  </p:clrMapOvr>
+</p:sld>
+</file>
+
+<file path=ppt/slides/slide13.xml><?xml version="1.0" encoding="utf-8"?>
+<p:sld xmlns:a="http://schemas.openxmlformats.org/drawingml/2006/main" xmlns:r="http://schemas.openxmlformats.org/officeDocument/2006/relationships" xmlns:p="http://schemas.openxmlformats.org/presentationml/2006/main">
+  <p:cSld name="Slide 13">
+    <p:spTree>
+      <p:nvGrpSpPr>
+        <p:cNvPr id="1" name=""/>
+        <p:cNvGrpSpPr/>
+        <p:nvPr/>
+      </p:nvGrpSpPr>
+      <p:grpSpPr>
+        <a:xfrm>
+          <a:off x="0" y="0"/>
+          <a:ext cx="0" cy="0"/>
+          <a:chOff x="0" y="0"/>
+          <a:chExt cx="0" cy="0"/>
+        </a:xfrm>
+      </p:grpSpPr>
+      <p:sp>
+        <p:nvSpPr>
+          <p:cNvPr id="2" name="Text 0"/>
+          <p:cNvSpPr/>
+          <p:nvPr>
+            <p:ph idx="100" type="title" hasCustomPrompt="1"/>
+          </p:nvPr>
+        </p:nvSpPr>
+        <p:spPr>
+          <a:xfrm>
+            <a:off x="548640" y="365760"/>
+            <a:ext cx="11064240" cy="822960"/>
+          </a:xfrm>
+          <a:prstGeom prst="rect">
+            <a:avLst/>
+          </a:prstGeom>
+          <a:noFill/>
+          <a:ln/>
+        </p:spPr>
+        <p:txBody>
+          <a:bodyPr wrap="square" lIns="0" tIns="0" rIns="0" bIns="0" rtlCol="0" anchor="ctr"/>
+          <a:lstStyle/>
+          <a:p>
+            <a:pPr algn="l" indent="0" marL="0">
+              <a:buNone/>
+            </a:pPr>
+            <a:r>
+              <a:rPr lang="en-US" sz="3600" b="1" dirty="0">
+                <a:solidFill>
+                  <a:schemeClr val="tx2"/>
+                </a:solidFill>
+              </a:rPr>
+              <a:t>Adding a new page: the checklist</a:t>
+            </a:r>
+            <a:endParaRPr lang="en-US" sz="3600" dirty="0"/>
+          </a:p>
+        </p:txBody>
+      </p:sp>
+      <p:sp>
+        <p:nvSpPr>
+          <p:cNvPr id="3" name="chk-0-badge"/>
+          <p:cNvSpPr/>
+          <p:nvPr/>
+        </p:nvSpPr>
+        <p:spPr>
+          <a:xfrm>
+            <a:off x="548640" y="1572768"/>
+            <a:ext cx="502920" cy="502920"/>
+          </a:xfrm>
+          <a:prstGeom prst="ellipse">
+            <a:avLst/>
+          </a:prstGeom>
+          <a:solidFill>
+            <a:schemeClr val="tx2"/>
+          </a:solidFill>
+          <a:ln w="12700">
+            <a:solidFill>
+              <a:schemeClr val="tx2"/>
+            </a:solidFill>
+            <a:prstDash val="solid"/>
+          </a:ln>
+        </p:spPr>
+      </p:sp>
+      <p:sp>
+        <p:nvSpPr>
+          <p:cNvPr id="4" name="chk-0-badge-text"/>
+          <p:cNvSpPr txBox="1"/>
+          <p:nvPr/>
+        </p:nvSpPr>
+        <p:spPr>
+          <a:xfrm>
+            <a:off x="548640" y="1572768"/>
+            <a:ext cx="502920" cy="502920"/>
+          </a:xfrm>
+          <a:prstGeom prst="rect">
+            <a:avLst/>
+          </a:prstGeom>
+          <a:noFill/>
+          <a:ln/>
+        </p:spPr>
+        <p:txBody>
+          <a:bodyPr wrap="square" lIns="0" tIns="0" rIns="0" bIns="0" rtlCol="0" anchor="ctr"/>
+          <a:lstStyle/>
+          <a:p>
+            <a:pPr algn="ctr" indent="0" marL="0">
+              <a:buNone/>
+            </a:pPr>
+            <a:r>
+              <a:rPr lang="en-US" sz="1600" b="1" dirty="0">
+                <a:solidFill>
+                  <a:schemeClr val="bg1"/>
+                </a:solidFill>
+              </a:rPr>
+              <a:t>1</a:t>
+            </a:r>
+            <a:endParaRPr lang="en-US" sz="1600" dirty="0"/>
+          </a:p>
+        </p:txBody>
+      </p:sp>
+      <p:sp>
+        <p:nvSpPr>
+          <p:cNvPr id="5" name="chk-0-t"/>
+          <p:cNvSpPr txBox="1"/>
+          <p:nvPr/>
+        </p:nvSpPr>
+        <p:spPr>
+          <a:xfrm>
+            <a:off x="1280160" y="1463040"/>
+            <a:ext cx="4663440" cy="731520"/>
+          </a:xfrm>
+          <a:prstGeom prst="rect">
+            <a:avLst/>
+          </a:prstGeom>
+          <a:noFill/>
+          <a:ln/>
+        </p:spPr>
+        <p:txBody>
+          <a:bodyPr wrap="square" lIns="0" tIns="0" rIns="0" bIns="0" rtlCol="0" anchor="ctr"/>
+          <a:lstStyle/>
+          <a:p>
+            <a:pPr indent="0" marL="0">
+              <a:buNone/>
+            </a:pPr>
+            <a:r>
+              <a:rPr lang="en-US" sz="1800" dirty="0">
+                <a:solidFill>
+                  <a:schemeClr val="tx1"/>
+                </a:solidFill>
+              </a:rPr>
+              <a:t>Route in app.routes.ts and sidebar link</a:t>
+            </a:r>
+            <a:endParaRPr lang="en-US" sz="1800" dirty="0"/>
+          </a:p>
+        </p:txBody>
+      </p:sp>
+      <p:sp>
+        <p:nvSpPr>
+          <p:cNvPr id="6" name="chk-1-badge"/>
+          <p:cNvSpPr/>
+          <p:nvPr/>
+        </p:nvSpPr>
+        <p:spPr>
+          <a:xfrm>
+            <a:off x="548640" y="2670048"/>
+            <a:ext cx="502920" cy="502920"/>
+          </a:xfrm>
+          <a:prstGeom prst="ellipse">
+            <a:avLst/>
+          </a:prstGeom>
+          <a:solidFill>
+            <a:schemeClr val="tx2"/>
+          </a:solidFill>
+          <a:ln w="12700">
+            <a:solidFill>
+              <a:schemeClr val="tx2"/>
+            </a:solidFill>
+            <a:prstDash val="solid"/>
+          </a:ln>
+        </p:spPr>
+      </p:sp>
+      <p:sp>
+        <p:nvSpPr>
+          <p:cNvPr id="7" name="chk-1-badge-text"/>
+          <p:cNvSpPr txBox="1"/>
+          <p:nvPr/>
+        </p:nvSpPr>
+        <p:spPr>
+          <a:xfrm>
+            <a:off x="548640" y="2670048"/>
+            <a:ext cx="502920" cy="502920"/>
+          </a:xfrm>
+          <a:prstGeom prst="rect">
+            <a:avLst/>
+          </a:prstGeom>
+          <a:noFill/>
+          <a:ln/>
+        </p:spPr>
+        <p:txBody>
+          <a:bodyPr wrap="square" lIns="0" tIns="0" rIns="0" bIns="0" rtlCol="0" anchor="ctr"/>
+          <a:lstStyle/>
+          <a:p>
+            <a:pPr algn="ctr" indent="0" marL="0">
+              <a:buNone/>
+            </a:pPr>
+            <a:r>
+              <a:rPr lang="en-US" sz="1600" b="1" dirty="0">
+                <a:solidFill>
+                  <a:schemeClr val="bg1"/>
+                </a:solidFill>
+              </a:rPr>
+              <a:t>2</a:t>
+            </a:r>
+            <a:endParaRPr lang="en-US" sz="1600" dirty="0"/>
+          </a:p>
+        </p:txBody>
+      </p:sp>
+      <p:sp>
+        <p:nvSpPr>
+          <p:cNvPr id="8" name="chk-1-t"/>
+          <p:cNvSpPr txBox="1"/>
+          <p:nvPr/>
+        </p:nvSpPr>
+        <p:spPr>
+          <a:xfrm>
+            <a:off x="1280160" y="2560320"/>
+            <a:ext cx="4663440" cy="731520"/>
+          </a:xfrm>
+          <a:prstGeom prst="rect">
+            <a:avLst/>
+          </a:prstGeom>
+          <a:noFill/>
+          <a:ln/>
+        </p:spPr>
+        <p:txBody>
+          <a:bodyPr wrap="square" lIns="0" tIns="0" rIns="0" bIns="0" rtlCol="0" anchor="ctr"/>
+          <a:lstStyle/>
+          <a:p>
+            <a:pPr indent="0" marL="0">
+              <a:buNone/>
+            </a:pPr>
+            <a:r>
+              <a:rPr lang="en-US" sz="1800" dirty="0">
+                <a:solidFill>
+                  <a:schemeClr val="tx1"/>
+                </a:solidFill>
+              </a:rPr>
+              <a:t>AppPage seed entry with the same URL</a:t>
+            </a:r>
+            <a:endParaRPr lang="en-US" sz="1800" dirty="0"/>
+          </a:p>
+        </p:txBody>
+      </p:sp>
+      <p:sp>
+        <p:nvSpPr>
+          <p:cNvPr id="9" name="chk-2-badge"/>
+          <p:cNvSpPr/>
+          <p:nvPr/>
+        </p:nvSpPr>
+        <p:spPr>
+          <a:xfrm>
+            <a:off x="548640" y="3767328"/>
+            <a:ext cx="502920" cy="502920"/>
+          </a:xfrm>
+          <a:prstGeom prst="ellipse">
+            <a:avLst/>
+          </a:prstGeom>
+          <a:solidFill>
+            <a:schemeClr val="tx2"/>
+          </a:solidFill>
+          <a:ln w="12700">
+            <a:solidFill>
+              <a:schemeClr val="tx2"/>
+            </a:solidFill>
+            <a:prstDash val="solid"/>
+          </a:ln>
+        </p:spPr>
+      </p:sp>
+      <p:sp>
+        <p:nvSpPr>
+          <p:cNvPr id="10" name="chk-2-badge-text"/>
+          <p:cNvSpPr txBox="1"/>
+          <p:nvPr/>
+        </p:nvSpPr>
+        <p:spPr>
+          <a:xfrm>
+            <a:off x="548640" y="3767328"/>
+            <a:ext cx="502920" cy="502920"/>
+          </a:xfrm>
+          <a:prstGeom prst="rect">
+            <a:avLst/>
+          </a:prstGeom>
+          <a:noFill/>
+          <a:ln/>
+        </p:spPr>
+        <p:txBody>
+          <a:bodyPr wrap="square" lIns="0" tIns="0" rIns="0" bIns="0" rtlCol="0" anchor="ctr"/>
+          <a:lstStyle/>
+          <a:p>
+            <a:pPr algn="ctr" indent="0" marL="0">
+              <a:buNone/>
+            </a:pPr>
+            <a:r>
+              <a:rPr lang="en-US" sz="1600" b="1" dirty="0">
+                <a:solidFill>
+                  <a:schemeClr val="bg1"/>
+                </a:solidFill>
+              </a:rPr>
+              <a:t>3</a:t>
+            </a:r>
+            <a:endParaRPr lang="en-US" sz="1600" dirty="0"/>
+          </a:p>
+        </p:txBody>
+      </p:sp>
+      <p:sp>
+        <p:nvSpPr>
+          <p:cNvPr id="11" name="chk-2-t"/>
+          <p:cNvSpPr txBox="1"/>
+          <p:nvPr/>
+        </p:nvSpPr>
+        <p:spPr>
+          <a:xfrm>
+            <a:off x="1280160" y="3657600"/>
+            <a:ext cx="4663440" cy="731520"/>
+          </a:xfrm>
+          <a:prstGeom prst="rect">
+            <a:avLst/>
+          </a:prstGeom>
+          <a:noFill/>
+          <a:ln/>
+        </p:spPr>
+        <p:txBody>
+          <a:bodyPr wrap="square" lIns="0" tIns="0" rIns="0" bIns="0" rtlCol="0" anchor="ctr"/>
+          <a:lstStyle/>
+          <a:p>
+            <a:pPr indent="0" marL="0">
+              <a:buNone/>
+            </a:pPr>
+            <a:r>
+              <a:rPr lang="en-US" sz="1800" dirty="0">
+                <a:solidFill>
+                  <a:schemeClr val="tx1"/>
+                </a:solidFill>
+              </a:rPr>
+              <a:t>API endpoint + service rule + DTOs</a:t>
+            </a:r>
+            <a:endParaRPr lang="en-US" sz="1800" dirty="0"/>
+          </a:p>
+        </p:txBody>
+      </p:sp>
+      <p:sp>
+        <p:nvSpPr>
+          <p:cNvPr id="12" name="chk-3-badge"/>
+          <p:cNvSpPr/>
+          <p:nvPr/>
+        </p:nvSpPr>
+        <p:spPr>
+          <a:xfrm>
+            <a:off x="548640" y="4864608"/>
+            <a:ext cx="502920" cy="502920"/>
+          </a:xfrm>
+          <a:prstGeom prst="ellipse">
+            <a:avLst/>
+          </a:prstGeom>
+          <a:solidFill>
+            <a:schemeClr val="tx2"/>
+          </a:solidFill>
+          <a:ln w="12700">
+            <a:solidFill>
+              <a:schemeClr val="tx2"/>
+            </a:solidFill>
+            <a:prstDash val="solid"/>
+          </a:ln>
+        </p:spPr>
+      </p:sp>
+      <p:sp>
+        <p:nvSpPr>
+          <p:cNvPr id="13" name="chk-3-badge-text"/>
+          <p:cNvSpPr txBox="1"/>
+          <p:nvPr/>
+        </p:nvSpPr>
+        <p:spPr>
+          <a:xfrm>
+            <a:off x="548640" y="4864608"/>
+            <a:ext cx="502920" cy="502920"/>
+          </a:xfrm>
+          <a:prstGeom prst="rect">
+            <a:avLst/>
+          </a:prstGeom>
+          <a:noFill/>
+          <a:ln/>
+        </p:spPr>
+        <p:txBody>
+          <a:bodyPr wrap="square" lIns="0" tIns="0" rIns="0" bIns="0" rtlCol="0" anchor="ctr"/>
+          <a:lstStyle/>
+          <a:p>
+            <a:pPr algn="ctr" indent="0" marL="0">
+              <a:buNone/>
+            </a:pPr>
+            <a:r>
+              <a:rPr lang="en-US" sz="1600" b="1" dirty="0">
+                <a:solidFill>
+                  <a:schemeClr val="bg1"/>
+                </a:solidFill>
+              </a:rPr>
+              <a:t>4</a:t>
+            </a:r>
+            <a:endParaRPr lang="en-US" sz="1600" dirty="0"/>
+          </a:p>
+        </p:txBody>
+      </p:sp>
+      <p:sp>
+        <p:nvSpPr>
+          <p:cNvPr id="14" name="chk-3-t"/>
+          <p:cNvSpPr txBox="1"/>
+          <p:nvPr/>
+        </p:nvSpPr>
+        <p:spPr>
+          <a:xfrm>
+            <a:off x="1280160" y="4754880"/>
+            <a:ext cx="4663440" cy="731520"/>
+          </a:xfrm>
+          <a:prstGeom prst="rect">
+            <a:avLst/>
+          </a:prstGeom>
+          <a:noFill/>
+          <a:ln/>
+        </p:spPr>
+        <p:txBody>
+          <a:bodyPr wrap="square" lIns="0" tIns="0" rIns="0" bIns="0" rtlCol="0" anchor="ctr"/>
+          <a:lstStyle/>
+          <a:p>
+            <a:pPr indent="0" marL="0">
+              <a:buNone/>
+            </a:pPr>
+            <a:r>
+              <a:rPr lang="en-US" sz="1800" dirty="0">
+                <a:solidFill>
+                  <a:schemeClr val="tx1"/>
+                </a:solidFill>
+              </a:rPr>
+              <a:t>Data service, then NgRx slice if shared</a:t>
+            </a:r>
+            <a:endParaRPr lang="en-US" sz="1800" dirty="0"/>
+          </a:p>
+        </p:txBody>
+      </p:sp>
+      <p:sp>
+        <p:nvSpPr>
+          <p:cNvPr id="15" name="chk-4-badge"/>
+          <p:cNvSpPr/>
+          <p:nvPr/>
+        </p:nvSpPr>
+        <p:spPr>
+          <a:xfrm>
+            <a:off x="6172200" y="1572768"/>
+            <a:ext cx="502920" cy="502920"/>
+          </a:xfrm>
+          <a:prstGeom prst="ellipse">
+            <a:avLst/>
+          </a:prstGeom>
+          <a:solidFill>
+            <a:schemeClr val="tx2"/>
+          </a:solidFill>
+          <a:ln w="12700">
+            <a:solidFill>
+              <a:schemeClr val="tx2"/>
+            </a:solidFill>
+            <a:prstDash val="solid"/>
+          </a:ln>
+        </p:spPr>
+      </p:sp>
+      <p:sp>
+        <p:nvSpPr>
+          <p:cNvPr id="16" name="chk-4-badge-text"/>
+          <p:cNvSpPr txBox="1"/>
+          <p:nvPr/>
+        </p:nvSpPr>
+        <p:spPr>
+          <a:xfrm>
+            <a:off x="6172200" y="1572768"/>
+            <a:ext cx="502920" cy="502920"/>
+          </a:xfrm>
+          <a:prstGeom prst="rect">
+            <a:avLst/>
+          </a:prstGeom>
+          <a:noFill/>
+          <a:ln/>
+        </p:spPr>
+        <p:txBody>
+          <a:bodyPr wrap="square" lIns="0" tIns="0" rIns="0" bIns="0" rtlCol="0" anchor="ctr"/>
+          <a:lstStyle/>
+          <a:p>
+            <a:pPr algn="ctr" indent="0" marL="0">
+              <a:buNone/>
+            </a:pPr>
+            <a:r>
+              <a:rPr lang="en-US" sz="1600" b="1" dirty="0">
+                <a:solidFill>
+                  <a:schemeClr val="bg1"/>
+                </a:solidFill>
+              </a:rPr>
+              <a:t>5</a:t>
+            </a:r>
+            <a:endParaRPr lang="en-US" sz="1600" dirty="0"/>
+          </a:p>
+        </p:txBody>
+      </p:sp>
+      <p:sp>
+        <p:nvSpPr>
+          <p:cNvPr id="17" name="chk-4-t"/>
+          <p:cNvSpPr txBox="1"/>
+          <p:nvPr/>
+        </p:nvSpPr>
+        <p:spPr>
+          <a:xfrm>
+            <a:off x="6903720" y="1463040"/>
+            <a:ext cx="4663440" cy="731520"/>
+          </a:xfrm>
+          <a:prstGeom prst="rect">
+            <a:avLst/>
+          </a:prstGeom>
+          <a:noFill/>
+          <a:ln/>
+        </p:spPr>
+        <p:txBody>
+          <a:bodyPr wrap="square" lIns="0" tIns="0" rIns="0" bIns="0" rtlCol="0" anchor="ctr"/>
+          <a:lstStyle/>
+          <a:p>
+            <a:pPr indent="0" marL="0">
+              <a:buNone/>
+            </a:pPr>
+            <a:r>
+              <a:rPr lang="en-US" sz="1800" dirty="0">
+                <a:solidFill>
+                  <a:schemeClr val="tx1"/>
+                </a:solidFill>
+              </a:rPr>
+              <a:t>Form pipeline, executor, validators</a:t>
+            </a:r>
+            <a:endParaRPr lang="en-US" sz="1800" dirty="0"/>
+          </a:p>
+        </p:txBody>
+      </p:sp>
+      <p:sp>
+        <p:nvSpPr>
+          <p:cNvPr id="18" name="chk-5-badge"/>
+          <p:cNvSpPr/>
+          <p:nvPr/>
+        </p:nvSpPr>
+        <p:spPr>
+          <a:xfrm>
+            <a:off x="6172200" y="2670048"/>
+            <a:ext cx="502920" cy="502920"/>
+          </a:xfrm>
+          <a:prstGeom prst="ellipse">
+            <a:avLst/>
+          </a:prstGeom>
+          <a:solidFill>
+            <a:schemeClr val="tx2"/>
+          </a:solidFill>
+          <a:ln w="12700">
+            <a:solidFill>
+              <a:schemeClr val="tx2"/>
+            </a:solidFill>
+            <a:prstDash val="solid"/>
+          </a:ln>
+        </p:spPr>
+      </p:sp>
+      <p:sp>
+        <p:nvSpPr>
+          <p:cNvPr id="19" name="chk-5-badge-text"/>
+          <p:cNvSpPr txBox="1"/>
+          <p:nvPr/>
+        </p:nvSpPr>
+        <p:spPr>
+          <a:xfrm>
+            <a:off x="6172200" y="2670048"/>
+            <a:ext cx="502920" cy="502920"/>
+          </a:xfrm>
+          <a:prstGeom prst="rect">
+            <a:avLst/>
+          </a:prstGeom>
+          <a:noFill/>
+          <a:ln/>
+        </p:spPr>
+        <p:txBody>
+          <a:bodyPr wrap="square" lIns="0" tIns="0" rIns="0" bIns="0" rtlCol="0" anchor="ctr"/>
+          <a:lstStyle/>
+          <a:p>
+            <a:pPr algn="ctr" indent="0" marL="0">
+              <a:buNone/>
+            </a:pPr>
+            <a:r>
+              <a:rPr lang="en-US" sz="1600" b="1" dirty="0">
+                <a:solidFill>
+                  <a:schemeClr val="bg1"/>
+                </a:solidFill>
+              </a:rPr>
+              <a:t>6</a:t>
+            </a:r>
+            <a:endParaRPr lang="en-US" sz="1600" dirty="0"/>
+          </a:p>
+        </p:txBody>
+      </p:sp>
+      <p:sp>
+        <p:nvSpPr>
+          <p:cNvPr id="20" name="chk-5-t"/>
+          <p:cNvSpPr txBox="1"/>
+          <p:nvPr/>
+        </p:nvSpPr>
+        <p:spPr>
+          <a:xfrm>
+            <a:off x="6903720" y="2560320"/>
+            <a:ext cx="4663440" cy="731520"/>
+          </a:xfrm>
+          <a:prstGeom prst="rect">
+            <a:avLst/>
+          </a:prstGeom>
+          <a:noFill/>
+          <a:ln/>
+        </p:spPr>
+        <p:txBody>
+          <a:bodyPr wrap="square" lIns="0" tIns="0" rIns="0" bIns="0" rtlCol="0" anchor="ctr"/>
+          <a:lstStyle/>
+          <a:p>
+            <a:pPr indent="0" marL="0">
+              <a:buNone/>
+            </a:pPr>
+            <a:r>
+              <a:rPr lang="en-US" sz="1800" dirty="0">
+                <a:solidFill>
+                  <a:schemeClr val="tx1"/>
+                </a:solidFill>
+              </a:rPr>
+              <a:t>English in templates, Arabic in messages.ar.json</a:t>
+            </a:r>
+            <a:endParaRPr lang="en-US" sz="1800" dirty="0"/>
+          </a:p>
+        </p:txBody>
+      </p:sp>
+      <p:sp>
+        <p:nvSpPr>
+          <p:cNvPr id="21" name="chk-6-badge"/>
+          <p:cNvSpPr/>
+          <p:nvPr/>
+        </p:nvSpPr>
+        <p:spPr>
+          <a:xfrm>
+            <a:off x="6172200" y="3767328"/>
+            <a:ext cx="502920" cy="502920"/>
+          </a:xfrm>
+          <a:prstGeom prst="ellipse">
+            <a:avLst/>
+          </a:prstGeom>
+          <a:solidFill>
+            <a:schemeClr val="tx2"/>
+          </a:solidFill>
+          <a:ln w="12700">
+            <a:solidFill>
+              <a:schemeClr val="tx2"/>
+            </a:solidFill>
+            <a:prstDash val="solid"/>
+          </a:ln>
+        </p:spPr>
+      </p:sp>
+      <p:sp>
+        <p:nvSpPr>
+          <p:cNvPr id="22" name="chk-6-badge-text"/>
+          <p:cNvSpPr txBox="1"/>
+          <p:nvPr/>
+        </p:nvSpPr>
+        <p:spPr>
+          <a:xfrm>
+            <a:off x="6172200" y="3767328"/>
+            <a:ext cx="502920" cy="502920"/>
+          </a:xfrm>
+          <a:prstGeom prst="rect">
+            <a:avLst/>
+          </a:prstGeom>
+          <a:noFill/>
+          <a:ln/>
+        </p:spPr>
+        <p:txBody>
+          <a:bodyPr wrap="square" lIns="0" tIns="0" rIns="0" bIns="0" rtlCol="0" anchor="ctr"/>
+          <a:lstStyle/>
+          <a:p>
+            <a:pPr algn="ctr" indent="0" marL="0">
+              <a:buNone/>
+            </a:pPr>
+            <a:r>
+              <a:rPr lang="en-US" sz="1600" b="1" dirty="0">
+                <a:solidFill>
+                  <a:schemeClr val="bg1"/>
+                </a:solidFill>
+              </a:rPr>
+              <a:t>7</a:t>
+            </a:r>
+            <a:endParaRPr lang="en-US" sz="1600" dirty="0"/>
+          </a:p>
+        </p:txBody>
+      </p:sp>
+      <p:sp>
+        <p:nvSpPr>
+          <p:cNvPr id="23" name="chk-6-t"/>
+          <p:cNvSpPr txBox="1"/>
+          <p:nvPr/>
+        </p:nvSpPr>
+        <p:spPr>
+          <a:xfrm>
+            <a:off x="6903720" y="3657600"/>
+            <a:ext cx="4663440" cy="731520"/>
+          </a:xfrm>
+          <a:prstGeom prst="rect">
+            <a:avLst/>
+          </a:prstGeom>
+          <a:noFill/>
+          <a:ln/>
+        </p:spPr>
+        <p:txBody>
+          <a:bodyPr wrap="square" lIns="0" tIns="0" rIns="0" bIns="0" rtlCol="0" anchor="ctr"/>
+          <a:lstStyle/>
+          <a:p>
+            <a:pPr indent="0" marL="0">
+              <a:buNone/>
+            </a:pPr>
+            <a:r>
+              <a:rPr lang="en-US" sz="1800" dirty="0">
+                <a:solidFill>
+                  <a:schemeClr val="tx1"/>
+                </a:solidFill>
+              </a:rPr>
+              <a:t>Mobile layout and RTL checked</a:t>
+            </a:r>
+            <a:endParaRPr lang="en-US" sz="1800" dirty="0"/>
+          </a:p>
+        </p:txBody>
+      </p:sp>
+      <p:sp>
+        <p:nvSpPr>
+          <p:cNvPr id="24" name="chk-7-badge"/>
+          <p:cNvSpPr/>
+          <p:nvPr/>
+        </p:nvSpPr>
+        <p:spPr>
+          <a:xfrm>
+            <a:off x="6172200" y="4864608"/>
+            <a:ext cx="502920" cy="502920"/>
+          </a:xfrm>
+          <a:prstGeom prst="ellipse">
+            <a:avLst/>
+          </a:prstGeom>
+          <a:solidFill>
+            <a:schemeClr val="accent2"/>
+          </a:solidFill>
+          <a:ln w="12700">
+            <a:solidFill>
+              <a:schemeClr val="accent2"/>
+            </a:solidFill>
+            <a:prstDash val="solid"/>
+          </a:ln>
+        </p:spPr>
+      </p:sp>
+      <p:sp>
+        <p:nvSpPr>
+          <p:cNvPr id="25" name="chk-7-badge-text"/>
+          <p:cNvSpPr txBox="1"/>
+          <p:nvPr/>
+        </p:nvSpPr>
+        <p:spPr>
+          <a:xfrm>
+            <a:off x="6172200" y="4864608"/>
+            <a:ext cx="502920" cy="502920"/>
+          </a:xfrm>
+          <a:prstGeom prst="rect">
+            <a:avLst/>
+          </a:prstGeom>
+          <a:noFill/>
+          <a:ln/>
+        </p:spPr>
+        <p:txBody>
+          <a:bodyPr wrap="square" lIns="0" tIns="0" rIns="0" bIns="0" rtlCol="0" anchor="ctr"/>
+          <a:lstStyle/>
+          <a:p>
+            <a:pPr algn="ctr" indent="0" marL="0">
+              <a:buNone/>
+            </a:pPr>
+            <a:r>
+              <a:rPr lang="en-US" sz="1600" b="1" dirty="0">
+                <a:solidFill>
+                  <a:schemeClr val="bg1"/>
+                </a:solidFill>
+              </a:rPr>
+              <a:t>8</a:t>
+            </a:r>
+            <a:endParaRPr lang="en-US" sz="1600" dirty="0"/>
+          </a:p>
+        </p:txBody>
+      </p:sp>
+      <p:sp>
+        <p:nvSpPr>
+          <p:cNvPr id="26" name="chk-7-t"/>
+          <p:cNvSpPr txBox="1"/>
+          <p:nvPr/>
+        </p:nvSpPr>
+        <p:spPr>
+          <a:xfrm>
+            <a:off x="6903720" y="4754880"/>
+            <a:ext cx="4663440" cy="731520"/>
+          </a:xfrm>
+          <a:prstGeom prst="rect">
+            <a:avLst/>
+          </a:prstGeom>
+          <a:noFill/>
+          <a:ln/>
+        </p:spPr>
+        <p:txBody>
+          <a:bodyPr wrap="square" lIns="0" tIns="0" rIns="0" bIns="0" rtlCol="0" anchor="ctr"/>
+          <a:lstStyle/>
+          <a:p>
+            <a:pPr indent="0" marL="0">
+              <a:buNone/>
+            </a:pPr>
+            <a:r>
+              <a:rPr lang="en-US" sz="1800" dirty="0">
+                <a:solidFill>
+                  <a:schemeClr val="tx1"/>
+                </a:solidFill>
+              </a:rPr>
+              <a:t>2–3 tests for the new rule</a:t>
+            </a:r>
+            <a:endParaRPr lang="en-US" sz="1800" dirty="0"/>
+          </a:p>
+        </p:txBody>
+      </p:sp>
+      <p:sp>
+        <p:nvSpPr>
+          <p:cNvPr id="25" name="Slide Number Placeholder 0"/>
+          <p:cNvSpPr>
+            <a:spLocks noGrp="1"/>
+          </p:cNvSpPr>
+          <p:nvPr>
+            <p:ph type="sldNum" sz="quarter" idx="4294967295"/>
+          </p:nvPr>
+        </p:nvSpPr>
+        <p:spPr>
+          <a:xfrm>
+            <a:off x="11155680" y="6400800"/>
+            <a:ext cx="457200" cy="274320"/>
+          </a:xfrm>
+          <a:prstGeom prst="rect">
+            <a:avLst/>
+          </a:prstGeom>
+          <a:extLst>
+            <a:ext uri="{C572A759-6A51-4108-AA02-DFA0A04FC94B}">
+              <ma14:wrappingTextBoxFlag xmlns:ma14="http://schemas.microsoft.com/office/mac/drawingml/2011/main" val="0"/>
+            </a:ext>
+          </a:extLst>
+        </p:spPr>
+        <p:txBody>
+          <a:bodyPr/>
+          <a:lstStyle>
+            <a:lvl1pPr>
+              <a:defRPr sz="1000">
+                <a:solidFill>
+                  <a:schemeClr val="accent6"/>
+                </a:solidFill>
+              </a:defRPr>
+            </a:lvl1pPr>
+          </a:lstStyle>
+          <a:p>
+            <a:pPr algn="r"/>
+            <a:fld id="{F7021451-1387-4CA6-816F-3879F97B5CBC}" type="slidenum">
+              <a:rPr b="0" lang="en-US"/>
+              <a:t>13</a:t>
+            </a:fld>
+            <a:endParaRPr lang="en-US"/>
+          </a:p>
+        </p:txBody>
+      </p:sp>
+    </p:spTree>
+  </p:cSld>
+  <p:clrMapOvr>
+    <a:masterClrMapping/>
+  </p:clrMapOvr>
+</p:sld>
+</file>
+
+<file path=ppt/slides/slide14.xml><?xml version="1.0" encoding="utf-8"?>
+<p:sld xmlns:a="http://schemas.openxmlformats.org/drawingml/2006/main" xmlns:r="http://schemas.openxmlformats.org/officeDocument/2006/relationships" xmlns:p="http://schemas.openxmlformats.org/presentationml/2006/main">
+  <p:cSld name="Slide 14">
+    <p:spTree>
+      <p:nvGrpSpPr>
+        <p:cNvPr id="1" name=""/>
+        <p:cNvGrpSpPr/>
+        <p:nvPr/>
+      </p:nvGrpSpPr>
+      <p:grpSpPr>
+        <a:xfrm>
+          <a:off x="0" y="0"/>
+          <a:ext cx="0" cy="0"/>
+          <a:chOff x="0" y="0"/>
+          <a:chExt cx="0" cy="0"/>
+        </a:xfrm>
+      </p:grpSpPr>
+      <p:sp>
+        <p:nvSpPr>
+          <p:cNvPr id="2" name="Text 0"/>
+          <p:cNvSpPr/>
+          <p:nvPr>
+            <p:ph idx="100" type="title" hasCustomPrompt="1"/>
+          </p:nvPr>
+        </p:nvSpPr>
+        <p:spPr>
+          <a:xfrm>
             <a:off x="548640" y="2103120"/>
             <a:ext cx="10515600" cy="1463040"/>
           </a:xfrm>
@@ -8091,7 +9819,7 @@
                   <a:schemeClr val="tx1"/>
                 </a:solidFill>
               </a:rPr>
-              <a:t>post-job page in the main product. Required fields show * from the validator, never hard-coded.</a:t>
+              <a:t>the UI showcase form (/admin/showcase/new). Required fields show * from the validator, never hard-coded.</a:t>
             </a:r>
             <a:endParaRPr lang="en-US" sz="1600" dirty="0"/>
           </a:p>
@@ -8199,7 +9927,7 @@
                   <a:schemeClr val="tx2"/>
                 </a:solidFill>
               </a:rPr>
-              <a:t>One loading overlay, one error path</a:t>
+              <a:t>What happens when the user clicks Save</a:t>
             </a:r>
             <a:endParaRPr lang="en-US" sz="3600" dirty="0"/>
           </a:p>
@@ -8207,18 +9935,18 @@
       </p:sp>
       <p:sp>
         <p:nvSpPr>
-          <p:cNvPr id="3" name="loading-card"/>
+          <p:cNvPr id="3" name="flow-0-card"/>
           <p:cNvSpPr/>
           <p:nvPr/>
         </p:nvSpPr>
         <p:spPr>
           <a:xfrm>
-            <a:off x="548640" y="1463040"/>
-            <a:ext cx="5394960" cy="3566160"/>
+            <a:off x="548640" y="1417320"/>
+            <a:ext cx="2606040" cy="2606040"/>
           </a:xfrm>
           <a:prstGeom prst="roundRect">
             <a:avLst>
-              <a:gd name="adj" fmla="val 3077"/>
+              <a:gd name="adj" fmla="val 4211"/>
             </a:avLst>
           </a:prstGeom>
           <a:solidFill>
@@ -8234,13 +9962,13 @@
       </p:sp>
       <p:sp>
         <p:nvSpPr>
-          <p:cNvPr id="4" name="loading-badge"/>
+          <p:cNvPr id="4" name="flow-0-badge"/>
           <p:cNvSpPr/>
           <p:nvPr/>
         </p:nvSpPr>
         <p:spPr>
           <a:xfrm>
-            <a:off x="822960" y="1737360"/>
+            <a:off x="822960" y="1691640"/>
             <a:ext cx="502920" cy="502920"/>
           </a:xfrm>
           <a:prstGeom prst="ellipse">
@@ -8259,13 +9987,13 @@
       </p:sp>
       <p:sp>
         <p:nvSpPr>
-          <p:cNvPr id="5" name="loading-badge-text"/>
-          <p:cNvSpPr txBox="1"/>
-          <p:nvPr/>
-        </p:nvSpPr>
-        <p:spPr>
-          <a:xfrm>
-            <a:off x="822960" y="1737360"/>
+          <p:cNvPr id="5" name="flow-0-badge-text"/>
+          <p:cNvSpPr txBox="1"/>
+          <p:nvPr/>
+        </p:nvSpPr>
+        <p:spPr>
+          <a:xfrm>
+            <a:off x="822960" y="1691640"/>
             <a:ext cx="502920" cy="502920"/>
           </a:xfrm>
           <a:prstGeom prst="rect">
@@ -8287,7 +10015,7 @@
                   <a:schemeClr val="bg1"/>
                 </a:solidFill>
               </a:rPr>
-              <a:t>L</a:t>
+              <a:t>1</a:t>
             </a:r>
             <a:endParaRPr lang="en-US" sz="1600" dirty="0"/>
           </a:p>
@@ -8295,14 +10023,14 @@
       </p:sp>
       <p:sp>
         <p:nvSpPr>
-          <p:cNvPr id="6" name="loading-title"/>
-          <p:cNvSpPr txBox="1"/>
-          <p:nvPr/>
-        </p:nvSpPr>
-        <p:spPr>
-          <a:xfrm>
-            <a:off x="1508760" y="1737360"/>
-            <a:ext cx="4206240" cy="502920"/>
+          <p:cNvPr id="6" name="flow-0-title"/>
+          <p:cNvSpPr txBox="1"/>
+          <p:nvPr/>
+        </p:nvSpPr>
+        <p:spPr>
+          <a:xfrm>
+            <a:off x="1508760" y="1691640"/>
+            <a:ext cx="1417320" cy="502920"/>
           </a:xfrm>
           <a:prstGeom prst="rect">
             <a:avLst/>
@@ -8323,7 +10051,7 @@
                   <a:schemeClr val="tx1"/>
                 </a:solidFill>
               </a:rPr>
-              <a:t>Loading (uiAsync)</a:t>
+              <a:t>Touch &amp; validate</a:t>
             </a:r>
             <a:endParaRPr lang="en-US" sz="1800" dirty="0"/>
           </a:p>
@@ -8331,14 +10059,14 @@
       </p:sp>
       <p:sp>
         <p:nvSpPr>
-          <p:cNvPr id="7" name="loading-body"/>
-          <p:cNvSpPr txBox="1"/>
-          <p:nvPr/>
-        </p:nvSpPr>
-        <p:spPr>
-          <a:xfrm>
-            <a:off x="822960" y="2377440"/>
-            <a:ext cx="4892040" cy="2468880"/>
+          <p:cNvPr id="7" name="flow-0-body"/>
+          <p:cNvSpPr txBox="1"/>
+          <p:nvPr/>
+        </p:nvSpPr>
+        <p:spPr>
+          <a:xfrm>
+            <a:off x="822960" y="2331720"/>
+            <a:ext cx="2103120" cy="1508760"/>
           </a:xfrm>
           <a:prstGeom prst="rect">
             <a:avLst/>
@@ -8350,93 +10078,103 @@
           <a:bodyPr wrap="square" lIns="0" tIns="0" rIns="0" bIns="0" rtlCol="0" anchor="t"/>
           <a:lstStyle/>
           <a:p>
-            <a:pPr marL="342900" indent="-342900">
+            <a:pPr indent="0" marL="0">
               <a:spcAft>
                 <a:spcPts val="400"/>
               </a:spcAft>
-              <a:buSzPct val="100000"/>
-              <a:buChar char="•"/>
-            </a:pPr>
-            <a:r>
-              <a:rPr lang="en-US" sz="1600" dirty="0">
-                <a:solidFill>
-                  <a:schemeClr val="tx1"/>
-                </a:solidFill>
-              </a:rPr>
-              <a:t>AsyncExecutorService.execute() increments uiAsync.pendingDepth</a:t>
-            </a:r>
-            <a:endParaRPr lang="en-US" sz="1600" dirty="0"/>
-          </a:p>
-          <a:p>
-            <a:pPr marL="342900" indent="-342900">
+              <a:buNone/>
+            </a:pPr>
+            <a:r>
+              <a:rPr lang="en-US" sz="950" b="1" dirty="0">
+                <a:solidFill>
+                  <a:schemeClr val="tx2"/>
+                </a:solidFill>
+                <a:latin typeface="Courier New" pitchFamily="34" charset="0"/>
+                <a:ea typeface="Courier New" pitchFamily="34" charset="-122"/>
+                <a:cs typeface="Courier New" pitchFamily="34" charset="-120"/>
+              </a:rPr>
+              <a:t>markAllAsTouched()</a:t>
+            </a:r>
+            <a:endParaRPr lang="en-US" sz="1500" dirty="0"/>
+          </a:p>
+          <a:p>
+            <a:pPr indent="0" marL="0">
               <a:spcAft>
                 <a:spcPts val="400"/>
               </a:spcAft>
-              <a:buSzPct val="100000"/>
-              <a:buChar char="•"/>
-            </a:pPr>
-            <a:r>
-              <a:rPr lang="en-US" sz="1600" dirty="0">
-                <a:solidFill>
-                  <a:schemeClr val="tx1"/>
-                </a:solidFill>
-              </a:rPr>
-              <a:t>MainLayout shows the blocking spinner while work is pending</a:t>
-            </a:r>
-            <a:endParaRPr lang="en-US" sz="1600" dirty="0"/>
-          </a:p>
-          <a:p>
-            <a:pPr marL="342900" indent="-342900">
+              <a:buNone/>
+            </a:pPr>
+            <a:r>
+              <a:rPr lang="en-US" sz="950" b="1" dirty="0">
+                <a:solidFill>
+                  <a:schemeClr val="tx2"/>
+                </a:solidFill>
+                <a:latin typeface="Courier New" pitchFamily="34" charset="0"/>
+                <a:ea typeface="Courier New" pitchFamily="34" charset="-122"/>
+                <a:cs typeface="Courier New" pitchFamily="34" charset="-120"/>
+              </a:rPr>
+              <a:t>updateValueAndValidity()</a:t>
+            </a:r>
+            <a:endParaRPr lang="en-US" sz="1500" dirty="0"/>
+          </a:p>
+          <a:p>
+            <a:pPr indent="0" marL="0">
               <a:spcAft>
                 <a:spcPts val="400"/>
               </a:spcAft>
-              <a:buSzPct val="100000"/>
-              <a:buChar char="•"/>
-            </a:pPr>
-            <a:r>
-              <a:rPr lang="en-US" sz="1600" dirty="0">
+              <a:buNone/>
+            </a:pPr>
+            <a:r>
+              <a:rPr lang="en-US" sz="1500" dirty="0">
                 <a:solidFill>
                   <a:schemeClr val="tx1"/>
                 </a:solidFill>
               </a:rPr>
-              <a:t>Fetches: recordSuccess false; mutations: success toast</a:t>
-            </a:r>
-            <a:endParaRPr lang="en-US" sz="1600" dirty="0"/>
-          </a:p>
-          <a:p>
-            <a:pPr marL="342900" indent="-342900">
-              <a:spcAft>
-                <a:spcPts val="400"/>
-              </a:spcAft>
-              <a:buSzPct val="100000"/>
-              <a:buChar char="•"/>
-            </a:pPr>
-            <a:r>
-              <a:rPr lang="en-US" sz="1600" dirty="0">
-                <a:solidFill>
-                  <a:schemeClr val="tx1"/>
-                </a:solidFill>
-              </a:rPr>
-              <a:t>No component-level "Loading…" rows or spinners</a:t>
-            </a:r>
-            <a:endParaRPr lang="en-US" sz="1600" dirty="0"/>
-          </a:p>
-        </p:txBody>
-      </p:sp>
-      <p:sp>
-        <p:nvSpPr>
-          <p:cNvPr id="8" name="errors-card"/>
+              <a:t>Every field shows its error message, not only the ones the user visited.</a:t>
+            </a:r>
+            <a:endParaRPr lang="en-US" sz="1500" dirty="0"/>
+          </a:p>
+        </p:txBody>
+      </p:sp>
+      <p:sp>
+        <p:nvSpPr>
+          <p:cNvPr id="8" name="flow-0-arrow"/>
           <p:cNvSpPr/>
           <p:nvPr/>
         </p:nvSpPr>
         <p:spPr>
           <a:xfrm>
-            <a:off x="6217920" y="1463040"/>
-            <a:ext cx="5394960" cy="3566160"/>
+            <a:off x="3182112" y="2560320"/>
+            <a:ext cx="155448" cy="320040"/>
+          </a:xfrm>
+          <a:prstGeom prst="rightArrow">
+            <a:avLst/>
+          </a:prstGeom>
+          <a:solidFill>
+            <a:schemeClr val="accent2"/>
+          </a:solidFill>
+          <a:ln w="12700">
+            <a:solidFill>
+              <a:schemeClr val="accent2"/>
+            </a:solidFill>
+            <a:prstDash val="solid"/>
+          </a:ln>
+        </p:spPr>
+      </p:sp>
+      <p:sp>
+        <p:nvSpPr>
+          <p:cNvPr id="9" name="flow-1-card"/>
+          <p:cNvSpPr/>
+          <p:nvPr/>
+        </p:nvSpPr>
+        <p:spPr>
+          <a:xfrm>
+            <a:off x="3367735" y="1417320"/>
+            <a:ext cx="2606040" cy="2606040"/>
           </a:xfrm>
           <a:prstGeom prst="roundRect">
             <a:avLst>
-              <a:gd name="adj" fmla="val 3077"/>
+              <a:gd name="adj" fmla="val 4211"/>
             </a:avLst>
           </a:prstGeom>
           <a:solidFill>
@@ -8452,16 +10190,172 @@
       </p:sp>
       <p:sp>
         <p:nvSpPr>
-          <p:cNvPr id="9" name="errors-badge"/>
+          <p:cNvPr id="10" name="flow-1-badge"/>
           <p:cNvSpPr/>
           <p:nvPr/>
         </p:nvSpPr>
         <p:spPr>
           <a:xfrm>
-            <a:off x="6492240" y="1737360"/>
+            <a:off x="3642055" y="1691640"/>
             <a:ext cx="502920" cy="502920"/>
           </a:xfrm>
           <a:prstGeom prst="ellipse">
+            <a:avLst/>
+          </a:prstGeom>
+          <a:solidFill>
+            <a:schemeClr val="tx2"/>
+          </a:solidFill>
+          <a:ln w="12700">
+            <a:solidFill>
+              <a:schemeClr val="tx2"/>
+            </a:solidFill>
+            <a:prstDash val="solid"/>
+          </a:ln>
+        </p:spPr>
+      </p:sp>
+      <p:sp>
+        <p:nvSpPr>
+          <p:cNvPr id="11" name="flow-1-badge-text"/>
+          <p:cNvSpPr txBox="1"/>
+          <p:nvPr/>
+        </p:nvSpPr>
+        <p:spPr>
+          <a:xfrm>
+            <a:off x="3642055" y="1691640"/>
+            <a:ext cx="502920" cy="502920"/>
+          </a:xfrm>
+          <a:prstGeom prst="rect">
+            <a:avLst/>
+          </a:prstGeom>
+          <a:noFill/>
+          <a:ln/>
+        </p:spPr>
+        <p:txBody>
+          <a:bodyPr wrap="square" lIns="0" tIns="0" rIns="0" bIns="0" rtlCol="0" anchor="ctr"/>
+          <a:lstStyle/>
+          <a:p>
+            <a:pPr algn="ctr" indent="0" marL="0">
+              <a:buNone/>
+            </a:pPr>
+            <a:r>
+              <a:rPr lang="en-US" sz="1600" b="1" dirty="0">
+                <a:solidFill>
+                  <a:schemeClr val="bg1"/>
+                </a:solidFill>
+              </a:rPr>
+              <a:t>2</a:t>
+            </a:r>
+            <a:endParaRPr lang="en-US" sz="1600" dirty="0"/>
+          </a:p>
+        </p:txBody>
+      </p:sp>
+      <p:sp>
+        <p:nvSpPr>
+          <p:cNvPr id="12" name="flow-1-title"/>
+          <p:cNvSpPr txBox="1"/>
+          <p:nvPr/>
+        </p:nvSpPr>
+        <p:spPr>
+          <a:xfrm>
+            <a:off x="4327855" y="1691640"/>
+            <a:ext cx="1417320" cy="502920"/>
+          </a:xfrm>
+          <a:prstGeom prst="rect">
+            <a:avLst/>
+          </a:prstGeom>
+          <a:noFill/>
+          <a:ln/>
+        </p:spPr>
+        <p:txBody>
+          <a:bodyPr wrap="square" lIns="0" tIns="0" rIns="0" bIns="0" rtlCol="0" anchor="ctr"/>
+          <a:lstStyle/>
+          <a:p>
+            <a:pPr indent="0" marL="0">
+              <a:buNone/>
+            </a:pPr>
+            <a:r>
+              <a:rPr lang="en-US" sz="1800" b="1" dirty="0">
+                <a:solidFill>
+                  <a:schemeClr val="tx1"/>
+                </a:solidFill>
+              </a:rPr>
+              <a:t>Wait for async</a:t>
+            </a:r>
+            <a:endParaRPr lang="en-US" sz="1800" dirty="0"/>
+          </a:p>
+        </p:txBody>
+      </p:sp>
+      <p:sp>
+        <p:nvSpPr>
+          <p:cNvPr id="13" name="flow-1-body"/>
+          <p:cNvSpPr txBox="1"/>
+          <p:nvPr/>
+        </p:nvSpPr>
+        <p:spPr>
+          <a:xfrm>
+            <a:off x="3642055" y="2331720"/>
+            <a:ext cx="2103120" cy="1508760"/>
+          </a:xfrm>
+          <a:prstGeom prst="rect">
+            <a:avLst/>
+          </a:prstGeom>
+          <a:noFill/>
+          <a:ln/>
+        </p:spPr>
+        <p:txBody>
+          <a:bodyPr wrap="square" lIns="0" tIns="0" rIns="0" bIns="0" rtlCol="0" anchor="t"/>
+          <a:lstStyle/>
+          <a:p>
+            <a:pPr indent="0" marL="0">
+              <a:spcAft>
+                <a:spcPts val="400"/>
+              </a:spcAft>
+              <a:buNone/>
+            </a:pPr>
+            <a:r>
+              <a:rPr lang="en-US" sz="950" b="1" dirty="0">
+                <a:solidFill>
+                  <a:schemeClr val="tx2"/>
+                </a:solidFill>
+                <a:latin typeface="Courier New" pitchFamily="34" charset="0"/>
+                <a:ea typeface="Courier New" pitchFamily="34" charset="-122"/>
+                <a:cs typeface="Courier New" pitchFamily="34" charset="-120"/>
+              </a:rPr>
+              <a:t>waitForAllAsyncValidators()</a:t>
+            </a:r>
+            <a:endParaRPr lang="en-US" sz="1500" dirty="0"/>
+          </a:p>
+          <a:p>
+            <a:pPr indent="0" marL="0">
+              <a:spcAft>
+                <a:spcPts val="400"/>
+              </a:spcAft>
+              <a:buNone/>
+            </a:pPr>
+            <a:r>
+              <a:rPr lang="en-US" sz="1500" dirty="0">
+                <a:solidFill>
+                  <a:schemeClr val="tx1"/>
+                </a:solidFill>
+              </a:rPr>
+              <a:t>Waits until no control is PENDING, e.g. an HTTP "email already used" check.</a:t>
+            </a:r>
+            <a:endParaRPr lang="en-US" sz="1500" dirty="0"/>
+          </a:p>
+        </p:txBody>
+      </p:sp>
+      <p:sp>
+        <p:nvSpPr>
+          <p:cNvPr id="14" name="flow-1-arrow"/>
+          <p:cNvSpPr/>
+          <p:nvPr/>
+        </p:nvSpPr>
+        <p:spPr>
+          <a:xfrm>
+            <a:off x="6001207" y="2560320"/>
+            <a:ext cx="155448" cy="320040"/>
+          </a:xfrm>
+          <a:prstGeom prst="rightArrow">
             <a:avLst/>
           </a:prstGeom>
           <a:solidFill>
@@ -8477,15 +10371,166 @@
       </p:sp>
       <p:sp>
         <p:nvSpPr>
-          <p:cNvPr id="10" name="errors-badge-text"/>
-          <p:cNvSpPr txBox="1"/>
-          <p:nvPr/>
-        </p:nvSpPr>
-        <p:spPr>
-          <a:xfrm>
-            <a:off x="6492240" y="1737360"/>
+          <p:cNvPr id="15" name="flow-1-exit-arrow"/>
+          <p:cNvSpPr/>
+          <p:nvPr/>
+        </p:nvSpPr>
+        <p:spPr>
+          <a:xfrm>
+            <a:off x="4533595" y="4096512"/>
+            <a:ext cx="274320" cy="274320"/>
+          </a:xfrm>
+          <a:prstGeom prst="downArrow">
+            <a:avLst/>
+          </a:prstGeom>
+          <a:solidFill>
+            <a:schemeClr val="accent5"/>
+          </a:solidFill>
+          <a:ln w="12700">
+            <a:solidFill>
+              <a:schemeClr val="accent5"/>
+            </a:solidFill>
+            <a:prstDash val="solid"/>
+          </a:ln>
+        </p:spPr>
+      </p:sp>
+      <p:sp>
+        <p:nvSpPr>
+          <p:cNvPr id="16" name="flow-1-exit"/>
+          <p:cNvSpPr/>
+          <p:nvPr/>
+        </p:nvSpPr>
+        <p:spPr>
+          <a:xfrm>
+            <a:off x="3367735" y="4434840"/>
+            <a:ext cx="2606040" cy="548640"/>
+          </a:xfrm>
+          <a:prstGeom prst="roundRect">
+            <a:avLst>
+              <a:gd name="adj" fmla="val 16667"/>
+            </a:avLst>
+          </a:prstGeom>
+          <a:solidFill>
+            <a:schemeClr val="bg1"/>
+          </a:solidFill>
+          <a:ln w="15875">
+            <a:solidFill>
+              <a:schemeClr val="accent5"/>
+            </a:solidFill>
+            <a:prstDash val="solid"/>
+          </a:ln>
+        </p:spPr>
+      </p:sp>
+      <p:sp>
+        <p:nvSpPr>
+          <p:cNvPr id="17" name="flow-1-exit-text"/>
+          <p:cNvSpPr txBox="1"/>
+          <p:nvPr/>
+        </p:nvSpPr>
+        <p:spPr>
+          <a:xfrm>
+            <a:off x="3459175" y="4434840"/>
+            <a:ext cx="2423160" cy="548640"/>
+          </a:xfrm>
+          <a:prstGeom prst="rect">
+            <a:avLst/>
+          </a:prstGeom>
+          <a:noFill/>
+          <a:ln/>
+        </p:spPr>
+        <p:txBody>
+          <a:bodyPr wrap="square" lIns="0" tIns="0" rIns="0" bIns="0" rtlCol="0" anchor="ctr"/>
+          <a:lstStyle/>
+          <a:p>
+            <a:pPr algn="ctr" indent="0" marL="0">
+              <a:buNone/>
+            </a:pPr>
+            <a:r>
+              <a:rPr lang="en-US" sz="1200" b="1" dirty="0">
+                <a:solidFill>
+                  <a:schemeClr val="accent5"/>
+                </a:solidFill>
+              </a:rPr>
+              <a:t>Stop: </a:t>
+            </a:r>
+            <a:pPr algn="ctr" indent="0" marL="0">
+              <a:buNone/>
+            </a:pPr>
+            <a:r>
+              <a:rPr lang="en-US" sz="1200" dirty="0">
+                <a:solidFill>
+                  <a:schemeClr val="accent5"/>
+                </a:solidFill>
+              </a:rPr>
+              <a:t>form invalid → 'invalid'</a:t>
+            </a:r>
+            <a:endParaRPr lang="en-US" sz="1200" dirty="0"/>
+          </a:p>
+        </p:txBody>
+      </p:sp>
+      <p:sp>
+        <p:nvSpPr>
+          <p:cNvPr id="18" name="flow-2-card"/>
+          <p:cNvSpPr/>
+          <p:nvPr/>
+        </p:nvSpPr>
+        <p:spPr>
+          <a:xfrm>
+            <a:off x="6186830" y="1417320"/>
+            <a:ext cx="2606040" cy="2606040"/>
+          </a:xfrm>
+          <a:prstGeom prst="roundRect">
+            <a:avLst>
+              <a:gd name="adj" fmla="val 4211"/>
+            </a:avLst>
+          </a:prstGeom>
+          <a:solidFill>
+            <a:schemeClr val="bg2"/>
+          </a:solidFill>
+          <a:ln w="12700">
+            <a:solidFill>
+              <a:schemeClr val="bg2"/>
+            </a:solidFill>
+            <a:prstDash val="solid"/>
+          </a:ln>
+        </p:spPr>
+      </p:sp>
+      <p:sp>
+        <p:nvSpPr>
+          <p:cNvPr id="19" name="flow-2-badge"/>
+          <p:cNvSpPr/>
+          <p:nvPr/>
+        </p:nvSpPr>
+        <p:spPr>
+          <a:xfrm>
+            <a:off x="6461150" y="1691640"/>
             <a:ext cx="502920" cy="502920"/>
           </a:xfrm>
+          <a:prstGeom prst="ellipse">
+            <a:avLst/>
+          </a:prstGeom>
+          <a:solidFill>
+            <a:schemeClr val="tx2"/>
+          </a:solidFill>
+          <a:ln w="12700">
+            <a:solidFill>
+              <a:schemeClr val="tx2"/>
+            </a:solidFill>
+            <a:prstDash val="solid"/>
+          </a:ln>
+        </p:spPr>
+      </p:sp>
+      <p:sp>
+        <p:nvSpPr>
+          <p:cNvPr id="20" name="flow-2-badge-text"/>
+          <p:cNvSpPr txBox="1"/>
+          <p:nvPr/>
+        </p:nvSpPr>
+        <p:spPr>
+          <a:xfrm>
+            <a:off x="6461150" y="1691640"/>
+            <a:ext cx="502920" cy="502920"/>
+          </a:xfrm>
           <a:prstGeom prst="rect">
             <a:avLst/>
           </a:prstGeom>
@@ -8505,7 +10550,7 @@
                   <a:schemeClr val="bg1"/>
                 </a:solidFill>
               </a:rPr>
-              <a:t>E</a:t>
+              <a:t>3</a:t>
             </a:r>
             <a:endParaRPr lang="en-US" sz="1600" dirty="0"/>
           </a:p>
@@ -8513,14 +10558,14 @@
       </p:sp>
       <p:sp>
         <p:nvSpPr>
-          <p:cNvPr id="11" name="errors-title"/>
-          <p:cNvSpPr txBox="1"/>
-          <p:nvPr/>
-        </p:nvSpPr>
-        <p:spPr>
-          <a:xfrm>
-            <a:off x="7178040" y="1737360"/>
-            <a:ext cx="4206240" cy="502920"/>
+          <p:cNvPr id="21" name="flow-2-title"/>
+          <p:cNvSpPr txBox="1"/>
+          <p:nvPr/>
+        </p:nvSpPr>
+        <p:spPr>
+          <a:xfrm>
+            <a:off x="7146950" y="1691640"/>
+            <a:ext cx="1417320" cy="502920"/>
           </a:xfrm>
           <a:prstGeom prst="rect">
             <a:avLst/>
@@ -8541,7 +10586,7 @@
                   <a:schemeClr val="tx1"/>
                 </a:solidFill>
               </a:rPr>
-              <a:t>Errors</a:t>
+              <a:t>Server check</a:t>
             </a:r>
             <a:endParaRPr lang="en-US" sz="1800" dirty="0"/>
           </a:p>
@@ -8549,14 +10594,14 @@
       </p:sp>
       <p:sp>
         <p:nvSpPr>
-          <p:cNvPr id="12" name="errors-body"/>
-          <p:cNvSpPr txBox="1"/>
-          <p:nvPr/>
-        </p:nvSpPr>
-        <p:spPr>
-          <a:xfrm>
-            <a:off x="6492240" y="2377440"/>
-            <a:ext cx="4892040" cy="2468880"/>
+          <p:cNvPr id="22" name="flow-2-body"/>
+          <p:cNvSpPr txBox="1"/>
+          <p:nvPr/>
+        </p:nvSpPr>
+        <p:spPr>
+          <a:xfrm>
+            <a:off x="6461150" y="2331720"/>
+            <a:ext cx="2103120" cy="1508760"/>
           </a:xfrm>
           <a:prstGeom prst="rect">
             <a:avLst/>
@@ -8568,76 +10613,521 @@
           <a:bodyPr wrap="square" lIns="0" tIns="0" rIns="0" bIns="0" rtlCol="0" anchor="t"/>
           <a:lstStyle/>
           <a:p>
-            <a:pPr marL="342900" indent="-342900">
+            <a:pPr indent="0" marL="0">
               <a:spcAft>
                 <a:spcPts val="400"/>
               </a:spcAft>
-              <a:buSzPct val="100000"/>
-              <a:buChar char="•"/>
-            </a:pPr>
-            <a:r>
-              <a:rPr lang="en-US" sz="1600" dirty="0">
-                <a:solidFill>
-                  <a:schemeClr val="tx1"/>
-                </a:solidFill>
-              </a:rPr>
-              <a:t>httpErrorInterceptor turns API failures into user messages</a:t>
-            </a:r>
-            <a:endParaRPr lang="en-US" sz="1600" dirty="0"/>
-          </a:p>
-          <a:p>
-            <a:pPr marL="342900" indent="-342900">
+              <a:buNone/>
+            </a:pPr>
+            <a:r>
+              <a:rPr lang="en-US" sz="950" b="1" dirty="0">
+                <a:solidFill>
+                  <a:schemeClr val="tx2"/>
+                </a:solidFill>
+                <a:latin typeface="Courier New" pitchFamily="34" charset="0"/>
+                <a:ea typeface="Courier New" pitchFamily="34" charset="-122"/>
+                <a:cs typeface="Courier New" pitchFamily="34" charset="-120"/>
+              </a:rPr>
+              <a:t>asyncValidate()</a:t>
+            </a:r>
+            <a:endParaRPr lang="en-US" sz="1500" dirty="0"/>
+          </a:p>
+          <a:p>
+            <a:pPr indent="0" marL="0">
               <a:spcAft>
                 <a:spcPts val="400"/>
               </a:spcAft>
-              <a:buSzPct val="100000"/>
-              <a:buChar char="•"/>
-            </a:pPr>
-            <a:r>
-              <a:rPr lang="en-US" sz="1600" dirty="0">
+              <a:buNone/>
+            </a:pPr>
+            <a:r>
+              <a:rPr lang="en-US" sz="1500" dirty="0">
                 <a:solidFill>
                   <a:schemeClr val="tx1"/>
                 </a:solidFill>
               </a:rPr>
-              <a:t>GlobalErrorHandler + ClientErrorReporter catch client crashes</a:t>
+              <a:t>Optional. Extra rule that needs the API. Set the field error and return false.</a:t>
+            </a:r>
+            <a:endParaRPr lang="en-US" sz="1500" dirty="0"/>
+          </a:p>
+        </p:txBody>
+      </p:sp>
+      <p:sp>
+        <p:nvSpPr>
+          <p:cNvPr id="23" name="flow-2-arrow"/>
+          <p:cNvSpPr/>
+          <p:nvPr/>
+        </p:nvSpPr>
+        <p:spPr>
+          <a:xfrm>
+            <a:off x="8820302" y="2560320"/>
+            <a:ext cx="155448" cy="320040"/>
+          </a:xfrm>
+          <a:prstGeom prst="rightArrow">
+            <a:avLst/>
+          </a:prstGeom>
+          <a:solidFill>
+            <a:schemeClr val="accent2"/>
+          </a:solidFill>
+          <a:ln w="12700">
+            <a:solidFill>
+              <a:schemeClr val="accent2"/>
+            </a:solidFill>
+            <a:prstDash val="solid"/>
+          </a:ln>
+        </p:spPr>
+      </p:sp>
+      <p:sp>
+        <p:nvSpPr>
+          <p:cNvPr id="24" name="flow-2-exit-arrow"/>
+          <p:cNvSpPr/>
+          <p:nvPr/>
+        </p:nvSpPr>
+        <p:spPr>
+          <a:xfrm>
+            <a:off x="7352690" y="4096512"/>
+            <a:ext cx="274320" cy="274320"/>
+          </a:xfrm>
+          <a:prstGeom prst="downArrow">
+            <a:avLst/>
+          </a:prstGeom>
+          <a:solidFill>
+            <a:schemeClr val="accent5"/>
+          </a:solidFill>
+          <a:ln w="12700">
+            <a:solidFill>
+              <a:schemeClr val="accent5"/>
+            </a:solidFill>
+            <a:prstDash val="solid"/>
+          </a:ln>
+        </p:spPr>
+      </p:sp>
+      <p:sp>
+        <p:nvSpPr>
+          <p:cNvPr id="25" name="flow-2-exit"/>
+          <p:cNvSpPr/>
+          <p:nvPr/>
+        </p:nvSpPr>
+        <p:spPr>
+          <a:xfrm>
+            <a:off x="6186830" y="4434840"/>
+            <a:ext cx="2606040" cy="548640"/>
+          </a:xfrm>
+          <a:prstGeom prst="roundRect">
+            <a:avLst>
+              <a:gd name="adj" fmla="val 16667"/>
+            </a:avLst>
+          </a:prstGeom>
+          <a:solidFill>
+            <a:schemeClr val="bg1"/>
+          </a:solidFill>
+          <a:ln w="15875">
+            <a:solidFill>
+              <a:schemeClr val="accent5"/>
+            </a:solidFill>
+            <a:prstDash val="solid"/>
+          </a:ln>
+        </p:spPr>
+      </p:sp>
+      <p:sp>
+        <p:nvSpPr>
+          <p:cNvPr id="26" name="flow-2-exit-text"/>
+          <p:cNvSpPr txBox="1"/>
+          <p:nvPr/>
+        </p:nvSpPr>
+        <p:spPr>
+          <a:xfrm>
+            <a:off x="6278270" y="4434840"/>
+            <a:ext cx="2423160" cy="548640"/>
+          </a:xfrm>
+          <a:prstGeom prst="rect">
+            <a:avLst/>
+          </a:prstGeom>
+          <a:noFill/>
+          <a:ln/>
+        </p:spPr>
+        <p:txBody>
+          <a:bodyPr wrap="square" lIns="0" tIns="0" rIns="0" bIns="0" rtlCol="0" anchor="ctr"/>
+          <a:lstStyle/>
+          <a:p>
+            <a:pPr algn="ctr" indent="0" marL="0">
+              <a:buNone/>
+            </a:pPr>
+            <a:r>
+              <a:rPr lang="en-US" sz="1200" b="1" dirty="0">
+                <a:solidFill>
+                  <a:schemeClr val="accent5"/>
+                </a:solidFill>
+              </a:rPr>
+              <a:t>Stop: </a:t>
+            </a:r>
+            <a:pPr algn="ctr" indent="0" marL="0">
+              <a:buNone/>
+            </a:pPr>
+            <a:r>
+              <a:rPr lang="en-US" sz="1200" dirty="0">
+                <a:solidFill>
+                  <a:schemeClr val="accent5"/>
+                </a:solidFill>
+              </a:rPr>
+              <a:t>returns false → 'server_validation'</a:t>
+            </a:r>
+            <a:endParaRPr lang="en-US" sz="1200" dirty="0"/>
+          </a:p>
+        </p:txBody>
+      </p:sp>
+      <p:sp>
+        <p:nvSpPr>
+          <p:cNvPr id="27" name="flow-3-card"/>
+          <p:cNvSpPr/>
+          <p:nvPr/>
+        </p:nvSpPr>
+        <p:spPr>
+          <a:xfrm>
+            <a:off x="9005926" y="1417320"/>
+            <a:ext cx="2606040" cy="2606040"/>
+          </a:xfrm>
+          <a:prstGeom prst="roundRect">
+            <a:avLst>
+              <a:gd name="adj" fmla="val 4211"/>
+            </a:avLst>
+          </a:prstGeom>
+          <a:solidFill>
+            <a:schemeClr val="bg2"/>
+          </a:solidFill>
+          <a:ln w="12700">
+            <a:solidFill>
+              <a:schemeClr val="bg2"/>
+            </a:solidFill>
+            <a:prstDash val="solid"/>
+          </a:ln>
+        </p:spPr>
+      </p:sp>
+      <p:sp>
+        <p:nvSpPr>
+          <p:cNvPr id="28" name="flow-3-badge"/>
+          <p:cNvSpPr/>
+          <p:nvPr/>
+        </p:nvSpPr>
+        <p:spPr>
+          <a:xfrm>
+            <a:off x="9280246" y="1691640"/>
+            <a:ext cx="502920" cy="502920"/>
+          </a:xfrm>
+          <a:prstGeom prst="ellipse">
+            <a:avLst/>
+          </a:prstGeom>
+          <a:solidFill>
+            <a:schemeClr val="accent2"/>
+          </a:solidFill>
+          <a:ln w="12700">
+            <a:solidFill>
+              <a:schemeClr val="accent2"/>
+            </a:solidFill>
+            <a:prstDash val="solid"/>
+          </a:ln>
+        </p:spPr>
+      </p:sp>
+      <p:sp>
+        <p:nvSpPr>
+          <p:cNvPr id="29" name="flow-3-badge-text"/>
+          <p:cNvSpPr txBox="1"/>
+          <p:nvPr/>
+        </p:nvSpPr>
+        <p:spPr>
+          <a:xfrm>
+            <a:off x="9280246" y="1691640"/>
+            <a:ext cx="502920" cy="502920"/>
+          </a:xfrm>
+          <a:prstGeom prst="rect">
+            <a:avLst/>
+          </a:prstGeom>
+          <a:noFill/>
+          <a:ln/>
+        </p:spPr>
+        <p:txBody>
+          <a:bodyPr wrap="square" lIns="0" tIns="0" rIns="0" bIns="0" rtlCol="0" anchor="ctr"/>
+          <a:lstStyle/>
+          <a:p>
+            <a:pPr algn="ctr" indent="0" marL="0">
+              <a:buNone/>
+            </a:pPr>
+            <a:r>
+              <a:rPr lang="en-US" sz="1600" b="1" dirty="0">
+                <a:solidFill>
+                  <a:schemeClr val="bg1"/>
+                </a:solidFill>
+              </a:rPr>
+              <a:t>4</a:t>
             </a:r>
             <a:endParaRPr lang="en-US" sz="1600" dirty="0"/>
           </a:p>
-          <a:p>
-            <a:pPr marL="342900" indent="-342900">
+        </p:txBody>
+      </p:sp>
+      <p:sp>
+        <p:nvSpPr>
+          <p:cNvPr id="30" name="flow-3-title"/>
+          <p:cNvSpPr txBox="1"/>
+          <p:nvPr/>
+        </p:nvSpPr>
+        <p:spPr>
+          <a:xfrm>
+            <a:off x="9966046" y="1691640"/>
+            <a:ext cx="1417320" cy="502920"/>
+          </a:xfrm>
+          <a:prstGeom prst="rect">
+            <a:avLst/>
+          </a:prstGeom>
+          <a:noFill/>
+          <a:ln/>
+        </p:spPr>
+        <p:txBody>
+          <a:bodyPr wrap="square" lIns="0" tIns="0" rIns="0" bIns="0" rtlCol="0" anchor="ctr"/>
+          <a:lstStyle/>
+          <a:p>
+            <a:pPr indent="0" marL="0">
+              <a:buNone/>
+            </a:pPr>
+            <a:r>
+              <a:rPr lang="en-US" sz="1800" b="1" dirty="0">
+                <a:solidFill>
+                  <a:schemeClr val="tx1"/>
+                </a:solidFill>
+              </a:rPr>
+              <a:t>Execute</a:t>
+            </a:r>
+            <a:endParaRPr lang="en-US" sz="1800" dirty="0"/>
+          </a:p>
+        </p:txBody>
+      </p:sp>
+      <p:sp>
+        <p:nvSpPr>
+          <p:cNvPr id="31" name="flow-3-body"/>
+          <p:cNvSpPr txBox="1"/>
+          <p:nvPr/>
+        </p:nvSpPr>
+        <p:spPr>
+          <a:xfrm>
+            <a:off x="9280246" y="2331720"/>
+            <a:ext cx="2103120" cy="1508760"/>
+          </a:xfrm>
+          <a:prstGeom prst="rect">
+            <a:avLst/>
+          </a:prstGeom>
+          <a:noFill/>
+          <a:ln/>
+        </p:spPr>
+        <p:txBody>
+          <a:bodyPr wrap="square" lIns="0" tIns="0" rIns="0" bIns="0" rtlCol="0" anchor="t"/>
+          <a:lstStyle/>
+          <a:p>
+            <a:pPr indent="0" marL="0">
               <a:spcAft>
                 <a:spcPts val="400"/>
               </a:spcAft>
-              <a:buSzPct val="100000"/>
-              <a:buChar char="•"/>
-            </a:pPr>
-            <a:r>
-              <a:rPr lang="en-US" sz="1600" dirty="0">
-                <a:solidFill>
-                  <a:schemeClr val="tx1"/>
-                </a:solidFill>
-              </a:rPr>
-              <a:t>API ExceptionMiddleware returns a support ticket reference</a:t>
-            </a:r>
-            <a:endParaRPr lang="en-US" sz="1600" dirty="0"/>
-          </a:p>
-          <a:p>
-            <a:pPr marL="342900" indent="-342900">
+              <a:buNone/>
+            </a:pPr>
+            <a:r>
+              <a:rPr lang="en-US" sz="950" b="1" dirty="0">
+                <a:solidFill>
+                  <a:schemeClr val="tx2"/>
+                </a:solidFill>
+                <a:latin typeface="Courier New" pitchFamily="34" charset="0"/>
+                <a:ea typeface="Courier New" pitchFamily="34" charset="-122"/>
+                <a:cs typeface="Courier New" pitchFamily="34" charset="-120"/>
+              </a:rPr>
+              <a:t>executor.execute(work)</a:t>
+            </a:r>
+            <a:endParaRPr lang="en-US" sz="1500" dirty="0"/>
+          </a:p>
+          <a:p>
+            <a:pPr indent="0" marL="0">
               <a:spcAft>
                 <a:spcPts val="400"/>
               </a:spcAft>
-              <a:buSzPct val="100000"/>
-              <a:buChar char="•"/>
-            </a:pPr>
-            <a:r>
-              <a:rPr lang="en-US" sz="1600" dirty="0">
+              <a:buNone/>
+            </a:pPr>
+            <a:r>
+              <a:rPr lang="en-US" sz="1500" dirty="0">
                 <a:solidFill>
                   <a:schemeClr val="tx1"/>
                 </a:solidFill>
               </a:rPr>
-              <a:t>Never swallow errors in a component</a:t>
-            </a:r>
-            <a:endParaRPr lang="en-US" sz="1600" dirty="0"/>
+              <a:t>Spinner on, HTTP call, success toast. Errors become an error toast.</a:t>
+            </a:r>
+            <a:endParaRPr lang="en-US" sz="1500" dirty="0"/>
+          </a:p>
+        </p:txBody>
+      </p:sp>
+      <p:sp>
+        <p:nvSpPr>
+          <p:cNvPr id="32" name="flow-3-exit-arrow"/>
+          <p:cNvSpPr/>
+          <p:nvPr/>
+        </p:nvSpPr>
+        <p:spPr>
+          <a:xfrm>
+            <a:off x="10171786" y="4096512"/>
+            <a:ext cx="274320" cy="274320"/>
+          </a:xfrm>
+          <a:prstGeom prst="downArrow">
+            <a:avLst/>
+          </a:prstGeom>
+          <a:solidFill>
+            <a:schemeClr val="accent5"/>
+          </a:solidFill>
+          <a:ln w="12700">
+            <a:solidFill>
+              <a:schemeClr val="accent5"/>
+            </a:solidFill>
+            <a:prstDash val="solid"/>
+          </a:ln>
+        </p:spPr>
+      </p:sp>
+      <p:sp>
+        <p:nvSpPr>
+          <p:cNvPr id="33" name="flow-3-exit"/>
+          <p:cNvSpPr/>
+          <p:nvPr/>
+        </p:nvSpPr>
+        <p:spPr>
+          <a:xfrm>
+            <a:off x="9005926" y="4434840"/>
+            <a:ext cx="2606040" cy="548640"/>
+          </a:xfrm>
+          <a:prstGeom prst="roundRect">
+            <a:avLst>
+              <a:gd name="adj" fmla="val 16667"/>
+            </a:avLst>
+          </a:prstGeom>
+          <a:solidFill>
+            <a:schemeClr val="bg1"/>
+          </a:solidFill>
+          <a:ln w="15875">
+            <a:solidFill>
+              <a:schemeClr val="accent5"/>
+            </a:solidFill>
+            <a:prstDash val="solid"/>
+          </a:ln>
+        </p:spPr>
+      </p:sp>
+      <p:sp>
+        <p:nvSpPr>
+          <p:cNvPr id="34" name="flow-3-exit-text"/>
+          <p:cNvSpPr txBox="1"/>
+          <p:nvPr/>
+        </p:nvSpPr>
+        <p:spPr>
+          <a:xfrm>
+            <a:off x="9097366" y="4434840"/>
+            <a:ext cx="2423160" cy="548640"/>
+          </a:xfrm>
+          <a:prstGeom prst="rect">
+            <a:avLst/>
+          </a:prstGeom>
+          <a:noFill/>
+          <a:ln/>
+        </p:spPr>
+        <p:txBody>
+          <a:bodyPr wrap="square" lIns="0" tIns="0" rIns="0" bIns="0" rtlCol="0" anchor="ctr"/>
+          <a:lstStyle/>
+          <a:p>
+            <a:pPr algn="ctr" indent="0" marL="0">
+              <a:buNone/>
+            </a:pPr>
+            <a:r>
+              <a:rPr lang="en-US" sz="1200" b="1" dirty="0">
+                <a:solidFill>
+                  <a:schemeClr val="accent5"/>
+                </a:solidFill>
+              </a:rPr>
+              <a:t>Stop: </a:t>
+            </a:r>
+            <a:pPr algn="ctr" indent="0" marL="0">
+              <a:buNone/>
+            </a:pPr>
+            <a:r>
+              <a:rPr lang="en-US" sz="1200" dirty="0">
+                <a:solidFill>
+                  <a:schemeClr val="accent5"/>
+                </a:solidFill>
+              </a:rPr>
+              <a:t>HTTP fails → 'submit_error'</a:t>
+            </a:r>
+            <a:endParaRPr lang="en-US" sz="1200" dirty="0"/>
+          </a:p>
+        </p:txBody>
+      </p:sp>
+      <p:sp>
+        <p:nvSpPr>
+          <p:cNvPr id="35" name="flow-result"/>
+          <p:cNvSpPr/>
+          <p:nvPr/>
+        </p:nvSpPr>
+        <p:spPr>
+          <a:xfrm>
+            <a:off x="548640" y="5120640"/>
+            <a:ext cx="11064240" cy="1005840"/>
+          </a:xfrm>
+          <a:prstGeom prst="roundRect">
+            <a:avLst>
+              <a:gd name="adj" fmla="val 10909"/>
+            </a:avLst>
+          </a:prstGeom>
+          <a:solidFill>
+            <a:schemeClr val="tx2"/>
+          </a:solidFill>
+          <a:ln w="12700">
+            <a:solidFill>
+              <a:schemeClr val="tx2"/>
+            </a:solidFill>
+            <a:prstDash val="solid"/>
+          </a:ln>
+        </p:spPr>
+      </p:sp>
+      <p:sp>
+        <p:nvSpPr>
+          <p:cNvPr id="36" name="flow-result-text"/>
+          <p:cNvSpPr txBox="1"/>
+          <p:nvPr/>
+        </p:nvSpPr>
+        <p:spPr>
+          <a:xfrm>
+            <a:off x="868680" y="5120640"/>
+            <a:ext cx="10424160" cy="1005840"/>
+          </a:xfrm>
+          <a:prstGeom prst="rect">
+            <a:avLst/>
+          </a:prstGeom>
+          <a:noFill/>
+          <a:ln/>
+        </p:spPr>
+        <p:txBody>
+          <a:bodyPr wrap="square" lIns="0" tIns="0" rIns="0" bIns="0" rtlCol="0" anchor="ctr"/>
+          <a:lstStyle/>
+          <a:p>
+            <a:pPr indent="0" marL="0">
+              <a:buNone/>
+            </a:pPr>
+            <a:r>
+              <a:rPr lang="en-US" sz="1700" b="1" dirty="0">
+                <a:solidFill>
+                  <a:schemeClr val="bg1"/>
+                </a:solidFill>
+              </a:rPr>
+              <a:t>Result: </a:t>
+            </a:r>
+            <a:pPr indent="0" marL="0">
+              <a:buNone/>
+            </a:pPr>
+            <a:r>
+              <a:rPr lang="en-US" sz="1700" dirty="0">
+                <a:solidFill>
+                  <a:schemeClr val="bg1"/>
+                </a:solidFill>
+              </a:rPr>
+              <a:t>{ ok: true, value } and the page navigates. On any stop it gets { ok: false, reason } and simply returns: the messages are already on screen.</a:t>
+            </a:r>
+            <a:endParaRPr lang="en-US" sz="1700" dirty="0"/>
           </a:p>
         </p:txBody>
       </p:sp>
@@ -8743,7 +11233,7 @@
                   <a:schemeClr val="tx2"/>
                 </a:solidFill>
               </a:rPr>
-              <a:t>State, language and direction</a:t>
+              <a:t>The pipeline in a real page</a:t>
             </a:r>
             <a:endParaRPr lang="en-US" sz="3600" dirty="0"/>
           </a:p>
@@ -8751,18 +11241,865 @@
       </p:sp>
       <p:sp>
         <p:nvSpPr>
-          <p:cNvPr id="3" name="ngrx-card"/>
+          <p:cNvPr id="3" name="code-bg"/>
           <p:cNvSpPr/>
           <p:nvPr/>
         </p:nvSpPr>
         <p:spPr>
           <a:xfrm>
-            <a:off x="548640" y="1463040"/>
-            <a:ext cx="3566160" cy="3566160"/>
+            <a:off x="548640" y="1371600"/>
+            <a:ext cx="6400800" cy="4800600"/>
           </a:xfrm>
           <a:prstGeom prst="roundRect">
             <a:avLst>
-              <a:gd name="adj" fmla="val 3077"/>
+              <a:gd name="adj" fmla="val 2286"/>
+            </a:avLst>
+          </a:prstGeom>
+          <a:solidFill>
+            <a:schemeClr val="tx1"/>
+          </a:solidFill>
+          <a:ln w="12700">
+            <a:solidFill>
+              <a:schemeClr val="tx1"/>
+            </a:solidFill>
+            <a:prstDash val="solid"/>
+          </a:ln>
+        </p:spPr>
+      </p:sp>
+      <p:sp>
+        <p:nvSpPr>
+          <p:cNvPr id="4" name="code-text"/>
+          <p:cNvSpPr txBox="1"/>
+          <p:nvPr/>
+        </p:nvSpPr>
+        <p:spPr>
+          <a:xfrm>
+            <a:off x="822960" y="1508760"/>
+            <a:ext cx="5943600" cy="4526280"/>
+          </a:xfrm>
+          <a:prstGeom prst="rect">
+            <a:avLst/>
+          </a:prstGeom>
+          <a:noFill/>
+          <a:ln/>
+        </p:spPr>
+        <p:txBody>
+          <a:bodyPr wrap="square" lIns="0" tIns="0" rIns="0" bIns="0" rtlCol="0" anchor="t"/>
+          <a:lstStyle/>
+          <a:p>
+            <a:pPr indent="0" marL="0">
+              <a:buNone/>
+            </a:pPr>
+            <a:r>
+              <a:rPr lang="en-US" sz="1400" dirty="0">
+                <a:solidFill>
+                  <a:schemeClr val="bg1"/>
+                </a:solidFill>
+                <a:latin typeface="Courier New" pitchFamily="34" charset="0"/>
+                <a:ea typeface="Courier New" pitchFamily="34" charset="-122"/>
+                <a:cs typeface="Courier New" pitchFamily="34" charset="-120"/>
+              </a:rPr>
+              <a:t>async save(): Promise&lt;void&gt; {</a:t>
+            </a:r>
+            <a:endParaRPr lang="en-US" sz="1400" dirty="0"/>
+          </a:p>
+          <a:p>
+            <a:pPr indent="0" marL="0">
+              <a:buNone/>
+            </a:pPr>
+            <a:r>
+              <a:rPr lang="en-US" sz="1400" dirty="0">
+                <a:solidFill>
+                  <a:schemeClr val="bg1"/>
+                </a:solidFill>
+                <a:latin typeface="Courier New" pitchFamily="34" charset="0"/>
+                <a:ea typeface="Courier New" pitchFamily="34" charset="-122"/>
+                <a:cs typeface="Courier New" pitchFamily="34" charset="-120"/>
+              </a:rPr>
+              <a:t>  const id = this.itemId();</a:t>
+            </a:r>
+            <a:endParaRPr lang="en-US" sz="1400" dirty="0"/>
+          </a:p>
+          <a:p>
+            <a:pPr indent="0" marL="0">
+              <a:buNone/>
+            </a:pPr>
+            <a:r>
+              <a:rPr lang="en-US" sz="1400" dirty="0">
+                <a:solidFill>
+                  <a:schemeClr val="bg1"/>
+                </a:solidFill>
+                <a:latin typeface="Courier New" pitchFamily="34" charset="0"/>
+                <a:ea typeface="Courier New" pitchFamily="34" charset="-122"/>
+                <a:cs typeface="Courier New" pitchFamily="34" charset="-120"/>
+              </a:rPr>
+              <a:t>  const result = await this.formPipeline.run({</a:t>
+            </a:r>
+            <a:endParaRPr lang="en-US" sz="1400" dirty="0"/>
+          </a:p>
+          <a:p>
+            <a:pPr indent="0" marL="0">
+              <a:buNone/>
+            </a:pPr>
+            <a:r>
+              <a:rPr lang="en-US" sz="1400" dirty="0">
+                <a:solidFill>
+                  <a:schemeClr val="accent4"/>
+                </a:solidFill>
+                <a:latin typeface="Courier New" pitchFamily="34" charset="0"/>
+                <a:ea typeface="Courier New" pitchFamily="34" charset="-122"/>
+                <a:cs typeface="Courier New" pitchFamily="34" charset="-120"/>
+              </a:rPr>
+              <a:t>    form: this.form,                      // 1</a:t>
+            </a:r>
+            <a:endParaRPr lang="en-US" sz="1400" dirty="0"/>
+          </a:p>
+          <a:p>
+            <a:pPr indent="0" marL="0">
+              <a:buNone/>
+            </a:pPr>
+            <a:r>
+              <a:rPr lang="en-US" sz="1400" dirty="0">
+                <a:solidFill>
+                  <a:schemeClr val="accent4"/>
+                </a:solidFill>
+                <a:latin typeface="Courier New" pitchFamily="34" charset="0"/>
+                <a:ea typeface="Courier New" pitchFamily="34" charset="-122"/>
+                <a:cs typeface="Courier New" pitchFamily="34" charset="-120"/>
+              </a:rPr>
+              <a:t>    work: () =&gt; {                         // 2</a:t>
+            </a:r>
+            <a:endParaRPr lang="en-US" sz="1400" dirty="0"/>
+          </a:p>
+          <a:p>
+            <a:pPr indent="0" marL="0">
+              <a:buNone/>
+            </a:pPr>
+            <a:r>
+              <a:rPr lang="en-US" sz="1400" dirty="0">
+                <a:solidFill>
+                  <a:schemeClr val="bg1"/>
+                </a:solidFill>
+                <a:latin typeface="Courier New" pitchFamily="34" charset="0"/>
+                <a:ea typeface="Courier New" pitchFamily="34" charset="-122"/>
+                <a:cs typeface="Courier New" pitchFamily="34" charset="-120"/>
+              </a:rPr>
+              <a:t>      const body = showcaseRequest(this.form);</a:t>
+            </a:r>
+            <a:endParaRPr lang="en-US" sz="1400" dirty="0"/>
+          </a:p>
+          <a:p>
+            <a:pPr indent="0" marL="0">
+              <a:buNone/>
+            </a:pPr>
+            <a:r>
+              <a:rPr lang="en-US" sz="1400" dirty="0">
+                <a:solidFill>
+                  <a:schemeClr val="bg1"/>
+                </a:solidFill>
+                <a:latin typeface="Courier New" pitchFamily="34" charset="0"/>
+                <a:ea typeface="Courier New" pitchFamily="34" charset="-122"/>
+                <a:cs typeface="Courier New" pitchFamily="34" charset="-120"/>
+              </a:rPr>
+              <a:t>      return firstValueFrom(id == null</a:t>
+            </a:r>
+            <a:endParaRPr lang="en-US" sz="1400" dirty="0"/>
+          </a:p>
+          <a:p>
+            <a:pPr indent="0" marL="0">
+              <a:buNone/>
+            </a:pPr>
+            <a:r>
+              <a:rPr lang="en-US" sz="1400" dirty="0">
+                <a:solidFill>
+                  <a:schemeClr val="bg1"/>
+                </a:solidFill>
+                <a:latin typeface="Courier New" pitchFamily="34" charset="0"/>
+                <a:ea typeface="Courier New" pitchFamily="34" charset="-122"/>
+                <a:cs typeface="Courier New" pitchFamily="34" charset="-120"/>
+              </a:rPr>
+              <a:t>        ? this.api.create(body)</a:t>
+            </a:r>
+            <a:endParaRPr lang="en-US" sz="1400" dirty="0"/>
+          </a:p>
+          <a:p>
+            <a:pPr indent="0" marL="0">
+              <a:buNone/>
+            </a:pPr>
+            <a:r>
+              <a:rPr lang="en-US" sz="1400" dirty="0">
+                <a:solidFill>
+                  <a:schemeClr val="bg1"/>
+                </a:solidFill>
+                <a:latin typeface="Courier New" pitchFamily="34" charset="0"/>
+                <a:ea typeface="Courier New" pitchFamily="34" charset="-122"/>
+                <a:cs typeface="Courier New" pitchFamily="34" charset="-120"/>
+              </a:rPr>
+              <a:t>        : this.api.update(id, body));</a:t>
+            </a:r>
+            <a:endParaRPr lang="en-US" sz="1400" dirty="0"/>
+          </a:p>
+          <a:p>
+            <a:pPr indent="0" marL="0">
+              <a:buNone/>
+            </a:pPr>
+            <a:r>
+              <a:rPr lang="en-US" sz="1400" dirty="0">
+                <a:solidFill>
+                  <a:schemeClr val="bg1"/>
+                </a:solidFill>
+                <a:latin typeface="Courier New" pitchFamily="34" charset="0"/>
+                <a:ea typeface="Courier New" pitchFamily="34" charset="-122"/>
+                <a:cs typeface="Courier New" pitchFamily="34" charset="-120"/>
+              </a:rPr>
+              <a:t>    },</a:t>
+            </a:r>
+            <a:endParaRPr lang="en-US" sz="1400" dirty="0"/>
+          </a:p>
+          <a:p>
+            <a:pPr indent="0" marL="0">
+              <a:buNone/>
+            </a:pPr>
+            <a:r>
+              <a:rPr lang="en-US" sz="1400" dirty="0">
+                <a:solidFill>
+                  <a:schemeClr val="accent4"/>
+                </a:solidFill>
+                <a:latin typeface="Courier New" pitchFamily="34" charset="0"/>
+                <a:ea typeface="Courier New" pitchFamily="34" charset="-122"/>
+                <a:cs typeface="Courier New" pitchFamily="34" charset="-120"/>
+              </a:rPr>
+              <a:t>    execute: {                            // 3</a:t>
+            </a:r>
+            <a:endParaRPr lang="en-US" sz="1400" dirty="0"/>
+          </a:p>
+          <a:p>
+            <a:pPr indent="0" marL="0">
+              <a:buNone/>
+            </a:pPr>
+            <a:r>
+              <a:rPr lang="en-US" sz="1400" dirty="0">
+                <a:solidFill>
+                  <a:schemeClr val="bg1"/>
+                </a:solidFill>
+                <a:latin typeface="Courier New" pitchFamily="34" charset="0"/>
+                <a:ea typeface="Courier New" pitchFamily="34" charset="-122"/>
+                <a:cs typeface="Courier New" pitchFamily="34" charset="-120"/>
+              </a:rPr>
+              <a:t>      progressMessage: $localize`Saving…`,</a:t>
+            </a:r>
+            <a:endParaRPr lang="en-US" sz="1400" dirty="0"/>
+          </a:p>
+          <a:p>
+            <a:pPr indent="0" marL="0">
+              <a:buNone/>
+            </a:pPr>
+            <a:r>
+              <a:rPr lang="en-US" sz="1400" dirty="0">
+                <a:solidFill>
+                  <a:schemeClr val="bg1"/>
+                </a:solidFill>
+                <a:latin typeface="Courier New" pitchFamily="34" charset="0"/>
+                <a:ea typeface="Courier New" pitchFamily="34" charset="-122"/>
+                <a:cs typeface="Courier New" pitchFamily="34" charset="-120"/>
+              </a:rPr>
+              <a:t>      successMessage: $localize`Record saved.`,</a:t>
+            </a:r>
+            <a:endParaRPr lang="en-US" sz="1400" dirty="0"/>
+          </a:p>
+          <a:p>
+            <a:pPr indent="0" marL="0">
+              <a:buNone/>
+            </a:pPr>
+            <a:r>
+              <a:rPr lang="en-US" sz="1400" dirty="0">
+                <a:solidFill>
+                  <a:schemeClr val="bg1"/>
+                </a:solidFill>
+                <a:latin typeface="Courier New" pitchFamily="34" charset="0"/>
+                <a:ea typeface="Courier New" pitchFamily="34" charset="-122"/>
+                <a:cs typeface="Courier New" pitchFamily="34" charset="-120"/>
+              </a:rPr>
+              <a:t>    },</a:t>
+            </a:r>
+            <a:endParaRPr lang="en-US" sz="1400" dirty="0"/>
+          </a:p>
+          <a:p>
+            <a:pPr indent="0" marL="0">
+              <a:buNone/>
+            </a:pPr>
+            <a:r>
+              <a:rPr lang="en-US" sz="1400" dirty="0">
+                <a:solidFill>
+                  <a:schemeClr val="bg1"/>
+                </a:solidFill>
+                <a:latin typeface="Courier New" pitchFamily="34" charset="0"/>
+                <a:ea typeface="Courier New" pitchFamily="34" charset="-122"/>
+                <a:cs typeface="Courier New" pitchFamily="34" charset="-120"/>
+              </a:rPr>
+              <a:t>  });</a:t>
+            </a:r>
+            <a:endParaRPr lang="en-US" sz="1400" dirty="0"/>
+          </a:p>
+          <a:p>
+            <a:pPr indent="0" marL="0">
+              <a:buNone/>
+            </a:pPr>
+            <a:r>
+              <a:rPr lang="en-US" sz="1400" dirty="0">
+                <a:solidFill>
+                  <a:schemeClr val="accent4"/>
+                </a:solidFill>
+                <a:latin typeface="Courier New" pitchFamily="34" charset="0"/>
+                <a:ea typeface="Courier New" pitchFamily="34" charset="-122"/>
+                <a:cs typeface="Courier New" pitchFamily="34" charset="-120"/>
+              </a:rPr>
+              <a:t>  if (!isFormPipelineSuccess(result)) return;  // 4</a:t>
+            </a:r>
+            <a:endParaRPr lang="en-US" sz="1400" dirty="0"/>
+          </a:p>
+          <a:p>
+            <a:pPr indent="0" marL="0">
+              <a:buNone/>
+            </a:pPr>
+            <a:r>
+              <a:rPr lang="en-US" sz="1400" dirty="0">
+                <a:solidFill>
+                  <a:schemeClr val="bg1"/>
+                </a:solidFill>
+                <a:latin typeface="Courier New" pitchFamily="34" charset="0"/>
+                <a:ea typeface="Courier New" pitchFamily="34" charset="-122"/>
+                <a:cs typeface="Courier New" pitchFamily="34" charset="-120"/>
+              </a:rPr>
+              <a:t>  void this.router.navigate([this.backToList]);</a:t>
+            </a:r>
+            <a:endParaRPr lang="en-US" sz="1400" dirty="0"/>
+          </a:p>
+          <a:p>
+            <a:pPr indent="0" marL="0">
+              <a:buNone/>
+            </a:pPr>
+            <a:r>
+              <a:rPr lang="en-US" sz="1400" dirty="0">
+                <a:solidFill>
+                  <a:schemeClr val="bg1"/>
+                </a:solidFill>
+                <a:latin typeface="Courier New" pitchFamily="34" charset="0"/>
+                <a:ea typeface="Courier New" pitchFamily="34" charset="-122"/>
+                <a:cs typeface="Courier New" pitchFamily="34" charset="-120"/>
+              </a:rPr>
+              <a:t>}</a:t>
+            </a:r>
+            <a:endParaRPr lang="en-US" sz="1400" dirty="0"/>
+          </a:p>
+        </p:txBody>
+      </p:sp>
+      <p:sp>
+        <p:nvSpPr>
+          <p:cNvPr id="5" name="code-caption"/>
+          <p:cNvSpPr txBox="1"/>
+          <p:nvPr/>
+        </p:nvSpPr>
+        <p:spPr>
+          <a:xfrm>
+            <a:off x="548640" y="6199632"/>
+            <a:ext cx="6400800" cy="201168"/>
+          </a:xfrm>
+          <a:prstGeom prst="rect">
+            <a:avLst/>
+          </a:prstGeom>
+          <a:noFill/>
+          <a:ln/>
+        </p:spPr>
+        <p:txBody>
+          <a:bodyPr wrap="square" lIns="0" tIns="0" rIns="0" bIns="0" rtlCol="0" anchor="ctr"/>
+          <a:lstStyle/>
+          <a:p>
+            <a:pPr indent="0" marL="0">
+              <a:buNone/>
+            </a:pPr>
+            <a:r>
+              <a:rPr lang="en-US" sz="1000" i="1" dirty="0">
+                <a:solidFill>
+                  <a:schemeClr val="accent6"/>
+                </a:solidFill>
+              </a:rPr>
+              <a:t>showcase-form-page.component.ts</a:t>
+            </a:r>
+            <a:endParaRPr lang="en-US" sz="1000" dirty="0"/>
+          </a:p>
+        </p:txBody>
+      </p:sp>
+      <p:sp>
+        <p:nvSpPr>
+          <p:cNvPr id="6" name="cn-0-badge"/>
+          <p:cNvSpPr/>
+          <p:nvPr/>
+        </p:nvSpPr>
+        <p:spPr>
+          <a:xfrm>
+            <a:off x="7269480" y="1481328"/>
+            <a:ext cx="502920" cy="502920"/>
+          </a:xfrm>
+          <a:prstGeom prst="ellipse">
+            <a:avLst/>
+          </a:prstGeom>
+          <a:solidFill>
+            <a:schemeClr val="tx2"/>
+          </a:solidFill>
+          <a:ln w="12700">
+            <a:solidFill>
+              <a:schemeClr val="tx2"/>
+            </a:solidFill>
+            <a:prstDash val="solid"/>
+          </a:ln>
+        </p:spPr>
+      </p:sp>
+      <p:sp>
+        <p:nvSpPr>
+          <p:cNvPr id="7" name="cn-0-badge-text"/>
+          <p:cNvSpPr txBox="1"/>
+          <p:nvPr/>
+        </p:nvSpPr>
+        <p:spPr>
+          <a:xfrm>
+            <a:off x="7269480" y="1481328"/>
+            <a:ext cx="502920" cy="502920"/>
+          </a:xfrm>
+          <a:prstGeom prst="rect">
+            <a:avLst/>
+          </a:prstGeom>
+          <a:noFill/>
+          <a:ln/>
+        </p:spPr>
+        <p:txBody>
+          <a:bodyPr wrap="square" lIns="0" tIns="0" rIns="0" bIns="0" rtlCol="0" anchor="ctr"/>
+          <a:lstStyle/>
+          <a:p>
+            <a:pPr algn="ctr" indent="0" marL="0">
+              <a:buNone/>
+            </a:pPr>
+            <a:r>
+              <a:rPr lang="en-US" sz="1600" b="1" dirty="0">
+                <a:solidFill>
+                  <a:schemeClr val="bg1"/>
+                </a:solidFill>
+              </a:rPr>
+              <a:t>1</a:t>
+            </a:r>
+            <a:endParaRPr lang="en-US" sz="1600" dirty="0"/>
+          </a:p>
+        </p:txBody>
+      </p:sp>
+      <p:sp>
+        <p:nvSpPr>
+          <p:cNvPr id="8" name="cn-0-t"/>
+          <p:cNvSpPr txBox="1"/>
+          <p:nvPr/>
+        </p:nvSpPr>
+        <p:spPr>
+          <a:xfrm>
+            <a:off x="7955280" y="1371600"/>
+            <a:ext cx="3657600" cy="822960"/>
+          </a:xfrm>
+          <a:prstGeom prst="rect">
+            <a:avLst/>
+          </a:prstGeom>
+          <a:noFill/>
+          <a:ln/>
+        </p:spPr>
+        <p:txBody>
+          <a:bodyPr wrap="square" lIns="0" tIns="0" rIns="0" bIns="0" rtlCol="0" anchor="t"/>
+          <a:lstStyle/>
+          <a:p>
+            <a:pPr indent="0" marL="0">
+              <a:buNone/>
+            </a:pPr>
+            <a:r>
+              <a:rPr lang="en-US" sz="1400" b="1" dirty="0">
+                <a:solidFill>
+                  <a:schemeClr val="tx2"/>
+                </a:solidFill>
+                <a:latin typeface="Courier New" pitchFamily="34" charset="0"/>
+                <a:ea typeface="Courier New" pitchFamily="34" charset="-122"/>
+                <a:cs typeface="Courier New" pitchFamily="34" charset="-120"/>
+              </a:rPr>
+              <a:t>form</a:t>
+            </a:r>
+            <a:endParaRPr lang="en-US" sz="1400" dirty="0"/>
+          </a:p>
+          <a:p>
+            <a:pPr indent="0" marL="0">
+              <a:buNone/>
+            </a:pPr>
+            <a:r>
+              <a:rPr lang="en-US" sz="1400" dirty="0">
+                <a:solidFill>
+                  <a:schemeClr val="tx1"/>
+                </a:solidFill>
+              </a:rPr>
+              <a:t>The FormGroup built with @validators. Rules match the API rules.</a:t>
+            </a:r>
+            <a:endParaRPr lang="en-US" sz="1400" dirty="0"/>
+          </a:p>
+        </p:txBody>
+      </p:sp>
+      <p:sp>
+        <p:nvSpPr>
+          <p:cNvPr id="9" name="cn-1-badge"/>
+          <p:cNvSpPr/>
+          <p:nvPr/>
+        </p:nvSpPr>
+        <p:spPr>
+          <a:xfrm>
+            <a:off x="7269480" y="2414016"/>
+            <a:ext cx="502920" cy="502920"/>
+          </a:xfrm>
+          <a:prstGeom prst="ellipse">
+            <a:avLst/>
+          </a:prstGeom>
+          <a:solidFill>
+            <a:schemeClr val="tx2"/>
+          </a:solidFill>
+          <a:ln w="12700">
+            <a:solidFill>
+              <a:schemeClr val="tx2"/>
+            </a:solidFill>
+            <a:prstDash val="solid"/>
+          </a:ln>
+        </p:spPr>
+      </p:sp>
+      <p:sp>
+        <p:nvSpPr>
+          <p:cNvPr id="10" name="cn-1-badge-text"/>
+          <p:cNvSpPr txBox="1"/>
+          <p:nvPr/>
+        </p:nvSpPr>
+        <p:spPr>
+          <a:xfrm>
+            <a:off x="7269480" y="2414016"/>
+            <a:ext cx="502920" cy="502920"/>
+          </a:xfrm>
+          <a:prstGeom prst="rect">
+            <a:avLst/>
+          </a:prstGeom>
+          <a:noFill/>
+          <a:ln/>
+        </p:spPr>
+        <p:txBody>
+          <a:bodyPr wrap="square" lIns="0" tIns="0" rIns="0" bIns="0" rtlCol="0" anchor="ctr"/>
+          <a:lstStyle/>
+          <a:p>
+            <a:pPr algn="ctr" indent="0" marL="0">
+              <a:buNone/>
+            </a:pPr>
+            <a:r>
+              <a:rPr lang="en-US" sz="1600" b="1" dirty="0">
+                <a:solidFill>
+                  <a:schemeClr val="bg1"/>
+                </a:solidFill>
+              </a:rPr>
+              <a:t>2</a:t>
+            </a:r>
+            <a:endParaRPr lang="en-US" sz="1600" dirty="0"/>
+          </a:p>
+        </p:txBody>
+      </p:sp>
+      <p:sp>
+        <p:nvSpPr>
+          <p:cNvPr id="11" name="cn-1-t"/>
+          <p:cNvSpPr txBox="1"/>
+          <p:nvPr/>
+        </p:nvSpPr>
+        <p:spPr>
+          <a:xfrm>
+            <a:off x="7955280" y="2304288"/>
+            <a:ext cx="3657600" cy="822960"/>
+          </a:xfrm>
+          <a:prstGeom prst="rect">
+            <a:avLst/>
+          </a:prstGeom>
+          <a:noFill/>
+          <a:ln/>
+        </p:spPr>
+        <p:txBody>
+          <a:bodyPr wrap="square" lIns="0" tIns="0" rIns="0" bIns="0" rtlCol="0" anchor="t"/>
+          <a:lstStyle/>
+          <a:p>
+            <a:pPr indent="0" marL="0">
+              <a:buNone/>
+            </a:pPr>
+            <a:r>
+              <a:rPr lang="en-US" sz="1400" b="1" dirty="0">
+                <a:solidFill>
+                  <a:schemeClr val="tx2"/>
+                </a:solidFill>
+                <a:latin typeface="Courier New" pitchFamily="34" charset="0"/>
+                <a:ea typeface="Courier New" pitchFamily="34" charset="-122"/>
+                <a:cs typeface="Courier New" pitchFamily="34" charset="-120"/>
+              </a:rPr>
+              <a:t>work</a:t>
+            </a:r>
+            <a:endParaRPr lang="en-US" sz="1400" dirty="0"/>
+          </a:p>
+          <a:p>
+            <a:pPr indent="0" marL="0">
+              <a:buNone/>
+            </a:pPr>
+            <a:r>
+              <a:rPr lang="en-US" sz="1400" dirty="0">
+                <a:solidFill>
+                  <a:schemeClr val="tx1"/>
+                </a:solidFill>
+              </a:rPr>
+              <a:t>Only the HTTP call. Runs only when the form is valid.</a:t>
+            </a:r>
+            <a:endParaRPr lang="en-US" sz="1400" dirty="0"/>
+          </a:p>
+        </p:txBody>
+      </p:sp>
+      <p:sp>
+        <p:nvSpPr>
+          <p:cNvPr id="12" name="cn-2-badge"/>
+          <p:cNvSpPr/>
+          <p:nvPr/>
+        </p:nvSpPr>
+        <p:spPr>
+          <a:xfrm>
+            <a:off x="7269480" y="3346704"/>
+            <a:ext cx="502920" cy="502920"/>
+          </a:xfrm>
+          <a:prstGeom prst="ellipse">
+            <a:avLst/>
+          </a:prstGeom>
+          <a:solidFill>
+            <a:schemeClr val="tx2"/>
+          </a:solidFill>
+          <a:ln w="12700">
+            <a:solidFill>
+              <a:schemeClr val="tx2"/>
+            </a:solidFill>
+            <a:prstDash val="solid"/>
+          </a:ln>
+        </p:spPr>
+      </p:sp>
+      <p:sp>
+        <p:nvSpPr>
+          <p:cNvPr id="13" name="cn-2-badge-text"/>
+          <p:cNvSpPr txBox="1"/>
+          <p:nvPr/>
+        </p:nvSpPr>
+        <p:spPr>
+          <a:xfrm>
+            <a:off x="7269480" y="3346704"/>
+            <a:ext cx="502920" cy="502920"/>
+          </a:xfrm>
+          <a:prstGeom prst="rect">
+            <a:avLst/>
+          </a:prstGeom>
+          <a:noFill/>
+          <a:ln/>
+        </p:spPr>
+        <p:txBody>
+          <a:bodyPr wrap="square" lIns="0" tIns="0" rIns="0" bIns="0" rtlCol="0" anchor="ctr"/>
+          <a:lstStyle/>
+          <a:p>
+            <a:pPr algn="ctr" indent="0" marL="0">
+              <a:buNone/>
+            </a:pPr>
+            <a:r>
+              <a:rPr lang="en-US" sz="1600" b="1" dirty="0">
+                <a:solidFill>
+                  <a:schemeClr val="bg1"/>
+                </a:solidFill>
+              </a:rPr>
+              <a:t>3</a:t>
+            </a:r>
+            <a:endParaRPr lang="en-US" sz="1600" dirty="0"/>
+          </a:p>
+        </p:txBody>
+      </p:sp>
+      <p:sp>
+        <p:nvSpPr>
+          <p:cNvPr id="14" name="cn-2-t"/>
+          <p:cNvSpPr txBox="1"/>
+          <p:nvPr/>
+        </p:nvSpPr>
+        <p:spPr>
+          <a:xfrm>
+            <a:off x="7955280" y="3236976"/>
+            <a:ext cx="3657600" cy="822960"/>
+          </a:xfrm>
+          <a:prstGeom prst="rect">
+            <a:avLst/>
+          </a:prstGeom>
+          <a:noFill/>
+          <a:ln/>
+        </p:spPr>
+        <p:txBody>
+          <a:bodyPr wrap="square" lIns="0" tIns="0" rIns="0" bIns="0" rtlCol="0" anchor="t"/>
+          <a:lstStyle/>
+          <a:p>
+            <a:pPr indent="0" marL="0">
+              <a:buNone/>
+            </a:pPr>
+            <a:r>
+              <a:rPr lang="en-US" sz="1400" b="1" dirty="0">
+                <a:solidFill>
+                  <a:schemeClr val="tx2"/>
+                </a:solidFill>
+                <a:latin typeface="Courier New" pitchFamily="34" charset="0"/>
+                <a:ea typeface="Courier New" pitchFamily="34" charset="-122"/>
+                <a:cs typeface="Courier New" pitchFamily="34" charset="-120"/>
+              </a:rPr>
+              <a:t>execute</a:t>
+            </a:r>
+            <a:endParaRPr lang="en-US" sz="1400" dirty="0"/>
+          </a:p>
+          <a:p>
+            <a:pPr indent="0" marL="0">
+              <a:buNone/>
+            </a:pPr>
+            <a:r>
+              <a:rPr lang="en-US" sz="1400" dirty="0">
+                <a:solidFill>
+                  <a:schemeClr val="tx1"/>
+                </a:solidFill>
+              </a:rPr>
+              <a:t>Progress and success text for the global overlay and toast.</a:t>
+            </a:r>
+            <a:endParaRPr lang="en-US" sz="1400" dirty="0"/>
+          </a:p>
+        </p:txBody>
+      </p:sp>
+      <p:sp>
+        <p:nvSpPr>
+          <p:cNvPr id="15" name="cn-3-badge"/>
+          <p:cNvSpPr/>
+          <p:nvPr/>
+        </p:nvSpPr>
+        <p:spPr>
+          <a:xfrm>
+            <a:off x="7269480" y="4279392"/>
+            <a:ext cx="502920" cy="502920"/>
+          </a:xfrm>
+          <a:prstGeom prst="ellipse">
+            <a:avLst/>
+          </a:prstGeom>
+          <a:solidFill>
+            <a:schemeClr val="accent2"/>
+          </a:solidFill>
+          <a:ln w="12700">
+            <a:solidFill>
+              <a:schemeClr val="accent2"/>
+            </a:solidFill>
+            <a:prstDash val="solid"/>
+          </a:ln>
+        </p:spPr>
+      </p:sp>
+      <p:sp>
+        <p:nvSpPr>
+          <p:cNvPr id="16" name="cn-3-badge-text"/>
+          <p:cNvSpPr txBox="1"/>
+          <p:nvPr/>
+        </p:nvSpPr>
+        <p:spPr>
+          <a:xfrm>
+            <a:off x="7269480" y="4279392"/>
+            <a:ext cx="502920" cy="502920"/>
+          </a:xfrm>
+          <a:prstGeom prst="rect">
+            <a:avLst/>
+          </a:prstGeom>
+          <a:noFill/>
+          <a:ln/>
+        </p:spPr>
+        <p:txBody>
+          <a:bodyPr wrap="square" lIns="0" tIns="0" rIns="0" bIns="0" rtlCol="0" anchor="ctr"/>
+          <a:lstStyle/>
+          <a:p>
+            <a:pPr algn="ctr" indent="0" marL="0">
+              <a:buNone/>
+            </a:pPr>
+            <a:r>
+              <a:rPr lang="en-US" sz="1600" b="1" dirty="0">
+                <a:solidFill>
+                  <a:schemeClr val="bg1"/>
+                </a:solidFill>
+              </a:rPr>
+              <a:t>4</a:t>
+            </a:r>
+            <a:endParaRPr lang="en-US" sz="1600" dirty="0"/>
+          </a:p>
+        </p:txBody>
+      </p:sp>
+      <p:sp>
+        <p:nvSpPr>
+          <p:cNvPr id="17" name="cn-3-t"/>
+          <p:cNvSpPr txBox="1"/>
+          <p:nvPr/>
+        </p:nvSpPr>
+        <p:spPr>
+          <a:xfrm>
+            <a:off x="7955280" y="4169664"/>
+            <a:ext cx="3657600" cy="822960"/>
+          </a:xfrm>
+          <a:prstGeom prst="rect">
+            <a:avLst/>
+          </a:prstGeom>
+          <a:noFill/>
+          <a:ln/>
+        </p:spPr>
+        <p:txBody>
+          <a:bodyPr wrap="square" lIns="0" tIns="0" rIns="0" bIns="0" rtlCol="0" anchor="t"/>
+          <a:lstStyle/>
+          <a:p>
+            <a:pPr indent="0" marL="0">
+              <a:buNone/>
+            </a:pPr>
+            <a:r>
+              <a:rPr lang="en-US" sz="1400" b="1" dirty="0">
+                <a:solidFill>
+                  <a:schemeClr val="tx2"/>
+                </a:solidFill>
+                <a:latin typeface="Courier New" pitchFamily="34" charset="0"/>
+                <a:ea typeface="Courier New" pitchFamily="34" charset="-122"/>
+                <a:cs typeface="Courier New" pitchFamily="34" charset="-120"/>
+              </a:rPr>
+              <a:t>result</a:t>
+            </a:r>
+            <a:endParaRPr lang="en-US" sz="1400" dirty="0"/>
+          </a:p>
+          <a:p>
+            <a:pPr indent="0" marL="0">
+              <a:buNone/>
+            </a:pPr>
+            <a:r>
+              <a:rPr lang="en-US" sz="1400" dirty="0">
+                <a:solidFill>
+                  <a:schemeClr val="tx1"/>
+                </a:solidFill>
+              </a:rPr>
+              <a:t>Stop on failure. On success, navigate back to the list.</a:t>
+            </a:r>
+            <a:endParaRPr lang="en-US" sz="1400" dirty="0"/>
+          </a:p>
+        </p:txBody>
+      </p:sp>
+      <p:sp>
+        <p:nvSpPr>
+          <p:cNvPr id="18" name="no-list"/>
+          <p:cNvSpPr/>
+          <p:nvPr/>
+        </p:nvSpPr>
+        <p:spPr>
+          <a:xfrm>
+            <a:off x="7269480" y="5166360"/>
+            <a:ext cx="4343400" cy="1005840"/>
+          </a:xfrm>
+          <a:prstGeom prst="roundRect">
+            <a:avLst>
+              <a:gd name="adj" fmla="val 9091"/>
             </a:avLst>
           </a:prstGeom>
           <a:solidFill>
@@ -8778,39 +12115,14 @@
       </p:sp>
       <p:sp>
         <p:nvSpPr>
-          <p:cNvPr id="4" name="ngrx-badge"/>
-          <p:cNvSpPr/>
-          <p:nvPr/>
-        </p:nvSpPr>
-        <p:spPr>
-          <a:xfrm>
-            <a:off x="822960" y="1737360"/>
-            <a:ext cx="502920" cy="502920"/>
-          </a:xfrm>
-          <a:prstGeom prst="ellipse">
-            <a:avLst/>
-          </a:prstGeom>
-          <a:solidFill>
-            <a:schemeClr val="tx2"/>
-          </a:solidFill>
-          <a:ln w="12700">
-            <a:solidFill>
-              <a:schemeClr val="tx2"/>
-            </a:solidFill>
-            <a:prstDash val="solid"/>
-          </a:ln>
-        </p:spPr>
-      </p:sp>
-      <p:sp>
-        <p:nvSpPr>
-          <p:cNvPr id="5" name="ngrx-badge-text"/>
-          <p:cNvSpPr txBox="1"/>
-          <p:nvPr/>
-        </p:nvSpPr>
-        <p:spPr>
-          <a:xfrm>
-            <a:off x="822960" y="1737360"/>
-            <a:ext cx="502920" cy="502920"/>
+          <p:cNvPr id="19" name="no-list-text"/>
+          <p:cNvSpPr txBox="1"/>
+          <p:nvPr/>
+        </p:nvSpPr>
+        <p:spPr>
+          <a:xfrm>
+            <a:off x="7452360" y="5166360"/>
+            <a:ext cx="4023360" cy="1005840"/>
           </a:xfrm>
           <a:prstGeom prst="rect">
             <a:avLst/>
@@ -8822,548 +12134,29 @@
           <a:bodyPr wrap="square" lIns="0" tIns="0" rIns="0" bIns="0" rtlCol="0" anchor="ctr"/>
           <a:lstStyle/>
           <a:p>
-            <a:pPr algn="ctr" indent="0" marL="0">
-              <a:buNone/>
-            </a:pPr>
-            <a:r>
-              <a:rPr lang="en-US" sz="1600" b="1" dirty="0">
-                <a:solidFill>
-                  <a:schemeClr val="bg1"/>
-                </a:solidFill>
-              </a:rPr>
-              <a:t>S</a:t>
-            </a:r>
-            <a:endParaRPr lang="en-US" sz="1600" dirty="0"/>
-          </a:p>
-        </p:txBody>
-      </p:sp>
-      <p:sp>
-        <p:nvSpPr>
-          <p:cNvPr id="6" name="ngrx-title"/>
-          <p:cNvSpPr txBox="1"/>
-          <p:nvPr/>
-        </p:nvSpPr>
-        <p:spPr>
-          <a:xfrm>
-            <a:off x="1508760" y="1737360"/>
-            <a:ext cx="2377440" cy="502920"/>
-          </a:xfrm>
-          <a:prstGeom prst="rect">
-            <a:avLst/>
-          </a:prstGeom>
-          <a:noFill/>
-          <a:ln/>
-        </p:spPr>
-        <p:txBody>
-          <a:bodyPr wrap="square" lIns="0" tIns="0" rIns="0" bIns="0" rtlCol="0" anchor="ctr"/>
-          <a:lstStyle/>
-          <a:p>
             <a:pPr indent="0" marL="0">
               <a:buNone/>
             </a:pPr>
             <a:r>
-              <a:rPr lang="en-US" sz="1800" b="1" dirty="0">
+              <a:rPr lang="en-US" sz="1300" b="1" dirty="0">
                 <a:solidFill>
                   <a:schemeClr val="tx1"/>
                 </a:solidFill>
               </a:rPr>
-              <a:t>NgRx</a:t>
-            </a:r>
-            <a:endParaRPr lang="en-US" sz="1800" dirty="0"/>
-          </a:p>
-        </p:txBody>
-      </p:sp>
-      <p:sp>
-        <p:nvSpPr>
-          <p:cNvPr id="7" name="ngrx-body"/>
-          <p:cNvSpPr txBox="1"/>
-          <p:nvPr/>
-        </p:nvSpPr>
-        <p:spPr>
-          <a:xfrm>
-            <a:off x="822960" y="2377440"/>
-            <a:ext cx="3063240" cy="2468880"/>
-          </a:xfrm>
-          <a:prstGeom prst="rect">
-            <a:avLst/>
-          </a:prstGeom>
-          <a:noFill/>
-          <a:ln/>
-        </p:spPr>
-        <p:txBody>
-          <a:bodyPr wrap="square" lIns="0" tIns="0" rIns="0" bIns="0" rtlCol="0" anchor="t"/>
-          <a:lstStyle/>
-          <a:p>
-            <a:pPr marL="342900" indent="-342900">
-              <a:spcAft>
-                <a:spcPts val="400"/>
-              </a:spcAft>
-              <a:buSzPct val="100000"/>
-              <a:buChar char="•"/>
-            </a:pPr>
-            <a:r>
-              <a:rPr lang="en-US" sz="1500" dirty="0">
+              <a:t>Not in the page: </a:t>
+            </a:r>
+            <a:pPr indent="0" marL="0">
+              <a:buNone/>
+            </a:pPr>
+            <a:r>
+              <a:rPr lang="en-US" sz="1300" dirty="0">
                 <a:solidFill>
                   <a:schemeClr val="tx1"/>
                 </a:solidFill>
               </a:rPr>
-              <a:t>core/store/&lt;feature&gt;/ flat files: actions, reducer, selectors, state</a:t>
-            </a:r>
-            <a:endParaRPr lang="en-US" sz="1500" dirty="0"/>
-          </a:p>
-          <a:p>
-            <a:pPr marL="342900" indent="-342900">
-              <a:spcAft>
-                <a:spcPts val="400"/>
-              </a:spcAft>
-              <a:buSzPct val="100000"/>
-              <a:buChar char="•"/>
-            </a:pPr>
-            <a:r>
-              <a:rPr lang="en-US" sz="1500" dirty="0">
-                <a:solidFill>
-                  <a:schemeClr val="tx1"/>
-                </a:solidFill>
-              </a:rPr>
-              <a:t>Write to the store after a successful HTTP call</a:t>
-            </a:r>
-            <a:endParaRPr lang="en-US" sz="1500" dirty="0"/>
-          </a:p>
-          <a:p>
-            <a:pPr marL="342900" indent="-342900">
-              <a:spcAft>
-                <a:spcPts val="400"/>
-              </a:spcAft>
-              <a:buSzPct val="100000"/>
-              <a:buChar char="•"/>
-            </a:pPr>
-            <a:r>
-              <a:rPr lang="en-US" sz="1500" dirty="0">
-                <a:solidFill>
-                  <a:schemeClr val="tx1"/>
-                </a:solidFill>
-              </a:rPr>
-              <a:t>Clear caches on logout</a:t>
-            </a:r>
-            <a:endParaRPr lang="en-US" sz="1500" dirty="0"/>
-          </a:p>
-        </p:txBody>
-      </p:sp>
-      <p:sp>
-        <p:nvSpPr>
-          <p:cNvPr id="8" name="i18n-card"/>
-          <p:cNvSpPr/>
-          <p:nvPr/>
-        </p:nvSpPr>
-        <p:spPr>
-          <a:xfrm>
-            <a:off x="4297680" y="1463040"/>
-            <a:ext cx="3566160" cy="3566160"/>
-          </a:xfrm>
-          <a:prstGeom prst="roundRect">
-            <a:avLst>
-              <a:gd name="adj" fmla="val 3077"/>
-            </a:avLst>
-          </a:prstGeom>
-          <a:solidFill>
-            <a:schemeClr val="bg2"/>
-          </a:solidFill>
-          <a:ln w="12700">
-            <a:solidFill>
-              <a:schemeClr val="bg2"/>
-            </a:solidFill>
-            <a:prstDash val="solid"/>
-          </a:ln>
-        </p:spPr>
-      </p:sp>
-      <p:sp>
-        <p:nvSpPr>
-          <p:cNvPr id="9" name="i18n-badge"/>
-          <p:cNvSpPr/>
-          <p:nvPr/>
-        </p:nvSpPr>
-        <p:spPr>
-          <a:xfrm>
-            <a:off x="4572000" y="1737360"/>
-            <a:ext cx="502920" cy="502920"/>
-          </a:xfrm>
-          <a:prstGeom prst="ellipse">
-            <a:avLst/>
-          </a:prstGeom>
-          <a:solidFill>
-            <a:schemeClr val="accent2"/>
-          </a:solidFill>
-          <a:ln w="12700">
-            <a:solidFill>
-              <a:schemeClr val="accent2"/>
-            </a:solidFill>
-            <a:prstDash val="solid"/>
-          </a:ln>
-        </p:spPr>
-      </p:sp>
-      <p:sp>
-        <p:nvSpPr>
-          <p:cNvPr id="10" name="i18n-badge-text"/>
-          <p:cNvSpPr txBox="1"/>
-          <p:nvPr/>
-        </p:nvSpPr>
-        <p:spPr>
-          <a:xfrm>
-            <a:off x="4572000" y="1737360"/>
-            <a:ext cx="502920" cy="502920"/>
-          </a:xfrm>
-          <a:prstGeom prst="rect">
-            <a:avLst/>
-          </a:prstGeom>
-          <a:noFill/>
-          <a:ln/>
-        </p:spPr>
-        <p:txBody>
-          <a:bodyPr wrap="square" lIns="0" tIns="0" rIns="0" bIns="0" rtlCol="0" anchor="ctr"/>
-          <a:lstStyle/>
-          <a:p>
-            <a:pPr algn="ctr" indent="0" marL="0">
-              <a:buNone/>
-            </a:pPr>
-            <a:r>
-              <a:rPr lang="en-US" sz="1600" b="1" dirty="0">
-                <a:solidFill>
-                  <a:schemeClr val="bg1"/>
-                </a:solidFill>
-              </a:rPr>
-              <a:t>T</a:t>
-            </a:r>
-            <a:endParaRPr lang="en-US" sz="1600" dirty="0"/>
-          </a:p>
-        </p:txBody>
-      </p:sp>
-      <p:sp>
-        <p:nvSpPr>
-          <p:cNvPr id="11" name="i18n-title"/>
-          <p:cNvSpPr txBox="1"/>
-          <p:nvPr/>
-        </p:nvSpPr>
-        <p:spPr>
-          <a:xfrm>
-            <a:off x="5257800" y="1737360"/>
-            <a:ext cx="2377440" cy="502920"/>
-          </a:xfrm>
-          <a:prstGeom prst="rect">
-            <a:avLst/>
-          </a:prstGeom>
-          <a:noFill/>
-          <a:ln/>
-        </p:spPr>
-        <p:txBody>
-          <a:bodyPr wrap="square" lIns="0" tIns="0" rIns="0" bIns="0" rtlCol="0" anchor="ctr"/>
-          <a:lstStyle/>
-          <a:p>
-            <a:pPr indent="0" marL="0">
-              <a:buNone/>
-            </a:pPr>
-            <a:r>
-              <a:rPr lang="en-US" sz="1800" b="1" dirty="0">
-                <a:solidFill>
-                  <a:schemeClr val="tx1"/>
-                </a:solidFill>
-              </a:rPr>
-              <a:t>Translations</a:t>
-            </a:r>
-            <a:endParaRPr lang="en-US" sz="1800" dirty="0"/>
-          </a:p>
-        </p:txBody>
-      </p:sp>
-      <p:sp>
-        <p:nvSpPr>
-          <p:cNvPr id="12" name="i18n-body"/>
-          <p:cNvSpPr txBox="1"/>
-          <p:nvPr/>
-        </p:nvSpPr>
-        <p:spPr>
-          <a:xfrm>
-            <a:off x="4572000" y="2377440"/>
-            <a:ext cx="3063240" cy="2468880"/>
-          </a:xfrm>
-          <a:prstGeom prst="rect">
-            <a:avLst/>
-          </a:prstGeom>
-          <a:noFill/>
-          <a:ln/>
-        </p:spPr>
-        <p:txBody>
-          <a:bodyPr wrap="square" lIns="0" tIns="0" rIns="0" bIns="0" rtlCol="0" anchor="t"/>
-          <a:lstStyle/>
-          <a:p>
-            <a:pPr marL="342900" indent="-342900">
-              <a:spcAft>
-                <a:spcPts val="400"/>
-              </a:spcAft>
-              <a:buSzPct val="100000"/>
-              <a:buChar char="•"/>
-            </a:pPr>
-            <a:r>
-              <a:rPr lang="en-US" sz="1500" dirty="0">
-                <a:solidFill>
-                  <a:schemeClr val="tx1"/>
-                </a:solidFill>
-              </a:rPr>
-              <a:t>i18n attribute or $localize with a stable @@jobseeker.* ID</a:t>
-            </a:r>
-            <a:endParaRPr lang="en-US" sz="1500" dirty="0"/>
-          </a:p>
-          <a:p>
-            <a:pPr marL="342900" indent="-342900">
-              <a:spcAft>
-                <a:spcPts val="400"/>
-              </a:spcAft>
-              <a:buSzPct val="100000"/>
-              <a:buChar char="•"/>
-            </a:pPr>
-            <a:r>
-              <a:rPr lang="en-US" sz="1500" dirty="0">
-                <a:solidFill>
-                  <a:schemeClr val="tx1"/>
-                </a:solidFill>
-              </a:rPr>
-              <a:t>Arabic in core/translations/&lt;area&gt;/messages.ar.json</a:t>
-            </a:r>
-            <a:endParaRPr lang="en-US" sz="1500" dirty="0"/>
-          </a:p>
-          <a:p>
-            <a:pPr marL="342900" indent="-342900">
-              <a:spcAft>
-                <a:spcPts val="400"/>
-              </a:spcAft>
-              <a:buSzPct val="100000"/>
-              <a:buChar char="•"/>
-            </a:pPr>
-            <a:r>
-              <a:rPr lang="en-US" sz="1500" dirty="0">
-                <a:solidFill>
-                  <a:schemeClr val="tx1"/>
-                </a:solidFill>
-              </a:rPr>
-              <a:t>Register new folders in merge-ar-translations.ts</a:t>
-            </a:r>
-            <a:endParaRPr lang="en-US" sz="1500" dirty="0"/>
-          </a:p>
-        </p:txBody>
-      </p:sp>
-      <p:sp>
-        <p:nvSpPr>
-          <p:cNvPr id="13" name="bilingual-card"/>
-          <p:cNvSpPr/>
-          <p:nvPr/>
-        </p:nvSpPr>
-        <p:spPr>
-          <a:xfrm>
-            <a:off x="8046720" y="1463040"/>
-            <a:ext cx="3566160" cy="3566160"/>
-          </a:xfrm>
-          <a:prstGeom prst="roundRect">
-            <a:avLst>
-              <a:gd name="adj" fmla="val 3077"/>
-            </a:avLst>
-          </a:prstGeom>
-          <a:solidFill>
-            <a:schemeClr val="bg2"/>
-          </a:solidFill>
-          <a:ln w="12700">
-            <a:solidFill>
-              <a:schemeClr val="bg2"/>
-            </a:solidFill>
-            <a:prstDash val="solid"/>
-          </a:ln>
-        </p:spPr>
-      </p:sp>
-      <p:sp>
-        <p:nvSpPr>
-          <p:cNvPr id="14" name="bilingual-badge"/>
-          <p:cNvSpPr/>
-          <p:nvPr/>
-        </p:nvSpPr>
-        <p:spPr>
-          <a:xfrm>
-            <a:off x="8321040" y="1737360"/>
-            <a:ext cx="502920" cy="502920"/>
-          </a:xfrm>
-          <a:prstGeom prst="ellipse">
-            <a:avLst/>
-          </a:prstGeom>
-          <a:solidFill>
-            <a:schemeClr val="tx2"/>
-          </a:solidFill>
-          <a:ln w="12700">
-            <a:solidFill>
-              <a:schemeClr val="tx2"/>
-            </a:solidFill>
-            <a:prstDash val="solid"/>
-          </a:ln>
-        </p:spPr>
-      </p:sp>
-      <p:sp>
-        <p:nvSpPr>
-          <p:cNvPr id="15" name="bilingual-badge-text"/>
-          <p:cNvSpPr txBox="1"/>
-          <p:nvPr/>
-        </p:nvSpPr>
-        <p:spPr>
-          <a:xfrm>
-            <a:off x="8321040" y="1737360"/>
-            <a:ext cx="502920" cy="502920"/>
-          </a:xfrm>
-          <a:prstGeom prst="rect">
-            <a:avLst/>
-          </a:prstGeom>
-          <a:noFill/>
-          <a:ln/>
-        </p:spPr>
-        <p:txBody>
-          <a:bodyPr wrap="square" lIns="0" tIns="0" rIns="0" bIns="0" rtlCol="0" anchor="ctr"/>
-          <a:lstStyle/>
-          <a:p>
-            <a:pPr algn="ctr" indent="0" marL="0">
-              <a:buNone/>
-            </a:pPr>
-            <a:r>
-              <a:rPr lang="en-US" sz="1600" b="1" dirty="0">
-                <a:solidFill>
-                  <a:schemeClr val="bg1"/>
-                </a:solidFill>
-              </a:rPr>
-              <a:t>B</a:t>
-            </a:r>
-            <a:endParaRPr lang="en-US" sz="1600" dirty="0"/>
-          </a:p>
-        </p:txBody>
-      </p:sp>
-      <p:sp>
-        <p:nvSpPr>
-          <p:cNvPr id="16" name="bilingual-title"/>
-          <p:cNvSpPr txBox="1"/>
-          <p:nvPr/>
-        </p:nvSpPr>
-        <p:spPr>
-          <a:xfrm>
-            <a:off x="9006840" y="1737360"/>
-            <a:ext cx="2377440" cy="502920"/>
-          </a:xfrm>
-          <a:prstGeom prst="rect">
-            <a:avLst/>
-          </a:prstGeom>
-          <a:noFill/>
-          <a:ln/>
-        </p:spPr>
-        <p:txBody>
-          <a:bodyPr wrap="square" lIns="0" tIns="0" rIns="0" bIns="0" rtlCol="0" anchor="ctr"/>
-          <a:lstStyle/>
-          <a:p>
-            <a:pPr indent="0" marL="0">
-              <a:buNone/>
-            </a:pPr>
-            <a:r>
-              <a:rPr lang="en-US" sz="1800" b="1" dirty="0">
-                <a:solidFill>
-                  <a:schemeClr val="tx1"/>
-                </a:solidFill>
-              </a:rPr>
-              <a:t>Bilingual data</a:t>
-            </a:r>
-            <a:endParaRPr lang="en-US" sz="1800" dirty="0"/>
-          </a:p>
-        </p:txBody>
-      </p:sp>
-      <p:sp>
-        <p:nvSpPr>
-          <p:cNvPr id="17" name="bilingual-body"/>
-          <p:cNvSpPr txBox="1"/>
-          <p:nvPr/>
-        </p:nvSpPr>
-        <p:spPr>
-          <a:xfrm>
-            <a:off x="8321040" y="2377440"/>
-            <a:ext cx="3063240" cy="2468880"/>
-          </a:xfrm>
-          <a:prstGeom prst="rect">
-            <a:avLst/>
-          </a:prstGeom>
-          <a:noFill/>
-          <a:ln/>
-        </p:spPr>
-        <p:txBody>
-          <a:bodyPr wrap="square" lIns="0" tIns="0" rIns="0" bIns="0" rtlCol="0" anchor="t"/>
-          <a:lstStyle/>
-          <a:p>
-            <a:pPr marL="342900" indent="-342900">
-              <a:spcAft>
-                <a:spcPts val="400"/>
-              </a:spcAft>
-              <a:buSzPct val="100000"/>
-              <a:buChar char="•"/>
-            </a:pPr>
-            <a:r>
-              <a:rPr lang="en-US" sz="1500" dirty="0">
-                <a:solidFill>
-                  <a:schemeClr val="tx1"/>
-                </a:solidFill>
-              </a:rPr>
-              <a:t>Fields come in pairs: title_en / title_ar</a:t>
-            </a:r>
-            <a:endParaRPr lang="en-US" sz="1500" dirty="0"/>
-          </a:p>
-          <a:p>
-            <a:pPr marL="342900" indent="-342900">
-              <a:spcAft>
-                <a:spcPts val="400"/>
-              </a:spcAft>
-              <a:buSzPct val="100000"/>
-              <a:buChar char="•"/>
-            </a:pPr>
-            <a:r>
-              <a:rPr lang="en-US" sz="1500" dirty="0">
-                <a:solidFill>
-                  <a:schemeClr val="tx1"/>
-                </a:solidFill>
-              </a:rPr>
-              <a:t>Forms show both inputs</a:t>
-            </a:r>
-            <a:endParaRPr lang="en-US" sz="1500" dirty="0"/>
-          </a:p>
-          <a:p>
-            <a:pPr marL="342900" indent="-342900">
-              <a:spcAft>
-                <a:spcPts val="400"/>
-              </a:spcAft>
-              <a:buSzPct val="100000"/>
-              <a:buChar char="•"/>
-            </a:pPr>
-            <a:r>
-              <a:rPr lang="en-US" sz="1500" dirty="0">
-                <a:solidFill>
-                  <a:schemeClr val="tx1"/>
-                </a:solidFill>
-              </a:rPr>
-              <a:t>Read-only views show only the active locale</a:t>
-            </a:r>
-            <a:endParaRPr lang="en-US" sz="1500" dirty="0"/>
-          </a:p>
-          <a:p>
-            <a:pPr marL="342900" indent="-342900">
-              <a:spcAft>
-                <a:spcPts val="400"/>
-              </a:spcAft>
-              <a:buSzPct val="100000"/>
-              <a:buChar char="•"/>
-            </a:pPr>
-            <a:r>
-              <a:rPr lang="en-US" sz="1500" dirty="0">
-                <a:solidFill>
-                  <a:schemeClr val="tx1"/>
-                </a:solidFill>
-              </a:rPr>
-              <a:t>RTL / LTR set by LocaleService</a:t>
-            </a:r>
-            <a:endParaRPr lang="en-US" sz="1500" dirty="0"/>
+              <a:t>try/catch, loading flags, toast calls, markAllAsTouched. Errors show via {{ control | validationMessage }}.</a:t>
+            </a:r>
+            <a:endParaRPr lang="en-US" sz="1300" dirty="0"/>
           </a:p>
         </p:txBody>
       </p:sp>
@@ -9469,7 +12262,7 @@
                   <a:schemeClr val="tx2"/>
                 </a:solidFill>
               </a:rPr>
-              <a:t>List pages look and behave the same</a:t>
+              <a:t>One loading overlay, one error path</a:t>
             </a:r>
             <a:endParaRPr lang="en-US" sz="3600" dirty="0"/>
           </a:p>
@@ -9477,227 +12270,22 @@
       </p:sp>
       <p:sp>
         <p:nvSpPr>
-          <p:cNvPr id="3" name="wf-shell"/>
+          <p:cNvPr id="3" name="loading-card"/>
           <p:cNvSpPr/>
           <p:nvPr/>
         </p:nvSpPr>
         <p:spPr>
           <a:xfrm>
             <a:off x="548640" y="1463040"/>
-            <a:ext cx="6583680" cy="4480560"/>
+            <a:ext cx="5394960" cy="3566160"/>
           </a:xfrm>
           <a:prstGeom prst="roundRect">
             <a:avLst>
-              <a:gd name="adj" fmla="val 2449"/>
+              <a:gd name="adj" fmla="val 3077"/>
             </a:avLst>
           </a:prstGeom>
           <a:solidFill>
             <a:schemeClr val="bg2"/>
-          </a:solidFill>
-          <a:ln w="12700">
-            <a:solidFill>
-              <a:schemeClr val="accent3"/>
-            </a:solidFill>
-            <a:prstDash val="solid"/>
-          </a:ln>
-        </p:spPr>
-      </p:sp>
-      <p:sp>
-        <p:nvSpPr>
-          <p:cNvPr id="4" name="wf-title"/>
-          <p:cNvSpPr txBox="1"/>
-          <p:nvPr/>
-        </p:nvSpPr>
-        <p:spPr>
-          <a:xfrm>
-            <a:off x="822960" y="1691640"/>
-            <a:ext cx="2743200" cy="411480"/>
-          </a:xfrm>
-          <a:prstGeom prst="rect">
-            <a:avLst/>
-          </a:prstGeom>
-          <a:noFill/>
-          <a:ln/>
-        </p:spPr>
-        <p:txBody>
-          <a:bodyPr wrap="square" lIns="0" tIns="0" rIns="0" bIns="0" rtlCol="0" anchor="ctr"/>
-          <a:lstStyle/>
-          <a:p>
-            <a:pPr indent="0" marL="0">
-              <a:buNone/>
-            </a:pPr>
-            <a:r>
-              <a:rPr lang="en-US" sz="1600" b="1" dirty="0">
-                <a:solidFill>
-                  <a:schemeClr val="tx1"/>
-                </a:solidFill>
-              </a:rPr>
-              <a:t>Page title</a:t>
-            </a:r>
-            <a:endParaRPr lang="en-US" sz="1600" dirty="0"/>
-          </a:p>
-        </p:txBody>
-      </p:sp>
-      <p:sp>
-        <p:nvSpPr>
-          <p:cNvPr id="5" name="wf-btn-0"/>
-          <p:cNvSpPr/>
-          <p:nvPr/>
-        </p:nvSpPr>
-        <p:spPr>
-          <a:xfrm>
-            <a:off x="5212080" y="1664208"/>
-            <a:ext cx="457200" cy="457200"/>
-          </a:xfrm>
-          <a:prstGeom prst="roundRect">
-            <a:avLst>
-              <a:gd name="adj" fmla="val 16000"/>
-            </a:avLst>
-          </a:prstGeom>
-          <a:solidFill>
-            <a:schemeClr val="bg1"/>
-          </a:solidFill>
-          <a:ln w="12700">
-            <a:solidFill>
-              <a:schemeClr val="accent3"/>
-            </a:solidFill>
-            <a:prstDash val="solid"/>
-          </a:ln>
-        </p:spPr>
-      </p:sp>
-      <p:sp>
-        <p:nvSpPr>
-          <p:cNvPr id="6" name="wf-btn-1"/>
-          <p:cNvSpPr/>
-          <p:nvPr/>
-        </p:nvSpPr>
-        <p:spPr>
-          <a:xfrm>
-            <a:off x="5760720" y="1664208"/>
-            <a:ext cx="457200" cy="457200"/>
-          </a:xfrm>
-          <a:prstGeom prst="roundRect">
-            <a:avLst>
-              <a:gd name="adj" fmla="val 16000"/>
-            </a:avLst>
-          </a:prstGeom>
-          <a:solidFill>
-            <a:schemeClr val="bg1"/>
-          </a:solidFill>
-          <a:ln w="12700">
-            <a:solidFill>
-              <a:schemeClr val="accent3"/>
-            </a:solidFill>
-            <a:prstDash val="solid"/>
-          </a:ln>
-        </p:spPr>
-      </p:sp>
-      <p:sp>
-        <p:nvSpPr>
-          <p:cNvPr id="7" name="wf-btn-2"/>
-          <p:cNvSpPr/>
-          <p:nvPr/>
-        </p:nvSpPr>
-        <p:spPr>
-          <a:xfrm>
-            <a:off x="6309360" y="1664208"/>
-            <a:ext cx="457200" cy="457200"/>
-          </a:xfrm>
-          <a:prstGeom prst="roundRect">
-            <a:avLst>
-              <a:gd name="adj" fmla="val 16000"/>
-            </a:avLst>
-          </a:prstGeom>
-          <a:solidFill>
-            <a:schemeClr val="accent3"/>
-          </a:solidFill>
-          <a:ln w="12700">
-            <a:solidFill>
-              <a:schemeClr val="accent3"/>
-            </a:solidFill>
-            <a:prstDash val="solid"/>
-          </a:ln>
-        </p:spPr>
-      </p:sp>
-      <p:sp>
-        <p:nvSpPr>
-          <p:cNvPr id="8" name="wf-search"/>
-          <p:cNvSpPr/>
-          <p:nvPr/>
-        </p:nvSpPr>
-        <p:spPr>
-          <a:xfrm>
-            <a:off x="822960" y="2331720"/>
-            <a:ext cx="6035040" cy="457200"/>
-          </a:xfrm>
-          <a:prstGeom prst="roundRect">
-            <a:avLst>
-              <a:gd name="adj" fmla="val 16000"/>
-            </a:avLst>
-          </a:prstGeom>
-          <a:solidFill>
-            <a:schemeClr val="bg1"/>
-          </a:solidFill>
-          <a:ln w="12700">
-            <a:solidFill>
-              <a:schemeClr val="accent3"/>
-            </a:solidFill>
-            <a:prstDash val="solid"/>
-          </a:ln>
-        </p:spPr>
-      </p:sp>
-      <p:sp>
-        <p:nvSpPr>
-          <p:cNvPr id="9" name="wf-search-text"/>
-          <p:cNvSpPr txBox="1"/>
-          <p:nvPr/>
-        </p:nvSpPr>
-        <p:spPr>
-          <a:xfrm>
-            <a:off x="960120" y="2331720"/>
-            <a:ext cx="3657600" cy="457200"/>
-          </a:xfrm>
-          <a:prstGeom prst="rect">
-            <a:avLst/>
-          </a:prstGeom>
-          <a:noFill/>
-          <a:ln/>
-        </p:spPr>
-        <p:txBody>
-          <a:bodyPr wrap="square" lIns="0" tIns="0" rIns="0" bIns="0" rtlCol="0" anchor="ctr"/>
-          <a:lstStyle/>
-          <a:p>
-            <a:pPr indent="0" marL="0">
-              <a:buNone/>
-            </a:pPr>
-            <a:r>
-              <a:rPr lang="en-US" sz="1200" dirty="0">
-                <a:solidFill>
-                  <a:schemeClr val="accent6"/>
-                </a:solidFill>
-              </a:rPr>
-              <a:t>Search… (runs as you type)</a:t>
-            </a:r>
-            <a:endParaRPr lang="en-US" sz="1200" dirty="0"/>
-          </a:p>
-        </p:txBody>
-      </p:sp>
-      <p:sp>
-        <p:nvSpPr>
-          <p:cNvPr id="10" name="wf-row-0"/>
-          <p:cNvSpPr/>
-          <p:nvPr/>
-        </p:nvSpPr>
-        <p:spPr>
-          <a:xfrm>
-            <a:off x="822960" y="3017520"/>
-            <a:ext cx="6035040" cy="365760"/>
-          </a:xfrm>
-          <a:prstGeom prst="rect">
-            <a:avLst/>
-          </a:prstGeom>
-          <a:solidFill>
-            <a:schemeClr val="tx2"/>
           </a:solidFill>
           <a:ln w="12700">
             <a:solidFill>
@@ -9709,14 +12297,39 @@
       </p:sp>
       <p:sp>
         <p:nvSpPr>
-          <p:cNvPr id="11" name="wf-row-0-n"/>
-          <p:cNvSpPr txBox="1"/>
-          <p:nvPr/>
-        </p:nvSpPr>
-        <p:spPr>
-          <a:xfrm>
-            <a:off x="914400" y="3017520"/>
-            <a:ext cx="365760" cy="365760"/>
+          <p:cNvPr id="4" name="loading-badge"/>
+          <p:cNvSpPr/>
+          <p:nvPr/>
+        </p:nvSpPr>
+        <p:spPr>
+          <a:xfrm>
+            <a:off x="822960" y="1737360"/>
+            <a:ext cx="502920" cy="502920"/>
+          </a:xfrm>
+          <a:prstGeom prst="ellipse">
+            <a:avLst/>
+          </a:prstGeom>
+          <a:solidFill>
+            <a:schemeClr val="tx2"/>
+          </a:solidFill>
+          <a:ln w="12700">
+            <a:solidFill>
+              <a:schemeClr val="tx2"/>
+            </a:solidFill>
+            <a:prstDash val="solid"/>
+          </a:ln>
+        </p:spPr>
+      </p:sp>
+      <p:sp>
+        <p:nvSpPr>
+          <p:cNvPr id="5" name="loading-badge-text"/>
+          <p:cNvSpPr txBox="1"/>
+          <p:nvPr/>
+        </p:nvSpPr>
+        <p:spPr>
+          <a:xfrm>
+            <a:off x="822960" y="1737360"/>
+            <a:ext cx="502920" cy="502920"/>
           </a:xfrm>
           <a:prstGeom prst="rect">
             <a:avLst/>
@@ -9728,37 +12341,169 @@
           <a:bodyPr wrap="square" lIns="0" tIns="0" rIns="0" bIns="0" rtlCol="0" anchor="ctr"/>
           <a:lstStyle/>
           <a:p>
+            <a:pPr algn="ctr" indent="0" marL="0">
+              <a:buNone/>
+            </a:pPr>
+            <a:r>
+              <a:rPr lang="en-US" sz="1600" b="1" dirty="0">
+                <a:solidFill>
+                  <a:schemeClr val="bg1"/>
+                </a:solidFill>
+              </a:rPr>
+              <a:t>L</a:t>
+            </a:r>
+            <a:endParaRPr lang="en-US" sz="1600" dirty="0"/>
+          </a:p>
+        </p:txBody>
+      </p:sp>
+      <p:sp>
+        <p:nvSpPr>
+          <p:cNvPr id="6" name="loading-title"/>
+          <p:cNvSpPr txBox="1"/>
+          <p:nvPr/>
+        </p:nvSpPr>
+        <p:spPr>
+          <a:xfrm>
+            <a:off x="1508760" y="1737360"/>
+            <a:ext cx="4206240" cy="502920"/>
+          </a:xfrm>
+          <a:prstGeom prst="rect">
+            <a:avLst/>
+          </a:prstGeom>
+          <a:noFill/>
+          <a:ln/>
+        </p:spPr>
+        <p:txBody>
+          <a:bodyPr wrap="square" lIns="0" tIns="0" rIns="0" bIns="0" rtlCol="0" anchor="ctr"/>
+          <a:lstStyle/>
+          <a:p>
             <a:pPr indent="0" marL="0">
               <a:buNone/>
             </a:pPr>
             <a:r>
-              <a:rPr lang="en-US" sz="1200" b="1" dirty="0">
-                <a:solidFill>
-                  <a:schemeClr val="bg1"/>
-                </a:solidFill>
-              </a:rPr>
-              <a:t>#</a:t>
-            </a:r>
-            <a:endParaRPr lang="en-US" sz="1200" dirty="0"/>
-          </a:p>
-        </p:txBody>
-      </p:sp>
-      <p:sp>
-        <p:nvSpPr>
-          <p:cNvPr id="12" name="wf-row-1"/>
+              <a:rPr lang="en-US" sz="1800" b="1" dirty="0">
+                <a:solidFill>
+                  <a:schemeClr val="tx1"/>
+                </a:solidFill>
+              </a:rPr>
+              <a:t>Loading (uiAsync)</a:t>
+            </a:r>
+            <a:endParaRPr lang="en-US" sz="1800" dirty="0"/>
+          </a:p>
+        </p:txBody>
+      </p:sp>
+      <p:sp>
+        <p:nvSpPr>
+          <p:cNvPr id="7" name="loading-body"/>
+          <p:cNvSpPr txBox="1"/>
+          <p:nvPr/>
+        </p:nvSpPr>
+        <p:spPr>
+          <a:xfrm>
+            <a:off x="822960" y="2377440"/>
+            <a:ext cx="4892040" cy="2468880"/>
+          </a:xfrm>
+          <a:prstGeom prst="rect">
+            <a:avLst/>
+          </a:prstGeom>
+          <a:noFill/>
+          <a:ln/>
+        </p:spPr>
+        <p:txBody>
+          <a:bodyPr wrap="square" lIns="0" tIns="0" rIns="0" bIns="0" rtlCol="0" anchor="t"/>
+          <a:lstStyle/>
+          <a:p>
+            <a:pPr marL="342900" indent="-342900">
+              <a:spcAft>
+                <a:spcPts val="400"/>
+              </a:spcAft>
+              <a:buSzPct val="100000"/>
+              <a:buChar char="•"/>
+            </a:pPr>
+            <a:r>
+              <a:rPr lang="en-US" sz="1600" dirty="0">
+                <a:solidFill>
+                  <a:schemeClr val="tx1"/>
+                </a:solidFill>
+              </a:rPr>
+              <a:t>AsyncExecutorService.execute() increments uiAsync.pendingDepth</a:t>
+            </a:r>
+            <a:endParaRPr lang="en-US" sz="1600" dirty="0"/>
+          </a:p>
+          <a:p>
+            <a:pPr marL="342900" indent="-342900">
+              <a:spcAft>
+                <a:spcPts val="400"/>
+              </a:spcAft>
+              <a:buSzPct val="100000"/>
+              <a:buChar char="•"/>
+            </a:pPr>
+            <a:r>
+              <a:rPr lang="en-US" sz="1600" dirty="0">
+                <a:solidFill>
+                  <a:schemeClr val="tx1"/>
+                </a:solidFill>
+              </a:rPr>
+              <a:t>MainLayout shows the blocking spinner while work is pending</a:t>
+            </a:r>
+            <a:endParaRPr lang="en-US" sz="1600" dirty="0"/>
+          </a:p>
+          <a:p>
+            <a:pPr marL="342900" indent="-342900">
+              <a:spcAft>
+                <a:spcPts val="400"/>
+              </a:spcAft>
+              <a:buSzPct val="100000"/>
+              <a:buChar char="•"/>
+            </a:pPr>
+            <a:r>
+              <a:rPr lang="en-US" sz="1600" dirty="0">
+                <a:solidFill>
+                  <a:schemeClr val="tx1"/>
+                </a:solidFill>
+              </a:rPr>
+              <a:t>Fetches: recordSuccess false; mutations: success toast</a:t>
+            </a:r>
+            <a:endParaRPr lang="en-US" sz="1600" dirty="0"/>
+          </a:p>
+          <a:p>
+            <a:pPr marL="342900" indent="-342900">
+              <a:spcAft>
+                <a:spcPts val="400"/>
+              </a:spcAft>
+              <a:buSzPct val="100000"/>
+              <a:buChar char="•"/>
+            </a:pPr>
+            <a:r>
+              <a:rPr lang="en-US" sz="1600" dirty="0">
+                <a:solidFill>
+                  <a:schemeClr val="tx1"/>
+                </a:solidFill>
+              </a:rPr>
+              <a:t>No component-level "Loading…" rows or spinners</a:t>
+            </a:r>
+            <a:endParaRPr lang="en-US" sz="1600" dirty="0"/>
+          </a:p>
+        </p:txBody>
+      </p:sp>
+      <p:sp>
+        <p:nvSpPr>
+          <p:cNvPr id="8" name="errors-card"/>
           <p:cNvSpPr/>
           <p:nvPr/>
         </p:nvSpPr>
         <p:spPr>
           <a:xfrm>
-            <a:off x="822960" y="3429000"/>
-            <a:ext cx="6035040" cy="365760"/>
-          </a:xfrm>
-          <a:prstGeom prst="rect">
-            <a:avLst/>
+            <a:off x="6217920" y="1463040"/>
+            <a:ext cx="5394960" cy="3566160"/>
+          </a:xfrm>
+          <a:prstGeom prst="roundRect">
+            <a:avLst>
+              <a:gd name="adj" fmla="val 3077"/>
+            </a:avLst>
           </a:prstGeom>
           <a:solidFill>
-            <a:schemeClr val="bg1"/>
+            <a:schemeClr val="bg2"/>
           </a:solidFill>
           <a:ln w="12700">
             <a:solidFill>
@@ -9770,60 +12515,24 @@
       </p:sp>
       <p:sp>
         <p:nvSpPr>
-          <p:cNvPr id="13" name="wf-row-1-n"/>
-          <p:cNvSpPr txBox="1"/>
-          <p:nvPr/>
-        </p:nvSpPr>
-        <p:spPr>
-          <a:xfrm>
-            <a:off x="914400" y="3429000"/>
-            <a:ext cx="365760" cy="365760"/>
-          </a:xfrm>
-          <a:prstGeom prst="rect">
-            <a:avLst/>
-          </a:prstGeom>
-          <a:noFill/>
-          <a:ln/>
-        </p:spPr>
-        <p:txBody>
-          <a:bodyPr wrap="square" lIns="0" tIns="0" rIns="0" bIns="0" rtlCol="0" anchor="ctr"/>
-          <a:lstStyle/>
-          <a:p>
-            <a:pPr indent="0" marL="0">
-              <a:buNone/>
-            </a:pPr>
-            <a:r>
-              <a:rPr lang="en-US" sz="1200" dirty="0">
-                <a:solidFill>
-                  <a:schemeClr val="tx1"/>
-                </a:solidFill>
-              </a:rPr>
-              <a:t>1</a:t>
-            </a:r>
-            <a:endParaRPr lang="en-US" sz="1200" dirty="0"/>
-          </a:p>
-        </p:txBody>
-      </p:sp>
-      <p:sp>
-        <p:nvSpPr>
-          <p:cNvPr id="14" name="wf-row-2"/>
+          <p:cNvPr id="9" name="errors-badge"/>
           <p:cNvSpPr/>
           <p:nvPr/>
         </p:nvSpPr>
         <p:spPr>
           <a:xfrm>
-            <a:off x="822960" y="3840480"/>
-            <a:ext cx="6035040" cy="365760"/>
-          </a:xfrm>
-          <a:prstGeom prst="rect">
+            <a:off x="6492240" y="1737360"/>
+            <a:ext cx="502920" cy="502920"/>
+          </a:xfrm>
+          <a:prstGeom prst="ellipse">
             <a:avLst/>
           </a:prstGeom>
           <a:solidFill>
-            <a:schemeClr val="bg1"/>
+            <a:schemeClr val="accent2"/>
           </a:solidFill>
           <a:ln w="12700">
             <a:solidFill>
-              <a:schemeClr val="bg2"/>
+              <a:schemeClr val="accent2"/>
             </a:solidFill>
             <a:prstDash val="solid"/>
           </a:ln>
@@ -9831,14 +12540,14 @@
       </p:sp>
       <p:sp>
         <p:nvSpPr>
-          <p:cNvPr id="15" name="wf-row-2-n"/>
-          <p:cNvSpPr txBox="1"/>
-          <p:nvPr/>
-        </p:nvSpPr>
-        <p:spPr>
-          <a:xfrm>
-            <a:off x="914400" y="3840480"/>
-            <a:ext cx="365760" cy="365760"/>
+          <p:cNvPr id="10" name="errors-badge-text"/>
+          <p:cNvSpPr txBox="1"/>
+          <p:nvPr/>
+        </p:nvSpPr>
+        <p:spPr>
+          <a:xfrm>
+            <a:off x="6492240" y="1737360"/>
+            <a:ext cx="502920" cy="502920"/>
           </a:xfrm>
           <a:prstGeom prst="rect">
             <a:avLst/>
@@ -9850,225 +12559,67 @@
           <a:bodyPr wrap="square" lIns="0" tIns="0" rIns="0" bIns="0" rtlCol="0" anchor="ctr"/>
           <a:lstStyle/>
           <a:p>
+            <a:pPr algn="ctr" indent="0" marL="0">
+              <a:buNone/>
+            </a:pPr>
+            <a:r>
+              <a:rPr lang="en-US" sz="1600" b="1" dirty="0">
+                <a:solidFill>
+                  <a:schemeClr val="bg1"/>
+                </a:solidFill>
+              </a:rPr>
+              <a:t>E</a:t>
+            </a:r>
+            <a:endParaRPr lang="en-US" sz="1600" dirty="0"/>
+          </a:p>
+        </p:txBody>
+      </p:sp>
+      <p:sp>
+        <p:nvSpPr>
+          <p:cNvPr id="11" name="errors-title"/>
+          <p:cNvSpPr txBox="1"/>
+          <p:nvPr/>
+        </p:nvSpPr>
+        <p:spPr>
+          <a:xfrm>
+            <a:off x="7178040" y="1737360"/>
+            <a:ext cx="4206240" cy="502920"/>
+          </a:xfrm>
+          <a:prstGeom prst="rect">
+            <a:avLst/>
+          </a:prstGeom>
+          <a:noFill/>
+          <a:ln/>
+        </p:spPr>
+        <p:txBody>
+          <a:bodyPr wrap="square" lIns="0" tIns="0" rIns="0" bIns="0" rtlCol="0" anchor="ctr"/>
+          <a:lstStyle/>
+          <a:p>
             <a:pPr indent="0" marL="0">
               <a:buNone/>
             </a:pPr>
             <a:r>
-              <a:rPr lang="en-US" sz="1200" dirty="0">
+              <a:rPr lang="en-US" sz="1800" b="1" dirty="0">
                 <a:solidFill>
                   <a:schemeClr val="tx1"/>
                 </a:solidFill>
               </a:rPr>
-              <a:t>2</a:t>
-            </a:r>
-            <a:endParaRPr lang="en-US" sz="1200" dirty="0"/>
-          </a:p>
-        </p:txBody>
-      </p:sp>
-      <p:sp>
-        <p:nvSpPr>
-          <p:cNvPr id="16" name="wf-row-3"/>
-          <p:cNvSpPr/>
-          <p:nvPr/>
-        </p:nvSpPr>
-        <p:spPr>
-          <a:xfrm>
-            <a:off x="822960" y="4251960"/>
-            <a:ext cx="6035040" cy="365760"/>
-          </a:xfrm>
-          <a:prstGeom prst="rect">
-            <a:avLst/>
-          </a:prstGeom>
-          <a:solidFill>
-            <a:schemeClr val="bg1"/>
-          </a:solidFill>
-          <a:ln w="12700">
-            <a:solidFill>
-              <a:schemeClr val="bg2"/>
-            </a:solidFill>
-            <a:prstDash val="solid"/>
-          </a:ln>
-        </p:spPr>
-      </p:sp>
-      <p:sp>
-        <p:nvSpPr>
-          <p:cNvPr id="17" name="wf-row-3-n"/>
-          <p:cNvSpPr txBox="1"/>
-          <p:nvPr/>
-        </p:nvSpPr>
-        <p:spPr>
-          <a:xfrm>
-            <a:off x="914400" y="4251960"/>
-            <a:ext cx="365760" cy="365760"/>
-          </a:xfrm>
-          <a:prstGeom prst="rect">
-            <a:avLst/>
-          </a:prstGeom>
-          <a:noFill/>
-          <a:ln/>
-        </p:spPr>
-        <p:txBody>
-          <a:bodyPr wrap="square" lIns="0" tIns="0" rIns="0" bIns="0" rtlCol="0" anchor="ctr"/>
-          <a:lstStyle/>
-          <a:p>
-            <a:pPr indent="0" marL="0">
-              <a:buNone/>
-            </a:pPr>
-            <a:r>
-              <a:rPr lang="en-US" sz="1200" dirty="0">
-                <a:solidFill>
-                  <a:schemeClr val="tx1"/>
-                </a:solidFill>
-              </a:rPr>
-              <a:t>3</a:t>
-            </a:r>
-            <a:endParaRPr lang="en-US" sz="1200" dirty="0"/>
-          </a:p>
-        </p:txBody>
-      </p:sp>
-      <p:sp>
-        <p:nvSpPr>
-          <p:cNvPr id="18" name="wf-row-4"/>
-          <p:cNvSpPr/>
-          <p:nvPr/>
-        </p:nvSpPr>
-        <p:spPr>
-          <a:xfrm>
-            <a:off x="822960" y="4663440"/>
-            <a:ext cx="6035040" cy="365760"/>
-          </a:xfrm>
-          <a:prstGeom prst="rect">
-            <a:avLst/>
-          </a:prstGeom>
-          <a:solidFill>
-            <a:schemeClr val="bg1"/>
-          </a:solidFill>
-          <a:ln w="12700">
-            <a:solidFill>
-              <a:schemeClr val="bg2"/>
-            </a:solidFill>
-            <a:prstDash val="solid"/>
-          </a:ln>
-        </p:spPr>
-      </p:sp>
-      <p:sp>
-        <p:nvSpPr>
-          <p:cNvPr id="19" name="wf-row-4-n"/>
-          <p:cNvSpPr txBox="1"/>
-          <p:nvPr/>
-        </p:nvSpPr>
-        <p:spPr>
-          <a:xfrm>
-            <a:off x="914400" y="4663440"/>
-            <a:ext cx="365760" cy="365760"/>
-          </a:xfrm>
-          <a:prstGeom prst="rect">
-            <a:avLst/>
-          </a:prstGeom>
-          <a:noFill/>
-          <a:ln/>
-        </p:spPr>
-        <p:txBody>
-          <a:bodyPr wrap="square" lIns="0" tIns="0" rIns="0" bIns="0" rtlCol="0" anchor="ctr"/>
-          <a:lstStyle/>
-          <a:p>
-            <a:pPr indent="0" marL="0">
-              <a:buNone/>
-            </a:pPr>
-            <a:r>
-              <a:rPr lang="en-US" sz="1200" dirty="0">
-                <a:solidFill>
-                  <a:schemeClr val="tx1"/>
-                </a:solidFill>
-              </a:rPr>
-              <a:t>4</a:t>
-            </a:r>
-            <a:endParaRPr lang="en-US" sz="1200" dirty="0"/>
-          </a:p>
-        </p:txBody>
-      </p:sp>
-      <p:sp>
-        <p:nvSpPr>
-          <p:cNvPr id="20" name="wf-summary"/>
-          <p:cNvSpPr txBox="1"/>
-          <p:nvPr/>
-        </p:nvSpPr>
-        <p:spPr>
-          <a:xfrm>
-            <a:off x="822960" y="5257800"/>
-            <a:ext cx="2377440" cy="411480"/>
-          </a:xfrm>
-          <a:prstGeom prst="rect">
-            <a:avLst/>
-          </a:prstGeom>
-          <a:noFill/>
-          <a:ln/>
-        </p:spPr>
-        <p:txBody>
-          <a:bodyPr wrap="square" lIns="0" tIns="0" rIns="0" bIns="0" rtlCol="0" anchor="ctr"/>
-          <a:lstStyle/>
-          <a:p>
-            <a:pPr indent="0" marL="0">
-              <a:buNone/>
-            </a:pPr>
-            <a:r>
-              <a:rPr lang="en-US" sz="1200" dirty="0">
-                <a:solidFill>
-                  <a:schemeClr val="tx1"/>
-                </a:solidFill>
-              </a:rPr>
-              <a:t>Showing 1–5 of 42</a:t>
-            </a:r>
-            <a:endParaRPr lang="en-US" sz="1200" dirty="0"/>
-          </a:p>
-        </p:txBody>
-      </p:sp>
-      <p:sp>
-        <p:nvSpPr>
-          <p:cNvPr id="21" name="wf-pager"/>
-          <p:cNvSpPr txBox="1"/>
-          <p:nvPr/>
-        </p:nvSpPr>
-        <p:spPr>
-          <a:xfrm>
-            <a:off x="4114800" y="5257800"/>
-            <a:ext cx="2743200" cy="411480"/>
-          </a:xfrm>
-          <a:prstGeom prst="rect">
-            <a:avLst/>
-          </a:prstGeom>
-          <a:noFill/>
-          <a:ln/>
-        </p:spPr>
-        <p:txBody>
-          <a:bodyPr wrap="square" lIns="0" tIns="0" rIns="0" bIns="0" rtlCol="0" anchor="ctr"/>
-          <a:lstStyle/>
-          <a:p>
-            <a:pPr algn="r" indent="0" marL="0">
-              <a:buNone/>
-            </a:pPr>
-            <a:r>
-              <a:rPr lang="en-US" sz="1200" b="1" dirty="0">
-                <a:solidFill>
-                  <a:schemeClr val="tx2"/>
-                </a:solidFill>
-              </a:rPr>
-              <a:t>Per page 5 ▾   ‹   1   ›</a:t>
-            </a:r>
-            <a:endParaRPr lang="en-US" sz="1200" dirty="0"/>
-          </a:p>
-        </p:txBody>
-      </p:sp>
-      <p:sp>
-        <p:nvSpPr>
-          <p:cNvPr id="22" name="list-rules"/>
-          <p:cNvSpPr txBox="1"/>
-          <p:nvPr/>
-        </p:nvSpPr>
-        <p:spPr>
-          <a:xfrm>
-            <a:off x="7498080" y="1463040"/>
-            <a:ext cx="4114800" cy="4480560"/>
+              <a:t>Errors</a:t>
+            </a:r>
+            <a:endParaRPr lang="en-US" sz="1800" dirty="0"/>
+          </a:p>
+        </p:txBody>
+      </p:sp>
+      <p:sp>
+        <p:nvSpPr>
+          <p:cNvPr id="12" name="errors-body"/>
+          <p:cNvSpPr txBox="1"/>
+          <p:nvPr/>
+        </p:nvSpPr>
+        <p:spPr>
+          <a:xfrm>
+            <a:off x="6492240" y="2377440"/>
+            <a:ext cx="4892040" cy="2468880"/>
           </a:xfrm>
           <a:prstGeom prst="rect">
             <a:avLst/>
@@ -10082,7 +12633,7 @@
           <a:p>
             <a:pPr marL="342900" indent="-342900">
               <a:spcAft>
-                <a:spcPts val="1000"/>
+                <a:spcPts val="400"/>
               </a:spcAft>
               <a:buSzPct val="100000"/>
               <a:buChar char="•"/>
@@ -10093,14 +12644,14 @@
                   <a:schemeClr val="tx1"/>
                 </a:solidFill>
               </a:rPr>
-              <a:t>Server-side paging: pageIndex, pageSize and query go to the API</a:t>
+              <a:t>httpErrorInterceptor turns API failures into user messages</a:t>
             </a:r>
             <a:endParaRPr lang="en-US" sz="1600" dirty="0"/>
           </a:p>
           <a:p>
             <a:pPr marL="342900" indent="-342900">
               <a:spcAft>
-                <a:spcPts val="1000"/>
+                <a:spcPts val="400"/>
               </a:spcAft>
               <a:buSzPct val="100000"/>
               <a:buChar char="•"/>
@@ -10111,14 +12662,14 @@
                   <a:schemeClr val="tx1"/>
                 </a:solidFill>
               </a:rPr>
-              <a:t>Page sizes 5 / 10 / 15, default 5</a:t>
+              <a:t>GlobalErrorHandler + ClientErrorReporter catch client crashes</a:t>
             </a:r>
             <a:endParaRPr lang="en-US" sz="1600" dirty="0"/>
           </a:p>
           <a:p>
             <a:pPr marL="342900" indent="-342900">
               <a:spcAft>
-                <a:spcPts val="1000"/>
+                <a:spcPts val="400"/>
               </a:spcAft>
               <a:buSzPct val="100000"/>
               <a:buChar char="•"/>
@@ -10129,14 +12680,14 @@
                   <a:schemeClr val="tx1"/>
                 </a:solidFill>
               </a:rPr>
-              <a:t>First column # is page-aware</a:t>
+              <a:t>API ExceptionMiddleware returns a support ticket reference</a:t>
             </a:r>
             <a:endParaRPr lang="en-US" sz="1600" dirty="0"/>
           </a:p>
           <a:p>
             <a:pPr marL="342900" indent="-342900">
               <a:spcAft>
-                <a:spcPts val="1000"/>
+                <a:spcPts val="400"/>
               </a:spcAft>
               <a:buSzPct val="100000"/>
               <a:buChar char="•"/>
@@ -10147,43 +12698,7 @@
                   <a:schemeClr val="tx1"/>
                 </a:solidFill>
               </a:rPr>
-              <a:t>Search on change (≈300 ms), no Search button</a:t>
-            </a:r>
-            <a:endParaRPr lang="en-US" sz="1600" dirty="0"/>
-          </a:p>
-          <a:p>
-            <a:pPr marL="342900" indent="-342900">
-              <a:spcAft>
-                <a:spcPts val="1000"/>
-              </a:spcAft>
-              <a:buSzPct val="100000"/>
-              <a:buChar char="•"/>
-            </a:pPr>
-            <a:r>
-              <a:rPr lang="en-US" sz="1600" dirty="0">
-                <a:solidFill>
-                  <a:schemeClr val="tx1"/>
-                </a:solidFill>
-              </a:rPr>
-              <a:t>Filter drawer on mobile, table becomes cards below lg</a:t>
-            </a:r>
-            <a:endParaRPr lang="en-US" sz="1600" dirty="0"/>
-          </a:p>
-          <a:p>
-            <a:pPr marL="342900" indent="-342900">
-              <a:spcAft>
-                <a:spcPts val="1000"/>
-              </a:spcAft>
-              <a:buSzPct val="100000"/>
-              <a:buChar char="•"/>
-            </a:pPr>
-            <a:r>
-              <a:rPr lang="en-US" sz="1600" dirty="0">
-                <a:solidFill>
-                  <a:schemeClr val="tx1"/>
-                </a:solidFill>
-              </a:rPr>
-              <a:t>Reset to page 1 when filters change</a:t>
+              <a:t>Never swallow errors in a component</a:t>
             </a:r>
             <a:endParaRPr lang="en-US" sz="1600" dirty="0"/>
           </a:p>

--- a/docs/training-standards.pptx
+++ b/docs/training-standards.pptx
@@ -120,19 +120,19 @@
   <p:extLst>
     <p:ext uri="{521415D9-36F7-43E2-AB2F-B90AF26B5E84}">
       <p14:sectionLst xmlns:p14="http://schemas.microsoft.com/office/powerpoint/2010/main">
-        <p14:section name="Intro" id="{50668ef0-ec5a-3f68-c9b6-132ce37234d9}">
+        <p14:section name="Intro" id="{f446ceb9-4852-00d8-b4c0-3239a4d48b1f}">
           <p14:sldIdLst>
             <p14:sldId id="256"/>
             <p14:sldId id="257"/>
           </p14:sldIdLst>
         </p14:section>
-        <p14:section name="Backend" id="{4920caf5-215d-e756-d001-a65d2b6a627e}">
+        <p14:section name="Backend" id="{104c24d1-bd61-03a7-12fd-0217eee9d8d4}">
           <p14:sldIdLst>
             <p14:sldId id="258"/>
             <p14:sldId id="259"/>
           </p14:sldIdLst>
         </p14:section>
-        <p14:section name="Frontend" id="{d27a7d6e-6c7f-f2d8-9458-c0912230db4a}">
+        <p14:section name="Frontend" id="{0a61b297-b4af-10a1-8125-2fca5312b195}">
           <p14:sldIdLst>
             <p14:sldId id="260"/>
             <p14:sldId id="261"/>
@@ -142,13 +142,13 @@
             <p14:sldId id="265"/>
           </p14:sldIdLst>
         </p14:section>
-        <p14:section name="Pages" id="{984731e0-2748-dae2-f7a6-41310938e948}">
+        <p14:section name="Pages" id="{ee645d21-89f9-9ab7-9602-7cfae371cedf}">
           <p14:sldIdLst>
             <p14:sldId id="266"/>
             <p14:sldId id="267"/>
           </p14:sldIdLst>
         </p14:section>
-        <p14:section name="Checklist" id="{c7229ff4-e53d-4b81-4e43-d90a3c864bb6}">
+        <p14:section name="Checklist" id="{1cde8afa-f3e6-c4fb-cb0c-8e0b9e51e943}">
           <p14:sldIdLst>
             <p14:sldId id="268"/>
             <p14:sldId id="269"/>
@@ -734,7 +734,7 @@
           <a:p>
             <a:r>
               <a:rPr lang="en-US" dirty="0"/>
-              <a:t>Copy an existing list (users, custom notifications, notification transactions) rather than inventing a pager. core/ui has table-pager and paged-list ready to use.</a:t>
+              <a:t>Copy an existing list (users, custom notifications, notification transactions) rather than inventing a pager. TrainingModule/src/app/core/ui has table-pager and paged-list ready to use. The showcase list (/admin/showcase) is the reference.</a:t>
             </a:r>
             <a:endParaRPr lang="en-US" dirty="0"/>
           </a:p>
@@ -1174,7 +1174,7 @@
           <a:p>
             <a:r>
               <a:rPr lang="en-US" dirty="0"/>
-              <a:t>Controllers never talk to CHDBContext directly. Register new services in Common/ServiceExtensions.cs. Keep controllers thin so rules can be unit-tested in Bidding_Core.Tests.</a:t>
+              <a:t>Controllers never talk to CHDBContext directly. Register new services in Bidding_API/Common/ServiceExtensions.cs. Keep controllers thin so rules can be unit-tested in Bidding_Core.Tests.</a:t>
             </a:r>
             <a:endParaRPr lang="en-US" dirty="0"/>
           </a:p>
@@ -1526,7 +1526,7 @@
           <a:p>
             <a:r>
               <a:rPr lang="en-US" dirty="0"/>
-              <a:t>The pipeline lives in core/ui/form-pipeline.service.ts. The page never calls markAllAsTouched, never sets a loading flag and never shows a toast itself. Each stop returns a reason so the page can react if it needs to, but most pages just return.</a:t>
+              <a:t>The pipeline lives in TrainingModule/src/app/core/ui/form-pipeline.service.ts. The page never calls markAllAsTouched, never sets a loading flag and never shows a toast itself. Each stop returns a reason so the page can react if it needs to, but most pages just return.</a:t>
             </a:r>
             <a:endParaRPr lang="en-US" dirty="0"/>
           </a:p>
@@ -2577,11 +2577,11 @@
         <p:spPr>
           <a:xfrm>
             <a:off x="548640" y="1463040"/>
-            <a:ext cx="3566160" cy="3566160"/>
+            <a:ext cx="3566160" cy="3108960"/>
           </a:xfrm>
           <a:prstGeom prst="roundRect">
             <a:avLst>
-              <a:gd name="adj" fmla="val 3077"/>
+              <a:gd name="adj" fmla="val 3529"/>
             </a:avLst>
           </a:prstGeom>
           <a:solidFill>
@@ -2701,7 +2701,7 @@
         <p:spPr>
           <a:xfrm>
             <a:off x="822960" y="2377440"/>
-            <a:ext cx="3063240" cy="2468880"/>
+            <a:ext cx="3063240" cy="2011680"/>
           </a:xfrm>
           <a:prstGeom prst="rect">
             <a:avLst/>
@@ -2777,11 +2777,11 @@
         <p:spPr>
           <a:xfrm>
             <a:off x="4297680" y="1463040"/>
-            <a:ext cx="3566160" cy="3566160"/>
+            <a:ext cx="3566160" cy="3108960"/>
           </a:xfrm>
           <a:prstGeom prst="roundRect">
             <a:avLst>
-              <a:gd name="adj" fmla="val 3077"/>
+              <a:gd name="adj" fmla="val 3529"/>
             </a:avLst>
           </a:prstGeom>
           <a:solidFill>
@@ -2901,7 +2901,7 @@
         <p:spPr>
           <a:xfrm>
             <a:off x="4572000" y="2377440"/>
-            <a:ext cx="3063240" cy="2468880"/>
+            <a:ext cx="3063240" cy="2011680"/>
           </a:xfrm>
           <a:prstGeom prst="rect">
             <a:avLst/>
@@ -2977,11 +2977,11 @@
         <p:spPr>
           <a:xfrm>
             <a:off x="8046720" y="1463040"/>
-            <a:ext cx="3566160" cy="3566160"/>
+            <a:ext cx="3566160" cy="3108960"/>
           </a:xfrm>
           <a:prstGeom prst="roundRect">
             <a:avLst>
-              <a:gd name="adj" fmla="val 3077"/>
+              <a:gd name="adj" fmla="val 3529"/>
             </a:avLst>
           </a:prstGeom>
           <a:solidFill>
@@ -3101,7 +3101,7 @@
         <p:spPr>
           <a:xfrm>
             <a:off x="8321040" y="2377440"/>
-            <a:ext cx="3063240" cy="2468880"/>
+            <a:ext cx="3063240" cy="2011680"/>
           </a:xfrm>
           <a:prstGeom prst="rect">
             <a:avLst/>
@@ -3183,6 +3183,233 @@
               <a:t>RTL / LTR set by LocaleService</a:t>
             </a:r>
             <a:endParaRPr lang="en-US" sz="1500" dirty="0"/>
+          </a:p>
+        </p:txBody>
+      </p:sp>
+      <p:sp>
+        <p:nvSpPr>
+          <p:cNvPr id="18" name="state-files"/>
+          <p:cNvSpPr/>
+          <p:nvPr/>
+        </p:nvSpPr>
+        <p:spPr>
+          <a:xfrm>
+            <a:off x="548640" y="4754880"/>
+            <a:ext cx="11064240" cy="1463040"/>
+          </a:xfrm>
+          <a:prstGeom prst="roundRect">
+            <a:avLst>
+              <a:gd name="adj" fmla="val 6250"/>
+            </a:avLst>
+          </a:prstGeom>
+          <a:solidFill>
+            <a:schemeClr val="bg2"/>
+          </a:solidFill>
+          <a:ln w="12700">
+            <a:solidFill>
+              <a:schemeClr val="bg2"/>
+            </a:solidFill>
+            <a:prstDash val="solid"/>
+          </a:ln>
+        </p:spPr>
+      </p:sp>
+      <p:sp>
+        <p:nvSpPr>
+          <p:cNvPr id="19" name="state-files-label"/>
+          <p:cNvSpPr txBox="1"/>
+          <p:nvPr/>
+        </p:nvSpPr>
+        <p:spPr>
+          <a:xfrm>
+            <a:off x="777240" y="4864608"/>
+            <a:ext cx="914400" cy="274320"/>
+          </a:xfrm>
+          <a:prstGeom prst="rect">
+            <a:avLst/>
+          </a:prstGeom>
+          <a:noFill/>
+          <a:ln/>
+        </p:spPr>
+        <p:txBody>
+          <a:bodyPr wrap="square" lIns="0" tIns="0" rIns="0" bIns="0" rtlCol="0" anchor="ctr"/>
+          <a:lstStyle/>
+          <a:p>
+            <a:pPr indent="0" marL="0">
+              <a:buNone/>
+            </a:pPr>
+            <a:r>
+              <a:rPr lang="en-US" sz="1200" b="1" dirty="0">
+                <a:solidFill>
+                  <a:schemeClr val="accent2"/>
+                </a:solidFill>
+              </a:rPr>
+              <a:t>Files</a:t>
+            </a:r>
+            <a:endParaRPr lang="en-US" sz="1200" dirty="0"/>
+          </a:p>
+        </p:txBody>
+      </p:sp>
+      <p:sp>
+        <p:nvSpPr>
+          <p:cNvPr id="20" name="state-files-0"/>
+          <p:cNvSpPr txBox="1"/>
+          <p:nvPr/>
+        </p:nvSpPr>
+        <p:spPr>
+          <a:xfrm>
+            <a:off x="777240" y="5166360"/>
+            <a:ext cx="5212080" cy="960120"/>
+          </a:xfrm>
+          <a:prstGeom prst="rect">
+            <a:avLst/>
+          </a:prstGeom>
+          <a:noFill/>
+          <a:ln/>
+        </p:spPr>
+        <p:txBody>
+          <a:bodyPr wrap="square" lIns="0" tIns="0" rIns="0" bIns="0" rtlCol="0" anchor="t"/>
+          <a:lstStyle/>
+          <a:p>
+            <a:pPr indent="0" marL="0">
+              <a:spcAft>
+                <a:spcPts val="300"/>
+              </a:spcAft>
+              <a:buNone/>
+            </a:pPr>
+            <a:r>
+              <a:rPr lang="en-US" sz="950" dirty="0">
+                <a:solidFill>
+                  <a:schemeClr val="tx2"/>
+                </a:solidFill>
+                <a:latin typeface="Courier New" pitchFamily="34" charset="0"/>
+                <a:ea typeface="Courier New" pitchFamily="34" charset="-122"/>
+                <a:cs typeface="Courier New" pitchFamily="34" charset="-120"/>
+              </a:rPr>
+              <a:t>TrainingModule/src/app/core/store/&lt;feature&gt;/</a:t>
+            </a:r>
+            <a:endParaRPr lang="en-US" sz="950" dirty="0"/>
+          </a:p>
+          <a:p>
+            <a:pPr indent="0" marL="0">
+              <a:spcAft>
+                <a:spcPts val="300"/>
+              </a:spcAft>
+              <a:buNone/>
+            </a:pPr>
+            <a:r>
+              <a:rPr lang="en-US" sz="950" dirty="0">
+                <a:solidFill>
+                  <a:schemeClr val="tx2"/>
+                </a:solidFill>
+                <a:latin typeface="Courier New" pitchFamily="34" charset="0"/>
+                <a:ea typeface="Courier New" pitchFamily="34" charset="-122"/>
+                <a:cs typeface="Courier New" pitchFamily="34" charset="-120"/>
+              </a:rPr>
+              <a:t>TrainingModule/src/app/app.config.ts  (provideState)</a:t>
+            </a:r>
+            <a:endParaRPr lang="en-US" sz="950" dirty="0"/>
+          </a:p>
+          <a:p>
+            <a:pPr indent="0" marL="0">
+              <a:spcAft>
+                <a:spcPts val="300"/>
+              </a:spcAft>
+              <a:buNone/>
+            </a:pPr>
+            <a:r>
+              <a:rPr lang="en-US" sz="950" dirty="0">
+                <a:solidFill>
+                  <a:schemeClr val="tx2"/>
+                </a:solidFill>
+                <a:latin typeface="Courier New" pitchFamily="34" charset="0"/>
+                <a:ea typeface="Courier New" pitchFamily="34" charset="-122"/>
+                <a:cs typeface="Courier New" pitchFamily="34" charset="-120"/>
+              </a:rPr>
+              <a:t>TrainingModule/src/app/core/auth/auth.service.ts  (logout clears)</a:t>
+            </a:r>
+            <a:endParaRPr lang="en-US" sz="950" dirty="0"/>
+          </a:p>
+        </p:txBody>
+      </p:sp>
+      <p:sp>
+        <p:nvSpPr>
+          <p:cNvPr id="21" name="state-files-1"/>
+          <p:cNvSpPr txBox="1"/>
+          <p:nvPr/>
+        </p:nvSpPr>
+        <p:spPr>
+          <a:xfrm>
+            <a:off x="6080760" y="5166360"/>
+            <a:ext cx="5212080" cy="960120"/>
+          </a:xfrm>
+          <a:prstGeom prst="rect">
+            <a:avLst/>
+          </a:prstGeom>
+          <a:noFill/>
+          <a:ln/>
+        </p:spPr>
+        <p:txBody>
+          <a:bodyPr wrap="square" lIns="0" tIns="0" rIns="0" bIns="0" rtlCol="0" anchor="t"/>
+          <a:lstStyle/>
+          <a:p>
+            <a:pPr indent="0" marL="0">
+              <a:spcAft>
+                <a:spcPts val="300"/>
+              </a:spcAft>
+              <a:buNone/>
+            </a:pPr>
+            <a:r>
+              <a:rPr lang="en-US" sz="950" dirty="0">
+                <a:solidFill>
+                  <a:schemeClr val="tx2"/>
+                </a:solidFill>
+                <a:latin typeface="Courier New" pitchFamily="34" charset="0"/>
+                <a:ea typeface="Courier New" pitchFamily="34" charset="-122"/>
+                <a:cs typeface="Courier New" pitchFamily="34" charset="-120"/>
+              </a:rPr>
+              <a:t>TrainingModule/src/app/core/translations/&lt;area&gt;/messages.ar.json</a:t>
+            </a:r>
+            <a:endParaRPr lang="en-US" sz="950" dirty="0"/>
+          </a:p>
+          <a:p>
+            <a:pPr indent="0" marL="0">
+              <a:spcAft>
+                <a:spcPts val="300"/>
+              </a:spcAft>
+              <a:buNone/>
+            </a:pPr>
+            <a:r>
+              <a:rPr lang="en-US" sz="950" dirty="0">
+                <a:solidFill>
+                  <a:schemeClr val="tx2"/>
+                </a:solidFill>
+                <a:latin typeface="Courier New" pitchFamily="34" charset="0"/>
+                <a:ea typeface="Courier New" pitchFamily="34" charset="-122"/>
+                <a:cs typeface="Courier New" pitchFamily="34" charset="-120"/>
+              </a:rPr>
+              <a:t>TrainingModule/src/app/core/translations/merge-ar-translations.ts</a:t>
+            </a:r>
+            <a:endParaRPr lang="en-US" sz="950" dirty="0"/>
+          </a:p>
+          <a:p>
+            <a:pPr indent="0" marL="0">
+              <a:spcAft>
+                <a:spcPts val="300"/>
+              </a:spcAft>
+              <a:buNone/>
+            </a:pPr>
+            <a:r>
+              <a:rPr lang="en-US" sz="950" dirty="0">
+                <a:solidFill>
+                  <a:schemeClr val="tx2"/>
+                </a:solidFill>
+                <a:latin typeface="Courier New" pitchFamily="34" charset="0"/>
+                <a:ea typeface="Courier New" pitchFamily="34" charset="-122"/>
+                <a:cs typeface="Courier New" pitchFamily="34" charset="-120"/>
+              </a:rPr>
+              <a:t>TrainingModule/src/app/core/locale/locale.service.ts</a:t>
+            </a:r>
+            <a:endParaRPr lang="en-US" sz="950" dirty="0"/>
           </a:p>
         </p:txBody>
       </p:sp>
@@ -3887,7 +4114,7 @@
         <p:spPr>
           <a:xfrm>
             <a:off x="7498080" y="1463040"/>
-            <a:ext cx="4114800" cy="4480560"/>
+            <a:ext cx="4114800" cy="3108960"/>
           </a:xfrm>
           <a:prstGeom prst="rect">
             <a:avLst/>
@@ -3901,110 +4128,255 @@
           <a:p>
             <a:pPr marL="342900" indent="-342900">
               <a:spcAft>
-                <a:spcPts val="1000"/>
+                <a:spcPts val="600"/>
               </a:spcAft>
               <a:buSzPct val="100000"/>
               <a:buChar char="•"/>
             </a:pPr>
             <a:r>
-              <a:rPr lang="en-US" sz="1600" dirty="0">
+              <a:rPr lang="en-US" sz="1500" dirty="0">
                 <a:solidFill>
                   <a:schemeClr val="tx1"/>
                 </a:solidFill>
               </a:rPr>
               <a:t>Server-side paging: pageIndex, pageSize and query go to the API</a:t>
             </a:r>
-            <a:endParaRPr lang="en-US" sz="1600" dirty="0"/>
+            <a:endParaRPr lang="en-US" sz="1500" dirty="0"/>
           </a:p>
           <a:p>
             <a:pPr marL="342900" indent="-342900">
               <a:spcAft>
-                <a:spcPts val="1000"/>
+                <a:spcPts val="600"/>
               </a:spcAft>
               <a:buSzPct val="100000"/>
               <a:buChar char="•"/>
             </a:pPr>
             <a:r>
-              <a:rPr lang="en-US" sz="1600" dirty="0">
+              <a:rPr lang="en-US" sz="1500" dirty="0">
                 <a:solidFill>
                   <a:schemeClr val="tx1"/>
                 </a:solidFill>
               </a:rPr>
               <a:t>Page sizes 5 / 10 / 15, default 5</a:t>
             </a:r>
-            <a:endParaRPr lang="en-US" sz="1600" dirty="0"/>
+            <a:endParaRPr lang="en-US" sz="1500" dirty="0"/>
           </a:p>
           <a:p>
             <a:pPr marL="342900" indent="-342900">
               <a:spcAft>
-                <a:spcPts val="1000"/>
+                <a:spcPts val="600"/>
               </a:spcAft>
               <a:buSzPct val="100000"/>
               <a:buChar char="•"/>
             </a:pPr>
             <a:r>
-              <a:rPr lang="en-US" sz="1600" dirty="0">
+              <a:rPr lang="en-US" sz="1500" dirty="0">
                 <a:solidFill>
                   <a:schemeClr val="tx1"/>
                 </a:solidFill>
               </a:rPr>
               <a:t>First column # is page-aware</a:t>
             </a:r>
-            <a:endParaRPr lang="en-US" sz="1600" dirty="0"/>
+            <a:endParaRPr lang="en-US" sz="1500" dirty="0"/>
           </a:p>
           <a:p>
             <a:pPr marL="342900" indent="-342900">
               <a:spcAft>
-                <a:spcPts val="1000"/>
+                <a:spcPts val="600"/>
               </a:spcAft>
               <a:buSzPct val="100000"/>
               <a:buChar char="•"/>
             </a:pPr>
             <a:r>
-              <a:rPr lang="en-US" sz="1600" dirty="0">
+              <a:rPr lang="en-US" sz="1500" dirty="0">
                 <a:solidFill>
                   <a:schemeClr val="tx1"/>
                 </a:solidFill>
               </a:rPr>
               <a:t>Search on change (≈300 ms), no Search button</a:t>
             </a:r>
-            <a:endParaRPr lang="en-US" sz="1600" dirty="0"/>
+            <a:endParaRPr lang="en-US" sz="1500" dirty="0"/>
           </a:p>
           <a:p>
             <a:pPr marL="342900" indent="-342900">
               <a:spcAft>
-                <a:spcPts val="1000"/>
+                <a:spcPts val="600"/>
               </a:spcAft>
               <a:buSzPct val="100000"/>
               <a:buChar char="•"/>
             </a:pPr>
             <a:r>
-              <a:rPr lang="en-US" sz="1600" dirty="0">
+              <a:rPr lang="en-US" sz="1500" dirty="0">
                 <a:solidFill>
                   <a:schemeClr val="tx1"/>
                 </a:solidFill>
               </a:rPr>
               <a:t>Filter drawer on mobile, table becomes cards below lg</a:t>
             </a:r>
-            <a:endParaRPr lang="en-US" sz="1600" dirty="0"/>
+            <a:endParaRPr lang="en-US" sz="1500" dirty="0"/>
           </a:p>
           <a:p>
             <a:pPr marL="342900" indent="-342900">
               <a:spcAft>
-                <a:spcPts val="1000"/>
+                <a:spcPts val="600"/>
               </a:spcAft>
               <a:buSzPct val="100000"/>
               <a:buChar char="•"/>
             </a:pPr>
             <a:r>
-              <a:rPr lang="en-US" sz="1600" dirty="0">
+              <a:rPr lang="en-US" sz="1500" dirty="0">
                 <a:solidFill>
                   <a:schemeClr val="tx1"/>
                 </a:solidFill>
               </a:rPr>
               <a:t>Reset to page 1 when filters change</a:t>
             </a:r>
-            <a:endParaRPr lang="en-US" sz="1600" dirty="0"/>
+            <a:endParaRPr lang="en-US" sz="1500" dirty="0"/>
+          </a:p>
+        </p:txBody>
+      </p:sp>
+      <p:sp>
+        <p:nvSpPr>
+          <p:cNvPr id="23" name="list-files"/>
+          <p:cNvSpPr/>
+          <p:nvPr/>
+        </p:nvSpPr>
+        <p:spPr>
+          <a:xfrm>
+            <a:off x="7498080" y="4617720"/>
+            <a:ext cx="4114800" cy="1325880"/>
+          </a:xfrm>
+          <a:prstGeom prst="roundRect">
+            <a:avLst>
+              <a:gd name="adj" fmla="val 6897"/>
+            </a:avLst>
+          </a:prstGeom>
+          <a:solidFill>
+            <a:schemeClr val="bg2"/>
+          </a:solidFill>
+          <a:ln w="12700">
+            <a:solidFill>
+              <a:schemeClr val="bg2"/>
+            </a:solidFill>
+            <a:prstDash val="solid"/>
+          </a:ln>
+        </p:spPr>
+      </p:sp>
+      <p:sp>
+        <p:nvSpPr>
+          <p:cNvPr id="24" name="list-files-label"/>
+          <p:cNvSpPr txBox="1"/>
+          <p:nvPr/>
+        </p:nvSpPr>
+        <p:spPr>
+          <a:xfrm>
+            <a:off x="7726680" y="4727448"/>
+            <a:ext cx="914400" cy="274320"/>
+          </a:xfrm>
+          <a:prstGeom prst="rect">
+            <a:avLst/>
+          </a:prstGeom>
+          <a:noFill/>
+          <a:ln/>
+        </p:spPr>
+        <p:txBody>
+          <a:bodyPr wrap="square" lIns="0" tIns="0" rIns="0" bIns="0" rtlCol="0" anchor="ctr"/>
+          <a:lstStyle/>
+          <a:p>
+            <a:pPr indent="0" marL="0">
+              <a:buNone/>
+            </a:pPr>
+            <a:r>
+              <a:rPr lang="en-US" sz="1200" b="1" dirty="0">
+                <a:solidFill>
+                  <a:schemeClr val="accent2"/>
+                </a:solidFill>
+              </a:rPr>
+              <a:t>Files</a:t>
+            </a:r>
+            <a:endParaRPr lang="en-US" sz="1200" dirty="0"/>
+          </a:p>
+        </p:txBody>
+      </p:sp>
+      <p:sp>
+        <p:nvSpPr>
+          <p:cNvPr id="25" name="list-files-0"/>
+          <p:cNvSpPr txBox="1"/>
+          <p:nvPr/>
+        </p:nvSpPr>
+        <p:spPr>
+          <a:xfrm>
+            <a:off x="7726680" y="5029200"/>
+            <a:ext cx="3566160" cy="822960"/>
+          </a:xfrm>
+          <a:prstGeom prst="rect">
+            <a:avLst/>
+          </a:prstGeom>
+          <a:noFill/>
+          <a:ln/>
+        </p:spPr>
+        <p:txBody>
+          <a:bodyPr wrap="square" lIns="0" tIns="0" rIns="0" bIns="0" rtlCol="0" anchor="t"/>
+          <a:lstStyle/>
+          <a:p>
+            <a:pPr indent="0" marL="0">
+              <a:spcAft>
+                <a:spcPts val="300"/>
+              </a:spcAft>
+              <a:buNone/>
+            </a:pPr>
+            <a:r>
+              <a:rPr lang="en-US" sz="900" dirty="0">
+                <a:solidFill>
+                  <a:schemeClr val="tx2"/>
+                </a:solidFill>
+                <a:latin typeface="Courier New" pitchFamily="34" charset="0"/>
+                <a:ea typeface="Courier New" pitchFamily="34" charset="-122"/>
+                <a:cs typeface="Courier New" pitchFamily="34" charset="-120"/>
+              </a:rPr>
+              <a:t>TrainingModule/src/app/features/admin/showcase/</a:t>
+            </a:r>
+            <a:endParaRPr lang="en-US" sz="900" dirty="0"/>
+          </a:p>
+          <a:p>
+            <a:pPr indent="0" marL="0">
+              <a:spcAft>
+                <a:spcPts val="300"/>
+              </a:spcAft>
+              <a:buNone/>
+            </a:pPr>
+            <a:r>
+              <a:rPr lang="en-US" sz="900" dirty="0">
+                <a:solidFill>
+                  <a:schemeClr val="tx2"/>
+                </a:solidFill>
+                <a:latin typeface="Courier New" pitchFamily="34" charset="0"/>
+                <a:ea typeface="Courier New" pitchFamily="34" charset="-122"/>
+                <a:cs typeface="Courier New" pitchFamily="34" charset="-120"/>
+              </a:rPr>
+              <a:t>TrainingModule/src/app/core/ui/table-pager/</a:t>
+            </a:r>
+            <a:endParaRPr lang="en-US" sz="900" dirty="0"/>
+          </a:p>
+          <a:p>
+            <a:pPr indent="0" marL="0">
+              <a:spcAft>
+                <a:spcPts val="300"/>
+              </a:spcAft>
+              <a:buNone/>
+            </a:pPr>
+            <a:r>
+              <a:rPr lang="en-US" sz="900" dirty="0">
+                <a:solidFill>
+                  <a:schemeClr val="tx2"/>
+                </a:solidFill>
+                <a:latin typeface="Courier New" pitchFamily="34" charset="0"/>
+                <a:ea typeface="Courier New" pitchFamily="34" charset="-122"/>
+                <a:cs typeface="Courier New" pitchFamily="34" charset="-120"/>
+              </a:rPr>
+              <a:t>TrainingModule/src/app/core/ui/paged-list/</a:t>
+            </a:r>
+            <a:endParaRPr lang="en-US" sz="900" dirty="0"/>
           </a:p>
         </p:txBody>
       </p:sp>
@@ -4852,7 +5224,7 @@
                   <a:schemeClr val="tx1"/>
                 </a:solidFill>
               </a:rPr>
-              <a:t>Downloads always use the attachment chips component</a:t>
+              <a:t>Downloads use the attachment chips component (not in this branch yet)</a:t>
             </a:r>
             <a:endParaRPr lang="en-US" sz="1600" dirty="0"/>
           </a:p>
@@ -5091,6 +5463,131 @@
               <a:t>Empty states and errors are fine</a:t>
             </a:r>
             <a:endParaRPr lang="en-US" sz="1500" dirty="0"/>
+          </a:p>
+        </p:txBody>
+      </p:sp>
+      <p:sp>
+        <p:nvSpPr>
+          <p:cNvPr id="30" name="detail-files"/>
+          <p:cNvSpPr/>
+          <p:nvPr/>
+        </p:nvSpPr>
+        <p:spPr>
+          <a:xfrm>
+            <a:off x="7680960" y="4754880"/>
+            <a:ext cx="3931920" cy="1188720"/>
+          </a:xfrm>
+          <a:prstGeom prst="roundRect">
+            <a:avLst>
+              <a:gd name="adj" fmla="val 7692"/>
+            </a:avLst>
+          </a:prstGeom>
+          <a:solidFill>
+            <a:schemeClr val="bg2"/>
+          </a:solidFill>
+          <a:ln w="12700">
+            <a:solidFill>
+              <a:schemeClr val="bg2"/>
+            </a:solidFill>
+            <a:prstDash val="solid"/>
+          </a:ln>
+        </p:spPr>
+      </p:sp>
+      <p:sp>
+        <p:nvSpPr>
+          <p:cNvPr id="31" name="detail-files-label"/>
+          <p:cNvSpPr txBox="1"/>
+          <p:nvPr/>
+        </p:nvSpPr>
+        <p:spPr>
+          <a:xfrm>
+            <a:off x="7909560" y="4864608"/>
+            <a:ext cx="914400" cy="274320"/>
+          </a:xfrm>
+          <a:prstGeom prst="rect">
+            <a:avLst/>
+          </a:prstGeom>
+          <a:noFill/>
+          <a:ln/>
+        </p:spPr>
+        <p:txBody>
+          <a:bodyPr wrap="square" lIns="0" tIns="0" rIns="0" bIns="0" rtlCol="0" anchor="ctr"/>
+          <a:lstStyle/>
+          <a:p>
+            <a:pPr indent="0" marL="0">
+              <a:buNone/>
+            </a:pPr>
+            <a:r>
+              <a:rPr lang="en-US" sz="1200" b="1" dirty="0">
+                <a:solidFill>
+                  <a:schemeClr val="accent2"/>
+                </a:solidFill>
+              </a:rPr>
+              <a:t>Files</a:t>
+            </a:r>
+            <a:endParaRPr lang="en-US" sz="1200" dirty="0"/>
+          </a:p>
+        </p:txBody>
+      </p:sp>
+      <p:sp>
+        <p:nvSpPr>
+          <p:cNvPr id="32" name="detail-files-0"/>
+          <p:cNvSpPr txBox="1"/>
+          <p:nvPr/>
+        </p:nvSpPr>
+        <p:spPr>
+          <a:xfrm>
+            <a:off x="7909560" y="5166360"/>
+            <a:ext cx="3383280" cy="685800"/>
+          </a:xfrm>
+          <a:prstGeom prst="rect">
+            <a:avLst/>
+          </a:prstGeom>
+          <a:noFill/>
+          <a:ln/>
+        </p:spPr>
+        <p:txBody>
+          <a:bodyPr wrap="square" lIns="0" tIns="0" rIns="0" bIns="0" rtlCol="0" anchor="t"/>
+          <a:lstStyle/>
+          <a:p>
+            <a:pPr indent="0" marL="0">
+              <a:spcAft>
+                <a:spcPts val="300"/>
+              </a:spcAft>
+              <a:buNone/>
+            </a:pPr>
+            <a:r>
+              <a:rPr lang="en-US" sz="900" dirty="0">
+                <a:solidFill>
+                  <a:schemeClr val="tx2"/>
+                </a:solidFill>
+                <a:latin typeface="Courier New" pitchFamily="34" charset="0"/>
+                <a:ea typeface="Courier New" pitchFamily="34" charset="-122"/>
+                <a:cs typeface="Courier New" pitchFamily="34" charset="-120"/>
+              </a:rPr>
+              <a:t>TrainingModule/src/app/features/admin/showcase/</a:t>
+            </a:r>
+            <a:endParaRPr lang="en-US" sz="900" dirty="0"/>
+          </a:p>
+          <a:p>
+            <a:pPr indent="0" marL="0">
+              <a:spcAft>
+                <a:spcPts val="300"/>
+              </a:spcAft>
+              <a:buNone/>
+            </a:pPr>
+            <a:r>
+              <a:rPr lang="en-US" sz="900" dirty="0">
+                <a:solidFill>
+                  <a:schemeClr val="tx2"/>
+                </a:solidFill>
+                <a:latin typeface="Courier New" pitchFamily="34" charset="0"/>
+                <a:ea typeface="Courier New" pitchFamily="34" charset="-122"/>
+                <a:cs typeface="Courier New" pitchFamily="34" charset="-120"/>
+              </a:rPr>
+              <a:t>(View popup: showcase-list-page.component.html)</a:t>
+            </a:r>
+            <a:endParaRPr lang="en-US" sz="900" dirty="0"/>
           </a:p>
         </p:txBody>
       </p:sp>
@@ -5271,8 +5768,8 @@
         </p:nvSpPr>
         <p:spPr>
           <a:xfrm>
-            <a:off x="1280160" y="1463040"/>
-            <a:ext cx="4663440" cy="731520"/>
+            <a:off x="1280160" y="1417320"/>
+            <a:ext cx="4754880" cy="822960"/>
           </a:xfrm>
           <a:prstGeom prst="rect">
             <a:avLst/>
@@ -5285,17 +5782,40 @@
           <a:lstStyle/>
           <a:p>
             <a:pPr indent="0" marL="0">
-              <a:buNone/>
-            </a:pPr>
-            <a:r>
-              <a:rPr lang="en-US" sz="1800" dirty="0">
+              <a:spcAft>
+                <a:spcPts val="200"/>
+              </a:spcAft>
+              <a:buNone/>
+            </a:pPr>
+            <a:r>
+              <a:rPr lang="en-US" sz="1700" dirty="0">
                 <a:solidFill>
                   <a:schemeClr val="tx1"/>
                 </a:solidFill>
               </a:rPr>
-              <a:t>Route in app.routes.ts and sidebar link</a:t>
-            </a:r>
-            <a:endParaRPr lang="en-US" sz="1800" dirty="0"/>
+              <a:t>Route and sidebar link</a:t>
+            </a:r>
+            <a:endParaRPr lang="en-US" sz="1700" dirty="0"/>
+          </a:p>
+          <a:p>
+            <a:pPr indent="0" marL="0">
+              <a:spcAft>
+                <a:spcPts val="200"/>
+              </a:spcAft>
+              <a:buNone/>
+            </a:pPr>
+            <a:r>
+              <a:rPr lang="en-US" sz="1050" dirty="0">
+                <a:solidFill>
+                  <a:schemeClr val="tx2"/>
+                </a:solidFill>
+                <a:latin typeface="Courier New" pitchFamily="34" charset="0"/>
+                <a:ea typeface="Courier New" pitchFamily="34" charset="-122"/>
+                <a:cs typeface="Courier New" pitchFamily="34" charset="-120"/>
+              </a:rPr>
+              <a:t>TrainingModule/src/app/app.routes.ts</a:t>
+            </a:r>
+            <a:endParaRPr lang="en-US" sz="1700" dirty="0"/>
           </a:p>
         </p:txBody>
       </p:sp>
@@ -5368,8 +5888,8 @@
         </p:nvSpPr>
         <p:spPr>
           <a:xfrm>
-            <a:off x="1280160" y="2560320"/>
-            <a:ext cx="4663440" cy="731520"/>
+            <a:off x="1280160" y="2514600"/>
+            <a:ext cx="4754880" cy="822960"/>
           </a:xfrm>
           <a:prstGeom prst="rect">
             <a:avLst/>
@@ -5382,17 +5902,40 @@
           <a:lstStyle/>
           <a:p>
             <a:pPr indent="0" marL="0">
-              <a:buNone/>
-            </a:pPr>
-            <a:r>
-              <a:rPr lang="en-US" sz="1800" dirty="0">
+              <a:spcAft>
+                <a:spcPts val="200"/>
+              </a:spcAft>
+              <a:buNone/>
+            </a:pPr>
+            <a:r>
+              <a:rPr lang="en-US" sz="1700" dirty="0">
                 <a:solidFill>
                   <a:schemeClr val="tx1"/>
                 </a:solidFill>
               </a:rPr>
               <a:t>AppPage seed entry with the same URL</a:t>
             </a:r>
-            <a:endParaRPr lang="en-US" sz="1800" dirty="0"/>
+            <a:endParaRPr lang="en-US" sz="1700" dirty="0"/>
+          </a:p>
+          <a:p>
+            <a:pPr indent="0" marL="0">
+              <a:spcAft>
+                <a:spcPts val="200"/>
+              </a:spcAft>
+              <a:buNone/>
+            </a:pPr>
+            <a:r>
+              <a:rPr lang="en-US" sz="1050" dirty="0">
+                <a:solidFill>
+                  <a:schemeClr val="tx2"/>
+                </a:solidFill>
+                <a:latin typeface="Courier New" pitchFamily="34" charset="0"/>
+                <a:ea typeface="Courier New" pitchFamily="34" charset="-122"/>
+                <a:cs typeface="Courier New" pitchFamily="34" charset="-120"/>
+              </a:rPr>
+              <a:t>Bidding_DLL/Seeding/IdentityAccessAppPagesSeedData.cs</a:t>
+            </a:r>
+            <a:endParaRPr lang="en-US" sz="1700" dirty="0"/>
           </a:p>
         </p:txBody>
       </p:sp>
@@ -5465,8 +6008,8 @@
         </p:nvSpPr>
         <p:spPr>
           <a:xfrm>
-            <a:off x="1280160" y="3657600"/>
-            <a:ext cx="4663440" cy="731520"/>
+            <a:off x="1280160" y="3611880"/>
+            <a:ext cx="4754880" cy="822960"/>
           </a:xfrm>
           <a:prstGeom prst="rect">
             <a:avLst/>
@@ -5479,17 +6022,40 @@
           <a:lstStyle/>
           <a:p>
             <a:pPr indent="0" marL="0">
-              <a:buNone/>
-            </a:pPr>
-            <a:r>
-              <a:rPr lang="en-US" sz="1800" dirty="0">
+              <a:spcAft>
+                <a:spcPts val="200"/>
+              </a:spcAft>
+              <a:buNone/>
+            </a:pPr>
+            <a:r>
+              <a:rPr lang="en-US" sz="1700" dirty="0">
                 <a:solidFill>
                   <a:schemeClr val="tx1"/>
                 </a:solidFill>
               </a:rPr>
               <a:t>API endpoint + service rule + DTOs</a:t>
             </a:r>
-            <a:endParaRPr lang="en-US" sz="1800" dirty="0"/>
+            <a:endParaRPr lang="en-US" sz="1700" dirty="0"/>
+          </a:p>
+          <a:p>
+            <a:pPr indent="0" marL="0">
+              <a:spcAft>
+                <a:spcPts val="200"/>
+              </a:spcAft>
+              <a:buNone/>
+            </a:pPr>
+            <a:r>
+              <a:rPr lang="en-US" sz="1050" dirty="0">
+                <a:solidFill>
+                  <a:schemeClr val="tx2"/>
+                </a:solidFill>
+                <a:latin typeface="Courier New" pitchFamily="34" charset="0"/>
+                <a:ea typeface="Courier New" pitchFamily="34" charset="-122"/>
+                <a:cs typeface="Courier New" pitchFamily="34" charset="-120"/>
+              </a:rPr>
+              <a:t>Bidding_API/Controllers/V2/ · Bidding_Core/Services/</a:t>
+            </a:r>
+            <a:endParaRPr lang="en-US" sz="1700" dirty="0"/>
           </a:p>
         </p:txBody>
       </p:sp>
@@ -5562,8 +6128,8 @@
         </p:nvSpPr>
         <p:spPr>
           <a:xfrm>
-            <a:off x="1280160" y="4754880"/>
-            <a:ext cx="4663440" cy="731520"/>
+            <a:off x="1280160" y="4709160"/>
+            <a:ext cx="4754880" cy="822960"/>
           </a:xfrm>
           <a:prstGeom prst="rect">
             <a:avLst/>
@@ -5576,17 +6142,40 @@
           <a:lstStyle/>
           <a:p>
             <a:pPr indent="0" marL="0">
-              <a:buNone/>
-            </a:pPr>
-            <a:r>
-              <a:rPr lang="en-US" sz="1800" dirty="0">
+              <a:spcAft>
+                <a:spcPts val="200"/>
+              </a:spcAft>
+              <a:buNone/>
+            </a:pPr>
+            <a:r>
+              <a:rPr lang="en-US" sz="1700" dirty="0">
                 <a:solidFill>
                   <a:schemeClr val="tx1"/>
                 </a:solidFill>
               </a:rPr>
               <a:t>Data service, then NgRx slice if shared</a:t>
             </a:r>
-            <a:endParaRPr lang="en-US" sz="1800" dirty="0"/>
+            <a:endParaRPr lang="en-US" sz="1700" dirty="0"/>
+          </a:p>
+          <a:p>
+            <a:pPr indent="0" marL="0">
+              <a:spcAft>
+                <a:spcPts val="200"/>
+              </a:spcAft>
+              <a:buNone/>
+            </a:pPr>
+            <a:r>
+              <a:rPr lang="en-US" sz="1050" dirty="0">
+                <a:solidFill>
+                  <a:schemeClr val="tx2"/>
+                </a:solidFill>
+                <a:latin typeface="Courier New" pitchFamily="34" charset="0"/>
+                <a:ea typeface="Courier New" pitchFamily="34" charset="-122"/>
+                <a:cs typeface="Courier New" pitchFamily="34" charset="-120"/>
+              </a:rPr>
+              <a:t>TrainingModule/src/app/core/store/&lt;feature&gt;/</a:t>
+            </a:r>
+            <a:endParaRPr lang="en-US" sz="1700" dirty="0"/>
           </a:p>
         </p:txBody>
       </p:sp>
@@ -5659,8 +6248,8 @@
         </p:nvSpPr>
         <p:spPr>
           <a:xfrm>
-            <a:off x="6903720" y="1463040"/>
-            <a:ext cx="4663440" cy="731520"/>
+            <a:off x="6903720" y="1417320"/>
+            <a:ext cx="4754880" cy="822960"/>
           </a:xfrm>
           <a:prstGeom prst="rect">
             <a:avLst/>
@@ -5673,17 +6262,40 @@
           <a:lstStyle/>
           <a:p>
             <a:pPr indent="0" marL="0">
-              <a:buNone/>
-            </a:pPr>
-            <a:r>
-              <a:rPr lang="en-US" sz="1800" dirty="0">
+              <a:spcAft>
+                <a:spcPts val="200"/>
+              </a:spcAft>
+              <a:buNone/>
+            </a:pPr>
+            <a:r>
+              <a:rPr lang="en-US" sz="1700" dirty="0">
                 <a:solidFill>
                   <a:schemeClr val="tx1"/>
                 </a:solidFill>
               </a:rPr>
               <a:t>Form pipeline, executor, validators</a:t>
             </a:r>
-            <a:endParaRPr lang="en-US" sz="1800" dirty="0"/>
+            <a:endParaRPr lang="en-US" sz="1700" dirty="0"/>
+          </a:p>
+          <a:p>
+            <a:pPr indent="0" marL="0">
+              <a:spcAft>
+                <a:spcPts val="200"/>
+              </a:spcAft>
+              <a:buNone/>
+            </a:pPr>
+            <a:r>
+              <a:rPr lang="en-US" sz="1050" dirty="0">
+                <a:solidFill>
+                  <a:schemeClr val="tx2"/>
+                </a:solidFill>
+                <a:latin typeface="Courier New" pitchFamily="34" charset="0"/>
+                <a:ea typeface="Courier New" pitchFamily="34" charset="-122"/>
+                <a:cs typeface="Courier New" pitchFamily="34" charset="-120"/>
+              </a:rPr>
+              <a:t>TrainingModule/src/app/core/ui/form-pipeline.service.ts</a:t>
+            </a:r>
+            <a:endParaRPr lang="en-US" sz="1700" dirty="0"/>
           </a:p>
         </p:txBody>
       </p:sp>
@@ -5756,8 +6368,8 @@
         </p:nvSpPr>
         <p:spPr>
           <a:xfrm>
-            <a:off x="6903720" y="2560320"/>
-            <a:ext cx="4663440" cy="731520"/>
+            <a:off x="6903720" y="2514600"/>
+            <a:ext cx="4754880" cy="822960"/>
           </a:xfrm>
           <a:prstGeom prst="rect">
             <a:avLst/>
@@ -5770,17 +6382,40 @@
           <a:lstStyle/>
           <a:p>
             <a:pPr indent="0" marL="0">
-              <a:buNone/>
-            </a:pPr>
-            <a:r>
-              <a:rPr lang="en-US" sz="1800" dirty="0">
+              <a:spcAft>
+                <a:spcPts val="200"/>
+              </a:spcAft>
+              <a:buNone/>
+            </a:pPr>
+            <a:r>
+              <a:rPr lang="en-US" sz="1700" dirty="0">
                 <a:solidFill>
                   <a:schemeClr val="tx1"/>
                 </a:solidFill>
               </a:rPr>
-              <a:t>English in templates, Arabic in messages.ar.json</a:t>
-            </a:r>
-            <a:endParaRPr lang="en-US" sz="1800" dirty="0"/>
+              <a:t>English in templates, Arabic translations</a:t>
+            </a:r>
+            <a:endParaRPr lang="en-US" sz="1700" dirty="0"/>
+          </a:p>
+          <a:p>
+            <a:pPr indent="0" marL="0">
+              <a:spcAft>
+                <a:spcPts val="200"/>
+              </a:spcAft>
+              <a:buNone/>
+            </a:pPr>
+            <a:r>
+              <a:rPr lang="en-US" sz="1050" dirty="0">
+                <a:solidFill>
+                  <a:schemeClr val="tx2"/>
+                </a:solidFill>
+                <a:latin typeface="Courier New" pitchFamily="34" charset="0"/>
+                <a:ea typeface="Courier New" pitchFamily="34" charset="-122"/>
+                <a:cs typeface="Courier New" pitchFamily="34" charset="-120"/>
+              </a:rPr>
+              <a:t>TrainingModule/src/app/core/translations/&lt;area&gt;/</a:t>
+            </a:r>
+            <a:endParaRPr lang="en-US" sz="1700" dirty="0"/>
           </a:p>
         </p:txBody>
       </p:sp>
@@ -5853,8 +6488,8 @@
         </p:nvSpPr>
         <p:spPr>
           <a:xfrm>
-            <a:off x="6903720" y="3657600"/>
-            <a:ext cx="4663440" cy="731520"/>
+            <a:off x="6903720" y="3611880"/>
+            <a:ext cx="4754880" cy="822960"/>
           </a:xfrm>
           <a:prstGeom prst="rect">
             <a:avLst/>
@@ -5867,17 +6502,20 @@
           <a:lstStyle/>
           <a:p>
             <a:pPr indent="0" marL="0">
-              <a:buNone/>
-            </a:pPr>
-            <a:r>
-              <a:rPr lang="en-US" sz="1800" dirty="0">
+              <a:spcAft>
+                <a:spcPts val="200"/>
+              </a:spcAft>
+              <a:buNone/>
+            </a:pPr>
+            <a:r>
+              <a:rPr lang="en-US" sz="1700" dirty="0">
                 <a:solidFill>
                   <a:schemeClr val="tx1"/>
                 </a:solidFill>
               </a:rPr>
               <a:t>Mobile layout and RTL checked</a:t>
             </a:r>
-            <a:endParaRPr lang="en-US" sz="1800" dirty="0"/>
+            <a:endParaRPr lang="en-US" sz="1700" dirty="0"/>
           </a:p>
         </p:txBody>
       </p:sp>
@@ -5950,8 +6588,8 @@
         </p:nvSpPr>
         <p:spPr>
           <a:xfrm>
-            <a:off x="6903720" y="4754880"/>
-            <a:ext cx="4663440" cy="731520"/>
+            <a:off x="6903720" y="4709160"/>
+            <a:ext cx="4754880" cy="822960"/>
           </a:xfrm>
           <a:prstGeom prst="rect">
             <a:avLst/>
@@ -5964,17 +6602,40 @@
           <a:lstStyle/>
           <a:p>
             <a:pPr indent="0" marL="0">
-              <a:buNone/>
-            </a:pPr>
-            <a:r>
-              <a:rPr lang="en-US" sz="1800" dirty="0">
+              <a:spcAft>
+                <a:spcPts val="200"/>
+              </a:spcAft>
+              <a:buNone/>
+            </a:pPr>
+            <a:r>
+              <a:rPr lang="en-US" sz="1700" dirty="0">
                 <a:solidFill>
                   <a:schemeClr val="tx1"/>
                 </a:solidFill>
               </a:rPr>
               <a:t>2–3 tests for the new rule</a:t>
             </a:r>
-            <a:endParaRPr lang="en-US" sz="1800" dirty="0"/>
+            <a:endParaRPr lang="en-US" sz="1700" dirty="0"/>
+          </a:p>
+          <a:p>
+            <a:pPr indent="0" marL="0">
+              <a:spcAft>
+                <a:spcPts val="200"/>
+              </a:spcAft>
+              <a:buNone/>
+            </a:pPr>
+            <a:r>
+              <a:rPr lang="en-US" sz="1050" dirty="0">
+                <a:solidFill>
+                  <a:schemeClr val="tx2"/>
+                </a:solidFill>
+                <a:latin typeface="Courier New" pitchFamily="34" charset="0"/>
+                <a:ea typeface="Courier New" pitchFamily="34" charset="-122"/>
+                <a:cs typeface="Courier New" pitchFamily="34" charset="-120"/>
+              </a:rPr>
+              <a:t>Bidding_Core.Tests/ · &lt;component&gt;.spec.ts</a:t>
+            </a:r>
+            <a:endParaRPr lang="en-US" sz="1700" dirty="0"/>
           </a:p>
         </p:txBody>
       </p:sp>
@@ -6118,7 +6779,7 @@
                   <a:schemeClr val="bg2"/>
                 </a:solidFill>
               </a:rPr>
-              <a:t>Rules live in .cursor/rules and docs/DESIGN-GUIDE.md. Read them before your first PR.</a:t>
+              <a:t>Rules live in .cursor/rules/ and TrainingModule/docs/DESIGN-GUIDE.md. Setup is in README.md. Read them before your first PR.</a:t>
             </a:r>
             <a:endParaRPr lang="en-US" sz="2000" dirty="0"/>
           </a:p>
@@ -7106,6 +7767,9 @@
           <a:lstStyle/>
           <a:p>
             <a:pPr indent="0" marL="0">
+              <a:spcAft>
+                <a:spcPts val="400"/>
+              </a:spcAft>
               <a:buNone/>
             </a:pPr>
             <a:r>
@@ -7115,6 +7779,26 @@
                 </a:solidFill>
               </a:rPr>
               <a:t>Controllers, JWT, middleware, background jobs. Thin: validate input, call a service, return.</a:t>
+            </a:r>
+            <a:endParaRPr lang="en-US" sz="1600" dirty="0"/>
+          </a:p>
+          <a:p>
+            <a:pPr indent="0" marL="0">
+              <a:spcAft>
+                <a:spcPts val="400"/>
+              </a:spcAft>
+              <a:buNone/>
+            </a:pPr>
+            <a:r>
+              <a:rPr lang="en-US" sz="1200" dirty="0">
+                <a:solidFill>
+                  <a:schemeClr val="tx2"/>
+                </a:solidFill>
+                <a:latin typeface="Courier New" pitchFamily="34" charset="0"/>
+                <a:ea typeface="Courier New" pitchFamily="34" charset="-122"/>
+                <a:cs typeface="Courier New" pitchFamily="34" charset="-120"/>
+              </a:rPr>
+              <a:t>Bidding_API/Controllers/V2/  ·  Bidding_API/Common/ServiceExtensions.cs</a:t>
             </a:r>
             <a:endParaRPr lang="en-US" sz="1600" dirty="0"/>
           </a:p>
@@ -7230,6 +7914,9 @@
           <a:lstStyle/>
           <a:p>
             <a:pPr indent="0" marL="0">
+              <a:spcAft>
+                <a:spcPts val="400"/>
+              </a:spcAft>
               <a:buNone/>
             </a:pPr>
             <a:r>
@@ -7239,6 +7926,26 @@
                 </a:solidFill>
               </a:rPr>
               <a:t>Business services and rules. All decisions and guards live here.</a:t>
+            </a:r>
+            <a:endParaRPr lang="en-US" sz="1600" dirty="0"/>
+          </a:p>
+          <a:p>
+            <a:pPr indent="0" marL="0">
+              <a:spcAft>
+                <a:spcPts val="400"/>
+              </a:spcAft>
+              <a:buNone/>
+            </a:pPr>
+            <a:r>
+              <a:rPr lang="en-US" sz="1200" dirty="0">
+                <a:solidFill>
+                  <a:schemeClr val="tx2"/>
+                </a:solidFill>
+                <a:latin typeface="Courier New" pitchFamily="34" charset="0"/>
+                <a:ea typeface="Courier New" pitchFamily="34" charset="-122"/>
+                <a:cs typeface="Courier New" pitchFamily="34" charset="-120"/>
+              </a:rPr>
+              <a:t>Bidding_Core/Services/  ·  Bidding_Core/Helpers/</a:t>
             </a:r>
             <a:endParaRPr lang="en-US" sz="1600" dirty="0"/>
           </a:p>
@@ -7354,6 +8061,9 @@
           <a:lstStyle/>
           <a:p>
             <a:pPr indent="0" marL="0">
+              <a:spcAft>
+                <a:spcPts val="400"/>
+              </a:spcAft>
               <a:buNone/>
             </a:pPr>
             <a:r>
@@ -7363,6 +8073,26 @@
                 </a:solidFill>
               </a:rPr>
               <a:t>CHDBContext, data access, repositories, seed data.</a:t>
+            </a:r>
+            <a:endParaRPr lang="en-US" sz="1600" dirty="0"/>
+          </a:p>
+          <a:p>
+            <a:pPr indent="0" marL="0">
+              <a:spcAft>
+                <a:spcPts val="400"/>
+              </a:spcAft>
+              <a:buNone/>
+            </a:pPr>
+            <a:r>
+              <a:rPr lang="en-US" sz="1200" dirty="0">
+                <a:solidFill>
+                  <a:schemeClr val="tx2"/>
+                </a:solidFill>
+                <a:latin typeface="Courier New" pitchFamily="34" charset="0"/>
+                <a:ea typeface="Courier New" pitchFamily="34" charset="-122"/>
+                <a:cs typeface="Courier New" pitchFamily="34" charset="-120"/>
+              </a:rPr>
+              <a:t>Bidding_DLL/CHDBContext.cs  ·  Bidding_DLL/Seeding/</a:t>
             </a:r>
             <a:endParaRPr lang="en-US" sz="1600" dirty="0"/>
           </a:p>
@@ -7478,6 +8208,9 @@
           <a:lstStyle/>
           <a:p>
             <a:pPr indent="0" marL="0">
+              <a:spcAft>
+                <a:spcPts val="400"/>
+              </a:spcAft>
               <a:buNone/>
             </a:pPr>
             <a:r>
@@ -7487,6 +8220,26 @@
                 </a:solidFill>
               </a:rPr>
               <a:t>Entities, DTOs, enums, crypto and shared helpers.</a:t>
+            </a:r>
+            <a:endParaRPr lang="en-US" sz="1600" dirty="0"/>
+          </a:p>
+          <a:p>
+            <a:pPr indent="0" marL="0">
+              <a:spcAft>
+                <a:spcPts val="400"/>
+              </a:spcAft>
+              <a:buNone/>
+            </a:pPr>
+            <a:r>
+              <a:rPr lang="en-US" sz="1200" dirty="0">
+                <a:solidFill>
+                  <a:schemeClr val="tx2"/>
+                </a:solidFill>
+                <a:latin typeface="Courier New" pitchFamily="34" charset="0"/>
+                <a:ea typeface="Courier New" pitchFamily="34" charset="-122"/>
+                <a:cs typeface="Courier New" pitchFamily="34" charset="-120"/>
+              </a:rPr>
+              <a:t>Bidding_Models/  ·  Bidding_Common/</a:t>
             </a:r>
             <a:endParaRPr lang="en-US" sz="1600" dirty="0"/>
           </a:p>
@@ -8083,7 +8836,47 @@
                   <a:schemeClr val="tx1"/>
                 </a:solidFill>
               </a:rPr>
-              <a:t>New route? Add it to IdentityAccessAppPagesSeedData.cs with the same URL, so roles and groups can grant it.</a:t>
+              <a:t>New route? Add an AppPage with the same URL, so roles and groups can grant it.</a:t>
+            </a:r>
+            <a:endParaRPr lang="en-US" sz="1600" dirty="0"/>
+          </a:p>
+          <a:p>
+            <a:pPr indent="0" marL="0">
+              <a:spcAft>
+                <a:spcPts val="400"/>
+              </a:spcAft>
+              <a:buNone/>
+            </a:pPr>
+            <a:r>
+              <a:rPr lang="en-US" sz="1150" dirty="0">
+                <a:solidFill>
+                  <a:schemeClr val="tx2"/>
+                </a:solidFill>
+                <a:latin typeface="Courier New" pitchFamily="34" charset="0"/>
+                <a:ea typeface="Courier New" pitchFamily="34" charset="-122"/>
+                <a:cs typeface="Courier New" pitchFamily="34" charset="-120"/>
+              </a:rPr>
+              <a:t>Bidding_DLL/Seeding/IdentityAccessAppPagesSeedData.cs</a:t>
+            </a:r>
+            <a:endParaRPr lang="en-US" sz="1600" dirty="0"/>
+          </a:p>
+          <a:p>
+            <a:pPr indent="0" marL="0">
+              <a:spcAft>
+                <a:spcPts val="400"/>
+              </a:spcAft>
+              <a:buNone/>
+            </a:pPr>
+            <a:r>
+              <a:rPr lang="en-US" sz="1150" dirty="0">
+                <a:solidFill>
+                  <a:schemeClr val="tx2"/>
+                </a:solidFill>
+                <a:latin typeface="Courier New" pitchFamily="34" charset="0"/>
+                <a:ea typeface="Courier New" pitchFamily="34" charset="-122"/>
+                <a:cs typeface="Courier New" pitchFamily="34" charset="-120"/>
+              </a:rPr>
+              <a:t>Bidding_DLL/Seeding/IdentityAccessSeedData.cs (role map)</a:t>
             </a:r>
             <a:endParaRPr lang="en-US" sz="1600" dirty="0"/>
           </a:p>
@@ -8247,6 +9040,26 @@
                 </a:solidFill>
               </a:rPr>
               <a:t>RunIdentityAccessSeeder stays false on the shared database unless agreed.</a:t>
+            </a:r>
+            <a:endParaRPr lang="en-US" sz="1600" dirty="0"/>
+          </a:p>
+          <a:p>
+            <a:pPr indent="0" marL="0">
+              <a:spcAft>
+                <a:spcPts val="400"/>
+              </a:spcAft>
+              <a:buNone/>
+            </a:pPr>
+            <a:r>
+              <a:rPr lang="en-US" sz="1150" dirty="0">
+                <a:solidFill>
+                  <a:schemeClr val="tx2"/>
+                </a:solidFill>
+                <a:latin typeface="Courier New" pitchFamily="34" charset="0"/>
+                <a:ea typeface="Courier New" pitchFamily="34" charset="-122"/>
+                <a:cs typeface="Courier New" pitchFamily="34" charset="-120"/>
+              </a:rPr>
+              <a:t>Bidding_API/appsettings.Development.json</a:t>
             </a:r>
             <a:endParaRPr lang="en-US" sz="1600" dirty="0"/>
           </a:p>
@@ -8369,7 +9182,7 @@
         <p:spPr>
           <a:xfrm>
             <a:off x="548640" y="1463040"/>
-            <a:ext cx="3017520" cy="822960"/>
+            <a:ext cx="4114800" cy="822960"/>
           </a:xfrm>
           <a:prstGeom prst="roundRect">
             <a:avLst>
@@ -8395,8 +9208,8 @@
         </p:nvSpPr>
         <p:spPr>
           <a:xfrm>
-            <a:off x="777240" y="1463040"/>
-            <a:ext cx="2743200" cy="822960"/>
+            <a:off x="731520" y="1463040"/>
+            <a:ext cx="3840480" cy="822960"/>
           </a:xfrm>
           <a:prstGeom prst="rect">
             <a:avLst/>
@@ -8412,7 +9225,7 @@
               <a:buNone/>
             </a:pPr>
             <a:r>
-              <a:rPr lang="en-US" sz="1800" b="1" dirty="0">
+              <a:rPr lang="en-US" sz="1250" b="1" dirty="0">
                 <a:solidFill>
                   <a:schemeClr val="tx2"/>
                 </a:solidFill>
@@ -8420,9 +9233,9 @@
                 <a:ea typeface="Courier New" pitchFamily="34" charset="-122"/>
                 <a:cs typeface="Courier New" pitchFamily="34" charset="-120"/>
               </a:rPr>
-              <a:t>core/</a:t>
-            </a:r>
-            <a:endParaRPr lang="en-US" sz="1800" dirty="0"/>
+              <a:t>TrainingModule/src/app/core/</a:t>
+            </a:r>
+            <a:endParaRPr lang="en-US" sz="1250" dirty="0"/>
           </a:p>
         </p:txBody>
       </p:sp>
@@ -8434,8 +9247,8 @@
         </p:nvSpPr>
         <p:spPr>
           <a:xfrm>
-            <a:off x="3840480" y="1463040"/>
-            <a:ext cx="4206240" cy="822960"/>
+            <a:off x="4892040" y="1463040"/>
+            <a:ext cx="3291840" cy="822960"/>
           </a:xfrm>
           <a:prstGeom prst="rect">
             <a:avLst/>
@@ -8451,14 +9264,14 @@
               <a:buNone/>
             </a:pPr>
             <a:r>
-              <a:rPr lang="en-US" sz="1500" dirty="0">
+              <a:rPr lang="en-US" sz="1400" dirty="0">
                 <a:solidFill>
                   <a:schemeClr val="tx1"/>
                 </a:solidFill>
               </a:rPr>
               <a:t>auth, interceptors, store, translations, validators, ui (pipeline, pager, paged list)</a:t>
             </a:r>
-            <a:endParaRPr lang="en-US" sz="1500" dirty="0"/>
+            <a:endParaRPr lang="en-US" sz="1400" dirty="0"/>
           </a:p>
         </p:txBody>
       </p:sp>
@@ -8471,7 +9284,7 @@
         <p:spPr>
           <a:xfrm>
             <a:off x="548640" y="2560320"/>
-            <a:ext cx="3017520" cy="822960"/>
+            <a:ext cx="4114800" cy="822960"/>
           </a:xfrm>
           <a:prstGeom prst="roundRect">
             <a:avLst>
@@ -8497,8 +9310,8 @@
         </p:nvSpPr>
         <p:spPr>
           <a:xfrm>
-            <a:off x="777240" y="2560320"/>
-            <a:ext cx="2743200" cy="822960"/>
+            <a:off x="731520" y="2560320"/>
+            <a:ext cx="3840480" cy="822960"/>
           </a:xfrm>
           <a:prstGeom prst="rect">
             <a:avLst/>
@@ -8514,7 +9327,7 @@
               <a:buNone/>
             </a:pPr>
             <a:r>
-              <a:rPr lang="en-US" sz="1800" b="1" dirty="0">
+              <a:rPr lang="en-US" sz="1250" b="1" dirty="0">
                 <a:solidFill>
                   <a:schemeClr val="tx2"/>
                 </a:solidFill>
@@ -8522,9 +9335,9 @@
                 <a:ea typeface="Courier New" pitchFamily="34" charset="-122"/>
                 <a:cs typeface="Courier New" pitchFamily="34" charset="-120"/>
               </a:rPr>
-              <a:t>features/&lt;area&gt;/</a:t>
-            </a:r>
-            <a:endParaRPr lang="en-US" sz="1800" dirty="0"/>
+              <a:t>TrainingModule/src/app/features/&lt;area&gt;/</a:t>
+            </a:r>
+            <a:endParaRPr lang="en-US" sz="1250" dirty="0"/>
           </a:p>
         </p:txBody>
       </p:sp>
@@ -8536,8 +9349,8 @@
         </p:nvSpPr>
         <p:spPr>
           <a:xfrm>
-            <a:off x="3840480" y="2560320"/>
-            <a:ext cx="4206240" cy="822960"/>
+            <a:off x="4892040" y="2560320"/>
+            <a:ext cx="3291840" cy="822960"/>
           </a:xfrm>
           <a:prstGeom prst="rect">
             <a:avLst/>
@@ -8553,14 +9366,14 @@
               <a:buNone/>
             </a:pPr>
             <a:r>
-              <a:rPr lang="en-US" sz="1500" dirty="0">
+              <a:rPr lang="en-US" sz="1400" dirty="0">
                 <a:solidFill>
                   <a:schemeClr val="tx1"/>
                 </a:solidFill>
               </a:rPr>
               <a:t>one folder per feature: pages, data services, models</a:t>
             </a:r>
-            <a:endParaRPr lang="en-US" sz="1500" dirty="0"/>
+            <a:endParaRPr lang="en-US" sz="1400" dirty="0"/>
           </a:p>
         </p:txBody>
       </p:sp>
@@ -8573,7 +9386,7 @@
         <p:spPr>
           <a:xfrm>
             <a:off x="548640" y="3657600"/>
-            <a:ext cx="3017520" cy="822960"/>
+            <a:ext cx="4114800" cy="822960"/>
           </a:xfrm>
           <a:prstGeom prst="roundRect">
             <a:avLst>
@@ -8599,8 +9412,8 @@
         </p:nvSpPr>
         <p:spPr>
           <a:xfrm>
-            <a:off x="777240" y="3657600"/>
-            <a:ext cx="2743200" cy="822960"/>
+            <a:off x="731520" y="3657600"/>
+            <a:ext cx="3840480" cy="822960"/>
           </a:xfrm>
           <a:prstGeom prst="rect">
             <a:avLst/>
@@ -8616,7 +9429,7 @@
               <a:buNone/>
             </a:pPr>
             <a:r>
-              <a:rPr lang="en-US" sz="1800" b="1" dirty="0">
+              <a:rPr lang="en-US" sz="1250" b="1" dirty="0">
                 <a:solidFill>
                   <a:schemeClr val="tx2"/>
                 </a:solidFill>
@@ -8624,9 +9437,9 @@
                 <a:ea typeface="Courier New" pitchFamily="34" charset="-122"/>
                 <a:cs typeface="Courier New" pitchFamily="34" charset="-120"/>
               </a:rPr>
-              <a:t>layout/</a:t>
-            </a:r>
-            <a:endParaRPr lang="en-US" sz="1800" dirty="0"/>
+              <a:t>TrainingModule/src/app/layout/</a:t>
+            </a:r>
+            <a:endParaRPr lang="en-US" sz="1250" dirty="0"/>
           </a:p>
         </p:txBody>
       </p:sp>
@@ -8638,8 +9451,8 @@
         </p:nvSpPr>
         <p:spPr>
           <a:xfrm>
-            <a:off x="3840480" y="3657600"/>
-            <a:ext cx="4206240" cy="822960"/>
+            <a:off x="4892040" y="3657600"/>
+            <a:ext cx="3291840" cy="822960"/>
           </a:xfrm>
           <a:prstGeom prst="rect">
             <a:avLst/>
@@ -8655,14 +9468,14 @@
               <a:buNone/>
             </a:pPr>
             <a:r>
-              <a:rPr lang="en-US" sz="1500" dirty="0">
+              <a:rPr lang="en-US" sz="1400" dirty="0">
                 <a:solidFill>
                   <a:schemeClr val="tx1"/>
                 </a:solidFill>
               </a:rPr>
               <a:t>main layout, sidebar, header, notifications bell</a:t>
             </a:r>
-            <a:endParaRPr lang="en-US" sz="1500" dirty="0"/>
+            <a:endParaRPr lang="en-US" sz="1400" dirty="0"/>
           </a:p>
         </p:txBody>
       </p:sp>
@@ -8675,7 +9488,7 @@
         <p:spPr>
           <a:xfrm>
             <a:off x="548640" y="4754880"/>
-            <a:ext cx="3017520" cy="822960"/>
+            <a:ext cx="4114800" cy="822960"/>
           </a:xfrm>
           <a:prstGeom prst="roundRect">
             <a:avLst>
@@ -8701,8 +9514,8 @@
         </p:nvSpPr>
         <p:spPr>
           <a:xfrm>
-            <a:off x="777240" y="4754880"/>
-            <a:ext cx="2743200" cy="822960"/>
+            <a:off x="731520" y="4754880"/>
+            <a:ext cx="3840480" cy="822960"/>
           </a:xfrm>
           <a:prstGeom prst="rect">
             <a:avLst/>
@@ -8718,7 +9531,7 @@
               <a:buNone/>
             </a:pPr>
             <a:r>
-              <a:rPr lang="en-US" sz="1800" b="1" dirty="0">
+              <a:rPr lang="en-US" sz="1250" b="1" dirty="0">
                 <a:solidFill>
                   <a:schemeClr val="tx2"/>
                 </a:solidFill>
@@ -8726,9 +9539,9 @@
                 <a:ea typeface="Courier New" pitchFamily="34" charset="-122"/>
                 <a:cs typeface="Courier New" pitchFamily="34" charset="-120"/>
               </a:rPr>
-              <a:t>shared/</a:t>
-            </a:r>
-            <a:endParaRPr lang="en-US" sz="1800" dirty="0"/>
+              <a:t>TrainingModule/src/app/shared/</a:t>
+            </a:r>
+            <a:endParaRPr lang="en-US" sz="1250" dirty="0"/>
           </a:p>
         </p:txBody>
       </p:sp>
@@ -8740,8 +9553,8 @@
         </p:nvSpPr>
         <p:spPr>
           <a:xfrm>
-            <a:off x="3840480" y="4754880"/>
-            <a:ext cx="4206240" cy="822960"/>
+            <a:off x="4892040" y="4754880"/>
+            <a:ext cx="3291840" cy="822960"/>
           </a:xfrm>
           <a:prstGeom prst="rect">
             <a:avLst/>
@@ -8757,14 +9570,14 @@
               <a:buNone/>
             </a:pPr>
             <a:r>
-              <a:rPr lang="en-US" sz="1500" dirty="0">
+              <a:rPr lang="en-US" sz="1400" dirty="0">
                 <a:solidFill>
                   <a:schemeClr val="tx1"/>
                 </a:solidFill>
               </a:rPr>
               <a:t>small reusable components with no feature logic</a:t>
             </a:r>
-            <a:endParaRPr lang="en-US" sz="1500" dirty="0"/>
+            <a:endParaRPr lang="en-US" sz="1400" dirty="0"/>
           </a:p>
         </p:txBody>
       </p:sp>
@@ -8797,7 +9610,57 @@
       </p:sp>
       <p:sp>
         <p:nvSpPr>
-          <p:cNvPr id="16" name="stack-title"/>
+          <p:cNvPr id="16" name="routes-path"/>
+          <p:cNvSpPr txBox="1"/>
+          <p:nvPr/>
+        </p:nvSpPr>
+        <p:spPr>
+          <a:xfrm>
+            <a:off x="548640" y="5852160"/>
+            <a:ext cx="7680960" cy="365760"/>
+          </a:xfrm>
+          <a:prstGeom prst="rect">
+            <a:avLst/>
+          </a:prstGeom>
+          <a:noFill/>
+          <a:ln/>
+        </p:spPr>
+        <p:txBody>
+          <a:bodyPr wrap="square" lIns="0" tIns="0" rIns="0" bIns="0" rtlCol="0" anchor="ctr"/>
+          <a:lstStyle/>
+          <a:p>
+            <a:pPr indent="0" marL="0">
+              <a:buNone/>
+            </a:pPr>
+            <a:r>
+              <a:rPr lang="en-US" sz="1400" b="1" dirty="0">
+                <a:solidFill>
+                  <a:schemeClr val="tx1"/>
+                </a:solidFill>
+              </a:rPr>
+              <a:t>Routes: </a:t>
+            </a:r>
+            <a:pPr indent="0" marL="0">
+              <a:buNone/>
+            </a:pPr>
+            <a:r>
+              <a:rPr lang="en-US" sz="1200" dirty="0">
+                <a:solidFill>
+                  <a:schemeClr val="tx2"/>
+                </a:solidFill>
+                <a:latin typeface="Courier New" pitchFamily="34" charset="0"/>
+                <a:ea typeface="Courier New" pitchFamily="34" charset="-122"/>
+                <a:cs typeface="Courier New" pitchFamily="34" charset="-120"/>
+              </a:rPr>
+              <a:t>TrainingModule/src/app/app.routes.ts</a:t>
+            </a:r>
+            <a:endParaRPr lang="en-US" sz="1400" dirty="0"/>
+          </a:p>
+        </p:txBody>
+      </p:sp>
+      <p:sp>
+        <p:nvSpPr>
+          <p:cNvPr id="17" name="stack-title"/>
           <p:cNvSpPr txBox="1"/>
           <p:nvPr/>
         </p:nvSpPr>
@@ -8833,7 +9696,7 @@
       </p:sp>
       <p:sp>
         <p:nvSpPr>
-          <p:cNvPr id="17" name="stack-body"/>
+          <p:cNvPr id="18" name="stack-body"/>
           <p:cNvSpPr txBox="1"/>
           <p:nvPr/>
         </p:nvSpPr>
@@ -9786,8 +10649,8 @@
         </p:nvSpPr>
         <p:spPr>
           <a:xfrm>
-            <a:off x="548640" y="4526280"/>
-            <a:ext cx="11064240" cy="822960"/>
+            <a:off x="548640" y="4343400"/>
+            <a:ext cx="11064240" cy="457200"/>
           </a:xfrm>
           <a:prstGeom prst="rect">
             <a:avLst/>
@@ -9822,6 +10685,171 @@
               <a:t>the UI showcase form (/admin/showcase/new). Required fields show * from the validator, never hard-coded.</a:t>
             </a:r>
             <a:endParaRPr lang="en-US" sz="1600" dirty="0"/>
+          </a:p>
+        </p:txBody>
+      </p:sp>
+      <p:sp>
+        <p:nvSpPr>
+          <p:cNvPr id="27" name="pipeline-files"/>
+          <p:cNvSpPr/>
+          <p:nvPr/>
+        </p:nvSpPr>
+        <p:spPr>
+          <a:xfrm>
+            <a:off x="548640" y="4892040"/>
+            <a:ext cx="11064240" cy="1325880"/>
+          </a:xfrm>
+          <a:prstGeom prst="roundRect">
+            <a:avLst>
+              <a:gd name="adj" fmla="val 6897"/>
+            </a:avLst>
+          </a:prstGeom>
+          <a:solidFill>
+            <a:schemeClr val="bg2"/>
+          </a:solidFill>
+          <a:ln w="12700">
+            <a:solidFill>
+              <a:schemeClr val="bg2"/>
+            </a:solidFill>
+            <a:prstDash val="solid"/>
+          </a:ln>
+        </p:spPr>
+      </p:sp>
+      <p:sp>
+        <p:nvSpPr>
+          <p:cNvPr id="28" name="pipeline-files-label"/>
+          <p:cNvSpPr txBox="1"/>
+          <p:nvPr/>
+        </p:nvSpPr>
+        <p:spPr>
+          <a:xfrm>
+            <a:off x="777240" y="5001768"/>
+            <a:ext cx="914400" cy="274320"/>
+          </a:xfrm>
+          <a:prstGeom prst="rect">
+            <a:avLst/>
+          </a:prstGeom>
+          <a:noFill/>
+          <a:ln/>
+        </p:spPr>
+        <p:txBody>
+          <a:bodyPr wrap="square" lIns="0" tIns="0" rIns="0" bIns="0" rtlCol="0" anchor="ctr"/>
+          <a:lstStyle/>
+          <a:p>
+            <a:pPr indent="0" marL="0">
+              <a:buNone/>
+            </a:pPr>
+            <a:r>
+              <a:rPr lang="en-US" sz="1200" b="1" dirty="0">
+                <a:solidFill>
+                  <a:schemeClr val="accent2"/>
+                </a:solidFill>
+              </a:rPr>
+              <a:t>Files</a:t>
+            </a:r>
+            <a:endParaRPr lang="en-US" sz="1200" dirty="0"/>
+          </a:p>
+        </p:txBody>
+      </p:sp>
+      <p:sp>
+        <p:nvSpPr>
+          <p:cNvPr id="29" name="pipeline-files-0"/>
+          <p:cNvSpPr txBox="1"/>
+          <p:nvPr/>
+        </p:nvSpPr>
+        <p:spPr>
+          <a:xfrm>
+            <a:off x="777240" y="5303520"/>
+            <a:ext cx="10515600" cy="822960"/>
+          </a:xfrm>
+          <a:prstGeom prst="rect">
+            <a:avLst/>
+          </a:prstGeom>
+          <a:noFill/>
+          <a:ln/>
+        </p:spPr>
+        <p:txBody>
+          <a:bodyPr wrap="square" lIns="0" tIns="0" rIns="0" bIns="0" rtlCol="0" anchor="t"/>
+          <a:lstStyle/>
+          <a:p>
+            <a:pPr indent="0" marL="0">
+              <a:spcAft>
+                <a:spcPts val="300"/>
+              </a:spcAft>
+              <a:buNone/>
+            </a:pPr>
+            <a:r>
+              <a:rPr lang="en-US" sz="1100" dirty="0">
+                <a:solidFill>
+                  <a:schemeClr val="tx2"/>
+                </a:solidFill>
+                <a:latin typeface="Courier New" pitchFamily="34" charset="0"/>
+                <a:ea typeface="Courier New" pitchFamily="34" charset="-122"/>
+                <a:cs typeface="Courier New" pitchFamily="34" charset="-120"/>
+              </a:rPr>
+              <a:t>TrainingModule/src/app/core/validators/  (imported as @validators)</a:t>
+            </a:r>
+            <a:endParaRPr lang="en-US" sz="1100" dirty="0"/>
+          </a:p>
+          <a:p>
+            <a:pPr indent="0" marL="0">
+              <a:spcAft>
+                <a:spcPts val="300"/>
+              </a:spcAft>
+              <a:buNone/>
+            </a:pPr>
+            <a:r>
+              <a:rPr lang="en-US" sz="1100" dirty="0">
+                <a:solidFill>
+                  <a:schemeClr val="tx2"/>
+                </a:solidFill>
+                <a:latin typeface="Courier New" pitchFamily="34" charset="0"/>
+                <a:ea typeface="Courier New" pitchFamily="34" charset="-122"/>
+                <a:cs typeface="Courier New" pitchFamily="34" charset="-120"/>
+              </a:rPr>
+              <a:t>TrainingModule/src/app/core/validators/validation-message.pipe.ts</a:t>
+            </a:r>
+            <a:endParaRPr lang="en-US" sz="1100" dirty="0"/>
+          </a:p>
+          <a:p>
+            <a:pPr indent="0" marL="0">
+              <a:spcAft>
+                <a:spcPts val="300"/>
+              </a:spcAft>
+              <a:buNone/>
+            </a:pPr>
+            <a:r>
+              <a:rPr lang="en-US" sz="1100" dirty="0">
+                <a:solidFill>
+                  <a:schemeClr val="tx2"/>
+                </a:solidFill>
+                <a:latin typeface="Courier New" pitchFamily="34" charset="0"/>
+                <a:ea typeface="Courier New" pitchFamily="34" charset="-122"/>
+                <a:cs typeface="Courier New" pitchFamily="34" charset="-120"/>
+              </a:rPr>
+              <a:t>TrainingModule/src/app/core/ui/form-pipeline.service.ts</a:t>
+            </a:r>
+            <a:endParaRPr lang="en-US" sz="1100" dirty="0"/>
+          </a:p>
+          <a:p>
+            <a:pPr indent="0" marL="0">
+              <a:spcAft>
+                <a:spcPts val="300"/>
+              </a:spcAft>
+              <a:buNone/>
+            </a:pPr>
+            <a:r>
+              <a:rPr lang="en-US" sz="1100" dirty="0">
+                <a:solidFill>
+                  <a:schemeClr val="tx2"/>
+                </a:solidFill>
+                <a:latin typeface="Courier New" pitchFamily="34" charset="0"/>
+                <a:ea typeface="Courier New" pitchFamily="34" charset="-122"/>
+                <a:cs typeface="Courier New" pitchFamily="34" charset="-120"/>
+              </a:rPr>
+              <a:t>TrainingModule/src/app/core/ui/async-executor.service.ts</a:t>
+            </a:r>
+            <a:endParaRPr lang="en-US" sz="1100" dirty="0"/>
           </a:p>
         </p:txBody>
       </p:sp>
@@ -11065,12 +12093,12 @@
         </p:nvSpPr>
         <p:spPr>
           <a:xfrm>
-            <a:off x="548640" y="5120640"/>
-            <a:ext cx="11064240" cy="1005840"/>
+            <a:off x="548640" y="5074920"/>
+            <a:ext cx="11064240" cy="777240"/>
           </a:xfrm>
           <a:prstGeom prst="roundRect">
             <a:avLst>
-              <a:gd name="adj" fmla="val 10909"/>
+              <a:gd name="adj" fmla="val 14118"/>
             </a:avLst>
           </a:prstGeom>
           <a:solidFill>
@@ -11092,8 +12120,8 @@
         </p:nvSpPr>
         <p:spPr>
           <a:xfrm>
-            <a:off x="868680" y="5120640"/>
-            <a:ext cx="10424160" cy="1005840"/>
+            <a:off x="868680" y="5074920"/>
+            <a:ext cx="10424160" cy="777240"/>
           </a:xfrm>
           <a:prstGeom prst="rect">
             <a:avLst/>
@@ -11109,7 +12137,7 @@
               <a:buNone/>
             </a:pPr>
             <a:r>
-              <a:rPr lang="en-US" sz="1700" b="1" dirty="0">
+              <a:rPr lang="en-US" sz="1600" b="1" dirty="0">
                 <a:solidFill>
                   <a:schemeClr val="bg1"/>
                 </a:solidFill>
@@ -11120,14 +12148,67 @@
               <a:buNone/>
             </a:pPr>
             <a:r>
-              <a:rPr lang="en-US" sz="1700" dirty="0">
+              <a:rPr lang="en-US" sz="1600" dirty="0">
                 <a:solidFill>
                   <a:schemeClr val="bg1"/>
                 </a:solidFill>
               </a:rPr>
               <a:t>{ ok: true, value } and the page navigates. On any stop it gets { ok: false, reason } and simply returns: the messages are already on screen.</a:t>
             </a:r>
-            <a:endParaRPr lang="en-US" sz="1700" dirty="0"/>
+            <a:endParaRPr lang="en-US" sz="1600" dirty="0"/>
+          </a:p>
+        </p:txBody>
+      </p:sp>
+      <p:sp>
+        <p:nvSpPr>
+          <p:cNvPr id="37" name="flow-files"/>
+          <p:cNvSpPr txBox="1"/>
+          <p:nvPr/>
+        </p:nvSpPr>
+        <p:spPr>
+          <a:xfrm>
+            <a:off x="548640" y="5925312"/>
+            <a:ext cx="11064240" cy="365760"/>
+          </a:xfrm>
+          <a:prstGeom prst="rect">
+            <a:avLst/>
+          </a:prstGeom>
+          <a:noFill/>
+          <a:ln/>
+        </p:spPr>
+        <p:txBody>
+          <a:bodyPr wrap="square" lIns="0" tIns="0" rIns="0" bIns="0" rtlCol="0" anchor="ctr"/>
+          <a:lstStyle/>
+          <a:p>
+            <a:pPr indent="0" marL="0">
+              <a:buNone/>
+            </a:pPr>
+            <a:r>
+              <a:rPr lang="en-US" sz="1050" b="1" dirty="0">
+                <a:solidFill>
+                  <a:schemeClr val="accent2"/>
+                </a:solidFill>
+                <a:latin typeface="Calibri" pitchFamily="34" charset="0"/>
+                <a:ea typeface="Calibri" pitchFamily="34" charset="-122"/>
+                <a:cs typeface="Calibri" pitchFamily="34" charset="-120"/>
+              </a:rPr>
+              <a:t>Files: </a:t>
+            </a:r>
+            <a:pPr indent="0" marL="0">
+              <a:buNone/>
+            </a:pPr>
+            <a:r>
+              <a:rPr lang="en-US" sz="1050" dirty="0">
+                <a:solidFill>
+                  <a:schemeClr val="tx2"/>
+                </a:solidFill>
+                <a:latin typeface="Courier New" pitchFamily="34" charset="0"/>
+                <a:ea typeface="Courier New" pitchFamily="34" charset="-122"/>
+                <a:cs typeface="Courier New" pitchFamily="34" charset="-120"/>
+              </a:rPr>
+              <a:t>TrainingModule/src/app/core/ui/form-pipeline.service.ts  ·  TrainingModule/src/app/core/ui/form-pipeline.types.ts</a:t>
+            </a:r>
+            <a:endParaRPr lang="en-US" sz="1050" dirty="0"/>
           </a:p>
         </p:txBody>
       </p:sp>
@@ -11248,11 +12329,11 @@
         <p:spPr>
           <a:xfrm>
             <a:off x="548640" y="1371600"/>
-            <a:ext cx="6400800" cy="4800600"/>
+            <a:ext cx="6400800" cy="4206240"/>
           </a:xfrm>
           <a:prstGeom prst="roundRect">
             <a:avLst>
-              <a:gd name="adj" fmla="val 2286"/>
+              <a:gd name="adj" fmla="val 2609"/>
             </a:avLst>
           </a:prstGeom>
           <a:solidFill>
@@ -11274,8 +12355,8 @@
         </p:nvSpPr>
         <p:spPr>
           <a:xfrm>
-            <a:off x="822960" y="1508760"/>
-            <a:ext cx="5943600" cy="4526280"/>
+            <a:off x="822960" y="1481328"/>
+            <a:ext cx="5943600" cy="4023360"/>
           </a:xfrm>
           <a:prstGeom prst="rect">
             <a:avLst/>
@@ -11602,31 +12683,57 @@
         </p:nvSpPr>
         <p:spPr>
           <a:xfrm>
-            <a:off x="548640" y="6199632"/>
-            <a:ext cx="6400800" cy="201168"/>
-          </a:xfrm>
-          <a:prstGeom prst="rect">
-            <a:avLst/>
-          </a:prstGeom>
-          <a:noFill/>
-          <a:ln/>
-        </p:spPr>
-        <p:txBody>
-          <a:bodyPr wrap="square" lIns="0" tIns="0" rIns="0" bIns="0" rtlCol="0" anchor="ctr"/>
-          <a:lstStyle/>
-          <a:p>
-            <a:pPr indent="0" marL="0">
-              <a:buNone/>
-            </a:pPr>
-            <a:r>
-              <a:rPr lang="en-US" sz="1000" i="1" dirty="0">
-                <a:solidFill>
-                  <a:schemeClr val="accent6"/>
-                </a:solidFill>
-              </a:rPr>
-              <a:t>showcase-form-page.component.ts</a:t>
-            </a:r>
-            <a:endParaRPr lang="en-US" sz="1000" dirty="0"/>
+            <a:off x="548640" y="5669280"/>
+            <a:ext cx="6400800" cy="548640"/>
+          </a:xfrm>
+          <a:prstGeom prst="rect">
+            <a:avLst/>
+          </a:prstGeom>
+          <a:noFill/>
+          <a:ln/>
+        </p:spPr>
+        <p:txBody>
+          <a:bodyPr wrap="square" lIns="0" tIns="0" rIns="0" bIns="0" rtlCol="0" anchor="t"/>
+          <a:lstStyle/>
+          <a:p>
+            <a:pPr indent="0" marL="0">
+              <a:spcAft>
+                <a:spcPts val="300"/>
+              </a:spcAft>
+              <a:buNone/>
+            </a:pPr>
+            <a:r>
+              <a:rPr lang="en-US" sz="1050" dirty="0">
+                <a:solidFill>
+                  <a:schemeClr val="tx2"/>
+                </a:solidFill>
+                <a:latin typeface="Courier New" pitchFamily="34" charset="0"/>
+                <a:ea typeface="Courier New" pitchFamily="34" charset="-122"/>
+                <a:cs typeface="Courier New" pitchFamily="34" charset="-120"/>
+              </a:rPr>
+              <a:t>TrainingModule/src/app/features/admin/showcase/showcase-form-page.component.ts</a:t>
+            </a:r>
+            <a:endParaRPr lang="en-US" sz="1050" dirty="0"/>
+          </a:p>
+          <a:p>
+            <a:pPr indent="0" marL="0">
+              <a:spcAft>
+                <a:spcPts val="300"/>
+              </a:spcAft>
+              <a:buNone/>
+            </a:pPr>
+            <a:r>
+              <a:rPr lang="en-US" sz="1050" dirty="0">
+                <a:solidFill>
+                  <a:schemeClr val="tx2"/>
+                </a:solidFill>
+                <a:latin typeface="Courier New" pitchFamily="34" charset="0"/>
+                <a:ea typeface="Courier New" pitchFamily="34" charset="-122"/>
+                <a:cs typeface="Courier New" pitchFamily="34" charset="-120"/>
+              </a:rPr>
+              <a:t>TrainingModule/src/app/features/admin/showcase/showcase-form.ts</a:t>
+            </a:r>
+            <a:endParaRPr lang="en-US" sz="1050" dirty="0"/>
           </a:p>
         </p:txBody>
       </p:sp>
@@ -11738,7 +12845,7 @@
                   <a:schemeClr val="tx1"/>
                 </a:solidFill>
               </a:rPr>
-              <a:t>The FormGroup built with @validators. Rules match the API rules.</a:t>
+              <a:t>Built in showcase-form.ts with @validators. Same rules as Bidding_Core/Helpers/ShowcaseRules.cs.</a:t>
             </a:r>
             <a:endParaRPr lang="en-US" sz="1400" dirty="0"/>
           </a:p>
@@ -12277,11 +13384,11 @@
         <p:spPr>
           <a:xfrm>
             <a:off x="548640" y="1463040"/>
-            <a:ext cx="5394960" cy="3566160"/>
+            <a:ext cx="5394960" cy="3108960"/>
           </a:xfrm>
           <a:prstGeom prst="roundRect">
             <a:avLst>
-              <a:gd name="adj" fmla="val 3077"/>
+              <a:gd name="adj" fmla="val 3529"/>
             </a:avLst>
           </a:prstGeom>
           <a:solidFill>
@@ -12401,7 +13508,7 @@
         <p:spPr>
           <a:xfrm>
             <a:off x="822960" y="2377440"/>
-            <a:ext cx="4892040" cy="2468880"/>
+            <a:ext cx="4892040" cy="2011680"/>
           </a:xfrm>
           <a:prstGeom prst="rect">
             <a:avLst/>
@@ -12495,11 +13602,11 @@
         <p:spPr>
           <a:xfrm>
             <a:off x="6217920" y="1463040"/>
-            <a:ext cx="5394960" cy="3566160"/>
+            <a:ext cx="5394960" cy="3108960"/>
           </a:xfrm>
           <a:prstGeom prst="roundRect">
             <a:avLst>
-              <a:gd name="adj" fmla="val 3077"/>
+              <a:gd name="adj" fmla="val 3529"/>
             </a:avLst>
           </a:prstGeom>
           <a:solidFill>
@@ -12619,7 +13726,7 @@
         <p:spPr>
           <a:xfrm>
             <a:off x="6492240" y="2377440"/>
-            <a:ext cx="4892040" cy="2468880"/>
+            <a:ext cx="4892040" cy="2011680"/>
           </a:xfrm>
           <a:prstGeom prst="rect">
             <a:avLst/>
@@ -12701,6 +13808,253 @@
               <a:t>Never swallow errors in a component</a:t>
             </a:r>
             <a:endParaRPr lang="en-US" sz="1600" dirty="0"/>
+          </a:p>
+        </p:txBody>
+      </p:sp>
+      <p:sp>
+        <p:nvSpPr>
+          <p:cNvPr id="13" name="loading-files"/>
+          <p:cNvSpPr/>
+          <p:nvPr/>
+        </p:nvSpPr>
+        <p:spPr>
+          <a:xfrm>
+            <a:off x="548640" y="4754880"/>
+            <a:ext cx="11064240" cy="1463040"/>
+          </a:xfrm>
+          <a:prstGeom prst="roundRect">
+            <a:avLst>
+              <a:gd name="adj" fmla="val 6250"/>
+            </a:avLst>
+          </a:prstGeom>
+          <a:solidFill>
+            <a:schemeClr val="bg2"/>
+          </a:solidFill>
+          <a:ln w="12700">
+            <a:solidFill>
+              <a:schemeClr val="bg2"/>
+            </a:solidFill>
+            <a:prstDash val="solid"/>
+          </a:ln>
+        </p:spPr>
+      </p:sp>
+      <p:sp>
+        <p:nvSpPr>
+          <p:cNvPr id="14" name="loading-files-label"/>
+          <p:cNvSpPr txBox="1"/>
+          <p:nvPr/>
+        </p:nvSpPr>
+        <p:spPr>
+          <a:xfrm>
+            <a:off x="777240" y="4864608"/>
+            <a:ext cx="914400" cy="274320"/>
+          </a:xfrm>
+          <a:prstGeom prst="rect">
+            <a:avLst/>
+          </a:prstGeom>
+          <a:noFill/>
+          <a:ln/>
+        </p:spPr>
+        <p:txBody>
+          <a:bodyPr wrap="square" lIns="0" tIns="0" rIns="0" bIns="0" rtlCol="0" anchor="ctr"/>
+          <a:lstStyle/>
+          <a:p>
+            <a:pPr indent="0" marL="0">
+              <a:buNone/>
+            </a:pPr>
+            <a:r>
+              <a:rPr lang="en-US" sz="1200" b="1" dirty="0">
+                <a:solidFill>
+                  <a:schemeClr val="accent2"/>
+                </a:solidFill>
+              </a:rPr>
+              <a:t>Files</a:t>
+            </a:r>
+            <a:endParaRPr lang="en-US" sz="1200" dirty="0"/>
+          </a:p>
+        </p:txBody>
+      </p:sp>
+      <p:sp>
+        <p:nvSpPr>
+          <p:cNvPr id="15" name="loading-files-0"/>
+          <p:cNvSpPr txBox="1"/>
+          <p:nvPr/>
+        </p:nvSpPr>
+        <p:spPr>
+          <a:xfrm>
+            <a:off x="777240" y="5166360"/>
+            <a:ext cx="5212080" cy="960120"/>
+          </a:xfrm>
+          <a:prstGeom prst="rect">
+            <a:avLst/>
+          </a:prstGeom>
+          <a:noFill/>
+          <a:ln/>
+        </p:spPr>
+        <p:txBody>
+          <a:bodyPr wrap="square" lIns="0" tIns="0" rIns="0" bIns="0" rtlCol="0" anchor="t"/>
+          <a:lstStyle/>
+          <a:p>
+            <a:pPr indent="0" marL="0">
+              <a:spcAft>
+                <a:spcPts val="300"/>
+              </a:spcAft>
+              <a:buNone/>
+            </a:pPr>
+            <a:r>
+              <a:rPr lang="en-US" sz="950" dirty="0">
+                <a:solidFill>
+                  <a:schemeClr val="tx2"/>
+                </a:solidFill>
+                <a:latin typeface="Courier New" pitchFamily="34" charset="0"/>
+                <a:ea typeface="Courier New" pitchFamily="34" charset="-122"/>
+                <a:cs typeface="Courier New" pitchFamily="34" charset="-120"/>
+              </a:rPr>
+              <a:t>TrainingModule/src/app/core/ui/async-executor.service.ts</a:t>
+            </a:r>
+            <a:endParaRPr lang="en-US" sz="950" dirty="0"/>
+          </a:p>
+          <a:p>
+            <a:pPr indent="0" marL="0">
+              <a:spcAft>
+                <a:spcPts val="300"/>
+              </a:spcAft>
+              <a:buNone/>
+            </a:pPr>
+            <a:r>
+              <a:rPr lang="en-US" sz="950" dirty="0">
+                <a:solidFill>
+                  <a:schemeClr val="tx2"/>
+                </a:solidFill>
+                <a:latin typeface="Courier New" pitchFamily="34" charset="0"/>
+                <a:ea typeface="Courier New" pitchFamily="34" charset="-122"/>
+                <a:cs typeface="Courier New" pitchFamily="34" charset="-120"/>
+              </a:rPr>
+              <a:t>TrainingModule/src/app/core/store/ui-async/ui-async.reducer.ts</a:t>
+            </a:r>
+            <a:endParaRPr lang="en-US" sz="950" dirty="0"/>
+          </a:p>
+          <a:p>
+            <a:pPr indent="0" marL="0">
+              <a:spcAft>
+                <a:spcPts val="300"/>
+              </a:spcAft>
+              <a:buNone/>
+            </a:pPr>
+            <a:r>
+              <a:rPr lang="en-US" sz="950" dirty="0">
+                <a:solidFill>
+                  <a:schemeClr val="tx2"/>
+                </a:solidFill>
+                <a:latin typeface="Courier New" pitchFamily="34" charset="0"/>
+                <a:ea typeface="Courier New" pitchFamily="34" charset="-122"/>
+                <a:cs typeface="Courier New" pitchFamily="34" charset="-120"/>
+              </a:rPr>
+              <a:t>TrainingModule/src/app/layout/main-layout/main-layout.component.ts</a:t>
+            </a:r>
+            <a:endParaRPr lang="en-US" sz="950" dirty="0"/>
+          </a:p>
+          <a:p>
+            <a:pPr indent="0" marL="0">
+              <a:spcAft>
+                <a:spcPts val="300"/>
+              </a:spcAft>
+              <a:buNone/>
+            </a:pPr>
+            <a:r>
+              <a:rPr lang="en-US" sz="950" dirty="0">
+                <a:solidFill>
+                  <a:schemeClr val="tx2"/>
+                </a:solidFill>
+                <a:latin typeface="Courier New" pitchFamily="34" charset="0"/>
+                <a:ea typeface="Courier New" pitchFamily="34" charset="-122"/>
+                <a:cs typeface="Courier New" pitchFamily="34" charset="-120"/>
+              </a:rPr>
+              <a:t>TrainingModule/src/app/core/interceptors/http-error.interceptor.ts</a:t>
+            </a:r>
+            <a:endParaRPr lang="en-US" sz="950" dirty="0"/>
+          </a:p>
+        </p:txBody>
+      </p:sp>
+      <p:sp>
+        <p:nvSpPr>
+          <p:cNvPr id="16" name="loading-files-1"/>
+          <p:cNvSpPr txBox="1"/>
+          <p:nvPr/>
+        </p:nvSpPr>
+        <p:spPr>
+          <a:xfrm>
+            <a:off x="6080760" y="5166360"/>
+            <a:ext cx="5212080" cy="960120"/>
+          </a:xfrm>
+          <a:prstGeom prst="rect">
+            <a:avLst/>
+          </a:prstGeom>
+          <a:noFill/>
+          <a:ln/>
+        </p:spPr>
+        <p:txBody>
+          <a:bodyPr wrap="square" lIns="0" tIns="0" rIns="0" bIns="0" rtlCol="0" anchor="t"/>
+          <a:lstStyle/>
+          <a:p>
+            <a:pPr indent="0" marL="0">
+              <a:spcAft>
+                <a:spcPts val="300"/>
+              </a:spcAft>
+              <a:buNone/>
+            </a:pPr>
+            <a:r>
+              <a:rPr lang="en-US" sz="950" dirty="0">
+                <a:solidFill>
+                  <a:schemeClr val="tx2"/>
+                </a:solidFill>
+                <a:latin typeface="Courier New" pitchFamily="34" charset="0"/>
+                <a:ea typeface="Courier New" pitchFamily="34" charset="-122"/>
+                <a:cs typeface="Courier New" pitchFamily="34" charset="-120"/>
+              </a:rPr>
+              <a:t>TrainingModule/src/app/core/errors/global-error-handler.ts</a:t>
+            </a:r>
+            <a:endParaRPr lang="en-US" sz="950" dirty="0"/>
+          </a:p>
+          <a:p>
+            <a:pPr indent="0" marL="0">
+              <a:spcAft>
+                <a:spcPts val="300"/>
+              </a:spcAft>
+              <a:buNone/>
+            </a:pPr>
+            <a:r>
+              <a:rPr lang="en-US" sz="950" dirty="0">
+                <a:solidFill>
+                  <a:schemeClr val="tx2"/>
+                </a:solidFill>
+                <a:latin typeface="Courier New" pitchFamily="34" charset="0"/>
+                <a:ea typeface="Courier New" pitchFamily="34" charset="-122"/>
+                <a:cs typeface="Courier New" pitchFamily="34" charset="-120"/>
+              </a:rPr>
+              <a:t>TrainingModule/src/app/core/errors/client-error-reporter.service.ts</a:t>
+            </a:r>
+            <a:endParaRPr lang="en-US" sz="950" dirty="0"/>
+          </a:p>
+          <a:p>
+            <a:pPr indent="0" marL="0">
+              <a:spcAft>
+                <a:spcPts val="300"/>
+              </a:spcAft>
+              <a:buNone/>
+            </a:pPr>
+            <a:r>
+              <a:rPr lang="en-US" sz="950" dirty="0">
+                <a:solidFill>
+                  <a:schemeClr val="tx2"/>
+                </a:solidFill>
+                <a:latin typeface="Courier New" pitchFamily="34" charset="0"/>
+                <a:ea typeface="Courier New" pitchFamily="34" charset="-122"/>
+                <a:cs typeface="Courier New" pitchFamily="34" charset="-120"/>
+              </a:rPr>
+              <a:t>Bidding_API/ExceptionHandler/ExceptionMiddlewareExtensions.cs</a:t>
+            </a:r>
+            <a:endParaRPr lang="en-US" sz="950" dirty="0"/>
           </a:p>
         </p:txBody>
       </p:sp>

--- a/docs/training-standards.pptx
+++ b/docs/training-standards.pptx
@@ -19,9 +19,11 @@
     <p:sldId id="267" r:id="rId13"/>
     <p:sldId id="268" r:id="rId14"/>
     <p:sldId id="269" r:id="rId15"/>
+    <p:sldId id="270" r:id="rId16"/>
+    <p:sldId id="271" r:id="rId17"/>
   </p:sldIdLst>
   <p:notesMasterIdLst>
-    <p:notesMasterId r:id="rId16"/>
+    <p:notesMasterId r:id="rId18"/>
   </p:notesMasterIdLst>
   <p:sldSz cx="12192000" cy="6858000"/>
   <p:notesSz cx="6858000" cy="12192000"/>
@@ -120,19 +122,19 @@
   <p:extLst>
     <p:ext uri="{521415D9-36F7-43E2-AB2F-B90AF26B5E84}">
       <p14:sectionLst xmlns:p14="http://schemas.microsoft.com/office/powerpoint/2010/main">
-        <p14:section name="Intro" id="{f446ceb9-4852-00d8-b4c0-3239a4d48b1f}">
+        <p14:section name="Intro" id="{d8800e73-0c8f-7c4c-c1e3-48e4cc245a59}">
           <p14:sldIdLst>
             <p14:sldId id="256"/>
             <p14:sldId id="257"/>
           </p14:sldIdLst>
         </p14:section>
-        <p14:section name="Backend" id="{104c24d1-bd61-03a7-12fd-0217eee9d8d4}">
+        <p14:section name="Backend" id="{2dec100a-b6ee-21cd-b01a-69f16f3f0b93}">
           <p14:sldIdLst>
             <p14:sldId id="258"/>
             <p14:sldId id="259"/>
           </p14:sldIdLst>
         </p14:section>
-        <p14:section name="Frontend" id="{0a61b297-b4af-10a1-8125-2fca5312b195}">
+        <p14:section name="Frontend" id="{eb0ac9b3-9781-1546-ac33-9a32f7883404}">
           <p14:sldIdLst>
             <p14:sldId id="260"/>
             <p14:sldId id="261"/>
@@ -142,16 +144,22 @@
             <p14:sldId id="265"/>
           </p14:sldIdLst>
         </p14:section>
-        <p14:section name="Pages" id="{ee645d21-89f9-9ab7-9602-7cfae371cedf}">
+        <p14:section name="Pages" id="{38ea0cf8-5d65-cca9-6225-c99ad7cdf598}">
           <p14:sldIdLst>
             <p14:sldId id="266"/>
             <p14:sldId id="267"/>
           </p14:sldIdLst>
         </p14:section>
-        <p14:section name="Checklist" id="{1cde8afa-f3e6-c4fb-cb0c-8e0b9e51e943}">
+        <p14:section name="Roles" id="{c4bf5f53-cd6b-aed5-f533-280e9a0f0629}">
           <p14:sldIdLst>
             <p14:sldId id="268"/>
             <p14:sldId id="269"/>
+          </p14:sldIdLst>
+        </p14:section>
+        <p14:section name="Checklist" id="{d61761f7-fae1-9705-61f7-ecc5647a6993}">
+          <p14:sldIdLst>
+            <p14:sldId id="270"/>
+            <p14:sldId id="271"/>
           </p14:sldIdLst>
         </p14:section>
       </p14:sectionLst>
@@ -910,7 +918,7 @@
           <a:p>
             <a:r>
               <a:rPr lang="en-US" dirty="0"/>
-              <a:t>Use this as the PR checklist. If any line is missing, the page is not done.</a:t>
+              <a:t>A role name is UserType.UserGroup. Organizations are Corporate users linked to an Organization row; the company AccountAdmin manages its users and custom roles. Individuals have no organization. The open question is how a company sends its employees as trainees.</a:t>
             </a:r>
             <a:endParaRPr lang="en-US" dirty="0"/>
           </a:p>
@@ -998,7 +1006,7 @@
           <a:p>
             <a:r>
               <a:rPr lang="en-US" dirty="0"/>
-              <a:t>Questions. Point the team at the README for setup: connection string, JWT keys to change, and the no-migrations rule.</a:t>
+              <a:t>Steps 1 to 4 are normal work for every new page. Steps 5 and 6 touch shared enums and seed data, so agree them with the platform team before coding. Restart the API with the seeder enabled on a dev database to pick up role-page changes.</a:t>
             </a:r>
             <a:endParaRPr lang="en-US" dirty="0"/>
           </a:p>
@@ -1022,6 +1030,182 @@
             <a:fld id="{F7021451-1387-4CA6-816F-3879F97B5CBC}" type="slidenum">
               <a:rPr lang="en-US"/>
               <a:t>14</a:t>
+            </a:fld>
+            <a:endParaRPr lang="en-US"/>
+          </a:p>
+        </p:txBody>
+      </p:sp>
+    </p:spTree>
+    <p:extLst>
+      <p:ext uri="{BB962C8B-B14F-4D97-AF65-F5344CB8AC3E}">
+        <p14:creationId xmlns:p14="http://schemas.microsoft.com/office/powerpoint/2010/main" val="1024086991"/>
+      </p:ext>
+    </p:extLst>
+  </p:cSld>
+  <p:clrMapOvr>
+    <a:masterClrMapping/>
+  </p:clrMapOvr>
+</p:notes>
+</file>
+
+<file path=ppt/notesSlides/notesSlide15.xml><?xml version="1.0" encoding="utf-8"?>
+<p:notes xmlns:a="http://schemas.openxmlformats.org/drawingml/2006/main" xmlns:r="http://schemas.openxmlformats.org/officeDocument/2006/relationships" xmlns:p="http://schemas.openxmlformats.org/presentationml/2006/main">
+  <p:cSld>
+    <p:spTree>
+      <p:nvGrpSpPr>
+        <p:cNvPr id="1" name=""/>
+        <p:cNvGrpSpPr/>
+        <p:nvPr/>
+      </p:nvGrpSpPr>
+      <p:grpSpPr>
+        <a:xfrm>
+          <a:off x="0" y="0"/>
+          <a:ext cx="0" cy="0"/>
+          <a:chOff x="0" y="0"/>
+          <a:chExt cx="0" cy="0"/>
+        </a:xfrm>
+      </p:grpSpPr>
+      <p:sp>
+        <p:nvSpPr>
+          <p:cNvPr id="2" name="Slide Image Placeholder 1"/>
+          <p:cNvSpPr>
+            <a:spLocks noGrp="1" noRot="1" noChangeAspect="1"/>
+          </p:cNvSpPr>
+          <p:nvPr>
+            <p:ph type="sldImg"/>
+          </p:nvPr>
+        </p:nvSpPr>
+        <p:spPr/>
+      </p:sp>
+      <p:sp>
+        <p:nvSpPr>
+          <p:cNvPr id="3" name="Notes Placeholder 2"/>
+          <p:cNvSpPr>
+            <a:spLocks noGrp="1"/>
+          </p:cNvSpPr>
+          <p:nvPr>
+            <p:ph type="body" idx="1"/>
+          </p:nvPr>
+        </p:nvSpPr>
+        <p:spPr/>
+        <p:txBody>
+          <a:bodyPr/>
+          <a:lstStyle/>
+          <a:p>
+            <a:r>
+              <a:rPr lang="en-US" dirty="0"/>
+              <a:t>Use this as the PR checklist. If any line is missing, the page is not done.</a:t>
+            </a:r>
+            <a:endParaRPr lang="en-US" dirty="0"/>
+          </a:p>
+        </p:txBody>
+      </p:sp>
+      <p:sp>
+        <p:nvSpPr>
+          <p:cNvPr id="4" name="Slide Number Placeholder 3"/>
+          <p:cNvSpPr>
+            <a:spLocks noGrp="1"/>
+          </p:cNvSpPr>
+          <p:nvPr>
+            <p:ph type="sldNum" sz="quarter" idx="10"/>
+          </p:nvPr>
+        </p:nvSpPr>
+        <p:spPr/>
+        <p:txBody>
+          <a:bodyPr/>
+          <a:lstStyle/>
+          <a:p>
+            <a:fld id="{F7021451-1387-4CA6-816F-3879F97B5CBC}" type="slidenum">
+              <a:rPr lang="en-US"/>
+              <a:t>15</a:t>
+            </a:fld>
+            <a:endParaRPr lang="en-US"/>
+          </a:p>
+        </p:txBody>
+      </p:sp>
+    </p:spTree>
+    <p:extLst>
+      <p:ext uri="{BB962C8B-B14F-4D97-AF65-F5344CB8AC3E}">
+        <p14:creationId xmlns:p14="http://schemas.microsoft.com/office/powerpoint/2010/main" val="1024086991"/>
+      </p:ext>
+    </p:extLst>
+  </p:cSld>
+  <p:clrMapOvr>
+    <a:masterClrMapping/>
+  </p:clrMapOvr>
+</p:notes>
+</file>
+
+<file path=ppt/notesSlides/notesSlide16.xml><?xml version="1.0" encoding="utf-8"?>
+<p:notes xmlns:a="http://schemas.openxmlformats.org/drawingml/2006/main" xmlns:r="http://schemas.openxmlformats.org/officeDocument/2006/relationships" xmlns:p="http://schemas.openxmlformats.org/presentationml/2006/main">
+  <p:cSld>
+    <p:spTree>
+      <p:nvGrpSpPr>
+        <p:cNvPr id="1" name=""/>
+        <p:cNvGrpSpPr/>
+        <p:nvPr/>
+      </p:nvGrpSpPr>
+      <p:grpSpPr>
+        <a:xfrm>
+          <a:off x="0" y="0"/>
+          <a:ext cx="0" cy="0"/>
+          <a:chOff x="0" y="0"/>
+          <a:chExt cx="0" cy="0"/>
+        </a:xfrm>
+      </p:grpSpPr>
+      <p:sp>
+        <p:nvSpPr>
+          <p:cNvPr id="2" name="Slide Image Placeholder 1"/>
+          <p:cNvSpPr>
+            <a:spLocks noGrp="1" noRot="1" noChangeAspect="1"/>
+          </p:cNvSpPr>
+          <p:nvPr>
+            <p:ph type="sldImg"/>
+          </p:nvPr>
+        </p:nvSpPr>
+        <p:spPr/>
+      </p:sp>
+      <p:sp>
+        <p:nvSpPr>
+          <p:cNvPr id="3" name="Notes Placeholder 2"/>
+          <p:cNvSpPr>
+            <a:spLocks noGrp="1"/>
+          </p:cNvSpPr>
+          <p:nvPr>
+            <p:ph type="body" idx="1"/>
+          </p:nvPr>
+        </p:nvSpPr>
+        <p:spPr/>
+        <p:txBody>
+          <a:bodyPr/>
+          <a:lstStyle/>
+          <a:p>
+            <a:r>
+              <a:rPr lang="en-US" dirty="0"/>
+              <a:t>Questions. Point the team at the README for setup: connection string, JWT keys to change, and the no-migrations rule.</a:t>
+            </a:r>
+            <a:endParaRPr lang="en-US" dirty="0"/>
+          </a:p>
+        </p:txBody>
+      </p:sp>
+      <p:sp>
+        <p:nvSpPr>
+          <p:cNvPr id="4" name="Slide Number Placeholder 3"/>
+          <p:cNvSpPr>
+            <a:spLocks noGrp="1"/>
+          </p:cNvSpPr>
+          <p:nvPr>
+            <p:ph type="sldNum" sz="quarter" idx="10"/>
+          </p:nvPr>
+        </p:nvSpPr>
+        <p:spPr/>
+        <p:txBody>
+          <a:bodyPr/>
+          <a:lstStyle/>
+          <a:p>
+            <a:fld id="{F7021451-1387-4CA6-816F-3879F97B5CBC}" type="slidenum">
+              <a:rPr lang="en-US"/>
+              <a:t>16</a:t>
             </a:fld>
             <a:endParaRPr lang="en-US"/>
           </a:p>
@@ -5693,7 +5877,7 @@
                   <a:schemeClr val="tx2"/>
                 </a:solidFill>
               </a:rPr>
-              <a:t>Adding a new page: the checklist</a:t>
+              <a:t>Trainers and trainees, as organizations and individuals</a:t>
             </a:r>
             <a:endParaRPr lang="en-US" sz="3600" dirty="0"/>
           </a:p>
@@ -5701,17 +5885,91 @@
       </p:sp>
       <p:sp>
         <p:nvSpPr>
-          <p:cNvPr id="3" name="chk-0-badge"/>
+          <p:cNvPr id="3" name="rm-col-0"/>
+          <p:cNvSpPr txBox="1"/>
+          <p:nvPr/>
+        </p:nvSpPr>
+        <p:spPr>
+          <a:xfrm>
+            <a:off x="2148840" y="1325880"/>
+            <a:ext cx="4663440" cy="411480"/>
+          </a:xfrm>
+          <a:prstGeom prst="rect">
+            <a:avLst/>
+          </a:prstGeom>
+          <a:noFill/>
+          <a:ln/>
+        </p:spPr>
+        <p:txBody>
+          <a:bodyPr wrap="square" lIns="0" tIns="0" rIns="0" bIns="0" rtlCol="0" anchor="ctr"/>
+          <a:lstStyle/>
+          <a:p>
+            <a:pPr algn="ctr" indent="0" marL="0">
+              <a:buNone/>
+            </a:pPr>
+            <a:r>
+              <a:rPr lang="en-US" sz="1700" b="1" dirty="0">
+                <a:solidFill>
+                  <a:schemeClr val="tx2"/>
+                </a:solidFill>
+              </a:rPr>
+              <a:t>Organization (Corporate)</a:t>
+            </a:r>
+            <a:endParaRPr lang="en-US" sz="1700" dirty="0"/>
+          </a:p>
+        </p:txBody>
+      </p:sp>
+      <p:sp>
+        <p:nvSpPr>
+          <p:cNvPr id="4" name="rm-col-1"/>
+          <p:cNvSpPr txBox="1"/>
+          <p:nvPr/>
+        </p:nvSpPr>
+        <p:spPr>
+          <a:xfrm>
+            <a:off x="6949440" y="1325880"/>
+            <a:ext cx="4663440" cy="411480"/>
+          </a:xfrm>
+          <a:prstGeom prst="rect">
+            <a:avLst/>
+          </a:prstGeom>
+          <a:noFill/>
+          <a:ln/>
+        </p:spPr>
+        <p:txBody>
+          <a:bodyPr wrap="square" lIns="0" tIns="0" rIns="0" bIns="0" rtlCol="0" anchor="ctr"/>
+          <a:lstStyle/>
+          <a:p>
+            <a:pPr algn="ctr" indent="0" marL="0">
+              <a:buNone/>
+            </a:pPr>
+            <a:r>
+              <a:rPr lang="en-US" sz="1700" b="1" dirty="0">
+                <a:solidFill>
+                  <a:schemeClr val="tx2"/>
+                </a:solidFill>
+              </a:rPr>
+              <a:t>Individual</a:t>
+            </a:r>
+            <a:endParaRPr lang="en-US" sz="1700" dirty="0"/>
+          </a:p>
+        </p:txBody>
+      </p:sp>
+      <p:sp>
+        <p:nvSpPr>
+          <p:cNvPr id="5" name="rm-row-0"/>
           <p:cNvSpPr/>
           <p:nvPr/>
         </p:nvSpPr>
         <p:spPr>
           <a:xfrm>
-            <a:off x="548640" y="1572768"/>
-            <a:ext cx="502920" cy="502920"/>
-          </a:xfrm>
-          <a:prstGeom prst="ellipse">
-            <a:avLst/>
+            <a:off x="548640" y="1874520"/>
+            <a:ext cx="1463040" cy="1874520"/>
+          </a:xfrm>
+          <a:prstGeom prst="roundRect">
+            <a:avLst>
+              <a:gd name="adj" fmla="val 7500"/>
+            </a:avLst>
           </a:prstGeom>
           <a:solidFill>
             <a:schemeClr val="tx2"/>
@@ -5726,14 +5984,14 @@
       </p:sp>
       <p:sp>
         <p:nvSpPr>
-          <p:cNvPr id="4" name="chk-0-badge-text"/>
-          <p:cNvSpPr txBox="1"/>
-          <p:nvPr/>
-        </p:nvSpPr>
-        <p:spPr>
-          <a:xfrm>
-            <a:off x="548640" y="1572768"/>
-            <a:ext cx="502920" cy="502920"/>
+          <p:cNvPr id="6" name="rm-row-0-t"/>
+          <p:cNvSpPr txBox="1"/>
+          <p:nvPr/>
+        </p:nvSpPr>
+        <p:spPr>
+          <a:xfrm>
+            <a:off x="548640" y="1874520"/>
+            <a:ext cx="1463040" cy="1874520"/>
           </a:xfrm>
           <a:prstGeom prst="rect">
             <a:avLst/>
@@ -5749,89 +6007,32 @@
               <a:buNone/>
             </a:pPr>
             <a:r>
-              <a:rPr lang="en-US" sz="1600" b="1" dirty="0">
+              <a:rPr lang="en-US" sz="1800" b="1" dirty="0">
                 <a:solidFill>
                   <a:schemeClr val="bg1"/>
                 </a:solidFill>
               </a:rPr>
-              <a:t>1</a:t>
-            </a:r>
-            <a:endParaRPr lang="en-US" sz="1600" dirty="0"/>
-          </a:p>
-        </p:txBody>
-      </p:sp>
-      <p:sp>
-        <p:nvSpPr>
-          <p:cNvPr id="5" name="chk-0-t"/>
-          <p:cNvSpPr txBox="1"/>
-          <p:nvPr/>
-        </p:nvSpPr>
-        <p:spPr>
-          <a:xfrm>
-            <a:off x="1280160" y="1417320"/>
-            <a:ext cx="4754880" cy="822960"/>
-          </a:xfrm>
-          <a:prstGeom prst="rect">
-            <a:avLst/>
-          </a:prstGeom>
-          <a:noFill/>
-          <a:ln/>
-        </p:spPr>
-        <p:txBody>
-          <a:bodyPr wrap="square" lIns="0" tIns="0" rIns="0" bIns="0" rtlCol="0" anchor="ctr"/>
-          <a:lstStyle/>
-          <a:p>
-            <a:pPr indent="0" marL="0">
-              <a:spcAft>
-                <a:spcPts val="200"/>
-              </a:spcAft>
-              <a:buNone/>
-            </a:pPr>
-            <a:r>
-              <a:rPr lang="en-US" sz="1700" dirty="0">
-                <a:solidFill>
-                  <a:schemeClr val="tx1"/>
-                </a:solidFill>
-              </a:rPr>
-              <a:t>Route and sidebar link</a:t>
-            </a:r>
-            <a:endParaRPr lang="en-US" sz="1700" dirty="0"/>
-          </a:p>
-          <a:p>
-            <a:pPr indent="0" marL="0">
-              <a:spcAft>
-                <a:spcPts val="200"/>
-              </a:spcAft>
-              <a:buNone/>
-            </a:pPr>
-            <a:r>
-              <a:rPr lang="en-US" sz="1050" dirty="0">
-                <a:solidFill>
-                  <a:schemeClr val="tx2"/>
-                </a:solidFill>
-                <a:latin typeface="Courier New" pitchFamily="34" charset="0"/>
-                <a:ea typeface="Courier New" pitchFamily="34" charset="-122"/>
-                <a:cs typeface="Courier New" pitchFamily="34" charset="-120"/>
-              </a:rPr>
-              <a:t>TrainingModule/src/app/app.routes.ts</a:t>
-            </a:r>
-            <a:endParaRPr lang="en-US" sz="1700" dirty="0"/>
-          </a:p>
-        </p:txBody>
-      </p:sp>
-      <p:sp>
-        <p:nvSpPr>
-          <p:cNvPr id="6" name="chk-1-badge"/>
+              <a:t>Trainer</a:t>
+            </a:r>
+            <a:endParaRPr lang="en-US" sz="1800" dirty="0"/>
+          </a:p>
+        </p:txBody>
+      </p:sp>
+      <p:sp>
+        <p:nvSpPr>
+          <p:cNvPr id="7" name="rm-row-1"/>
           <p:cNvSpPr/>
           <p:nvPr/>
         </p:nvSpPr>
         <p:spPr>
           <a:xfrm>
-            <a:off x="548640" y="2670048"/>
-            <a:ext cx="502920" cy="502920"/>
-          </a:xfrm>
-          <a:prstGeom prst="ellipse">
-            <a:avLst/>
+            <a:off x="548640" y="3931920"/>
+            <a:ext cx="1463040" cy="1874520"/>
+          </a:xfrm>
+          <a:prstGeom prst="roundRect">
+            <a:avLst>
+              <a:gd name="adj" fmla="val 7500"/>
+            </a:avLst>
           </a:prstGeom>
           <a:solidFill>
             <a:schemeClr val="tx2"/>
@@ -5846,14 +6047,14 @@
       </p:sp>
       <p:sp>
         <p:nvSpPr>
-          <p:cNvPr id="7" name="chk-1-badge-text"/>
-          <p:cNvSpPr txBox="1"/>
-          <p:nvPr/>
-        </p:nvSpPr>
-        <p:spPr>
-          <a:xfrm>
-            <a:off x="548640" y="2670048"/>
-            <a:ext cx="502920" cy="502920"/>
+          <p:cNvPr id="8" name="rm-row-1-t"/>
+          <p:cNvSpPr txBox="1"/>
+          <p:nvPr/>
+        </p:nvSpPr>
+        <p:spPr>
+          <a:xfrm>
+            <a:off x="548640" y="3931920"/>
+            <a:ext cx="1463040" cy="1874520"/>
           </a:xfrm>
           <a:prstGeom prst="rect">
             <a:avLst/>
@@ -5869,27 +6070,54 @@
               <a:buNone/>
             </a:pPr>
             <a:r>
-              <a:rPr lang="en-US" sz="1600" b="1" dirty="0">
+              <a:rPr lang="en-US" sz="1800" b="1" dirty="0">
                 <a:solidFill>
                   <a:schemeClr val="bg1"/>
                 </a:solidFill>
               </a:rPr>
-              <a:t>2</a:t>
-            </a:r>
-            <a:endParaRPr lang="en-US" sz="1600" dirty="0"/>
-          </a:p>
-        </p:txBody>
-      </p:sp>
-      <p:sp>
-        <p:nvSpPr>
-          <p:cNvPr id="8" name="chk-1-t"/>
-          <p:cNvSpPr txBox="1"/>
-          <p:nvPr/>
-        </p:nvSpPr>
-        <p:spPr>
-          <a:xfrm>
-            <a:off x="1280160" y="2514600"/>
-            <a:ext cx="4754880" cy="822960"/>
+              <a:t>Trainee</a:t>
+            </a:r>
+            <a:endParaRPr lang="en-US" sz="1800" dirty="0"/>
+          </a:p>
+        </p:txBody>
+      </p:sp>
+      <p:sp>
+        <p:nvSpPr>
+          <p:cNvPr id="9" name="rm-cell-0"/>
+          <p:cNvSpPr/>
+          <p:nvPr/>
+        </p:nvSpPr>
+        <p:spPr>
+          <a:xfrm>
+            <a:off x="2148840" y="1874520"/>
+            <a:ext cx="4663440" cy="1874520"/>
+          </a:xfrm>
+          <a:prstGeom prst="roundRect">
+            <a:avLst>
+              <a:gd name="adj" fmla="val 5854"/>
+            </a:avLst>
+          </a:prstGeom>
+          <a:solidFill>
+            <a:schemeClr val="bg2"/>
+          </a:solidFill>
+          <a:ln w="6350">
+            <a:solidFill>
+              <a:schemeClr val="bg2"/>
+            </a:solidFill>
+            <a:prstDash val="solid"/>
+          </a:ln>
+        </p:spPr>
+      </p:sp>
+      <p:sp>
+        <p:nvSpPr>
+          <p:cNvPr id="10" name="rm-cell-0-name"/>
+          <p:cNvSpPr txBox="1"/>
+          <p:nvPr/>
+        </p:nvSpPr>
+        <p:spPr>
+          <a:xfrm>
+            <a:off x="2377440" y="2057400"/>
+            <a:ext cx="2651760" cy="365760"/>
           </a:xfrm>
           <a:prstGeom prst="rect">
             <a:avLst/>
@@ -5902,30 +6130,10 @@
           <a:lstStyle/>
           <a:p>
             <a:pPr indent="0" marL="0">
-              <a:spcAft>
-                <a:spcPts val="200"/>
-              </a:spcAft>
-              <a:buNone/>
-            </a:pPr>
-            <a:r>
-              <a:rPr lang="en-US" sz="1700" dirty="0">
-                <a:solidFill>
-                  <a:schemeClr val="tx1"/>
-                </a:solidFill>
-              </a:rPr>
-              <a:t>AppPage seed entry with the same URL</a:t>
-            </a:r>
-            <a:endParaRPr lang="en-US" sz="1700" dirty="0"/>
-          </a:p>
-          <a:p>
-            <a:pPr indent="0" marL="0">
-              <a:spcAft>
-                <a:spcPts val="200"/>
-              </a:spcAft>
-              <a:buNone/>
-            </a:pPr>
-            <a:r>
-              <a:rPr lang="en-US" sz="1050" dirty="0">
+              <a:buNone/>
+            </a:pPr>
+            <a:r>
+              <a:rPr lang="en-US" sz="1500" b="1" dirty="0">
                 <a:solidFill>
                   <a:schemeClr val="tx2"/>
                 </a:solidFill>
@@ -5933,32 +6141,34 @@
                 <a:ea typeface="Courier New" pitchFamily="34" charset="-122"/>
                 <a:cs typeface="Courier New" pitchFamily="34" charset="-120"/>
               </a:rPr>
-              <a:t>Bidding_DLL/Seeding/IdentityAccessAppPagesSeedData.cs</a:t>
-            </a:r>
-            <a:endParaRPr lang="en-US" sz="1700" dirty="0"/>
-          </a:p>
-        </p:txBody>
-      </p:sp>
-      <p:sp>
-        <p:nvSpPr>
-          <p:cNvPr id="9" name="chk-2-badge"/>
+              <a:t>Corporate.Trainer</a:t>
+            </a:r>
+            <a:endParaRPr lang="en-US" sz="1500" dirty="0"/>
+          </a:p>
+        </p:txBody>
+      </p:sp>
+      <p:sp>
+        <p:nvSpPr>
+          <p:cNvPr id="11" name="rm-cell-0-pill"/>
           <p:cNvSpPr/>
           <p:nvPr/>
         </p:nvSpPr>
         <p:spPr>
           <a:xfrm>
-            <a:off x="548640" y="3767328"/>
-            <a:ext cx="502920" cy="502920"/>
-          </a:xfrm>
-          <a:prstGeom prst="ellipse">
-            <a:avLst/>
+            <a:off x="4937760" y="2075688"/>
+            <a:ext cx="1645920" cy="329184"/>
+          </a:xfrm>
+          <a:prstGeom prst="roundRect">
+            <a:avLst>
+              <a:gd name="adj" fmla="val 50000"/>
+            </a:avLst>
           </a:prstGeom>
           <a:solidFill>
-            <a:schemeClr val="tx2"/>
+            <a:schemeClr val="accent3"/>
           </a:solidFill>
           <a:ln w="12700">
             <a:solidFill>
-              <a:schemeClr val="tx2"/>
+              <a:schemeClr val="accent3"/>
             </a:solidFill>
             <a:prstDash val="solid"/>
           </a:ln>
@@ -5966,14 +6176,14 @@
       </p:sp>
       <p:sp>
         <p:nvSpPr>
-          <p:cNvPr id="10" name="chk-2-badge-text"/>
-          <p:cNvSpPr txBox="1"/>
-          <p:nvPr/>
-        </p:nvSpPr>
-        <p:spPr>
-          <a:xfrm>
-            <a:off x="548640" y="3767328"/>
-            <a:ext cx="502920" cy="502920"/>
+          <p:cNvPr id="12" name="rm-cell-0-status"/>
+          <p:cNvSpPr txBox="1"/>
+          <p:nvPr/>
+        </p:nvSpPr>
+        <p:spPr>
+          <a:xfrm>
+            <a:off x="4937760" y="2075688"/>
+            <a:ext cx="1645920" cy="329184"/>
           </a:xfrm>
           <a:prstGeom prst="rect">
             <a:avLst/>
@@ -5989,27 +6199,90 @@
               <a:buNone/>
             </a:pPr>
             <a:r>
-              <a:rPr lang="en-US" sz="1600" b="1" dirty="0">
+              <a:rPr lang="en-US" sz="1100" b="1" dirty="0">
                 <a:solidFill>
                   <a:schemeClr val="bg1"/>
                 </a:solidFill>
               </a:rPr>
-              <a:t>3</a:t>
-            </a:r>
-            <a:endParaRPr lang="en-US" sz="1600" dirty="0"/>
-          </a:p>
-        </p:txBody>
-      </p:sp>
-      <p:sp>
-        <p:nvSpPr>
-          <p:cNvPr id="11" name="chk-2-t"/>
-          <p:cNvSpPr txBox="1"/>
-          <p:nvPr/>
-        </p:nvSpPr>
-        <p:spPr>
-          <a:xfrm>
-            <a:off x="1280160" y="3611880"/>
-            <a:ext cx="4754880" cy="822960"/>
+              <a:t>Exists · row 8</a:t>
+            </a:r>
+            <a:endParaRPr lang="en-US" sz="1100" dirty="0"/>
+          </a:p>
+        </p:txBody>
+      </p:sp>
+      <p:sp>
+        <p:nvSpPr>
+          <p:cNvPr id="13" name="rm-cell-0-body"/>
+          <p:cNvSpPr txBox="1"/>
+          <p:nvPr/>
+        </p:nvSpPr>
+        <p:spPr>
+          <a:xfrm>
+            <a:off x="2377440" y="2560320"/>
+            <a:ext cx="4206240" cy="1051560"/>
+          </a:xfrm>
+          <a:prstGeom prst="rect">
+            <a:avLst/>
+          </a:prstGeom>
+          <a:noFill/>
+          <a:ln/>
+        </p:spPr>
+        <p:txBody>
+          <a:bodyPr wrap="square" lIns="0" tIns="0" rIns="0" bIns="0" rtlCol="0" anchor="t"/>
+          <a:lstStyle/>
+          <a:p>
+            <a:pPr indent="0" marL="0">
+              <a:buNone/>
+            </a:pPr>
+            <a:r>
+              <a:rPr lang="en-US" sz="1400" dirty="0">
+                <a:solidFill>
+                  <a:schemeClr val="tx1"/>
+                </a:solidFill>
+              </a:rPr>
+              <a:t>Training provider company. Its AccountAdmin adds trainer users and can clone custom roles from this template. Claims: training.read, training.write.</a:t>
+            </a:r>
+            <a:endParaRPr lang="en-US" sz="1400" dirty="0"/>
+          </a:p>
+        </p:txBody>
+      </p:sp>
+      <p:sp>
+        <p:nvSpPr>
+          <p:cNvPr id="14" name="rm-cell-1"/>
+          <p:cNvSpPr/>
+          <p:nvPr/>
+        </p:nvSpPr>
+        <p:spPr>
+          <a:xfrm>
+            <a:off x="6949440" y="1874520"/>
+            <a:ext cx="4663440" cy="1874520"/>
+          </a:xfrm>
+          <a:prstGeom prst="roundRect">
+            <a:avLst>
+              <a:gd name="adj" fmla="val 5854"/>
+            </a:avLst>
+          </a:prstGeom>
+          <a:solidFill>
+            <a:schemeClr val="bg2"/>
+          </a:solidFill>
+          <a:ln w="6350">
+            <a:solidFill>
+              <a:schemeClr val="bg2"/>
+            </a:solidFill>
+            <a:prstDash val="solid"/>
+          </a:ln>
+        </p:spPr>
+      </p:sp>
+      <p:sp>
+        <p:nvSpPr>
+          <p:cNvPr id="15" name="rm-cell-1-name"/>
+          <p:cNvSpPr txBox="1"/>
+          <p:nvPr/>
+        </p:nvSpPr>
+        <p:spPr>
+          <a:xfrm>
+            <a:off x="7178040" y="2057400"/>
+            <a:ext cx="2651760" cy="365760"/>
           </a:xfrm>
           <a:prstGeom prst="rect">
             <a:avLst/>
@@ -6022,30 +6295,10 @@
           <a:lstStyle/>
           <a:p>
             <a:pPr indent="0" marL="0">
-              <a:spcAft>
-                <a:spcPts val="200"/>
-              </a:spcAft>
-              <a:buNone/>
-            </a:pPr>
-            <a:r>
-              <a:rPr lang="en-US" sz="1700" dirty="0">
-                <a:solidFill>
-                  <a:schemeClr val="tx1"/>
-                </a:solidFill>
-              </a:rPr>
-              <a:t>API endpoint + service rule + DTOs</a:t>
-            </a:r>
-            <a:endParaRPr lang="en-US" sz="1700" dirty="0"/>
-          </a:p>
-          <a:p>
-            <a:pPr indent="0" marL="0">
-              <a:spcAft>
-                <a:spcPts val="200"/>
-              </a:spcAft>
-              <a:buNone/>
-            </a:pPr>
-            <a:r>
-              <a:rPr lang="en-US" sz="1050" dirty="0">
+              <a:buNone/>
+            </a:pPr>
+            <a:r>
+              <a:rPr lang="en-US" sz="1500" b="1" dirty="0">
                 <a:solidFill>
                   <a:schemeClr val="tx2"/>
                 </a:solidFill>
@@ -6053,32 +6306,34 @@
                 <a:ea typeface="Courier New" pitchFamily="34" charset="-122"/>
                 <a:cs typeface="Courier New" pitchFamily="34" charset="-120"/>
               </a:rPr>
-              <a:t>Bidding_API/Controllers/V2/ · Bidding_Core/Services/</a:t>
-            </a:r>
-            <a:endParaRPr lang="en-US" sz="1700" dirty="0"/>
-          </a:p>
-        </p:txBody>
-      </p:sp>
-      <p:sp>
-        <p:nvSpPr>
-          <p:cNvPr id="12" name="chk-3-badge"/>
+              <a:t>Individual.Trainer</a:t>
+            </a:r>
+            <a:endParaRPr lang="en-US" sz="1500" dirty="0"/>
+          </a:p>
+        </p:txBody>
+      </p:sp>
+      <p:sp>
+        <p:nvSpPr>
+          <p:cNvPr id="16" name="rm-cell-1-pill"/>
           <p:cNvSpPr/>
           <p:nvPr/>
         </p:nvSpPr>
         <p:spPr>
           <a:xfrm>
-            <a:off x="548640" y="4864608"/>
-            <a:ext cx="502920" cy="502920"/>
-          </a:xfrm>
-          <a:prstGeom prst="ellipse">
-            <a:avLst/>
+            <a:off x="9738360" y="2075688"/>
+            <a:ext cx="1645920" cy="329184"/>
+          </a:xfrm>
+          <a:prstGeom prst="roundRect">
+            <a:avLst>
+              <a:gd name="adj" fmla="val 50000"/>
+            </a:avLst>
           </a:prstGeom>
           <a:solidFill>
-            <a:schemeClr val="tx2"/>
+            <a:schemeClr val="accent3"/>
           </a:solidFill>
           <a:ln w="12700">
             <a:solidFill>
-              <a:schemeClr val="tx2"/>
+              <a:schemeClr val="accent3"/>
             </a:solidFill>
             <a:prstDash val="solid"/>
           </a:ln>
@@ -6086,14 +6341,14 @@
       </p:sp>
       <p:sp>
         <p:nvSpPr>
-          <p:cNvPr id="13" name="chk-3-badge-text"/>
-          <p:cNvSpPr txBox="1"/>
-          <p:nvPr/>
-        </p:nvSpPr>
-        <p:spPr>
-          <a:xfrm>
-            <a:off x="548640" y="4864608"/>
-            <a:ext cx="502920" cy="502920"/>
+          <p:cNvPr id="17" name="rm-cell-1-status"/>
+          <p:cNvSpPr txBox="1"/>
+          <p:nvPr/>
+        </p:nvSpPr>
+        <p:spPr>
+          <a:xfrm>
+            <a:off x="9738360" y="2075688"/>
+            <a:ext cx="1645920" cy="329184"/>
           </a:xfrm>
           <a:prstGeom prst="rect">
             <a:avLst/>
@@ -6109,27 +6364,90 @@
               <a:buNone/>
             </a:pPr>
             <a:r>
-              <a:rPr lang="en-US" sz="1600" b="1" dirty="0">
+              <a:rPr lang="en-US" sz="1100" b="1" dirty="0">
                 <a:solidFill>
                   <a:schemeClr val="bg1"/>
                 </a:solidFill>
               </a:rPr>
-              <a:t>4</a:t>
-            </a:r>
-            <a:endParaRPr lang="en-US" sz="1600" dirty="0"/>
-          </a:p>
-        </p:txBody>
-      </p:sp>
-      <p:sp>
-        <p:nvSpPr>
-          <p:cNvPr id="14" name="chk-3-t"/>
-          <p:cNvSpPr txBox="1"/>
-          <p:nvPr/>
-        </p:nvSpPr>
-        <p:spPr>
-          <a:xfrm>
-            <a:off x="1280160" y="4709160"/>
-            <a:ext cx="4754880" cy="822960"/>
+              <a:t>Exists · row 12</a:t>
+            </a:r>
+            <a:endParaRPr lang="en-US" sz="1100" dirty="0"/>
+          </a:p>
+        </p:txBody>
+      </p:sp>
+      <p:sp>
+        <p:nvSpPr>
+          <p:cNvPr id="18" name="rm-cell-1-body"/>
+          <p:cNvSpPr txBox="1"/>
+          <p:nvPr/>
+        </p:nvSpPr>
+        <p:spPr>
+          <a:xfrm>
+            <a:off x="7178040" y="2560320"/>
+            <a:ext cx="4206240" cy="1051560"/>
+          </a:xfrm>
+          <a:prstGeom prst="rect">
+            <a:avLst/>
+          </a:prstGeom>
+          <a:noFill/>
+          <a:ln/>
+        </p:spPr>
+        <p:txBody>
+          <a:bodyPr wrap="square" lIns="0" tIns="0" rIns="0" bIns="0" rtlCol="0" anchor="t"/>
+          <a:lstStyle/>
+          <a:p>
+            <a:pPr indent="0" marL="0">
+              <a:buNone/>
+            </a:pPr>
+            <a:r>
+              <a:rPr lang="en-US" sz="1400" dirty="0">
+                <a:solidFill>
+                  <a:schemeClr val="tx1"/>
+                </a:solidFill>
+              </a:rPr>
+              <a:t>Independent trainer with a personal account. Same training claims; sees only their own data.</a:t>
+            </a:r>
+            <a:endParaRPr lang="en-US" sz="1400" dirty="0"/>
+          </a:p>
+        </p:txBody>
+      </p:sp>
+      <p:sp>
+        <p:nvSpPr>
+          <p:cNvPr id="19" name="rm-cell-2"/>
+          <p:cNvSpPr/>
+          <p:nvPr/>
+        </p:nvSpPr>
+        <p:spPr>
+          <a:xfrm>
+            <a:off x="2148840" y="3931920"/>
+            <a:ext cx="4663440" cy="1874520"/>
+          </a:xfrm>
+          <a:prstGeom prst="roundRect">
+            <a:avLst>
+              <a:gd name="adj" fmla="val 5854"/>
+            </a:avLst>
+          </a:prstGeom>
+          <a:solidFill>
+            <a:schemeClr val="bg1"/>
+          </a:solidFill>
+          <a:ln w="19050">
+            <a:solidFill>
+              <a:schemeClr val="accent2"/>
+            </a:solidFill>
+            <a:prstDash val="dash"/>
+          </a:ln>
+        </p:spPr>
+      </p:sp>
+      <p:sp>
+        <p:nvSpPr>
+          <p:cNvPr id="20" name="rm-cell-2-name"/>
+          <p:cNvSpPr txBox="1"/>
+          <p:nvPr/>
+        </p:nvSpPr>
+        <p:spPr>
+          <a:xfrm>
+            <a:off x="2377440" y="4114800"/>
+            <a:ext cx="2651760" cy="365760"/>
           </a:xfrm>
           <a:prstGeom prst="rect">
             <a:avLst/>
@@ -6142,30 +6460,10 @@
           <a:lstStyle/>
           <a:p>
             <a:pPr indent="0" marL="0">
-              <a:spcAft>
-                <a:spcPts val="200"/>
-              </a:spcAft>
-              <a:buNone/>
-            </a:pPr>
-            <a:r>
-              <a:rPr lang="en-US" sz="1700" dirty="0">
-                <a:solidFill>
-                  <a:schemeClr val="tx1"/>
-                </a:solidFill>
-              </a:rPr>
-              <a:t>Data service, then NgRx slice if shared</a:t>
-            </a:r>
-            <a:endParaRPr lang="en-US" sz="1700" dirty="0"/>
-          </a:p>
-          <a:p>
-            <a:pPr indent="0" marL="0">
-              <a:spcAft>
-                <a:spcPts val="200"/>
-              </a:spcAft>
-              <a:buNone/>
-            </a:pPr>
-            <a:r>
-              <a:rPr lang="en-US" sz="1050" dirty="0">
+              <a:buNone/>
+            </a:pPr>
+            <a:r>
+              <a:rPr lang="en-US" sz="1500" b="1" dirty="0">
                 <a:solidFill>
                   <a:schemeClr val="tx2"/>
                 </a:solidFill>
@@ -6173,365 +6471,27 @@
                 <a:ea typeface="Courier New" pitchFamily="34" charset="-122"/>
                 <a:cs typeface="Courier New" pitchFamily="34" charset="-120"/>
               </a:rPr>
-              <a:t>TrainingModule/src/app/core/store/&lt;feature&gt;/</a:t>
-            </a:r>
-            <a:endParaRPr lang="en-US" sz="1700" dirty="0"/>
-          </a:p>
-        </p:txBody>
-      </p:sp>
-      <p:sp>
-        <p:nvSpPr>
-          <p:cNvPr id="15" name="chk-4-badge"/>
+              <a:t>Corporate.Trainee</a:t>
+            </a:r>
+            <a:endParaRPr lang="en-US" sz="1500" dirty="0"/>
+          </a:p>
+        </p:txBody>
+      </p:sp>
+      <p:sp>
+        <p:nvSpPr>
+          <p:cNvPr id="21" name="rm-cell-2-pill"/>
           <p:cNvSpPr/>
           <p:nvPr/>
         </p:nvSpPr>
         <p:spPr>
           <a:xfrm>
-            <a:off x="6172200" y="1572768"/>
-            <a:ext cx="502920" cy="502920"/>
-          </a:xfrm>
-          <a:prstGeom prst="ellipse">
-            <a:avLst/>
-          </a:prstGeom>
-          <a:solidFill>
-            <a:schemeClr val="tx2"/>
-          </a:solidFill>
-          <a:ln w="12700">
-            <a:solidFill>
-              <a:schemeClr val="tx2"/>
-            </a:solidFill>
-            <a:prstDash val="solid"/>
-          </a:ln>
-        </p:spPr>
-      </p:sp>
-      <p:sp>
-        <p:nvSpPr>
-          <p:cNvPr id="16" name="chk-4-badge-text"/>
-          <p:cNvSpPr txBox="1"/>
-          <p:nvPr/>
-        </p:nvSpPr>
-        <p:spPr>
-          <a:xfrm>
-            <a:off x="6172200" y="1572768"/>
-            <a:ext cx="502920" cy="502920"/>
-          </a:xfrm>
-          <a:prstGeom prst="rect">
-            <a:avLst/>
-          </a:prstGeom>
-          <a:noFill/>
-          <a:ln/>
-        </p:spPr>
-        <p:txBody>
-          <a:bodyPr wrap="square" lIns="0" tIns="0" rIns="0" bIns="0" rtlCol="0" anchor="ctr"/>
-          <a:lstStyle/>
-          <a:p>
-            <a:pPr algn="ctr" indent="0" marL="0">
-              <a:buNone/>
-            </a:pPr>
-            <a:r>
-              <a:rPr lang="en-US" sz="1600" b="1" dirty="0">
-                <a:solidFill>
-                  <a:schemeClr val="bg1"/>
-                </a:solidFill>
-              </a:rPr>
-              <a:t>5</a:t>
-            </a:r>
-            <a:endParaRPr lang="en-US" sz="1600" dirty="0"/>
-          </a:p>
-        </p:txBody>
-      </p:sp>
-      <p:sp>
-        <p:nvSpPr>
-          <p:cNvPr id="17" name="chk-4-t"/>
-          <p:cNvSpPr txBox="1"/>
-          <p:nvPr/>
-        </p:nvSpPr>
-        <p:spPr>
-          <a:xfrm>
-            <a:off x="6903720" y="1417320"/>
-            <a:ext cx="4754880" cy="822960"/>
-          </a:xfrm>
-          <a:prstGeom prst="rect">
-            <a:avLst/>
-          </a:prstGeom>
-          <a:noFill/>
-          <a:ln/>
-        </p:spPr>
-        <p:txBody>
-          <a:bodyPr wrap="square" lIns="0" tIns="0" rIns="0" bIns="0" rtlCol="0" anchor="ctr"/>
-          <a:lstStyle/>
-          <a:p>
-            <a:pPr indent="0" marL="0">
-              <a:spcAft>
-                <a:spcPts val="200"/>
-              </a:spcAft>
-              <a:buNone/>
-            </a:pPr>
-            <a:r>
-              <a:rPr lang="en-US" sz="1700" dirty="0">
-                <a:solidFill>
-                  <a:schemeClr val="tx1"/>
-                </a:solidFill>
-              </a:rPr>
-              <a:t>Form pipeline, executor, validators</a:t>
-            </a:r>
-            <a:endParaRPr lang="en-US" sz="1700" dirty="0"/>
-          </a:p>
-          <a:p>
-            <a:pPr indent="0" marL="0">
-              <a:spcAft>
-                <a:spcPts val="200"/>
-              </a:spcAft>
-              <a:buNone/>
-            </a:pPr>
-            <a:r>
-              <a:rPr lang="en-US" sz="1050" dirty="0">
-                <a:solidFill>
-                  <a:schemeClr val="tx2"/>
-                </a:solidFill>
-                <a:latin typeface="Courier New" pitchFamily="34" charset="0"/>
-                <a:ea typeface="Courier New" pitchFamily="34" charset="-122"/>
-                <a:cs typeface="Courier New" pitchFamily="34" charset="-120"/>
-              </a:rPr>
-              <a:t>TrainingModule/src/app/core/ui/form-pipeline.service.ts</a:t>
-            </a:r>
-            <a:endParaRPr lang="en-US" sz="1700" dirty="0"/>
-          </a:p>
-        </p:txBody>
-      </p:sp>
-      <p:sp>
-        <p:nvSpPr>
-          <p:cNvPr id="18" name="chk-5-badge"/>
-          <p:cNvSpPr/>
-          <p:nvPr/>
-        </p:nvSpPr>
-        <p:spPr>
-          <a:xfrm>
-            <a:off x="6172200" y="2670048"/>
-            <a:ext cx="502920" cy="502920"/>
-          </a:xfrm>
-          <a:prstGeom prst="ellipse">
-            <a:avLst/>
-          </a:prstGeom>
-          <a:solidFill>
-            <a:schemeClr val="tx2"/>
-          </a:solidFill>
-          <a:ln w="12700">
-            <a:solidFill>
-              <a:schemeClr val="tx2"/>
-            </a:solidFill>
-            <a:prstDash val="solid"/>
-          </a:ln>
-        </p:spPr>
-      </p:sp>
-      <p:sp>
-        <p:nvSpPr>
-          <p:cNvPr id="19" name="chk-5-badge-text"/>
-          <p:cNvSpPr txBox="1"/>
-          <p:nvPr/>
-        </p:nvSpPr>
-        <p:spPr>
-          <a:xfrm>
-            <a:off x="6172200" y="2670048"/>
-            <a:ext cx="502920" cy="502920"/>
-          </a:xfrm>
-          <a:prstGeom prst="rect">
-            <a:avLst/>
-          </a:prstGeom>
-          <a:noFill/>
-          <a:ln/>
-        </p:spPr>
-        <p:txBody>
-          <a:bodyPr wrap="square" lIns="0" tIns="0" rIns="0" bIns="0" rtlCol="0" anchor="ctr"/>
-          <a:lstStyle/>
-          <a:p>
-            <a:pPr algn="ctr" indent="0" marL="0">
-              <a:buNone/>
-            </a:pPr>
-            <a:r>
-              <a:rPr lang="en-US" sz="1600" b="1" dirty="0">
-                <a:solidFill>
-                  <a:schemeClr val="bg1"/>
-                </a:solidFill>
-              </a:rPr>
-              <a:t>6</a:t>
-            </a:r>
-            <a:endParaRPr lang="en-US" sz="1600" dirty="0"/>
-          </a:p>
-        </p:txBody>
-      </p:sp>
-      <p:sp>
-        <p:nvSpPr>
-          <p:cNvPr id="20" name="chk-5-t"/>
-          <p:cNvSpPr txBox="1"/>
-          <p:nvPr/>
-        </p:nvSpPr>
-        <p:spPr>
-          <a:xfrm>
-            <a:off x="6903720" y="2514600"/>
-            <a:ext cx="4754880" cy="822960"/>
-          </a:xfrm>
-          <a:prstGeom prst="rect">
-            <a:avLst/>
-          </a:prstGeom>
-          <a:noFill/>
-          <a:ln/>
-        </p:spPr>
-        <p:txBody>
-          <a:bodyPr wrap="square" lIns="0" tIns="0" rIns="0" bIns="0" rtlCol="0" anchor="ctr"/>
-          <a:lstStyle/>
-          <a:p>
-            <a:pPr indent="0" marL="0">
-              <a:spcAft>
-                <a:spcPts val="200"/>
-              </a:spcAft>
-              <a:buNone/>
-            </a:pPr>
-            <a:r>
-              <a:rPr lang="en-US" sz="1700" dirty="0">
-                <a:solidFill>
-                  <a:schemeClr val="tx1"/>
-                </a:solidFill>
-              </a:rPr>
-              <a:t>English in templates, Arabic translations</a:t>
-            </a:r>
-            <a:endParaRPr lang="en-US" sz="1700" dirty="0"/>
-          </a:p>
-          <a:p>
-            <a:pPr indent="0" marL="0">
-              <a:spcAft>
-                <a:spcPts val="200"/>
-              </a:spcAft>
-              <a:buNone/>
-            </a:pPr>
-            <a:r>
-              <a:rPr lang="en-US" sz="1050" dirty="0">
-                <a:solidFill>
-                  <a:schemeClr val="tx2"/>
-                </a:solidFill>
-                <a:latin typeface="Courier New" pitchFamily="34" charset="0"/>
-                <a:ea typeface="Courier New" pitchFamily="34" charset="-122"/>
-                <a:cs typeface="Courier New" pitchFamily="34" charset="-120"/>
-              </a:rPr>
-              <a:t>TrainingModule/src/app/core/translations/&lt;area&gt;/</a:t>
-            </a:r>
-            <a:endParaRPr lang="en-US" sz="1700" dirty="0"/>
-          </a:p>
-        </p:txBody>
-      </p:sp>
-      <p:sp>
-        <p:nvSpPr>
-          <p:cNvPr id="21" name="chk-6-badge"/>
-          <p:cNvSpPr/>
-          <p:nvPr/>
-        </p:nvSpPr>
-        <p:spPr>
-          <a:xfrm>
-            <a:off x="6172200" y="3767328"/>
-            <a:ext cx="502920" cy="502920"/>
-          </a:xfrm>
-          <a:prstGeom prst="ellipse">
-            <a:avLst/>
-          </a:prstGeom>
-          <a:solidFill>
-            <a:schemeClr val="tx2"/>
-          </a:solidFill>
-          <a:ln w="12700">
-            <a:solidFill>
-              <a:schemeClr val="tx2"/>
-            </a:solidFill>
-            <a:prstDash val="solid"/>
-          </a:ln>
-        </p:spPr>
-      </p:sp>
-      <p:sp>
-        <p:nvSpPr>
-          <p:cNvPr id="22" name="chk-6-badge-text"/>
-          <p:cNvSpPr txBox="1"/>
-          <p:nvPr/>
-        </p:nvSpPr>
-        <p:spPr>
-          <a:xfrm>
-            <a:off x="6172200" y="3767328"/>
-            <a:ext cx="502920" cy="502920"/>
-          </a:xfrm>
-          <a:prstGeom prst="rect">
-            <a:avLst/>
-          </a:prstGeom>
-          <a:noFill/>
-          <a:ln/>
-        </p:spPr>
-        <p:txBody>
-          <a:bodyPr wrap="square" lIns="0" tIns="0" rIns="0" bIns="0" rtlCol="0" anchor="ctr"/>
-          <a:lstStyle/>
-          <a:p>
-            <a:pPr algn="ctr" indent="0" marL="0">
-              <a:buNone/>
-            </a:pPr>
-            <a:r>
-              <a:rPr lang="en-US" sz="1600" b="1" dirty="0">
-                <a:solidFill>
-                  <a:schemeClr val="bg1"/>
-                </a:solidFill>
-              </a:rPr>
-              <a:t>7</a:t>
-            </a:r>
-            <a:endParaRPr lang="en-US" sz="1600" dirty="0"/>
-          </a:p>
-        </p:txBody>
-      </p:sp>
-      <p:sp>
-        <p:nvSpPr>
-          <p:cNvPr id="23" name="chk-6-t"/>
-          <p:cNvSpPr txBox="1"/>
-          <p:nvPr/>
-        </p:nvSpPr>
-        <p:spPr>
-          <a:xfrm>
-            <a:off x="6903720" y="3611880"/>
-            <a:ext cx="4754880" cy="822960"/>
-          </a:xfrm>
-          <a:prstGeom prst="rect">
-            <a:avLst/>
-          </a:prstGeom>
-          <a:noFill/>
-          <a:ln/>
-        </p:spPr>
-        <p:txBody>
-          <a:bodyPr wrap="square" lIns="0" tIns="0" rIns="0" bIns="0" rtlCol="0" anchor="ctr"/>
-          <a:lstStyle/>
-          <a:p>
-            <a:pPr indent="0" marL="0">
-              <a:spcAft>
-                <a:spcPts val="200"/>
-              </a:spcAft>
-              <a:buNone/>
-            </a:pPr>
-            <a:r>
-              <a:rPr lang="en-US" sz="1700" dirty="0">
-                <a:solidFill>
-                  <a:schemeClr val="tx1"/>
-                </a:solidFill>
-              </a:rPr>
-              <a:t>Mobile layout and RTL checked</a:t>
-            </a:r>
-            <a:endParaRPr lang="en-US" sz="1700" dirty="0"/>
-          </a:p>
-        </p:txBody>
-      </p:sp>
-      <p:sp>
-        <p:nvSpPr>
-          <p:cNvPr id="24" name="chk-7-badge"/>
-          <p:cNvSpPr/>
-          <p:nvPr/>
-        </p:nvSpPr>
-        <p:spPr>
-          <a:xfrm>
-            <a:off x="6172200" y="4864608"/>
-            <a:ext cx="502920" cy="502920"/>
-          </a:xfrm>
-          <a:prstGeom prst="ellipse">
-            <a:avLst/>
+            <a:off x="4937760" y="4133088"/>
+            <a:ext cx="1645920" cy="329184"/>
+          </a:xfrm>
+          <a:prstGeom prst="roundRect">
+            <a:avLst>
+              <a:gd name="adj" fmla="val 50000"/>
+            </a:avLst>
           </a:prstGeom>
           <a:solidFill>
             <a:schemeClr val="accent2"/>
@@ -6546,14 +6506,14 @@
       </p:sp>
       <p:sp>
         <p:nvSpPr>
-          <p:cNvPr id="25" name="chk-7-badge-text"/>
-          <p:cNvSpPr txBox="1"/>
-          <p:nvPr/>
-        </p:nvSpPr>
-        <p:spPr>
-          <a:xfrm>
-            <a:off x="6172200" y="4864608"/>
-            <a:ext cx="502920" cy="502920"/>
+          <p:cNvPr id="22" name="rm-cell-2-status"/>
+          <p:cNvSpPr txBox="1"/>
+          <p:nvPr/>
+        </p:nvSpPr>
+        <p:spPr>
+          <a:xfrm>
+            <a:off x="4937760" y="4133088"/>
+            <a:ext cx="1645920" cy="329184"/>
           </a:xfrm>
           <a:prstGeom prst="rect">
             <a:avLst/>
@@ -6569,27 +6529,90 @@
               <a:buNone/>
             </a:pPr>
             <a:r>
-              <a:rPr lang="en-US" sz="1600" b="1" dirty="0">
+              <a:rPr lang="en-US" sz="1100" b="1" dirty="0">
                 <a:solidFill>
                   <a:schemeClr val="bg1"/>
                 </a:solidFill>
               </a:rPr>
-              <a:t>8</a:t>
-            </a:r>
-            <a:endParaRPr lang="en-US" sz="1600" dirty="0"/>
-          </a:p>
-        </p:txBody>
-      </p:sp>
-      <p:sp>
-        <p:nvSpPr>
-          <p:cNvPr id="26" name="chk-7-t"/>
-          <p:cNvSpPr txBox="1"/>
-          <p:nvPr/>
-        </p:nvSpPr>
-        <p:spPr>
-          <a:xfrm>
-            <a:off x="6903720" y="4709160"/>
-            <a:ext cx="4754880" cy="822960"/>
+              <a:t>Missing · to decide</a:t>
+            </a:r>
+            <a:endParaRPr lang="en-US" sz="1100" dirty="0"/>
+          </a:p>
+        </p:txBody>
+      </p:sp>
+      <p:sp>
+        <p:nvSpPr>
+          <p:cNvPr id="23" name="rm-cell-2-body"/>
+          <p:cNvSpPr txBox="1"/>
+          <p:nvPr/>
+        </p:nvSpPr>
+        <p:spPr>
+          <a:xfrm>
+            <a:off x="2377440" y="4617720"/>
+            <a:ext cx="4206240" cy="1051560"/>
+          </a:xfrm>
+          <a:prstGeom prst="rect">
+            <a:avLst/>
+          </a:prstGeom>
+          <a:noFill/>
+          <a:ln/>
+        </p:spPr>
+        <p:txBody>
+          <a:bodyPr wrap="square" lIns="0" tIns="0" rIns="0" bIns="0" rtlCol="0" anchor="t"/>
+          <a:lstStyle/>
+          <a:p>
+            <a:pPr indent="0" marL="0">
+              <a:buNone/>
+            </a:pPr>
+            <a:r>
+              <a:rPr lang="en-US" sz="1400" dirty="0">
+                <a:solidFill>
+                  <a:schemeClr val="tx1"/>
+                </a:solidFill>
+              </a:rPr>
+              <a:t>A company that enrolls its employees. Either add a Corporate Trainee group and template role, or let SME / NonSME companies enroll their staff.</a:t>
+            </a:r>
+            <a:endParaRPr lang="en-US" sz="1400" dirty="0"/>
+          </a:p>
+        </p:txBody>
+      </p:sp>
+      <p:sp>
+        <p:nvSpPr>
+          <p:cNvPr id="24" name="rm-cell-3"/>
+          <p:cNvSpPr/>
+          <p:nvPr/>
+        </p:nvSpPr>
+        <p:spPr>
+          <a:xfrm>
+            <a:off x="6949440" y="3931920"/>
+            <a:ext cx="4663440" cy="1874520"/>
+          </a:xfrm>
+          <a:prstGeom prst="roundRect">
+            <a:avLst>
+              <a:gd name="adj" fmla="val 5854"/>
+            </a:avLst>
+          </a:prstGeom>
+          <a:solidFill>
+            <a:schemeClr val="bg2"/>
+          </a:solidFill>
+          <a:ln w="6350">
+            <a:solidFill>
+              <a:schemeClr val="bg2"/>
+            </a:solidFill>
+            <a:prstDash val="solid"/>
+          </a:ln>
+        </p:spPr>
+      </p:sp>
+      <p:sp>
+        <p:nvSpPr>
+          <p:cNvPr id="25" name="rm-cell-3-name"/>
+          <p:cNvSpPr txBox="1"/>
+          <p:nvPr/>
+        </p:nvSpPr>
+        <p:spPr>
+          <a:xfrm>
+            <a:off x="7178040" y="4114800"/>
+            <a:ext cx="2651760" cy="365760"/>
           </a:xfrm>
           <a:prstGeom prst="rect">
             <a:avLst/>
@@ -6602,30 +6625,10 @@
           <a:lstStyle/>
           <a:p>
             <a:pPr indent="0" marL="0">
-              <a:spcAft>
-                <a:spcPts val="200"/>
-              </a:spcAft>
-              <a:buNone/>
-            </a:pPr>
-            <a:r>
-              <a:rPr lang="en-US" sz="1700" dirty="0">
-                <a:solidFill>
-                  <a:schemeClr val="tx1"/>
-                </a:solidFill>
-              </a:rPr>
-              <a:t>2–3 tests for the new rule</a:t>
-            </a:r>
-            <a:endParaRPr lang="en-US" sz="1700" dirty="0"/>
-          </a:p>
-          <a:p>
-            <a:pPr indent="0" marL="0">
-              <a:spcAft>
-                <a:spcPts val="200"/>
-              </a:spcAft>
-              <a:buNone/>
-            </a:pPr>
-            <a:r>
-              <a:rPr lang="en-US" sz="1050" dirty="0">
+              <a:buNone/>
+            </a:pPr>
+            <a:r>
+              <a:rPr lang="en-US" sz="1500" b="1" dirty="0">
                 <a:solidFill>
                   <a:schemeClr val="tx2"/>
                 </a:solidFill>
@@ -6633,9 +6636,169 @@
                 <a:ea typeface="Courier New" pitchFamily="34" charset="-122"/>
                 <a:cs typeface="Courier New" pitchFamily="34" charset="-120"/>
               </a:rPr>
-              <a:t>Bidding_Core.Tests/ · &lt;component&gt;.spec.ts</a:t>
-            </a:r>
-            <a:endParaRPr lang="en-US" sz="1700" dirty="0"/>
+              <a:t>Individual.Trainee</a:t>
+            </a:r>
+            <a:endParaRPr lang="en-US" sz="1500" dirty="0"/>
+          </a:p>
+        </p:txBody>
+      </p:sp>
+      <p:sp>
+        <p:nvSpPr>
+          <p:cNvPr id="26" name="rm-cell-3-pill"/>
+          <p:cNvSpPr/>
+          <p:nvPr/>
+        </p:nvSpPr>
+        <p:spPr>
+          <a:xfrm>
+            <a:off x="9738360" y="4133088"/>
+            <a:ext cx="1645920" cy="329184"/>
+          </a:xfrm>
+          <a:prstGeom prst="roundRect">
+            <a:avLst>
+              <a:gd name="adj" fmla="val 50000"/>
+            </a:avLst>
+          </a:prstGeom>
+          <a:solidFill>
+            <a:schemeClr val="accent3"/>
+          </a:solidFill>
+          <a:ln w="12700">
+            <a:solidFill>
+              <a:schemeClr val="accent3"/>
+            </a:solidFill>
+            <a:prstDash val="solid"/>
+          </a:ln>
+        </p:spPr>
+      </p:sp>
+      <p:sp>
+        <p:nvSpPr>
+          <p:cNvPr id="27" name="rm-cell-3-status"/>
+          <p:cNvSpPr txBox="1"/>
+          <p:nvPr/>
+        </p:nvSpPr>
+        <p:spPr>
+          <a:xfrm>
+            <a:off x="9738360" y="4133088"/>
+            <a:ext cx="1645920" cy="329184"/>
+          </a:xfrm>
+          <a:prstGeom prst="rect">
+            <a:avLst/>
+          </a:prstGeom>
+          <a:noFill/>
+          <a:ln/>
+        </p:spPr>
+        <p:txBody>
+          <a:bodyPr wrap="square" lIns="0" tIns="0" rIns="0" bIns="0" rtlCol="0" anchor="ctr"/>
+          <a:lstStyle/>
+          <a:p>
+            <a:pPr algn="ctr" indent="0" marL="0">
+              <a:buNone/>
+            </a:pPr>
+            <a:r>
+              <a:rPr lang="en-US" sz="1100" b="1" dirty="0">
+                <a:solidFill>
+                  <a:schemeClr val="bg1"/>
+                </a:solidFill>
+              </a:rPr>
+              <a:t>Exists · row 11</a:t>
+            </a:r>
+            <a:endParaRPr lang="en-US" sz="1100" dirty="0"/>
+          </a:p>
+        </p:txBody>
+      </p:sp>
+      <p:sp>
+        <p:nvSpPr>
+          <p:cNvPr id="28" name="rm-cell-3-body"/>
+          <p:cNvSpPr txBox="1"/>
+          <p:nvPr/>
+        </p:nvSpPr>
+        <p:spPr>
+          <a:xfrm>
+            <a:off x="7178040" y="4617720"/>
+            <a:ext cx="4206240" cy="1051560"/>
+          </a:xfrm>
+          <a:prstGeom prst="rect">
+            <a:avLst/>
+          </a:prstGeom>
+          <a:noFill/>
+          <a:ln/>
+        </p:spPr>
+        <p:txBody>
+          <a:bodyPr wrap="square" lIns="0" tIns="0" rIns="0" bIns="0" rtlCol="0" anchor="t"/>
+          <a:lstStyle/>
+          <a:p>
+            <a:pPr indent="0" marL="0">
+              <a:buNone/>
+            </a:pPr>
+            <a:r>
+              <a:rPr lang="en-US" sz="1400" dirty="0">
+                <a:solidFill>
+                  <a:schemeClr val="tx1"/>
+                </a:solidFill>
+              </a:rPr>
+              <a:t>Person who registers for and attends trainings. Claim: training.read.</a:t>
+            </a:r>
+            <a:endParaRPr lang="en-US" sz="1400" dirty="0"/>
+          </a:p>
+        </p:txBody>
+      </p:sp>
+      <p:sp>
+        <p:nvSpPr>
+          <p:cNvPr id="29" name="rm-where"/>
+          <p:cNvSpPr txBox="1"/>
+          <p:nvPr/>
+        </p:nvSpPr>
+        <p:spPr>
+          <a:xfrm>
+            <a:off x="548640" y="5897880"/>
+            <a:ext cx="11064240" cy="365760"/>
+          </a:xfrm>
+          <a:prstGeom prst="rect">
+            <a:avLst/>
+          </a:prstGeom>
+          <a:noFill/>
+          <a:ln/>
+        </p:spPr>
+        <p:txBody>
+          <a:bodyPr wrap="square" lIns="0" tIns="0" rIns="0" bIns="0" rtlCol="0" anchor="ctr"/>
+          <a:lstStyle/>
+          <a:p>
+            <a:pPr indent="0" marL="0">
+              <a:buNone/>
+            </a:pPr>
+            <a:r>
+              <a:rPr lang="en-US" sz="1400" b="1" dirty="0">
+                <a:solidFill>
+                  <a:schemeClr val="tx1"/>
+                </a:solidFill>
+              </a:rPr>
+              <a:t>Where to see them: </a:t>
+            </a:r>
+            <a:pPr indent="0" marL="0">
+              <a:buNone/>
+            </a:pPr>
+            <a:r>
+              <a:rPr lang="en-US" sz="1400" dirty="0">
+                <a:solidFill>
+                  <a:schemeClr val="tx1"/>
+                </a:solidFill>
+              </a:rPr>
+              <a:t>/admin/template-roles (sorted by name). Defined in </a:t>
+            </a:r>
+            <a:pPr indent="0" marL="0">
+              <a:buNone/>
+            </a:pPr>
+            <a:r>
+              <a:rPr lang="en-US" sz="1150" dirty="0">
+                <a:solidFill>
+                  <a:schemeClr val="tx2"/>
+                </a:solidFill>
+                <a:latin typeface="Courier New" pitchFamily="34" charset="0"/>
+                <a:ea typeface="Courier New" pitchFamily="34" charset="-122"/>
+                <a:cs typeface="Courier New" pitchFamily="34" charset="-120"/>
+              </a:rPr>
+              <a:t>Bidding_DLL/Seeding/IdentityAccessSeedData.cs</a:t>
+            </a:r>
+            <a:endParaRPr lang="en-US" sz="1400" dirty="0"/>
           </a:p>
         </p:txBody>
       </p:sp>
@@ -6695,6 +6858,1984 @@
 <file path=ppt/slides/slide14.xml><?xml version="1.0" encoding="utf-8"?>
 <p:sld xmlns:a="http://schemas.openxmlformats.org/drawingml/2006/main" xmlns:r="http://schemas.openxmlformats.org/officeDocument/2006/relationships" xmlns:p="http://schemas.openxmlformats.org/presentationml/2006/main">
   <p:cSld name="Slide 14">
+    <p:spTree>
+      <p:nvGrpSpPr>
+        <p:cNvPr id="1" name=""/>
+        <p:cNvGrpSpPr/>
+        <p:nvPr/>
+      </p:nvGrpSpPr>
+      <p:grpSpPr>
+        <a:xfrm>
+          <a:off x="0" y="0"/>
+          <a:ext cx="0" cy="0"/>
+          <a:chOff x="0" y="0"/>
+          <a:chExt cx="0" cy="0"/>
+        </a:xfrm>
+      </p:grpSpPr>
+      <p:sp>
+        <p:nvSpPr>
+          <p:cNvPr id="2" name="Text 0"/>
+          <p:cNvSpPr/>
+          <p:nvPr>
+            <p:ph idx="100" type="title" hasCustomPrompt="1"/>
+          </p:nvPr>
+        </p:nvSpPr>
+        <p:spPr>
+          <a:xfrm>
+            <a:off x="548640" y="365760"/>
+            <a:ext cx="11064240" cy="822960"/>
+          </a:xfrm>
+          <a:prstGeom prst="rect">
+            <a:avLst/>
+          </a:prstGeom>
+          <a:noFill/>
+          <a:ln/>
+        </p:spPr>
+        <p:txBody>
+          <a:bodyPr wrap="square" lIns="0" tIns="0" rIns="0" bIns="0" rtlCol="0" anchor="ctr"/>
+          <a:lstStyle/>
+          <a:p>
+            <a:pPr algn="l" indent="0" marL="0">
+              <a:buNone/>
+            </a:pPr>
+            <a:r>
+              <a:rPr lang="en-US" sz="3600" b="1" dirty="0">
+                <a:solidFill>
+                  <a:schemeClr val="tx2"/>
+                </a:solidFill>
+              </a:rPr>
+              <a:t>Making the roles work in the new module</a:t>
+            </a:r>
+            <a:endParaRPr lang="en-US" sz="3600" dirty="0"/>
+          </a:p>
+        </p:txBody>
+      </p:sp>
+      <p:sp>
+        <p:nvSpPr>
+          <p:cNvPr id="3" name="rw-0-badge"/>
+          <p:cNvSpPr/>
+          <p:nvPr/>
+        </p:nvSpPr>
+        <p:spPr>
+          <a:xfrm>
+            <a:off x="548640" y="1417320"/>
+            <a:ext cx="502920" cy="502920"/>
+          </a:xfrm>
+          <a:prstGeom prst="ellipse">
+            <a:avLst/>
+          </a:prstGeom>
+          <a:solidFill>
+            <a:schemeClr val="tx2"/>
+          </a:solidFill>
+          <a:ln w="12700">
+            <a:solidFill>
+              <a:schemeClr val="tx2"/>
+            </a:solidFill>
+            <a:prstDash val="solid"/>
+          </a:ln>
+        </p:spPr>
+      </p:sp>
+      <p:sp>
+        <p:nvSpPr>
+          <p:cNvPr id="4" name="rw-0-badge-text"/>
+          <p:cNvSpPr txBox="1"/>
+          <p:nvPr/>
+        </p:nvSpPr>
+        <p:spPr>
+          <a:xfrm>
+            <a:off x="548640" y="1417320"/>
+            <a:ext cx="502920" cy="502920"/>
+          </a:xfrm>
+          <a:prstGeom prst="rect">
+            <a:avLst/>
+          </a:prstGeom>
+          <a:noFill/>
+          <a:ln/>
+        </p:spPr>
+        <p:txBody>
+          <a:bodyPr wrap="square" lIns="0" tIns="0" rIns="0" bIns="0" rtlCol="0" anchor="ctr"/>
+          <a:lstStyle/>
+          <a:p>
+            <a:pPr algn="ctr" indent="0" marL="0">
+              <a:buNone/>
+            </a:pPr>
+            <a:r>
+              <a:rPr lang="en-US" sz="1600" b="1" dirty="0">
+                <a:solidFill>
+                  <a:schemeClr val="bg1"/>
+                </a:solidFill>
+              </a:rPr>
+              <a:t>1</a:t>
+            </a:r>
+            <a:endParaRPr lang="en-US" sz="1600" dirty="0"/>
+          </a:p>
+        </p:txBody>
+      </p:sp>
+      <p:sp>
+        <p:nvSpPr>
+          <p:cNvPr id="5" name="rw-0-t"/>
+          <p:cNvSpPr txBox="1"/>
+          <p:nvPr/>
+        </p:nvSpPr>
+        <p:spPr>
+          <a:xfrm>
+            <a:off x="1234440" y="1371600"/>
+            <a:ext cx="4754880" cy="1417320"/>
+          </a:xfrm>
+          <a:prstGeom prst="rect">
+            <a:avLst/>
+          </a:prstGeom>
+          <a:noFill/>
+          <a:ln/>
+        </p:spPr>
+        <p:txBody>
+          <a:bodyPr wrap="square" lIns="0" tIns="0" rIns="0" bIns="0" rtlCol="0" anchor="t"/>
+          <a:lstStyle/>
+          <a:p>
+            <a:pPr indent="0" marL="0">
+              <a:spcAft>
+                <a:spcPts val="300"/>
+              </a:spcAft>
+              <a:buNone/>
+            </a:pPr>
+            <a:r>
+              <a:rPr lang="en-US" sz="1700" b="1" dirty="0">
+                <a:solidFill>
+                  <a:schemeClr val="tx1"/>
+                </a:solidFill>
+              </a:rPr>
+              <a:t>Seed the new pages</a:t>
+            </a:r>
+            <a:endParaRPr lang="en-US" sz="1700" dirty="0"/>
+          </a:p>
+          <a:p>
+            <a:pPr indent="0" marL="0">
+              <a:spcAft>
+                <a:spcPts val="300"/>
+              </a:spcAft>
+              <a:buNone/>
+            </a:pPr>
+            <a:r>
+              <a:rPr lang="en-US" sz="1350" dirty="0">
+                <a:solidFill>
+                  <a:schemeClr val="tx1"/>
+                </a:solidFill>
+              </a:rPr>
+              <a:t>Give trainer and trainee pages their own code prefix and URL.</a:t>
+            </a:r>
+            <a:endParaRPr lang="en-US" sz="1700" dirty="0"/>
+          </a:p>
+          <a:p>
+            <a:pPr indent="0" marL="0">
+              <a:spcAft>
+                <a:spcPts val="300"/>
+              </a:spcAft>
+              <a:buNone/>
+            </a:pPr>
+            <a:r>
+              <a:rPr lang="en-US" sz="1000" dirty="0">
+                <a:solidFill>
+                  <a:schemeClr val="tx2"/>
+                </a:solidFill>
+                <a:latin typeface="Courier New" pitchFamily="34" charset="0"/>
+                <a:ea typeface="Courier New" pitchFamily="34" charset="-122"/>
+                <a:cs typeface="Courier New" pitchFamily="34" charset="-120"/>
+              </a:rPr>
+              <a:t>Bidding_DLL/Seeding/IdentityAccessAppPagesSeedData.cs</a:t>
+            </a:r>
+            <a:endParaRPr lang="en-US" sz="1700" dirty="0"/>
+          </a:p>
+        </p:txBody>
+      </p:sp>
+      <p:sp>
+        <p:nvSpPr>
+          <p:cNvPr id="6" name="rw-1-badge"/>
+          <p:cNvSpPr/>
+          <p:nvPr/>
+        </p:nvSpPr>
+        <p:spPr>
+          <a:xfrm>
+            <a:off x="6172200" y="1417320"/>
+            <a:ext cx="502920" cy="502920"/>
+          </a:xfrm>
+          <a:prstGeom prst="ellipse">
+            <a:avLst/>
+          </a:prstGeom>
+          <a:solidFill>
+            <a:schemeClr val="tx2"/>
+          </a:solidFill>
+          <a:ln w="12700">
+            <a:solidFill>
+              <a:schemeClr val="tx2"/>
+            </a:solidFill>
+            <a:prstDash val="solid"/>
+          </a:ln>
+        </p:spPr>
+      </p:sp>
+      <p:sp>
+        <p:nvSpPr>
+          <p:cNvPr id="7" name="rw-1-badge-text"/>
+          <p:cNvSpPr txBox="1"/>
+          <p:nvPr/>
+        </p:nvSpPr>
+        <p:spPr>
+          <a:xfrm>
+            <a:off x="6172200" y="1417320"/>
+            <a:ext cx="502920" cy="502920"/>
+          </a:xfrm>
+          <a:prstGeom prst="rect">
+            <a:avLst/>
+          </a:prstGeom>
+          <a:noFill/>
+          <a:ln/>
+        </p:spPr>
+        <p:txBody>
+          <a:bodyPr wrap="square" lIns="0" tIns="0" rIns="0" bIns="0" rtlCol="0" anchor="ctr"/>
+          <a:lstStyle/>
+          <a:p>
+            <a:pPr algn="ctr" indent="0" marL="0">
+              <a:buNone/>
+            </a:pPr>
+            <a:r>
+              <a:rPr lang="en-US" sz="1600" b="1" dirty="0">
+                <a:solidFill>
+                  <a:schemeClr val="bg1"/>
+                </a:solidFill>
+              </a:rPr>
+              <a:t>2</a:t>
+            </a:r>
+            <a:endParaRPr lang="en-US" sz="1600" dirty="0"/>
+          </a:p>
+        </p:txBody>
+      </p:sp>
+      <p:sp>
+        <p:nvSpPr>
+          <p:cNvPr id="8" name="rw-1-t"/>
+          <p:cNvSpPr txBox="1"/>
+          <p:nvPr/>
+        </p:nvSpPr>
+        <p:spPr>
+          <a:xfrm>
+            <a:off x="6858000" y="1371600"/>
+            <a:ext cx="4754880" cy="1417320"/>
+          </a:xfrm>
+          <a:prstGeom prst="rect">
+            <a:avLst/>
+          </a:prstGeom>
+          <a:noFill/>
+          <a:ln/>
+        </p:spPr>
+        <p:txBody>
+          <a:bodyPr wrap="square" lIns="0" tIns="0" rIns="0" bIns="0" rtlCol="0" anchor="t"/>
+          <a:lstStyle/>
+          <a:p>
+            <a:pPr indent="0" marL="0">
+              <a:spcAft>
+                <a:spcPts val="300"/>
+              </a:spcAft>
+              <a:buNone/>
+            </a:pPr>
+            <a:r>
+              <a:rPr lang="en-US" sz="1700" b="1" dirty="0">
+                <a:solidFill>
+                  <a:schemeClr val="tx1"/>
+                </a:solidFill>
+              </a:rPr>
+              <a:t>Point the roles at them</a:t>
+            </a:r>
+            <a:endParaRPr lang="en-US" sz="1700" dirty="0"/>
+          </a:p>
+          <a:p>
+            <a:pPr indent="0" marL="0">
+              <a:spcAft>
+                <a:spcPts val="300"/>
+              </a:spcAft>
+              <a:buNone/>
+            </a:pPr>
+            <a:r>
+              <a:rPr lang="en-US" sz="1350" dirty="0">
+                <a:solidFill>
+                  <a:schemeClr val="tx1"/>
+                </a:solidFill>
+              </a:rPr>
+              <a:t>trainerPages / traineePages still list the old Bidding_Web nw.training pages. Switch them to the new prefixes.</a:t>
+            </a:r>
+            <a:endParaRPr lang="en-US" sz="1700" dirty="0"/>
+          </a:p>
+          <a:p>
+            <a:pPr indent="0" marL="0">
+              <a:spcAft>
+                <a:spcPts val="300"/>
+              </a:spcAft>
+              <a:buNone/>
+            </a:pPr>
+            <a:r>
+              <a:rPr lang="en-US" sz="1000" dirty="0">
+                <a:solidFill>
+                  <a:schemeClr val="tx2"/>
+                </a:solidFill>
+                <a:latin typeface="Courier New" pitchFamily="34" charset="0"/>
+                <a:ea typeface="Courier New" pitchFamily="34" charset="-122"/>
+                <a:cs typeface="Courier New" pitchFamily="34" charset="-120"/>
+              </a:rPr>
+              <a:t>Bidding_DLL/Seeding/IdentityAccessSeedData.cs  (BuildRolePages)</a:t>
+            </a:r>
+            <a:endParaRPr lang="en-US" sz="1700" dirty="0"/>
+          </a:p>
+        </p:txBody>
+      </p:sp>
+      <p:sp>
+        <p:nvSpPr>
+          <p:cNvPr id="9" name="rw-2-badge"/>
+          <p:cNvSpPr/>
+          <p:nvPr/>
+        </p:nvSpPr>
+        <p:spPr>
+          <a:xfrm>
+            <a:off x="548640" y="2971800"/>
+            <a:ext cx="502920" cy="502920"/>
+          </a:xfrm>
+          <a:prstGeom prst="ellipse">
+            <a:avLst/>
+          </a:prstGeom>
+          <a:solidFill>
+            <a:schemeClr val="tx2"/>
+          </a:solidFill>
+          <a:ln w="12700">
+            <a:solidFill>
+              <a:schemeClr val="tx2"/>
+            </a:solidFill>
+            <a:prstDash val="solid"/>
+          </a:ln>
+        </p:spPr>
+      </p:sp>
+      <p:sp>
+        <p:nvSpPr>
+          <p:cNvPr id="10" name="rw-2-badge-text"/>
+          <p:cNvSpPr txBox="1"/>
+          <p:nvPr/>
+        </p:nvSpPr>
+        <p:spPr>
+          <a:xfrm>
+            <a:off x="548640" y="2971800"/>
+            <a:ext cx="502920" cy="502920"/>
+          </a:xfrm>
+          <a:prstGeom prst="rect">
+            <a:avLst/>
+          </a:prstGeom>
+          <a:noFill/>
+          <a:ln/>
+        </p:spPr>
+        <p:txBody>
+          <a:bodyPr wrap="square" lIns="0" tIns="0" rIns="0" bIns="0" rtlCol="0" anchor="ctr"/>
+          <a:lstStyle/>
+          <a:p>
+            <a:pPr algn="ctr" indent="0" marL="0">
+              <a:buNone/>
+            </a:pPr>
+            <a:r>
+              <a:rPr lang="en-US" sz="1600" b="1" dirty="0">
+                <a:solidFill>
+                  <a:schemeClr val="bg1"/>
+                </a:solidFill>
+              </a:rPr>
+              <a:t>3</a:t>
+            </a:r>
+            <a:endParaRPr lang="en-US" sz="1600" dirty="0"/>
+          </a:p>
+        </p:txBody>
+      </p:sp>
+      <p:sp>
+        <p:nvSpPr>
+          <p:cNvPr id="11" name="rw-2-t"/>
+          <p:cNvSpPr txBox="1"/>
+          <p:nvPr/>
+        </p:nvSpPr>
+        <p:spPr>
+          <a:xfrm>
+            <a:off x="1234440" y="2926080"/>
+            <a:ext cx="4754880" cy="1417320"/>
+          </a:xfrm>
+          <a:prstGeom prst="rect">
+            <a:avLst/>
+          </a:prstGeom>
+          <a:noFill/>
+          <a:ln/>
+        </p:spPr>
+        <p:txBody>
+          <a:bodyPr wrap="square" lIns="0" tIns="0" rIns="0" bIns="0" rtlCol="0" anchor="t"/>
+          <a:lstStyle/>
+          <a:p>
+            <a:pPr indent="0" marL="0">
+              <a:spcAft>
+                <a:spcPts val="300"/>
+              </a:spcAft>
+              <a:buNone/>
+            </a:pPr>
+            <a:r>
+              <a:rPr lang="en-US" sz="1700" b="1" dirty="0">
+                <a:solidFill>
+                  <a:schemeClr val="tx1"/>
+                </a:solidFill>
+              </a:rPr>
+              <a:t>Enforce claims in the API</a:t>
+            </a:r>
+            <a:endParaRPr lang="en-US" sz="1700" dirty="0"/>
+          </a:p>
+          <a:p>
+            <a:pPr indent="0" marL="0">
+              <a:spcAft>
+                <a:spcPts val="300"/>
+              </a:spcAft>
+              <a:buNone/>
+            </a:pPr>
+            <a:r>
+              <a:rPr lang="en-US" sz="1350" dirty="0">
+                <a:solidFill>
+                  <a:schemeClr val="tx1"/>
+                </a:solidFill>
+              </a:rPr>
+              <a:t>Check training.read / training.write in the service, not only in the sidebar.</a:t>
+            </a:r>
+            <a:endParaRPr lang="en-US" sz="1700" dirty="0"/>
+          </a:p>
+          <a:p>
+            <a:pPr indent="0" marL="0">
+              <a:spcAft>
+                <a:spcPts val="300"/>
+              </a:spcAft>
+              <a:buNone/>
+            </a:pPr>
+            <a:r>
+              <a:rPr lang="en-US" sz="1000" dirty="0">
+                <a:solidFill>
+                  <a:schemeClr val="tx2"/>
+                </a:solidFill>
+                <a:latin typeface="Courier New" pitchFamily="34" charset="0"/>
+                <a:ea typeface="Courier New" pitchFamily="34" charset="-122"/>
+                <a:cs typeface="Courier New" pitchFamily="34" charset="-120"/>
+              </a:rPr>
+              <a:t>Bidding_Core/Services/</a:t>
+            </a:r>
+            <a:endParaRPr lang="en-US" sz="1700" dirty="0"/>
+          </a:p>
+        </p:txBody>
+      </p:sp>
+      <p:sp>
+        <p:nvSpPr>
+          <p:cNvPr id="12" name="rw-3-badge"/>
+          <p:cNvSpPr/>
+          <p:nvPr/>
+        </p:nvSpPr>
+        <p:spPr>
+          <a:xfrm>
+            <a:off x="6172200" y="2971800"/>
+            <a:ext cx="502920" cy="502920"/>
+          </a:xfrm>
+          <a:prstGeom prst="ellipse">
+            <a:avLst/>
+          </a:prstGeom>
+          <a:solidFill>
+            <a:schemeClr val="tx2"/>
+          </a:solidFill>
+          <a:ln w="12700">
+            <a:solidFill>
+              <a:schemeClr val="tx2"/>
+            </a:solidFill>
+            <a:prstDash val="solid"/>
+          </a:ln>
+        </p:spPr>
+      </p:sp>
+      <p:sp>
+        <p:nvSpPr>
+          <p:cNvPr id="13" name="rw-3-badge-text"/>
+          <p:cNvSpPr txBox="1"/>
+          <p:nvPr/>
+        </p:nvSpPr>
+        <p:spPr>
+          <a:xfrm>
+            <a:off x="6172200" y="2971800"/>
+            <a:ext cx="502920" cy="502920"/>
+          </a:xfrm>
+          <a:prstGeom prst="rect">
+            <a:avLst/>
+          </a:prstGeom>
+          <a:noFill/>
+          <a:ln/>
+        </p:spPr>
+        <p:txBody>
+          <a:bodyPr wrap="square" lIns="0" tIns="0" rIns="0" bIns="0" rtlCol="0" anchor="ctr"/>
+          <a:lstStyle/>
+          <a:p>
+            <a:pPr algn="ctr" indent="0" marL="0">
+              <a:buNone/>
+            </a:pPr>
+            <a:r>
+              <a:rPr lang="en-US" sz="1600" b="1" dirty="0">
+                <a:solidFill>
+                  <a:schemeClr val="bg1"/>
+                </a:solidFill>
+              </a:rPr>
+              <a:t>4</a:t>
+            </a:r>
+            <a:endParaRPr lang="en-US" sz="1600" dirty="0"/>
+          </a:p>
+        </p:txBody>
+      </p:sp>
+      <p:sp>
+        <p:nvSpPr>
+          <p:cNvPr id="14" name="rw-3-t"/>
+          <p:cNvSpPr txBox="1"/>
+          <p:nvPr/>
+        </p:nvSpPr>
+        <p:spPr>
+          <a:xfrm>
+            <a:off x="6858000" y="2926080"/>
+            <a:ext cx="4754880" cy="1417320"/>
+          </a:xfrm>
+          <a:prstGeom prst="rect">
+            <a:avLst/>
+          </a:prstGeom>
+          <a:noFill/>
+          <a:ln/>
+        </p:spPr>
+        <p:txBody>
+          <a:bodyPr wrap="square" lIns="0" tIns="0" rIns="0" bIns="0" rtlCol="0" anchor="t"/>
+          <a:lstStyle/>
+          <a:p>
+            <a:pPr indent="0" marL="0">
+              <a:spcAft>
+                <a:spcPts val="300"/>
+              </a:spcAft>
+              <a:buNone/>
+            </a:pPr>
+            <a:r>
+              <a:rPr lang="en-US" sz="1700" b="1" dirty="0">
+                <a:solidFill>
+                  <a:schemeClr val="tx1"/>
+                </a:solidFill>
+              </a:rPr>
+              <a:t>Set the data scope</a:t>
+            </a:r>
+            <a:endParaRPr lang="en-US" sz="1700" dirty="0"/>
+          </a:p>
+          <a:p>
+            <a:pPr indent="0" marL="0">
+              <a:spcAft>
+                <a:spcPts val="300"/>
+              </a:spcAft>
+              <a:buNone/>
+            </a:pPr>
+            <a:r>
+              <a:rPr lang="en-US" sz="1350" dirty="0">
+                <a:solidFill>
+                  <a:schemeClr val="tx1"/>
+                </a:solidFill>
+              </a:rPr>
+              <a:t>organization for company trainers (whole company), mine for individuals. Editable per page in Groups → Pages.</a:t>
+            </a:r>
+            <a:endParaRPr lang="en-US" sz="1700" dirty="0"/>
+          </a:p>
+          <a:p>
+            <a:pPr indent="0" marL="0">
+              <a:spcAft>
+                <a:spcPts val="300"/>
+              </a:spcAft>
+              <a:buNone/>
+            </a:pPr>
+            <a:r>
+              <a:rPr lang="en-US" sz="1000" dirty="0">
+                <a:solidFill>
+                  <a:schemeClr val="tx2"/>
+                </a:solidFill>
+                <a:latin typeface="Courier New" pitchFamily="34" charset="0"/>
+                <a:ea typeface="Courier New" pitchFamily="34" charset="-122"/>
+                <a:cs typeface="Courier New" pitchFamily="34" charset="-120"/>
+              </a:rPr>
+              <a:t>Bidding_Models/DatabaseModel/IdentityAccess/RolePage.cs</a:t>
+            </a:r>
+            <a:endParaRPr lang="en-US" sz="1700" dirty="0"/>
+          </a:p>
+        </p:txBody>
+      </p:sp>
+      <p:sp>
+        <p:nvSpPr>
+          <p:cNvPr id="15" name="rw-4-badge"/>
+          <p:cNvSpPr/>
+          <p:nvPr/>
+        </p:nvSpPr>
+        <p:spPr>
+          <a:xfrm>
+            <a:off x="548640" y="4526280"/>
+            <a:ext cx="502920" cy="502920"/>
+          </a:xfrm>
+          <a:prstGeom prst="ellipse">
+            <a:avLst/>
+          </a:prstGeom>
+          <a:solidFill>
+            <a:schemeClr val="tx2"/>
+          </a:solidFill>
+          <a:ln w="12700">
+            <a:solidFill>
+              <a:schemeClr val="tx2"/>
+            </a:solidFill>
+            <a:prstDash val="solid"/>
+          </a:ln>
+        </p:spPr>
+      </p:sp>
+      <p:sp>
+        <p:nvSpPr>
+          <p:cNvPr id="16" name="rw-4-badge-text"/>
+          <p:cNvSpPr txBox="1"/>
+          <p:nvPr/>
+        </p:nvSpPr>
+        <p:spPr>
+          <a:xfrm>
+            <a:off x="548640" y="4526280"/>
+            <a:ext cx="502920" cy="502920"/>
+          </a:xfrm>
+          <a:prstGeom prst="rect">
+            <a:avLst/>
+          </a:prstGeom>
+          <a:noFill/>
+          <a:ln/>
+        </p:spPr>
+        <p:txBody>
+          <a:bodyPr wrap="square" lIns="0" tIns="0" rIns="0" bIns="0" rtlCol="0" anchor="ctr"/>
+          <a:lstStyle/>
+          <a:p>
+            <a:pPr algn="ctr" indent="0" marL="0">
+              <a:buNone/>
+            </a:pPr>
+            <a:r>
+              <a:rPr lang="en-US" sz="1600" b="1" dirty="0">
+                <a:solidFill>
+                  <a:schemeClr val="bg1"/>
+                </a:solidFill>
+              </a:rPr>
+              <a:t>5</a:t>
+            </a:r>
+            <a:endParaRPr lang="en-US" sz="1600" dirty="0"/>
+          </a:p>
+        </p:txBody>
+      </p:sp>
+      <p:sp>
+        <p:nvSpPr>
+          <p:cNvPr id="17" name="rw-4-t"/>
+          <p:cNvSpPr txBox="1"/>
+          <p:nvPr/>
+        </p:nvSpPr>
+        <p:spPr>
+          <a:xfrm>
+            <a:off x="1234440" y="4480560"/>
+            <a:ext cx="4754880" cy="1417320"/>
+          </a:xfrm>
+          <a:prstGeom prst="rect">
+            <a:avLst/>
+          </a:prstGeom>
+          <a:noFill/>
+          <a:ln/>
+        </p:spPr>
+        <p:txBody>
+          <a:bodyPr wrap="square" lIns="0" tIns="0" rIns="0" bIns="0" rtlCol="0" anchor="t"/>
+          <a:lstStyle/>
+          <a:p>
+            <a:pPr indent="0" marL="0">
+              <a:spcAft>
+                <a:spcPts val="300"/>
+              </a:spcAft>
+              <a:buNone/>
+            </a:pPr>
+            <a:r>
+              <a:rPr lang="en-US" sz="1700" b="1" dirty="0">
+                <a:solidFill>
+                  <a:schemeClr val="tx1"/>
+                </a:solidFill>
+              </a:rPr>
+              <a:t>Map the profile type</a:t>
+            </a:r>
+            <a:endParaRPr lang="en-US" sz="1700" dirty="0"/>
+          </a:p>
+          <a:p>
+            <a:pPr indent="0" marL="0">
+              <a:spcAft>
+                <a:spcPts val="300"/>
+              </a:spcAft>
+              <a:buNone/>
+            </a:pPr>
+            <a:r>
+              <a:rPr lang="en-US" sz="1350" dirty="0">
+                <a:solidFill>
+                  <a:schemeClr val="tx1"/>
+                </a:solidFill>
+              </a:rPr>
+              <a:t>TryMapProfileType has no Trainer / Trainee case and ProfileTypes has no value for them. Agree with the platform team.</a:t>
+            </a:r>
+            <a:endParaRPr lang="en-US" sz="1700" dirty="0"/>
+          </a:p>
+          <a:p>
+            <a:pPr indent="0" marL="0">
+              <a:spcAft>
+                <a:spcPts val="300"/>
+              </a:spcAft>
+              <a:buNone/>
+            </a:pPr>
+            <a:r>
+              <a:rPr lang="en-US" sz="1000" dirty="0">
+                <a:solidFill>
+                  <a:schemeClr val="tx2"/>
+                </a:solidFill>
+                <a:latin typeface="Courier New" pitchFamily="34" charset="0"/>
+                <a:ea typeface="Courier New" pitchFamily="34" charset="-122"/>
+                <a:cs typeface="Courier New" pitchFamily="34" charset="-120"/>
+              </a:rPr>
+              <a:t>Bidding_Core/Helpers/IdentityAccessAdminRules.cs · Bidding_Models/Enums.cs</a:t>
+            </a:r>
+            <a:endParaRPr lang="en-US" sz="1700" dirty="0"/>
+          </a:p>
+        </p:txBody>
+      </p:sp>
+      <p:sp>
+        <p:nvSpPr>
+          <p:cNvPr id="18" name="rw-5-badge"/>
+          <p:cNvSpPr/>
+          <p:nvPr/>
+        </p:nvSpPr>
+        <p:spPr>
+          <a:xfrm>
+            <a:off x="6172200" y="4526280"/>
+            <a:ext cx="502920" cy="502920"/>
+          </a:xfrm>
+          <a:prstGeom prst="ellipse">
+            <a:avLst/>
+          </a:prstGeom>
+          <a:solidFill>
+            <a:schemeClr val="accent2"/>
+          </a:solidFill>
+          <a:ln w="12700">
+            <a:solidFill>
+              <a:schemeClr val="accent2"/>
+            </a:solidFill>
+            <a:prstDash val="solid"/>
+          </a:ln>
+        </p:spPr>
+      </p:sp>
+      <p:sp>
+        <p:nvSpPr>
+          <p:cNvPr id="19" name="rw-5-badge-text"/>
+          <p:cNvSpPr txBox="1"/>
+          <p:nvPr/>
+        </p:nvSpPr>
+        <p:spPr>
+          <a:xfrm>
+            <a:off x="6172200" y="4526280"/>
+            <a:ext cx="502920" cy="502920"/>
+          </a:xfrm>
+          <a:prstGeom prst="rect">
+            <a:avLst/>
+          </a:prstGeom>
+          <a:noFill/>
+          <a:ln/>
+        </p:spPr>
+        <p:txBody>
+          <a:bodyPr wrap="square" lIns="0" tIns="0" rIns="0" bIns="0" rtlCol="0" anchor="ctr"/>
+          <a:lstStyle/>
+          <a:p>
+            <a:pPr algn="ctr" indent="0" marL="0">
+              <a:buNone/>
+            </a:pPr>
+            <a:r>
+              <a:rPr lang="en-US" sz="1600" b="1" dirty="0">
+                <a:solidFill>
+                  <a:schemeClr val="bg1"/>
+                </a:solidFill>
+              </a:rPr>
+              <a:t>6</a:t>
+            </a:r>
+            <a:endParaRPr lang="en-US" sz="1600" dirty="0"/>
+          </a:p>
+        </p:txBody>
+      </p:sp>
+      <p:sp>
+        <p:nvSpPr>
+          <p:cNvPr id="20" name="rw-5-t"/>
+          <p:cNvSpPr txBox="1"/>
+          <p:nvPr/>
+        </p:nvSpPr>
+        <p:spPr>
+          <a:xfrm>
+            <a:off x="6858000" y="4480560"/>
+            <a:ext cx="4754880" cy="1417320"/>
+          </a:xfrm>
+          <a:prstGeom prst="rect">
+            <a:avLst/>
+          </a:prstGeom>
+          <a:noFill/>
+          <a:ln/>
+        </p:spPr>
+        <p:txBody>
+          <a:bodyPr wrap="square" lIns="0" tIns="0" rIns="0" bIns="0" rtlCol="0" anchor="t"/>
+          <a:lstStyle/>
+          <a:p>
+            <a:pPr indent="0" marL="0">
+              <a:spcAft>
+                <a:spcPts val="300"/>
+              </a:spcAft>
+              <a:buNone/>
+            </a:pPr>
+            <a:r>
+              <a:rPr lang="en-US" sz="1700" b="1" dirty="0">
+                <a:solidFill>
+                  <a:schemeClr val="tx1"/>
+                </a:solidFill>
+              </a:rPr>
+              <a:t>Decide the corporate trainee</a:t>
+            </a:r>
+            <a:endParaRPr lang="en-US" sz="1700" dirty="0"/>
+          </a:p>
+          <a:p>
+            <a:pPr indent="0" marL="0">
+              <a:spcAft>
+                <a:spcPts val="300"/>
+              </a:spcAft>
+              <a:buNone/>
+            </a:pPr>
+            <a:r>
+              <a:rPr lang="en-US" sz="1350" dirty="0">
+                <a:solidFill>
+                  <a:schemeClr val="tx1"/>
+                </a:solidFill>
+              </a:rPr>
+              <a:t>If needed: new user group, template role and role id, with its pages and claims.</a:t>
+            </a:r>
+            <a:endParaRPr lang="en-US" sz="1700" dirty="0"/>
+          </a:p>
+          <a:p>
+            <a:pPr indent="0" marL="0">
+              <a:spcAft>
+                <a:spcPts val="300"/>
+              </a:spcAft>
+              <a:buNone/>
+            </a:pPr>
+            <a:r>
+              <a:rPr lang="en-US" sz="1000" dirty="0">
+                <a:solidFill>
+                  <a:schemeClr val="tx2"/>
+                </a:solidFill>
+                <a:latin typeface="Courier New" pitchFamily="34" charset="0"/>
+                <a:ea typeface="Courier New" pitchFamily="34" charset="-122"/>
+                <a:cs typeface="Courier New" pitchFamily="34" charset="-120"/>
+              </a:rPr>
+              <a:t>Bidding_DLL/Seeding/IdentityAccessSeedData.cs  (UserGroups, TemplateRoleIds)</a:t>
+            </a:r>
+            <a:endParaRPr lang="en-US" sz="1700" dirty="0"/>
+          </a:p>
+        </p:txBody>
+      </p:sp>
+      <p:sp>
+        <p:nvSpPr>
+          <p:cNvPr id="25" name="Slide Number Placeholder 0"/>
+          <p:cNvSpPr>
+            <a:spLocks noGrp="1"/>
+          </p:cNvSpPr>
+          <p:nvPr>
+            <p:ph type="sldNum" sz="quarter" idx="4294967295"/>
+          </p:nvPr>
+        </p:nvSpPr>
+        <p:spPr>
+          <a:xfrm>
+            <a:off x="11155680" y="6400800"/>
+            <a:ext cx="457200" cy="274320"/>
+          </a:xfrm>
+          <a:prstGeom prst="rect">
+            <a:avLst/>
+          </a:prstGeom>
+          <a:extLst>
+            <a:ext uri="{C572A759-6A51-4108-AA02-DFA0A04FC94B}">
+              <ma14:wrappingTextBoxFlag xmlns:ma14="http://schemas.microsoft.com/office/mac/drawingml/2011/main" val="0"/>
+            </a:ext>
+          </a:extLst>
+        </p:spPr>
+        <p:txBody>
+          <a:bodyPr/>
+          <a:lstStyle>
+            <a:lvl1pPr>
+              <a:defRPr sz="1000">
+                <a:solidFill>
+                  <a:schemeClr val="accent6"/>
+                </a:solidFill>
+              </a:defRPr>
+            </a:lvl1pPr>
+          </a:lstStyle>
+          <a:p>
+            <a:pPr algn="r"/>
+            <a:fld id="{F7021451-1387-4CA6-816F-3879F97B5CBC}" type="slidenum">
+              <a:rPr b="0" lang="en-US"/>
+              <a:t>14</a:t>
+            </a:fld>
+            <a:endParaRPr lang="en-US"/>
+          </a:p>
+        </p:txBody>
+      </p:sp>
+    </p:spTree>
+  </p:cSld>
+  <p:clrMapOvr>
+    <a:masterClrMapping/>
+  </p:clrMapOvr>
+</p:sld>
+</file>
+
+<file path=ppt/slides/slide15.xml><?xml version="1.0" encoding="utf-8"?>
+<p:sld xmlns:a="http://schemas.openxmlformats.org/drawingml/2006/main" xmlns:r="http://schemas.openxmlformats.org/officeDocument/2006/relationships" xmlns:p="http://schemas.openxmlformats.org/presentationml/2006/main">
+  <p:cSld name="Slide 15">
+    <p:spTree>
+      <p:nvGrpSpPr>
+        <p:cNvPr id="1" name=""/>
+        <p:cNvGrpSpPr/>
+        <p:nvPr/>
+      </p:nvGrpSpPr>
+      <p:grpSpPr>
+        <a:xfrm>
+          <a:off x="0" y="0"/>
+          <a:ext cx="0" cy="0"/>
+          <a:chOff x="0" y="0"/>
+          <a:chExt cx="0" cy="0"/>
+        </a:xfrm>
+      </p:grpSpPr>
+      <p:sp>
+        <p:nvSpPr>
+          <p:cNvPr id="2" name="Text 0"/>
+          <p:cNvSpPr/>
+          <p:nvPr>
+            <p:ph idx="100" type="title" hasCustomPrompt="1"/>
+          </p:nvPr>
+        </p:nvSpPr>
+        <p:spPr>
+          <a:xfrm>
+            <a:off x="548640" y="365760"/>
+            <a:ext cx="11064240" cy="822960"/>
+          </a:xfrm>
+          <a:prstGeom prst="rect">
+            <a:avLst/>
+          </a:prstGeom>
+          <a:noFill/>
+          <a:ln/>
+        </p:spPr>
+        <p:txBody>
+          <a:bodyPr wrap="square" lIns="0" tIns="0" rIns="0" bIns="0" rtlCol="0" anchor="ctr"/>
+          <a:lstStyle/>
+          <a:p>
+            <a:pPr algn="l" indent="0" marL="0">
+              <a:buNone/>
+            </a:pPr>
+            <a:r>
+              <a:rPr lang="en-US" sz="3600" b="1" dirty="0">
+                <a:solidFill>
+                  <a:schemeClr val="tx2"/>
+                </a:solidFill>
+              </a:rPr>
+              <a:t>Adding a new page: the checklist</a:t>
+            </a:r>
+            <a:endParaRPr lang="en-US" sz="3600" dirty="0"/>
+          </a:p>
+        </p:txBody>
+      </p:sp>
+      <p:sp>
+        <p:nvSpPr>
+          <p:cNvPr id="3" name="chk-0-badge"/>
+          <p:cNvSpPr/>
+          <p:nvPr/>
+        </p:nvSpPr>
+        <p:spPr>
+          <a:xfrm>
+            <a:off x="548640" y="1572768"/>
+            <a:ext cx="502920" cy="502920"/>
+          </a:xfrm>
+          <a:prstGeom prst="ellipse">
+            <a:avLst/>
+          </a:prstGeom>
+          <a:solidFill>
+            <a:schemeClr val="tx2"/>
+          </a:solidFill>
+          <a:ln w="12700">
+            <a:solidFill>
+              <a:schemeClr val="tx2"/>
+            </a:solidFill>
+            <a:prstDash val="solid"/>
+          </a:ln>
+        </p:spPr>
+      </p:sp>
+      <p:sp>
+        <p:nvSpPr>
+          <p:cNvPr id="4" name="chk-0-badge-text"/>
+          <p:cNvSpPr txBox="1"/>
+          <p:nvPr/>
+        </p:nvSpPr>
+        <p:spPr>
+          <a:xfrm>
+            <a:off x="548640" y="1572768"/>
+            <a:ext cx="502920" cy="502920"/>
+          </a:xfrm>
+          <a:prstGeom prst="rect">
+            <a:avLst/>
+          </a:prstGeom>
+          <a:noFill/>
+          <a:ln/>
+        </p:spPr>
+        <p:txBody>
+          <a:bodyPr wrap="square" lIns="0" tIns="0" rIns="0" bIns="0" rtlCol="0" anchor="ctr"/>
+          <a:lstStyle/>
+          <a:p>
+            <a:pPr algn="ctr" indent="0" marL="0">
+              <a:buNone/>
+            </a:pPr>
+            <a:r>
+              <a:rPr lang="en-US" sz="1600" b="1" dirty="0">
+                <a:solidFill>
+                  <a:schemeClr val="bg1"/>
+                </a:solidFill>
+              </a:rPr>
+              <a:t>1</a:t>
+            </a:r>
+            <a:endParaRPr lang="en-US" sz="1600" dirty="0"/>
+          </a:p>
+        </p:txBody>
+      </p:sp>
+      <p:sp>
+        <p:nvSpPr>
+          <p:cNvPr id="5" name="chk-0-t"/>
+          <p:cNvSpPr txBox="1"/>
+          <p:nvPr/>
+        </p:nvSpPr>
+        <p:spPr>
+          <a:xfrm>
+            <a:off x="1280160" y="1417320"/>
+            <a:ext cx="4754880" cy="822960"/>
+          </a:xfrm>
+          <a:prstGeom prst="rect">
+            <a:avLst/>
+          </a:prstGeom>
+          <a:noFill/>
+          <a:ln/>
+        </p:spPr>
+        <p:txBody>
+          <a:bodyPr wrap="square" lIns="0" tIns="0" rIns="0" bIns="0" rtlCol="0" anchor="ctr"/>
+          <a:lstStyle/>
+          <a:p>
+            <a:pPr indent="0" marL="0">
+              <a:spcAft>
+                <a:spcPts val="200"/>
+              </a:spcAft>
+              <a:buNone/>
+            </a:pPr>
+            <a:r>
+              <a:rPr lang="en-US" sz="1700" dirty="0">
+                <a:solidFill>
+                  <a:schemeClr val="tx1"/>
+                </a:solidFill>
+              </a:rPr>
+              <a:t>Route and sidebar link</a:t>
+            </a:r>
+            <a:endParaRPr lang="en-US" sz="1700" dirty="0"/>
+          </a:p>
+          <a:p>
+            <a:pPr indent="0" marL="0">
+              <a:spcAft>
+                <a:spcPts val="200"/>
+              </a:spcAft>
+              <a:buNone/>
+            </a:pPr>
+            <a:r>
+              <a:rPr lang="en-US" sz="1050" dirty="0">
+                <a:solidFill>
+                  <a:schemeClr val="tx2"/>
+                </a:solidFill>
+                <a:latin typeface="Courier New" pitchFamily="34" charset="0"/>
+                <a:ea typeface="Courier New" pitchFamily="34" charset="-122"/>
+                <a:cs typeface="Courier New" pitchFamily="34" charset="-120"/>
+              </a:rPr>
+              <a:t>TrainingModule/src/app/app.routes.ts</a:t>
+            </a:r>
+            <a:endParaRPr lang="en-US" sz="1700" dirty="0"/>
+          </a:p>
+        </p:txBody>
+      </p:sp>
+      <p:sp>
+        <p:nvSpPr>
+          <p:cNvPr id="6" name="chk-1-badge"/>
+          <p:cNvSpPr/>
+          <p:nvPr/>
+        </p:nvSpPr>
+        <p:spPr>
+          <a:xfrm>
+            <a:off x="548640" y="2670048"/>
+            <a:ext cx="502920" cy="502920"/>
+          </a:xfrm>
+          <a:prstGeom prst="ellipse">
+            <a:avLst/>
+          </a:prstGeom>
+          <a:solidFill>
+            <a:schemeClr val="tx2"/>
+          </a:solidFill>
+          <a:ln w="12700">
+            <a:solidFill>
+              <a:schemeClr val="tx2"/>
+            </a:solidFill>
+            <a:prstDash val="solid"/>
+          </a:ln>
+        </p:spPr>
+      </p:sp>
+      <p:sp>
+        <p:nvSpPr>
+          <p:cNvPr id="7" name="chk-1-badge-text"/>
+          <p:cNvSpPr txBox="1"/>
+          <p:nvPr/>
+        </p:nvSpPr>
+        <p:spPr>
+          <a:xfrm>
+            <a:off x="548640" y="2670048"/>
+            <a:ext cx="502920" cy="502920"/>
+          </a:xfrm>
+          <a:prstGeom prst="rect">
+            <a:avLst/>
+          </a:prstGeom>
+          <a:noFill/>
+          <a:ln/>
+        </p:spPr>
+        <p:txBody>
+          <a:bodyPr wrap="square" lIns="0" tIns="0" rIns="0" bIns="0" rtlCol="0" anchor="ctr"/>
+          <a:lstStyle/>
+          <a:p>
+            <a:pPr algn="ctr" indent="0" marL="0">
+              <a:buNone/>
+            </a:pPr>
+            <a:r>
+              <a:rPr lang="en-US" sz="1600" b="1" dirty="0">
+                <a:solidFill>
+                  <a:schemeClr val="bg1"/>
+                </a:solidFill>
+              </a:rPr>
+              <a:t>2</a:t>
+            </a:r>
+            <a:endParaRPr lang="en-US" sz="1600" dirty="0"/>
+          </a:p>
+        </p:txBody>
+      </p:sp>
+      <p:sp>
+        <p:nvSpPr>
+          <p:cNvPr id="8" name="chk-1-t"/>
+          <p:cNvSpPr txBox="1"/>
+          <p:nvPr/>
+        </p:nvSpPr>
+        <p:spPr>
+          <a:xfrm>
+            <a:off x="1280160" y="2514600"/>
+            <a:ext cx="4754880" cy="822960"/>
+          </a:xfrm>
+          <a:prstGeom prst="rect">
+            <a:avLst/>
+          </a:prstGeom>
+          <a:noFill/>
+          <a:ln/>
+        </p:spPr>
+        <p:txBody>
+          <a:bodyPr wrap="square" lIns="0" tIns="0" rIns="0" bIns="0" rtlCol="0" anchor="ctr"/>
+          <a:lstStyle/>
+          <a:p>
+            <a:pPr indent="0" marL="0">
+              <a:spcAft>
+                <a:spcPts val="200"/>
+              </a:spcAft>
+              <a:buNone/>
+            </a:pPr>
+            <a:r>
+              <a:rPr lang="en-US" sz="1700" dirty="0">
+                <a:solidFill>
+                  <a:schemeClr val="tx1"/>
+                </a:solidFill>
+              </a:rPr>
+              <a:t>AppPage seed entry with the same URL</a:t>
+            </a:r>
+            <a:endParaRPr lang="en-US" sz="1700" dirty="0"/>
+          </a:p>
+          <a:p>
+            <a:pPr indent="0" marL="0">
+              <a:spcAft>
+                <a:spcPts val="200"/>
+              </a:spcAft>
+              <a:buNone/>
+            </a:pPr>
+            <a:r>
+              <a:rPr lang="en-US" sz="1050" dirty="0">
+                <a:solidFill>
+                  <a:schemeClr val="tx2"/>
+                </a:solidFill>
+                <a:latin typeface="Courier New" pitchFamily="34" charset="0"/>
+                <a:ea typeface="Courier New" pitchFamily="34" charset="-122"/>
+                <a:cs typeface="Courier New" pitchFamily="34" charset="-120"/>
+              </a:rPr>
+              <a:t>Bidding_DLL/Seeding/IdentityAccessAppPagesSeedData.cs</a:t>
+            </a:r>
+            <a:endParaRPr lang="en-US" sz="1700" dirty="0"/>
+          </a:p>
+        </p:txBody>
+      </p:sp>
+      <p:sp>
+        <p:nvSpPr>
+          <p:cNvPr id="9" name="chk-2-badge"/>
+          <p:cNvSpPr/>
+          <p:nvPr/>
+        </p:nvSpPr>
+        <p:spPr>
+          <a:xfrm>
+            <a:off x="548640" y="3767328"/>
+            <a:ext cx="502920" cy="502920"/>
+          </a:xfrm>
+          <a:prstGeom prst="ellipse">
+            <a:avLst/>
+          </a:prstGeom>
+          <a:solidFill>
+            <a:schemeClr val="tx2"/>
+          </a:solidFill>
+          <a:ln w="12700">
+            <a:solidFill>
+              <a:schemeClr val="tx2"/>
+            </a:solidFill>
+            <a:prstDash val="solid"/>
+          </a:ln>
+        </p:spPr>
+      </p:sp>
+      <p:sp>
+        <p:nvSpPr>
+          <p:cNvPr id="10" name="chk-2-badge-text"/>
+          <p:cNvSpPr txBox="1"/>
+          <p:nvPr/>
+        </p:nvSpPr>
+        <p:spPr>
+          <a:xfrm>
+            <a:off x="548640" y="3767328"/>
+            <a:ext cx="502920" cy="502920"/>
+          </a:xfrm>
+          <a:prstGeom prst="rect">
+            <a:avLst/>
+          </a:prstGeom>
+          <a:noFill/>
+          <a:ln/>
+        </p:spPr>
+        <p:txBody>
+          <a:bodyPr wrap="square" lIns="0" tIns="0" rIns="0" bIns="0" rtlCol="0" anchor="ctr"/>
+          <a:lstStyle/>
+          <a:p>
+            <a:pPr algn="ctr" indent="0" marL="0">
+              <a:buNone/>
+            </a:pPr>
+            <a:r>
+              <a:rPr lang="en-US" sz="1600" b="1" dirty="0">
+                <a:solidFill>
+                  <a:schemeClr val="bg1"/>
+                </a:solidFill>
+              </a:rPr>
+              <a:t>3</a:t>
+            </a:r>
+            <a:endParaRPr lang="en-US" sz="1600" dirty="0"/>
+          </a:p>
+        </p:txBody>
+      </p:sp>
+      <p:sp>
+        <p:nvSpPr>
+          <p:cNvPr id="11" name="chk-2-t"/>
+          <p:cNvSpPr txBox="1"/>
+          <p:nvPr/>
+        </p:nvSpPr>
+        <p:spPr>
+          <a:xfrm>
+            <a:off x="1280160" y="3611880"/>
+            <a:ext cx="4754880" cy="822960"/>
+          </a:xfrm>
+          <a:prstGeom prst="rect">
+            <a:avLst/>
+          </a:prstGeom>
+          <a:noFill/>
+          <a:ln/>
+        </p:spPr>
+        <p:txBody>
+          <a:bodyPr wrap="square" lIns="0" tIns="0" rIns="0" bIns="0" rtlCol="0" anchor="ctr"/>
+          <a:lstStyle/>
+          <a:p>
+            <a:pPr indent="0" marL="0">
+              <a:spcAft>
+                <a:spcPts val="200"/>
+              </a:spcAft>
+              <a:buNone/>
+            </a:pPr>
+            <a:r>
+              <a:rPr lang="en-US" sz="1700" dirty="0">
+                <a:solidFill>
+                  <a:schemeClr val="tx1"/>
+                </a:solidFill>
+              </a:rPr>
+              <a:t>API endpoint + service rule + DTOs</a:t>
+            </a:r>
+            <a:endParaRPr lang="en-US" sz="1700" dirty="0"/>
+          </a:p>
+          <a:p>
+            <a:pPr indent="0" marL="0">
+              <a:spcAft>
+                <a:spcPts val="200"/>
+              </a:spcAft>
+              <a:buNone/>
+            </a:pPr>
+            <a:r>
+              <a:rPr lang="en-US" sz="1050" dirty="0">
+                <a:solidFill>
+                  <a:schemeClr val="tx2"/>
+                </a:solidFill>
+                <a:latin typeface="Courier New" pitchFamily="34" charset="0"/>
+                <a:ea typeface="Courier New" pitchFamily="34" charset="-122"/>
+                <a:cs typeface="Courier New" pitchFamily="34" charset="-120"/>
+              </a:rPr>
+              <a:t>Bidding_API/Controllers/V2/ · Bidding_Core/Services/</a:t>
+            </a:r>
+            <a:endParaRPr lang="en-US" sz="1700" dirty="0"/>
+          </a:p>
+        </p:txBody>
+      </p:sp>
+      <p:sp>
+        <p:nvSpPr>
+          <p:cNvPr id="12" name="chk-3-badge"/>
+          <p:cNvSpPr/>
+          <p:nvPr/>
+        </p:nvSpPr>
+        <p:spPr>
+          <a:xfrm>
+            <a:off x="548640" y="4864608"/>
+            <a:ext cx="502920" cy="502920"/>
+          </a:xfrm>
+          <a:prstGeom prst="ellipse">
+            <a:avLst/>
+          </a:prstGeom>
+          <a:solidFill>
+            <a:schemeClr val="tx2"/>
+          </a:solidFill>
+          <a:ln w="12700">
+            <a:solidFill>
+              <a:schemeClr val="tx2"/>
+            </a:solidFill>
+            <a:prstDash val="solid"/>
+          </a:ln>
+        </p:spPr>
+      </p:sp>
+      <p:sp>
+        <p:nvSpPr>
+          <p:cNvPr id="13" name="chk-3-badge-text"/>
+          <p:cNvSpPr txBox="1"/>
+          <p:nvPr/>
+        </p:nvSpPr>
+        <p:spPr>
+          <a:xfrm>
+            <a:off x="548640" y="4864608"/>
+            <a:ext cx="502920" cy="502920"/>
+          </a:xfrm>
+          <a:prstGeom prst="rect">
+            <a:avLst/>
+          </a:prstGeom>
+          <a:noFill/>
+          <a:ln/>
+        </p:spPr>
+        <p:txBody>
+          <a:bodyPr wrap="square" lIns="0" tIns="0" rIns="0" bIns="0" rtlCol="0" anchor="ctr"/>
+          <a:lstStyle/>
+          <a:p>
+            <a:pPr algn="ctr" indent="0" marL="0">
+              <a:buNone/>
+            </a:pPr>
+            <a:r>
+              <a:rPr lang="en-US" sz="1600" b="1" dirty="0">
+                <a:solidFill>
+                  <a:schemeClr val="bg1"/>
+                </a:solidFill>
+              </a:rPr>
+              <a:t>4</a:t>
+            </a:r>
+            <a:endParaRPr lang="en-US" sz="1600" dirty="0"/>
+          </a:p>
+        </p:txBody>
+      </p:sp>
+      <p:sp>
+        <p:nvSpPr>
+          <p:cNvPr id="14" name="chk-3-t"/>
+          <p:cNvSpPr txBox="1"/>
+          <p:nvPr/>
+        </p:nvSpPr>
+        <p:spPr>
+          <a:xfrm>
+            <a:off x="1280160" y="4709160"/>
+            <a:ext cx="4754880" cy="822960"/>
+          </a:xfrm>
+          <a:prstGeom prst="rect">
+            <a:avLst/>
+          </a:prstGeom>
+          <a:noFill/>
+          <a:ln/>
+        </p:spPr>
+        <p:txBody>
+          <a:bodyPr wrap="square" lIns="0" tIns="0" rIns="0" bIns="0" rtlCol="0" anchor="ctr"/>
+          <a:lstStyle/>
+          <a:p>
+            <a:pPr indent="0" marL="0">
+              <a:spcAft>
+                <a:spcPts val="200"/>
+              </a:spcAft>
+              <a:buNone/>
+            </a:pPr>
+            <a:r>
+              <a:rPr lang="en-US" sz="1700" dirty="0">
+                <a:solidFill>
+                  <a:schemeClr val="tx1"/>
+                </a:solidFill>
+              </a:rPr>
+              <a:t>Data service, then NgRx slice if shared</a:t>
+            </a:r>
+            <a:endParaRPr lang="en-US" sz="1700" dirty="0"/>
+          </a:p>
+          <a:p>
+            <a:pPr indent="0" marL="0">
+              <a:spcAft>
+                <a:spcPts val="200"/>
+              </a:spcAft>
+              <a:buNone/>
+            </a:pPr>
+            <a:r>
+              <a:rPr lang="en-US" sz="1050" dirty="0">
+                <a:solidFill>
+                  <a:schemeClr val="tx2"/>
+                </a:solidFill>
+                <a:latin typeface="Courier New" pitchFamily="34" charset="0"/>
+                <a:ea typeface="Courier New" pitchFamily="34" charset="-122"/>
+                <a:cs typeface="Courier New" pitchFamily="34" charset="-120"/>
+              </a:rPr>
+              <a:t>TrainingModule/src/app/core/store/&lt;feature&gt;/</a:t>
+            </a:r>
+            <a:endParaRPr lang="en-US" sz="1700" dirty="0"/>
+          </a:p>
+        </p:txBody>
+      </p:sp>
+      <p:sp>
+        <p:nvSpPr>
+          <p:cNvPr id="15" name="chk-4-badge"/>
+          <p:cNvSpPr/>
+          <p:nvPr/>
+        </p:nvSpPr>
+        <p:spPr>
+          <a:xfrm>
+            <a:off x="6172200" y="1572768"/>
+            <a:ext cx="502920" cy="502920"/>
+          </a:xfrm>
+          <a:prstGeom prst="ellipse">
+            <a:avLst/>
+          </a:prstGeom>
+          <a:solidFill>
+            <a:schemeClr val="tx2"/>
+          </a:solidFill>
+          <a:ln w="12700">
+            <a:solidFill>
+              <a:schemeClr val="tx2"/>
+            </a:solidFill>
+            <a:prstDash val="solid"/>
+          </a:ln>
+        </p:spPr>
+      </p:sp>
+      <p:sp>
+        <p:nvSpPr>
+          <p:cNvPr id="16" name="chk-4-badge-text"/>
+          <p:cNvSpPr txBox="1"/>
+          <p:nvPr/>
+        </p:nvSpPr>
+        <p:spPr>
+          <a:xfrm>
+            <a:off x="6172200" y="1572768"/>
+            <a:ext cx="502920" cy="502920"/>
+          </a:xfrm>
+          <a:prstGeom prst="rect">
+            <a:avLst/>
+          </a:prstGeom>
+          <a:noFill/>
+          <a:ln/>
+        </p:spPr>
+        <p:txBody>
+          <a:bodyPr wrap="square" lIns="0" tIns="0" rIns="0" bIns="0" rtlCol="0" anchor="ctr"/>
+          <a:lstStyle/>
+          <a:p>
+            <a:pPr algn="ctr" indent="0" marL="0">
+              <a:buNone/>
+            </a:pPr>
+            <a:r>
+              <a:rPr lang="en-US" sz="1600" b="1" dirty="0">
+                <a:solidFill>
+                  <a:schemeClr val="bg1"/>
+                </a:solidFill>
+              </a:rPr>
+              <a:t>5</a:t>
+            </a:r>
+            <a:endParaRPr lang="en-US" sz="1600" dirty="0"/>
+          </a:p>
+        </p:txBody>
+      </p:sp>
+      <p:sp>
+        <p:nvSpPr>
+          <p:cNvPr id="17" name="chk-4-t"/>
+          <p:cNvSpPr txBox="1"/>
+          <p:nvPr/>
+        </p:nvSpPr>
+        <p:spPr>
+          <a:xfrm>
+            <a:off x="6903720" y="1417320"/>
+            <a:ext cx="4754880" cy="822960"/>
+          </a:xfrm>
+          <a:prstGeom prst="rect">
+            <a:avLst/>
+          </a:prstGeom>
+          <a:noFill/>
+          <a:ln/>
+        </p:spPr>
+        <p:txBody>
+          <a:bodyPr wrap="square" lIns="0" tIns="0" rIns="0" bIns="0" rtlCol="0" anchor="ctr"/>
+          <a:lstStyle/>
+          <a:p>
+            <a:pPr indent="0" marL="0">
+              <a:spcAft>
+                <a:spcPts val="200"/>
+              </a:spcAft>
+              <a:buNone/>
+            </a:pPr>
+            <a:r>
+              <a:rPr lang="en-US" sz="1700" dirty="0">
+                <a:solidFill>
+                  <a:schemeClr val="tx1"/>
+                </a:solidFill>
+              </a:rPr>
+              <a:t>Form pipeline, executor, validators</a:t>
+            </a:r>
+            <a:endParaRPr lang="en-US" sz="1700" dirty="0"/>
+          </a:p>
+          <a:p>
+            <a:pPr indent="0" marL="0">
+              <a:spcAft>
+                <a:spcPts val="200"/>
+              </a:spcAft>
+              <a:buNone/>
+            </a:pPr>
+            <a:r>
+              <a:rPr lang="en-US" sz="1050" dirty="0">
+                <a:solidFill>
+                  <a:schemeClr val="tx2"/>
+                </a:solidFill>
+                <a:latin typeface="Courier New" pitchFamily="34" charset="0"/>
+                <a:ea typeface="Courier New" pitchFamily="34" charset="-122"/>
+                <a:cs typeface="Courier New" pitchFamily="34" charset="-120"/>
+              </a:rPr>
+              <a:t>TrainingModule/src/app/core/ui/form-pipeline.service.ts</a:t>
+            </a:r>
+            <a:endParaRPr lang="en-US" sz="1700" dirty="0"/>
+          </a:p>
+        </p:txBody>
+      </p:sp>
+      <p:sp>
+        <p:nvSpPr>
+          <p:cNvPr id="18" name="chk-5-badge"/>
+          <p:cNvSpPr/>
+          <p:nvPr/>
+        </p:nvSpPr>
+        <p:spPr>
+          <a:xfrm>
+            <a:off x="6172200" y="2670048"/>
+            <a:ext cx="502920" cy="502920"/>
+          </a:xfrm>
+          <a:prstGeom prst="ellipse">
+            <a:avLst/>
+          </a:prstGeom>
+          <a:solidFill>
+            <a:schemeClr val="tx2"/>
+          </a:solidFill>
+          <a:ln w="12700">
+            <a:solidFill>
+              <a:schemeClr val="tx2"/>
+            </a:solidFill>
+            <a:prstDash val="solid"/>
+          </a:ln>
+        </p:spPr>
+      </p:sp>
+      <p:sp>
+        <p:nvSpPr>
+          <p:cNvPr id="19" name="chk-5-badge-text"/>
+          <p:cNvSpPr txBox="1"/>
+          <p:nvPr/>
+        </p:nvSpPr>
+        <p:spPr>
+          <a:xfrm>
+            <a:off x="6172200" y="2670048"/>
+            <a:ext cx="502920" cy="502920"/>
+          </a:xfrm>
+          <a:prstGeom prst="rect">
+            <a:avLst/>
+          </a:prstGeom>
+          <a:noFill/>
+          <a:ln/>
+        </p:spPr>
+        <p:txBody>
+          <a:bodyPr wrap="square" lIns="0" tIns="0" rIns="0" bIns="0" rtlCol="0" anchor="ctr"/>
+          <a:lstStyle/>
+          <a:p>
+            <a:pPr algn="ctr" indent="0" marL="0">
+              <a:buNone/>
+            </a:pPr>
+            <a:r>
+              <a:rPr lang="en-US" sz="1600" b="1" dirty="0">
+                <a:solidFill>
+                  <a:schemeClr val="bg1"/>
+                </a:solidFill>
+              </a:rPr>
+              <a:t>6</a:t>
+            </a:r>
+            <a:endParaRPr lang="en-US" sz="1600" dirty="0"/>
+          </a:p>
+        </p:txBody>
+      </p:sp>
+      <p:sp>
+        <p:nvSpPr>
+          <p:cNvPr id="20" name="chk-5-t"/>
+          <p:cNvSpPr txBox="1"/>
+          <p:nvPr/>
+        </p:nvSpPr>
+        <p:spPr>
+          <a:xfrm>
+            <a:off x="6903720" y="2514600"/>
+            <a:ext cx="4754880" cy="822960"/>
+          </a:xfrm>
+          <a:prstGeom prst="rect">
+            <a:avLst/>
+          </a:prstGeom>
+          <a:noFill/>
+          <a:ln/>
+        </p:spPr>
+        <p:txBody>
+          <a:bodyPr wrap="square" lIns="0" tIns="0" rIns="0" bIns="0" rtlCol="0" anchor="ctr"/>
+          <a:lstStyle/>
+          <a:p>
+            <a:pPr indent="0" marL="0">
+              <a:spcAft>
+                <a:spcPts val="200"/>
+              </a:spcAft>
+              <a:buNone/>
+            </a:pPr>
+            <a:r>
+              <a:rPr lang="en-US" sz="1700" dirty="0">
+                <a:solidFill>
+                  <a:schemeClr val="tx1"/>
+                </a:solidFill>
+              </a:rPr>
+              <a:t>English in templates, Arabic translations</a:t>
+            </a:r>
+            <a:endParaRPr lang="en-US" sz="1700" dirty="0"/>
+          </a:p>
+          <a:p>
+            <a:pPr indent="0" marL="0">
+              <a:spcAft>
+                <a:spcPts val="200"/>
+              </a:spcAft>
+              <a:buNone/>
+            </a:pPr>
+            <a:r>
+              <a:rPr lang="en-US" sz="1050" dirty="0">
+                <a:solidFill>
+                  <a:schemeClr val="tx2"/>
+                </a:solidFill>
+                <a:latin typeface="Courier New" pitchFamily="34" charset="0"/>
+                <a:ea typeface="Courier New" pitchFamily="34" charset="-122"/>
+                <a:cs typeface="Courier New" pitchFamily="34" charset="-120"/>
+              </a:rPr>
+              <a:t>TrainingModule/src/app/core/translations/&lt;area&gt;/</a:t>
+            </a:r>
+            <a:endParaRPr lang="en-US" sz="1700" dirty="0"/>
+          </a:p>
+        </p:txBody>
+      </p:sp>
+      <p:sp>
+        <p:nvSpPr>
+          <p:cNvPr id="21" name="chk-6-badge"/>
+          <p:cNvSpPr/>
+          <p:nvPr/>
+        </p:nvSpPr>
+        <p:spPr>
+          <a:xfrm>
+            <a:off x="6172200" y="3767328"/>
+            <a:ext cx="502920" cy="502920"/>
+          </a:xfrm>
+          <a:prstGeom prst="ellipse">
+            <a:avLst/>
+          </a:prstGeom>
+          <a:solidFill>
+            <a:schemeClr val="tx2"/>
+          </a:solidFill>
+          <a:ln w="12700">
+            <a:solidFill>
+              <a:schemeClr val="tx2"/>
+            </a:solidFill>
+            <a:prstDash val="solid"/>
+          </a:ln>
+        </p:spPr>
+      </p:sp>
+      <p:sp>
+        <p:nvSpPr>
+          <p:cNvPr id="22" name="chk-6-badge-text"/>
+          <p:cNvSpPr txBox="1"/>
+          <p:nvPr/>
+        </p:nvSpPr>
+        <p:spPr>
+          <a:xfrm>
+            <a:off x="6172200" y="3767328"/>
+            <a:ext cx="502920" cy="502920"/>
+          </a:xfrm>
+          <a:prstGeom prst="rect">
+            <a:avLst/>
+          </a:prstGeom>
+          <a:noFill/>
+          <a:ln/>
+        </p:spPr>
+        <p:txBody>
+          <a:bodyPr wrap="square" lIns="0" tIns="0" rIns="0" bIns="0" rtlCol="0" anchor="ctr"/>
+          <a:lstStyle/>
+          <a:p>
+            <a:pPr algn="ctr" indent="0" marL="0">
+              <a:buNone/>
+            </a:pPr>
+            <a:r>
+              <a:rPr lang="en-US" sz="1600" b="1" dirty="0">
+                <a:solidFill>
+                  <a:schemeClr val="bg1"/>
+                </a:solidFill>
+              </a:rPr>
+              <a:t>7</a:t>
+            </a:r>
+            <a:endParaRPr lang="en-US" sz="1600" dirty="0"/>
+          </a:p>
+        </p:txBody>
+      </p:sp>
+      <p:sp>
+        <p:nvSpPr>
+          <p:cNvPr id="23" name="chk-6-t"/>
+          <p:cNvSpPr txBox="1"/>
+          <p:nvPr/>
+        </p:nvSpPr>
+        <p:spPr>
+          <a:xfrm>
+            <a:off x="6903720" y="3611880"/>
+            <a:ext cx="4754880" cy="822960"/>
+          </a:xfrm>
+          <a:prstGeom prst="rect">
+            <a:avLst/>
+          </a:prstGeom>
+          <a:noFill/>
+          <a:ln/>
+        </p:spPr>
+        <p:txBody>
+          <a:bodyPr wrap="square" lIns="0" tIns="0" rIns="0" bIns="0" rtlCol="0" anchor="ctr"/>
+          <a:lstStyle/>
+          <a:p>
+            <a:pPr indent="0" marL="0">
+              <a:spcAft>
+                <a:spcPts val="200"/>
+              </a:spcAft>
+              <a:buNone/>
+            </a:pPr>
+            <a:r>
+              <a:rPr lang="en-US" sz="1700" dirty="0">
+                <a:solidFill>
+                  <a:schemeClr val="tx1"/>
+                </a:solidFill>
+              </a:rPr>
+              <a:t>Mobile layout and RTL checked</a:t>
+            </a:r>
+            <a:endParaRPr lang="en-US" sz="1700" dirty="0"/>
+          </a:p>
+        </p:txBody>
+      </p:sp>
+      <p:sp>
+        <p:nvSpPr>
+          <p:cNvPr id="24" name="chk-7-badge"/>
+          <p:cNvSpPr/>
+          <p:nvPr/>
+        </p:nvSpPr>
+        <p:spPr>
+          <a:xfrm>
+            <a:off x="6172200" y="4864608"/>
+            <a:ext cx="502920" cy="502920"/>
+          </a:xfrm>
+          <a:prstGeom prst="ellipse">
+            <a:avLst/>
+          </a:prstGeom>
+          <a:solidFill>
+            <a:schemeClr val="accent2"/>
+          </a:solidFill>
+          <a:ln w="12700">
+            <a:solidFill>
+              <a:schemeClr val="accent2"/>
+            </a:solidFill>
+            <a:prstDash val="solid"/>
+          </a:ln>
+        </p:spPr>
+      </p:sp>
+      <p:sp>
+        <p:nvSpPr>
+          <p:cNvPr id="25" name="chk-7-badge-text"/>
+          <p:cNvSpPr txBox="1"/>
+          <p:nvPr/>
+        </p:nvSpPr>
+        <p:spPr>
+          <a:xfrm>
+            <a:off x="6172200" y="4864608"/>
+            <a:ext cx="502920" cy="502920"/>
+          </a:xfrm>
+          <a:prstGeom prst="rect">
+            <a:avLst/>
+          </a:prstGeom>
+          <a:noFill/>
+          <a:ln/>
+        </p:spPr>
+        <p:txBody>
+          <a:bodyPr wrap="square" lIns="0" tIns="0" rIns="0" bIns="0" rtlCol="0" anchor="ctr"/>
+          <a:lstStyle/>
+          <a:p>
+            <a:pPr algn="ctr" indent="0" marL="0">
+              <a:buNone/>
+            </a:pPr>
+            <a:r>
+              <a:rPr lang="en-US" sz="1600" b="1" dirty="0">
+                <a:solidFill>
+                  <a:schemeClr val="bg1"/>
+                </a:solidFill>
+              </a:rPr>
+              <a:t>8</a:t>
+            </a:r>
+            <a:endParaRPr lang="en-US" sz="1600" dirty="0"/>
+          </a:p>
+        </p:txBody>
+      </p:sp>
+      <p:sp>
+        <p:nvSpPr>
+          <p:cNvPr id="26" name="chk-7-t"/>
+          <p:cNvSpPr txBox="1"/>
+          <p:nvPr/>
+        </p:nvSpPr>
+        <p:spPr>
+          <a:xfrm>
+            <a:off x="6903720" y="4709160"/>
+            <a:ext cx="4754880" cy="822960"/>
+          </a:xfrm>
+          <a:prstGeom prst="rect">
+            <a:avLst/>
+          </a:prstGeom>
+          <a:noFill/>
+          <a:ln/>
+        </p:spPr>
+        <p:txBody>
+          <a:bodyPr wrap="square" lIns="0" tIns="0" rIns="0" bIns="0" rtlCol="0" anchor="ctr"/>
+          <a:lstStyle/>
+          <a:p>
+            <a:pPr indent="0" marL="0">
+              <a:spcAft>
+                <a:spcPts val="200"/>
+              </a:spcAft>
+              <a:buNone/>
+            </a:pPr>
+            <a:r>
+              <a:rPr lang="en-US" sz="1700" dirty="0">
+                <a:solidFill>
+                  <a:schemeClr val="tx1"/>
+                </a:solidFill>
+              </a:rPr>
+              <a:t>2–3 tests for the new rule</a:t>
+            </a:r>
+            <a:endParaRPr lang="en-US" sz="1700" dirty="0"/>
+          </a:p>
+          <a:p>
+            <a:pPr indent="0" marL="0">
+              <a:spcAft>
+                <a:spcPts val="200"/>
+              </a:spcAft>
+              <a:buNone/>
+            </a:pPr>
+            <a:r>
+              <a:rPr lang="en-US" sz="1050" dirty="0">
+                <a:solidFill>
+                  <a:schemeClr val="tx2"/>
+                </a:solidFill>
+                <a:latin typeface="Courier New" pitchFamily="34" charset="0"/>
+                <a:ea typeface="Courier New" pitchFamily="34" charset="-122"/>
+                <a:cs typeface="Courier New" pitchFamily="34" charset="-120"/>
+              </a:rPr>
+              <a:t>Bidding_Core.Tests/ · &lt;component&gt;.spec.ts</a:t>
+            </a:r>
+            <a:endParaRPr lang="en-US" sz="1700" dirty="0"/>
+          </a:p>
+        </p:txBody>
+      </p:sp>
+      <p:sp>
+        <p:nvSpPr>
+          <p:cNvPr id="25" name="Slide Number Placeholder 0"/>
+          <p:cNvSpPr>
+            <a:spLocks noGrp="1"/>
+          </p:cNvSpPr>
+          <p:nvPr>
+            <p:ph type="sldNum" sz="quarter" idx="4294967295"/>
+          </p:nvPr>
+        </p:nvSpPr>
+        <p:spPr>
+          <a:xfrm>
+            <a:off x="11155680" y="6400800"/>
+            <a:ext cx="457200" cy="274320"/>
+          </a:xfrm>
+          <a:prstGeom prst="rect">
+            <a:avLst/>
+          </a:prstGeom>
+          <a:extLst>
+            <a:ext uri="{C572A759-6A51-4108-AA02-DFA0A04FC94B}">
+              <ma14:wrappingTextBoxFlag xmlns:ma14="http://schemas.microsoft.com/office/mac/drawingml/2011/main" val="0"/>
+            </a:ext>
+          </a:extLst>
+        </p:spPr>
+        <p:txBody>
+          <a:bodyPr/>
+          <a:lstStyle>
+            <a:lvl1pPr>
+              <a:defRPr sz="1000">
+                <a:solidFill>
+                  <a:schemeClr val="accent6"/>
+                </a:solidFill>
+              </a:defRPr>
+            </a:lvl1pPr>
+          </a:lstStyle>
+          <a:p>
+            <a:pPr algn="r"/>
+            <a:fld id="{F7021451-1387-4CA6-816F-3879F97B5CBC}" type="slidenum">
+              <a:rPr b="0" lang="en-US"/>
+              <a:t>15</a:t>
+            </a:fld>
+            <a:endParaRPr lang="en-US"/>
+          </a:p>
+        </p:txBody>
+      </p:sp>
+    </p:spTree>
+  </p:cSld>
+  <p:clrMapOvr>
+    <a:masterClrMapping/>
+  </p:clrMapOvr>
+</p:sld>
+</file>
+
+<file path=ppt/slides/slide16.xml><?xml version="1.0" encoding="utf-8"?>
+<p:sld xmlns:a="http://schemas.openxmlformats.org/drawingml/2006/main" xmlns:r="http://schemas.openxmlformats.org/officeDocument/2006/relationships" xmlns:p="http://schemas.openxmlformats.org/presentationml/2006/main">
+  <p:cSld name="Slide 16">
     <p:spTree>
       <p:nvGrpSpPr>
         <p:cNvPr id="1" name=""/>
